--- a/docs/presentation/25027138 - Presentation.pptx
+++ b/docs/presentation/25027138 - Presentation.pptx
@@ -9,38 +9,39 @@
     <p:notesMasterId r:id="rId5"/>
   </p:notesMasterIdLst>
   <p:handoutMasterIdLst>
-    <p:handoutMasterId r:id="rId15"/>
+    <p:handoutMasterId r:id="rId16"/>
   </p:handoutMasterIdLst>
   <p:sldIdLst>
     <p:sldId id="273" r:id="rId4"/>
     <p:sldId id="266" r:id="rId6"/>
-    <p:sldId id="320" r:id="rId7"/>
-    <p:sldId id="321" r:id="rId8"/>
-    <p:sldId id="323" r:id="rId9"/>
-    <p:sldId id="324" r:id="rId10"/>
-    <p:sldId id="325" r:id="rId11"/>
-    <p:sldId id="326" r:id="rId12"/>
-    <p:sldId id="322" r:id="rId13"/>
-    <p:sldId id="318" r:id="rId14"/>
+    <p:sldId id="327" r:id="rId7"/>
+    <p:sldId id="320" r:id="rId8"/>
+    <p:sldId id="321" r:id="rId9"/>
+    <p:sldId id="323" r:id="rId10"/>
+    <p:sldId id="324" r:id="rId11"/>
+    <p:sldId id="325" r:id="rId12"/>
+    <p:sldId id="326" r:id="rId13"/>
+    <p:sldId id="322" r:id="rId14"/>
+    <p:sldId id="318" r:id="rId15"/>
   </p:sldIdLst>
   <p:sldSz cx="12192000" cy="6858000"/>
   <p:notesSz cx="6858000" cy="9144000"/>
   <p:embeddedFontLst>
     <p:embeddedFont>
       <p:font typeface="UCL Sans SemiBold" pitchFamily="2" charset="77"/>
-      <p:regular r:id="rId19"/>
+      <p:regular r:id="rId20"/>
     </p:embeddedFont>
     <p:embeddedFont>
       <p:font typeface="UCL Sans" pitchFamily="2" charset="77"/>
-      <p:regular r:id="rId20"/>
+      <p:regular r:id="rId21"/>
     </p:embeddedFont>
     <p:embeddedFont>
       <p:font typeface="UCL Sans"/>
-      <p:regular r:id="rId21"/>
+      <p:regular r:id="rId22"/>
     </p:embeddedFont>
     <p:embeddedFont>
       <p:font typeface="UCL Sans SemiBold"/>
-      <p:regular r:id="rId22"/>
+      <p:regular r:id="rId23"/>
     </p:embeddedFont>
   </p:embeddedFontLst>
   <p:defaultTextStyle>
@@ -175,6 +176,7 @@
           <p14:sldIdLst>
             <p14:sldId id="273"/>
             <p14:sldId id="266"/>
+            <p14:sldId id="327"/>
             <p14:sldId id="320"/>
             <p14:sldId id="321"/>
             <p14:sldId id="323"/>
@@ -786,6 +788,115 @@
 </p:notes>
 </file>
 
+<file path=ppt/notesSlides/notesSlide10.xml><?xml version="1.0" encoding="utf-8"?>
+<p:notes xmlns:a="http://schemas.openxmlformats.org/drawingml/2006/main" xmlns:r="http://schemas.openxmlformats.org/officeDocument/2006/relationships" xmlns:p="http://schemas.openxmlformats.org/presentationml/2006/main">
+  <p:cSld>
+    <p:spTree>
+      <p:nvGrpSpPr>
+        <p:cNvPr id="1" name=""/>
+        <p:cNvGrpSpPr/>
+        <p:nvPr/>
+      </p:nvGrpSpPr>
+      <p:grpSpPr>
+        <a:xfrm>
+          <a:off x="0" y="0"/>
+          <a:ext cx="0" cy="0"/>
+          <a:chOff x="0" y="0"/>
+          <a:chExt cx="0" cy="0"/>
+        </a:xfrm>
+      </p:grpSpPr>
+      <p:sp>
+        <p:nvSpPr>
+          <p:cNvPr id="2" name="Slide Image Placeholder 1"/>
+          <p:cNvSpPr>
+            <a:spLocks noGrp="1" noRot="1" noChangeAspect="1"/>
+          </p:cNvSpPr>
+          <p:nvPr>
+            <p:ph type="sldImg"/>
+          </p:nvPr>
+        </p:nvSpPr>
+        <p:spPr/>
+      </p:sp>
+      <p:sp>
+        <p:nvSpPr>
+          <p:cNvPr id="3" name="Notes Placeholder 2"/>
+          <p:cNvSpPr>
+            <a:spLocks noGrp="1"/>
+          </p:cNvSpPr>
+          <p:nvPr>
+            <p:ph type="body" idx="1"/>
+          </p:nvPr>
+        </p:nvSpPr>
+        <p:spPr/>
+        <p:txBody>
+          <a:bodyPr/>
+          <a:lstStyle/>
+          <a:p>
+            <a:pPr marL="0" marR="0" lvl="0" indent="0" algn="l" defTabSz="914400" rtl="0" eaLnBrk="1" fontAlgn="auto" latinLnBrk="0" hangingPunct="1">
+              <a:lnSpc>
+                <a:spcPct val="100000"/>
+              </a:lnSpc>
+              <a:spcBef>
+                <a:spcPts val="0"/>
+              </a:spcBef>
+              <a:spcAft>
+                <a:spcPts val="0"/>
+              </a:spcAft>
+              <a:buClrTx/>
+              <a:buSzTx/>
+              <a:buFontTx/>
+              <a:buNone/>
+              <a:defRPr/>
+            </a:pPr>
+            <a:r>
+              <a:rPr lang="en-GB" sz="1200" b="0" i="0" u="none" strike="noStrike" kern="1200" dirty="0">
+                <a:solidFill>
+                  <a:schemeClr val="tx1"/>
+                </a:solidFill>
+                <a:effectLst/>
+                <a:latin typeface="+mn-lt"/>
+                <a:ea typeface="+mn-ea"/>
+                <a:cs typeface="+mn-cs"/>
+              </a:rPr>
+              <a:t>Content slide full image with full colour logo</a:t>
+            </a:r>
+            <a:endParaRPr lang="en-GB" dirty="0"/>
+          </a:p>
+          <a:p>
+            <a:endParaRPr lang="en-GB" dirty="0"/>
+          </a:p>
+        </p:txBody>
+      </p:sp>
+      <p:sp>
+        <p:nvSpPr>
+          <p:cNvPr id="4" name="Slide Number Placeholder 3"/>
+          <p:cNvSpPr>
+            <a:spLocks noGrp="1"/>
+          </p:cNvSpPr>
+          <p:nvPr>
+            <p:ph type="sldNum" sz="quarter" idx="5"/>
+          </p:nvPr>
+        </p:nvSpPr>
+        <p:spPr/>
+        <p:txBody>
+          <a:bodyPr/>
+          <a:lstStyle/>
+          <a:p>
+            <a:fld id="{E28BC158-BB56-D04E-8DE4-3CEB786515BF}" type="slidenum">
+              <a:rPr lang="en-US" smtClean="0"/>
+            </a:fld>
+            <a:endParaRPr lang="en-US"/>
+          </a:p>
+        </p:txBody>
+      </p:sp>
+    </p:spTree>
+  </p:cSld>
+  <p:clrMapOvr>
+    <a:masterClrMapping/>
+  </p:clrMapOvr>
+</p:notes>
+</file>
+
 <file path=ppt/notesSlides/notesSlide2.xml><?xml version="1.0" encoding="utf-8"?>
 <p:notes xmlns:a="http://schemas.openxmlformats.org/drawingml/2006/main" xmlns:r="http://schemas.openxmlformats.org/officeDocument/2006/relationships" xmlns:p="http://schemas.openxmlformats.org/presentationml/2006/main">
   <p:cSld>
@@ -1460,22 +1571,6 @@
           <a:bodyPr/>
           <a:lstStyle/>
           <a:p>
-            <a:pPr marL="0" marR="0" lvl="0" indent="0" algn="l" defTabSz="914400" rtl="0" eaLnBrk="1" fontAlgn="auto" latinLnBrk="0" hangingPunct="1">
-              <a:lnSpc>
-                <a:spcPct val="100000"/>
-              </a:lnSpc>
-              <a:spcBef>
-                <a:spcPts val="0"/>
-              </a:spcBef>
-              <a:spcAft>
-                <a:spcPts val="0"/>
-              </a:spcAft>
-              <a:buClrTx/>
-              <a:buSzTx/>
-              <a:buFontTx/>
-              <a:buNone/>
-              <a:defRPr/>
-            </a:pPr>
             <a:r>
               <a:rPr lang="en-GB" sz="1200" b="0" i="0" u="none" strike="noStrike" kern="1200" dirty="0">
                 <a:solidFill>
@@ -1486,12 +1581,9 @@
                 <a:ea typeface="+mn-ea"/>
                 <a:cs typeface="+mn-cs"/>
               </a:rPr>
-              <a:t>Content slide full image with full colour logo</a:t>
-            </a:r>
-            <a:endParaRPr lang="en-GB" dirty="0"/>
-          </a:p>
-          <a:p>
-            <a:endParaRPr lang="en-GB" dirty="0"/>
+              <a:t>Content slide with a headline at the top left, followed by text box beneath it. </a:t>
+            </a:r>
+            <a:endParaRPr lang="en-US" dirty="0"/>
           </a:p>
         </p:txBody>
       </p:sp>
@@ -11152,22 +11244,10 @@
           <a:lstStyle/>
           <a:p>
             <a:r>
-              <a:rPr lang="en-US" altLang="en-US"/>
-              <a:t>Teaching a Self-</a:t>
-            </a:r>
-            <a:endParaRPr lang="en-US" altLang="en-US"/>
-          </a:p>
-          <a:p>
-            <a:r>
-              <a:rPr lang="en-US" altLang="en-US"/>
-              <a:t>Driving Car to</a:t>
-            </a:r>
-            <a:endParaRPr lang="en-US" altLang="en-US"/>
-          </a:p>
-          <a:p>
-            <a:r>
-              <a:rPr lang="en-US" altLang="en-US"/>
-              <a:t>Cross Safely​</a:t>
+              <a:rPr lang="en-US" altLang="en-US">
+                <a:sym typeface="+mn-ea"/>
+              </a:rPr>
+              <a:t>Risk-Aware Planning for Autonomous Driving</a:t>
             </a:r>
             <a:endParaRPr lang="en-US" altLang="en-US"/>
           </a:p>
@@ -11356,6 +11436,570 @@
 </file>
 
 <file path=ppt/slides/slide10.xml><?xml version="1.0" encoding="utf-8"?>
+<p:sld xmlns:a="http://schemas.openxmlformats.org/drawingml/2006/main" xmlns:r="http://schemas.openxmlformats.org/officeDocument/2006/relationships" xmlns:p="http://schemas.openxmlformats.org/presentationml/2006/main">
+  <p:cSld>
+    <p:spTree>
+      <p:nvGrpSpPr>
+        <p:cNvPr id="1" name=""/>
+        <p:cNvGrpSpPr/>
+        <p:nvPr/>
+      </p:nvGrpSpPr>
+      <p:grpSpPr>
+        <a:xfrm>
+          <a:off x="0" y="0"/>
+          <a:ext cx="0" cy="0"/>
+          <a:chOff x="0" y="0"/>
+          <a:chExt cx="0" cy="0"/>
+        </a:xfrm>
+      </p:grpSpPr>
+      <p:sp>
+        <p:nvSpPr>
+          <p:cNvPr id="2" name="Title 1"/>
+          <p:cNvSpPr>
+            <a:spLocks noGrp="1"/>
+          </p:cNvSpPr>
+          <p:nvPr>
+            <p:ph type="ctrTitle"/>
+          </p:nvPr>
+        </p:nvSpPr>
+        <p:spPr/>
+        <p:txBody>
+          <a:bodyPr/>
+          <a:lstStyle/>
+          <a:p>
+            <a:r>
+              <a:rPr lang="en-GB">
+                <a:latin typeface="UCL Sans SemiBold"/>
+              </a:rPr>
+              <a:t>Risk analysis</a:t>
+            </a:r>
+            <a:endParaRPr lang="en-US"/>
+          </a:p>
+        </p:txBody>
+      </p:sp>
+      <p:graphicFrame>
+        <p:nvGraphicFramePr>
+          <p:cNvPr id="4" name="Table 3"/>
+          <p:cNvGraphicFramePr>
+            <a:graphicFrameLocks noGrp="1"/>
+          </p:cNvGraphicFramePr>
+          <p:nvPr/>
+        </p:nvGraphicFramePr>
+        <p:xfrm>
+          <a:off x="159385" y="1452880"/>
+          <a:ext cx="11943080" cy="3127375"/>
+        </p:xfrm>
+        <a:graphic>
+          <a:graphicData uri="http://schemas.openxmlformats.org/drawingml/2006/table">
+            <a:tbl>
+              <a:tblPr firstRow="1" bandRow="1">
+                <a:tableStyleId>{5C22544A-7EE6-4342-B048-85BDC9FD1C3A}</a:tableStyleId>
+              </a:tblPr>
+              <a:tblGrid>
+                <a:gridCol w="3257550"/>
+                <a:gridCol w="3886200"/>
+                <a:gridCol w="4799330"/>
+              </a:tblGrid>
+              <a:tr h="604520">
+                <a:tc>
+                  <a:txBody>
+                    <a:bodyPr/>
+                    <a:lstStyle/>
+                    <a:p>
+                      <a:pPr algn="ctr">
+                        <a:defRPr sz="1200" b="1">
+                          <a:solidFill>
+                            <a:srgbClr val="FFFFFF"/>
+                          </a:solidFill>
+                        </a:defRPr>
+                      </a:pPr>
+                      <a:r>
+                        <a:rPr sz="1600"/>
+                        <a:t>Risk</a:t>
+                      </a:r>
+                      <a:endParaRPr sz="1600"/>
+                    </a:p>
+                  </a:txBody>
+                  <a:tcPr marL="36576" marR="36576" anchor="ctr">
+                    <a:solidFill>
+                      <a:srgbClr val="172554"/>
+                    </a:solidFill>
+                  </a:tcPr>
+                </a:tc>
+                <a:tc>
+                  <a:txBody>
+                    <a:bodyPr/>
+                    <a:lstStyle/>
+                    <a:p>
+                      <a:pPr algn="ctr">
+                        <a:defRPr sz="1200" b="1">
+                          <a:solidFill>
+                            <a:srgbClr val="FFFFFF"/>
+                          </a:solidFill>
+                        </a:defRPr>
+                      </a:pPr>
+                      <a:r>
+                        <a:rPr sz="1600"/>
+                        <a:t>Why it matters</a:t>
+                      </a:r>
+                      <a:endParaRPr sz="1600"/>
+                    </a:p>
+                  </a:txBody>
+                  <a:tcPr marL="36576" marR="36576" anchor="ctr">
+                    <a:solidFill>
+                      <a:srgbClr val="172554"/>
+                    </a:solidFill>
+                  </a:tcPr>
+                </a:tc>
+                <a:tc>
+                  <a:txBody>
+                    <a:bodyPr/>
+                    <a:lstStyle/>
+                    <a:p>
+                      <a:pPr algn="ctr">
+                        <a:defRPr sz="1200" b="1">
+                          <a:solidFill>
+                            <a:srgbClr val="FFFFFF"/>
+                          </a:solidFill>
+                        </a:defRPr>
+                      </a:pPr>
+                      <a:r>
+                        <a:rPr sz="1600"/>
+                        <a:t>My response</a:t>
+                      </a:r>
+                      <a:endParaRPr sz="1600"/>
+                    </a:p>
+                  </a:txBody>
+                  <a:tcPr marL="36576" marR="36576" anchor="ctr">
+                    <a:solidFill>
+                      <a:srgbClr val="172554"/>
+                    </a:solidFill>
+                  </a:tcPr>
+                </a:tc>
+              </a:tr>
+              <a:tr h="657225">
+                <a:tc>
+                  <a:txBody>
+                    <a:bodyPr/>
+                    <a:lstStyle/>
+                    <a:p>
+                      <a:pPr algn="ctr">
+                        <a:defRPr sz="1200">
+                          <a:solidFill>
+                            <a:srgbClr val="111827"/>
+                          </a:solidFill>
+                        </a:defRPr>
+                      </a:pPr>
+                      <a:r>
+                        <a:rPr sz="1600"/>
+                        <a:t>Simulator is slow</a:t>
+                      </a:r>
+                      <a:endParaRPr sz="1600"/>
+                    </a:p>
+                  </a:txBody>
+                  <a:tcPr marL="36576" marR="36576" anchor="ctr">
+                    <a:solidFill>
+                      <a:srgbClr val="FFFFFF"/>
+                    </a:solidFill>
+                  </a:tcPr>
+                </a:tc>
+                <a:tc>
+                  <a:txBody>
+                    <a:bodyPr/>
+                    <a:lstStyle/>
+                    <a:p>
+                      <a:pPr algn="ctr">
+                        <a:defRPr sz="1200">
+                          <a:solidFill>
+                            <a:srgbClr val="111827"/>
+                          </a:solidFill>
+                        </a:defRPr>
+                      </a:pPr>
+                      <a:r>
+                        <a:rPr sz="1600"/>
+                        <a:t>Experiments take time</a:t>
+                      </a:r>
+                      <a:endParaRPr sz="1600"/>
+                    </a:p>
+                  </a:txBody>
+                  <a:tcPr marL="36576" marR="36576" anchor="ctr">
+                    <a:solidFill>
+                      <a:srgbClr val="FFFFFF"/>
+                    </a:solidFill>
+                  </a:tcPr>
+                </a:tc>
+                <a:tc>
+                  <a:txBody>
+                    <a:bodyPr/>
+                    <a:lstStyle/>
+                    <a:p>
+                      <a:pPr algn="ctr">
+                        <a:defRPr sz="1200">
+                          <a:solidFill>
+                            <a:srgbClr val="111827"/>
+                          </a:solidFill>
+                        </a:defRPr>
+                      </a:pPr>
+                      <a:r>
+                        <a:rPr sz="1600"/>
+                        <a:t>Run small pilots first</a:t>
+                      </a:r>
+                      <a:r>
+                        <a:rPr lang="en-US" sz="1600"/>
+                        <a:t>, then scale experiments</a:t>
+                      </a:r>
+                      <a:endParaRPr lang="en-US" sz="1600"/>
+                    </a:p>
+                  </a:txBody>
+                  <a:tcPr marL="36576" marR="36576" anchor="ctr">
+                    <a:solidFill>
+                      <a:srgbClr val="FFFFFF"/>
+                    </a:solidFill>
+                  </a:tcPr>
+                </a:tc>
+              </a:tr>
+              <a:tr h="603885">
+                <a:tc>
+                  <a:txBody>
+                    <a:bodyPr/>
+                    <a:lstStyle/>
+                    <a:p>
+                      <a:pPr algn="ctr">
+                        <a:defRPr sz="1200">
+                          <a:solidFill>
+                            <a:srgbClr val="111827"/>
+                          </a:solidFill>
+                        </a:defRPr>
+                      </a:pPr>
+                      <a:r>
+                        <a:rPr sz="1600"/>
+                        <a:t>Planner fails</a:t>
+                      </a:r>
+                      <a:endParaRPr sz="1600"/>
+                    </a:p>
+                  </a:txBody>
+                  <a:tcPr marL="36576" marR="36576" anchor="ctr">
+                    <a:solidFill>
+                      <a:srgbClr val="F3F4F6"/>
+                    </a:solidFill>
+                  </a:tcPr>
+                </a:tc>
+                <a:tc>
+                  <a:txBody>
+                    <a:bodyPr/>
+                    <a:lstStyle/>
+                    <a:p>
+                      <a:pPr algn="ctr">
+                        <a:defRPr sz="1200">
+                          <a:solidFill>
+                            <a:srgbClr val="111827"/>
+                          </a:solidFill>
+                        </a:defRPr>
+                      </a:pPr>
+                      <a:r>
+                        <a:rPr sz="1600"/>
+                        <a:t>Car may</a:t>
+                      </a:r>
+                      <a:r>
+                        <a:rPr lang="en-US" sz="1600"/>
+                        <a:t> </a:t>
+                      </a:r>
+                      <a:r>
+                        <a:rPr lang="en-US" altLang="en-US" sz="1600"/>
+                        <a:t>produce invalid actions</a:t>
+                      </a:r>
+                      <a:endParaRPr lang="en-US" altLang="en-US" sz="1600"/>
+                    </a:p>
+                  </a:txBody>
+                  <a:tcPr marL="36576" marR="36576" anchor="ctr">
+                    <a:solidFill>
+                      <a:srgbClr val="F3F4F6"/>
+                    </a:solidFill>
+                  </a:tcPr>
+                </a:tc>
+                <a:tc>
+                  <a:txBody>
+                    <a:bodyPr/>
+                    <a:lstStyle/>
+                    <a:p>
+                      <a:pPr algn="ctr">
+                        <a:defRPr sz="1200">
+                          <a:solidFill>
+                            <a:srgbClr val="111827"/>
+                          </a:solidFill>
+                        </a:defRPr>
+                      </a:pPr>
+                      <a:r>
+                        <a:rPr sz="1600"/>
+                        <a:t>Save debug logs</a:t>
+                      </a:r>
+                      <a:r>
+                        <a:rPr lang="en-US" sz="1600"/>
+                        <a:t>, </a:t>
+                      </a:r>
+                      <a:r>
+                        <a:rPr lang="en-US" altLang="en-US" sz="1600"/>
+                        <a:t>use fallback analysis</a:t>
+                      </a:r>
+                      <a:endParaRPr lang="en-US" altLang="en-US" sz="1600"/>
+                    </a:p>
+                  </a:txBody>
+                  <a:tcPr marL="36576" marR="36576" anchor="ctr">
+                    <a:solidFill>
+                      <a:srgbClr val="F3F4F6"/>
+                    </a:solidFill>
+                  </a:tcPr>
+                </a:tc>
+              </a:tr>
+              <a:tr h="605790">
+                <a:tc>
+                  <a:txBody>
+                    <a:bodyPr/>
+                    <a:lstStyle/>
+                    <a:p>
+                      <a:pPr algn="ctr">
+                        <a:defRPr sz="1200">
+                          <a:solidFill>
+                            <a:srgbClr val="111827"/>
+                          </a:solidFill>
+                        </a:defRPr>
+                      </a:pPr>
+                      <a:r>
+                        <a:rPr lang="en-US" sz="1600"/>
+                        <a:t>GPUs from UCL are</a:t>
+                      </a:r>
+                      <a:r>
+                        <a:rPr lang="en-US" altLang="en-US" sz="1600"/>
+                        <a:t> limited</a:t>
+                      </a:r>
+                      <a:endParaRPr lang="en-US" altLang="en-US" sz="1600"/>
+                    </a:p>
+                  </a:txBody>
+                  <a:tcPr marL="36576" marR="36576" anchor="ctr">
+                    <a:solidFill>
+                      <a:srgbClr val="FFFFFF"/>
+                    </a:solidFill>
+                  </a:tcPr>
+                </a:tc>
+                <a:tc>
+                  <a:txBody>
+                    <a:bodyPr/>
+                    <a:lstStyle/>
+                    <a:p>
+                      <a:pPr algn="ctr">
+                        <a:defRPr sz="1200">
+                          <a:solidFill>
+                            <a:srgbClr val="111827"/>
+                          </a:solidFill>
+                        </a:defRPr>
+                      </a:pPr>
+                      <a:r>
+                        <a:rPr lang="en-US" sz="1600"/>
+                        <a:t>Experiments may be delayed</a:t>
+                      </a:r>
+                      <a:endParaRPr lang="en-US" sz="1600"/>
+                    </a:p>
+                  </a:txBody>
+                  <a:tcPr marL="36576" marR="36576" anchor="ctr">
+                    <a:solidFill>
+                      <a:srgbClr val="FFFFFF"/>
+                    </a:solidFill>
+                  </a:tcPr>
+                </a:tc>
+                <a:tc>
+                  <a:txBody>
+                    <a:bodyPr/>
+                    <a:lstStyle/>
+                    <a:p>
+                      <a:pPr algn="ctr">
+                        <a:defRPr sz="1200">
+                          <a:solidFill>
+                            <a:srgbClr val="111827"/>
+                          </a:solidFill>
+                        </a:defRPr>
+                      </a:pPr>
+                      <a:r>
+                        <a:rPr lang="en-US" sz="1600"/>
+                        <a:t>Use alternative GPUs such as Google Colab</a:t>
+                      </a:r>
+                      <a:endParaRPr lang="en-US" sz="1600"/>
+                    </a:p>
+                  </a:txBody>
+                  <a:tcPr marL="36576" marR="36576" anchor="ctr">
+                    <a:solidFill>
+                      <a:srgbClr val="FFFFFF"/>
+                    </a:solidFill>
+                  </a:tcPr>
+                </a:tc>
+              </a:tr>
+              <a:tr h="655955">
+                <a:tc>
+                  <a:txBody>
+                    <a:bodyPr/>
+                    <a:lstStyle/>
+                    <a:p>
+                      <a:pPr algn="ctr">
+                        <a:defRPr sz="1200">
+                          <a:solidFill>
+                            <a:srgbClr val="111827"/>
+                          </a:solidFill>
+                        </a:defRPr>
+                      </a:pPr>
+                      <a:r>
+                        <a:rPr lang="en-US" altLang="en-US" sz="1600"/>
+                        <a:t>Results are mixed</a:t>
+                      </a:r>
+                      <a:endParaRPr lang="en-US" altLang="en-US" sz="1600"/>
+                    </a:p>
+                  </a:txBody>
+                  <a:tcPr marL="36576" marR="36576" anchor="ctr">
+                    <a:solidFill>
+                      <a:srgbClr val="F3F4F6"/>
+                    </a:solidFill>
+                  </a:tcPr>
+                </a:tc>
+                <a:tc>
+                  <a:txBody>
+                    <a:bodyPr/>
+                    <a:lstStyle/>
+                    <a:p>
+                      <a:pPr algn="ctr">
+                        <a:defRPr sz="1200">
+                          <a:solidFill>
+                            <a:srgbClr val="111827"/>
+                          </a:solidFill>
+                        </a:defRPr>
+                      </a:pPr>
+                      <a:r>
+                        <a:rPr lang="en-US" altLang="en-US" sz="1600"/>
+                        <a:t>Hypothesis may not be fully supported</a:t>
+                      </a:r>
+                      <a:endParaRPr lang="en-US" altLang="en-US" sz="1600"/>
+                    </a:p>
+                  </a:txBody>
+                  <a:tcPr marL="36576" marR="36576" anchor="ctr">
+                    <a:solidFill>
+                      <a:srgbClr val="F3F4F6"/>
+                    </a:solidFill>
+                  </a:tcPr>
+                </a:tc>
+                <a:tc>
+                  <a:txBody>
+                    <a:bodyPr/>
+                    <a:lstStyle/>
+                    <a:p>
+                      <a:pPr algn="ctr">
+                        <a:defRPr sz="1200">
+                          <a:solidFill>
+                            <a:srgbClr val="111827"/>
+                          </a:solidFill>
+                        </a:defRPr>
+                      </a:pPr>
+                      <a:r>
+                        <a:rPr lang="en-US" altLang="en-US" sz="1600"/>
+                        <a:t>Analyse failure cases instead of hiding them</a:t>
+                      </a:r>
+                      <a:endParaRPr lang="en-US" altLang="en-US" sz="1600"/>
+                    </a:p>
+                  </a:txBody>
+                  <a:tcPr marL="36576" marR="36576" anchor="ctr">
+                    <a:solidFill>
+                      <a:srgbClr val="F3F4F6"/>
+                    </a:solidFill>
+                  </a:tcPr>
+                </a:tc>
+              </a:tr>
+            </a:tbl>
+          </a:graphicData>
+        </a:graphic>
+      </p:graphicFrame>
+      <p:sp>
+        <p:nvSpPr>
+          <p:cNvPr id="5" name="Rounded Rectangle 4"/>
+          <p:cNvSpPr/>
+          <p:nvPr/>
+        </p:nvSpPr>
+        <p:spPr>
+          <a:xfrm>
+            <a:off x="868680" y="4917440"/>
+            <a:ext cx="10241280" cy="960120"/>
+          </a:xfrm>
+          <a:prstGeom prst="roundRect">
+            <a:avLst/>
+          </a:prstGeom>
+          <a:solidFill>
+            <a:srgbClr val="FFEDD5"/>
+          </a:solidFill>
+          <a:ln>
+            <a:solidFill>
+              <a:srgbClr val="F97316"/>
+            </a:solidFill>
+          </a:ln>
+        </p:spPr>
+        <p:style>
+          <a:lnRef idx="1">
+            <a:schemeClr val="accent1"/>
+          </a:lnRef>
+          <a:fillRef idx="3">
+            <a:schemeClr val="accent1"/>
+          </a:fillRef>
+          <a:effectRef idx="2">
+            <a:schemeClr val="accent1"/>
+          </a:effectRef>
+          <a:fontRef idx="minor">
+            <a:schemeClr val="lt1"/>
+          </a:fontRef>
+        </p:style>
+        <p:txBody>
+          <a:bodyPr wrap="square" lIns="164592" tIns="91440" rIns="164592" bIns="73152" rtlCol="0" anchor="ctr"/>
+          <a:lstStyle/>
+          <a:p>
+            <a:pPr algn="l">
+              <a:defRPr sz="1500">
+                <a:solidFill>
+                  <a:srgbClr val="111827"/>
+                </a:solidFill>
+              </a:defRPr>
+            </a:pPr>
+            <a:r>
+              <a:rPr lang="en-US" altLang="en-US" sz="1800">
+                <a:latin typeface="UCL Sans" pitchFamily="2" charset="77"/>
+              </a:rPr>
+              <a:t>The main research risk is not only whether the car can complete one scenario, </a:t>
+            </a:r>
+            <a:endParaRPr lang="en-US" altLang="en-US" sz="1800">
+              <a:latin typeface="UCL Sans" pitchFamily="2" charset="77"/>
+            </a:endParaRPr>
+          </a:p>
+          <a:p>
+            <a:pPr algn="l">
+              <a:defRPr sz="1500">
+                <a:solidFill>
+                  <a:srgbClr val="111827"/>
+                </a:solidFill>
+              </a:defRPr>
+            </a:pPr>
+            <a:r>
+              <a:rPr lang="en-US" altLang="en-US" sz="1800">
+                <a:latin typeface="UCL Sans" pitchFamily="2" charset="77"/>
+              </a:rPr>
+              <a:t>but whether the method is reliable across different initial conditions.</a:t>
+            </a:r>
+            <a:endParaRPr lang="en-US" altLang="en-US" sz="1800">
+              <a:latin typeface="UCL Sans" pitchFamily="2" charset="77"/>
+            </a:endParaRPr>
+          </a:p>
+        </p:txBody>
+      </p:sp>
+    </p:spTree>
+  </p:cSld>
+  <p:clrMapOvr>
+    <a:masterClrMapping/>
+  </p:clrMapOvr>
+</p:sld>
+</file>
+
+<file path=ppt/slides/slide11.xml><?xml version="1.0" encoding="utf-8"?>
 <p:sld xmlns:a="http://schemas.openxmlformats.org/drawingml/2006/main" xmlns:r="http://schemas.openxmlformats.org/officeDocument/2006/relationships" xmlns:p="http://schemas.openxmlformats.org/presentationml/2006/main">
   <p:cSld>
     <p:spTree>
@@ -11464,28 +12108,15 @@
               <a:rPr lang="en-GB">
                 <a:latin typeface="UCL Sans SemiBold"/>
               </a:rPr>
-              <a:t>Area of research</a:t>
+              <a:t>Area of Research</a:t>
             </a:r>
             <a:r>
               <a:rPr lang="en-US" altLang="en-GB">
                 <a:latin typeface="UCL Sans SemiBold"/>
               </a:rPr>
-              <a:t> </a:t>
-            </a:r>
-            <a:r>
-              <a:rPr lang="en-GB">
-                <a:latin typeface="UCL Sans SemiBold"/>
-              </a:rPr>
-              <a:t>- </a:t>
-            </a:r>
-            <a:r>
-              <a:rPr lang="en-GB">
-                <a:latin typeface="UCL Sans SemiBold"/>
-                <a:sym typeface="+mn-ea"/>
-              </a:rPr>
-              <a:t>autonomous driving</a:t>
-            </a:r>
-            <a:endParaRPr lang="en-GB">
+              <a:t>: Autonomous Driving</a:t>
+            </a:r>
+            <a:endParaRPr lang="en-US" altLang="en-GB">
               <a:latin typeface="UCL Sans SemiBold"/>
             </a:endParaRPr>
           </a:p>
@@ -11503,15 +12134,17 @@
         </p:nvSpPr>
         <p:spPr>
           <a:xfrm>
-            <a:off x="440690" y="1508760"/>
-            <a:ext cx="6910705" cy="3528060"/>
+            <a:off x="440690" y="1216025"/>
+            <a:ext cx="10014585" cy="1986280"/>
           </a:xfrm>
         </p:spPr>
         <p:txBody>
           <a:bodyPr/>
           <a:lstStyle/>
           <a:p>
-            <a:pPr>
+            <a:pPr algn="l">
+              <a:buClrTx/>
+              <a:buSzTx/>
               <a:defRPr sz="1500">
                 <a:solidFill>
                   <a:srgbClr val="4B5563"/>
@@ -11523,19 +12156,19 @@
                 <a:solidFill>
                   <a:srgbClr val="111827"/>
                 </a:solidFill>
-                <a:sym typeface="+mn-ea"/>
               </a:rPr>
-              <a:t>In this project, the self-driving car needs to cross an intersection while another vehicle may move in several possible ways. The car must observe the current traffic situation, predict what may happen next, and choose a safe action.</a:t>
+              <a:t>Autonomous driving requires a vehicle to perceive the environment, predict other road users, plan a safe trajectory, and control its motion.</a:t>
             </a:r>
             <a:endParaRPr lang="en-US" altLang="en-US" sz="1800">
               <a:solidFill>
                 <a:srgbClr val="111827"/>
               </a:solidFill>
-              <a:sym typeface="+mn-ea"/>
             </a:endParaRPr>
           </a:p>
           <a:p>
-            <a:pPr>
+            <a:pPr algn="l">
+              <a:buClrTx/>
+              <a:buSzTx/>
               <a:defRPr sz="1500">
                 <a:solidFill>
                   <a:srgbClr val="4B5563"/>
@@ -11546,11 +12179,12 @@
               <a:solidFill>
                 <a:srgbClr val="111827"/>
               </a:solidFill>
-              <a:sym typeface="+mn-ea"/>
             </a:endParaRPr>
           </a:p>
           <a:p>
-            <a:pPr>
+            <a:pPr algn="l">
+              <a:buClrTx/>
+              <a:buSzTx/>
               <a:defRPr sz="1500">
                 <a:solidFill>
                   <a:srgbClr val="4B5563"/>
@@ -11562,63 +12196,69 @@
                 <a:solidFill>
                   <a:srgbClr val="111827"/>
                 </a:solidFill>
-                <a:sym typeface="+mn-ea"/>
               </a:rPr>
-              <a:t>This is a sequential decision-making problem: the car does not make one decision only. It repeatedly observes, predicts, plans, acts, and then updates its plan again.</a:t>
+              <a:t>This project focuses on how a self-driving car plans a safe action when another vehicle may move in several possible ways.</a:t>
             </a:r>
             <a:endParaRPr lang="en-US" altLang="en-US" sz="1800">
               <a:solidFill>
                 <a:srgbClr val="111827"/>
               </a:solidFill>
-              <a:sym typeface="+mn-ea"/>
             </a:endParaRPr>
           </a:p>
           <a:p>
-            <a:pPr>
+            <a:pPr algn="l">
+              <a:buClrTx/>
+              <a:buSzTx/>
               <a:defRPr sz="1500">
                 <a:solidFill>
                   <a:srgbClr val="4B5563"/>
                 </a:solidFill>
               </a:defRPr>
             </a:pPr>
-            <a:endParaRPr>
+            <a:endParaRPr lang="en-US" altLang="en-US" sz="1800">
               <a:solidFill>
                 <a:srgbClr val="111827"/>
               </a:solidFill>
             </a:endParaRPr>
           </a:p>
           <a:p>
-            <a:pPr>
+            <a:pPr algn="l">
+              <a:buClrTx/>
+              <a:buSzTx/>
               <a:defRPr sz="1500">
                 <a:solidFill>
                   <a:srgbClr val="4B5563"/>
                 </a:solidFill>
               </a:defRPr>
             </a:pPr>
-            <a:endParaRPr lang="en-GB"/>
-          </a:p>
-        </p:txBody>
-      </p:sp>
-      <p:sp>
-        <p:nvSpPr>
-          <p:cNvPr id="17" name="Rounded Rectangle 16"/>
+            <a:endParaRPr lang="en-US" altLang="en-US" sz="1800">
+              <a:solidFill>
+                <a:srgbClr val="111827"/>
+              </a:solidFill>
+            </a:endParaRPr>
+          </a:p>
+        </p:txBody>
+      </p:sp>
+      <p:sp>
+        <p:nvSpPr>
+          <p:cNvPr id="3" name="Rounded Rectangle 2"/>
           <p:cNvSpPr/>
           <p:nvPr/>
         </p:nvSpPr>
         <p:spPr>
           <a:xfrm>
-            <a:off x="868680" y="5035550"/>
-            <a:ext cx="5595620" cy="658495"/>
+            <a:off x="431800" y="3665220"/>
+            <a:ext cx="1417320" cy="685800"/>
           </a:xfrm>
           <a:prstGeom prst="roundRect">
             <a:avLst/>
           </a:prstGeom>
           <a:solidFill>
-            <a:srgbClr val="DBEAFE"/>
+            <a:srgbClr val="F3F4F6"/>
           </a:solidFill>
           <a:ln>
             <a:solidFill>
-              <a:srgbClr val="2563EB"/>
+              <a:srgbClr val="4B5563"/>
             </a:solidFill>
           </a:ln>
         </p:spPr>
@@ -11637,417 +12277,39 @@
           </a:fontRef>
         </p:style>
         <p:txBody>
-          <a:bodyPr lIns="109728" rIns="109728" rtlCol="0" anchor="ctr"/>
+          <a:bodyPr wrap="square" rtlCol="0" anchor="ctr"/>
           <a:lstStyle/>
           <a:p>
             <a:pPr algn="ctr">
-              <a:defRPr sz="1800" b="1">
+              <a:defRPr sz="1300" b="1">
                 <a:solidFill>
                   <a:srgbClr val="172554"/>
                 </a:solidFill>
               </a:defRPr>
             </a:pPr>
             <a:r>
-              <a:t>Like crossing a road: look, think, then move.</a:t>
-            </a:r>
-          </a:p>
-        </p:txBody>
-      </p:sp>
-      <p:sp>
-        <p:nvSpPr>
-          <p:cNvPr id="6" name="Rectangle 5"/>
-          <p:cNvSpPr/>
-          <p:nvPr/>
-        </p:nvSpPr>
-        <p:spPr>
-          <a:xfrm>
-            <a:off x="9289491" y="1417320"/>
-            <a:ext cx="1126540" cy="4403750"/>
-          </a:xfrm>
-          <a:prstGeom prst="rect">
-            <a:avLst/>
-          </a:prstGeom>
-          <a:solidFill>
-            <a:srgbClr val="374151"/>
-          </a:solidFill>
-          <a:ln>
-            <a:solidFill>
-              <a:srgbClr val="374151"/>
-            </a:solidFill>
-          </a:ln>
-        </p:spPr>
-        <p:style>
-          <a:lnRef idx="1">
-            <a:schemeClr val="accent1"/>
-          </a:lnRef>
-          <a:fillRef idx="3">
-            <a:schemeClr val="accent1"/>
-          </a:fillRef>
-          <a:effectRef idx="2">
-            <a:schemeClr val="accent1"/>
-          </a:effectRef>
-          <a:fontRef idx="minor">
-            <a:schemeClr val="lt1"/>
-          </a:fontRef>
-        </p:style>
-        <p:txBody>
-          <a:bodyPr rtlCol="0" anchor="ctr"/>
-          <a:lstStyle/>
-          <a:p>
-            <a:pPr algn="ctr"/>
-          </a:p>
-        </p:txBody>
-      </p:sp>
-      <p:sp>
-        <p:nvSpPr>
-          <p:cNvPr id="7" name="Rectangle 6"/>
-          <p:cNvSpPr/>
-          <p:nvPr/>
-        </p:nvSpPr>
-        <p:spPr>
-          <a:xfrm>
-            <a:off x="7599680" y="3055924"/>
-            <a:ext cx="4403750" cy="1126540"/>
-          </a:xfrm>
-          <a:prstGeom prst="rect">
-            <a:avLst/>
-          </a:prstGeom>
-          <a:solidFill>
-            <a:srgbClr val="374151"/>
-          </a:solidFill>
-          <a:ln>
-            <a:solidFill>
-              <a:srgbClr val="374151"/>
-            </a:solidFill>
-          </a:ln>
-        </p:spPr>
-        <p:style>
-          <a:lnRef idx="1">
-            <a:schemeClr val="accent1"/>
-          </a:lnRef>
-          <a:fillRef idx="3">
-            <a:schemeClr val="accent1"/>
-          </a:fillRef>
-          <a:effectRef idx="2">
-            <a:schemeClr val="accent1"/>
-          </a:effectRef>
-          <a:fontRef idx="minor">
-            <a:schemeClr val="lt1"/>
-          </a:fontRef>
-        </p:style>
-        <p:txBody>
-          <a:bodyPr rtlCol="0" anchor="ctr"/>
-          <a:lstStyle/>
-          <a:p>
-            <a:pPr algn="ctr"/>
-          </a:p>
-        </p:txBody>
-      </p:sp>
-      <p:sp>
-        <p:nvSpPr>
-          <p:cNvPr id="8" name="Rectangle 7"/>
-          <p:cNvSpPr/>
-          <p:nvPr/>
-        </p:nvSpPr>
-        <p:spPr>
-          <a:xfrm>
-            <a:off x="7804505" y="3588471"/>
-            <a:ext cx="460857" cy="51206"/>
-          </a:xfrm>
-          <a:prstGeom prst="rect">
-            <a:avLst/>
-          </a:prstGeom>
-          <a:solidFill>
-            <a:srgbClr val="FBBF24"/>
-          </a:solidFill>
-          <a:ln>
-            <a:solidFill>
-              <a:srgbClr val="FBBF24"/>
-            </a:solidFill>
-          </a:ln>
-        </p:spPr>
-        <p:style>
-          <a:lnRef idx="1">
-            <a:schemeClr val="accent1"/>
-          </a:lnRef>
-          <a:fillRef idx="3">
-            <a:schemeClr val="accent1"/>
-          </a:fillRef>
-          <a:effectRef idx="2">
-            <a:schemeClr val="accent1"/>
-          </a:effectRef>
-          <a:fontRef idx="minor">
-            <a:schemeClr val="lt1"/>
-          </a:fontRef>
-        </p:style>
-        <p:txBody>
-          <a:bodyPr rtlCol="0" anchor="ctr"/>
-          <a:lstStyle/>
-          <a:p>
-            <a:pPr algn="ctr"/>
-          </a:p>
-        </p:txBody>
-      </p:sp>
-      <p:sp>
-        <p:nvSpPr>
-          <p:cNvPr id="9" name="Rectangle 8"/>
-          <p:cNvSpPr/>
-          <p:nvPr/>
-        </p:nvSpPr>
-        <p:spPr>
-          <a:xfrm>
-            <a:off x="8726220" y="3588471"/>
-            <a:ext cx="460857" cy="51206"/>
-          </a:xfrm>
-          <a:prstGeom prst="rect">
-            <a:avLst/>
-          </a:prstGeom>
-          <a:solidFill>
-            <a:srgbClr val="FBBF24"/>
-          </a:solidFill>
-          <a:ln>
-            <a:solidFill>
-              <a:srgbClr val="FBBF24"/>
-            </a:solidFill>
-          </a:ln>
-        </p:spPr>
-        <p:style>
-          <a:lnRef idx="1">
-            <a:schemeClr val="accent1"/>
-          </a:lnRef>
-          <a:fillRef idx="3">
-            <a:schemeClr val="accent1"/>
-          </a:fillRef>
-          <a:effectRef idx="2">
-            <a:schemeClr val="accent1"/>
-          </a:effectRef>
-          <a:fontRef idx="minor">
-            <a:schemeClr val="lt1"/>
-          </a:fontRef>
-        </p:style>
-        <p:txBody>
-          <a:bodyPr rtlCol="0" anchor="ctr"/>
-          <a:lstStyle/>
-          <a:p>
-            <a:pPr algn="ctr"/>
-          </a:p>
-        </p:txBody>
-      </p:sp>
-      <p:sp>
-        <p:nvSpPr>
-          <p:cNvPr id="10" name="Rectangle 9"/>
-          <p:cNvSpPr/>
-          <p:nvPr/>
-        </p:nvSpPr>
-        <p:spPr>
-          <a:xfrm>
-            <a:off x="9647936" y="3588471"/>
-            <a:ext cx="460857" cy="51206"/>
-          </a:xfrm>
-          <a:prstGeom prst="rect">
-            <a:avLst/>
-          </a:prstGeom>
-          <a:solidFill>
-            <a:srgbClr val="FBBF24"/>
-          </a:solidFill>
-          <a:ln>
-            <a:solidFill>
-              <a:srgbClr val="FBBF24"/>
-            </a:solidFill>
-          </a:ln>
-        </p:spPr>
-        <p:style>
-          <a:lnRef idx="1">
-            <a:schemeClr val="accent1"/>
-          </a:lnRef>
-          <a:fillRef idx="3">
-            <a:schemeClr val="accent1"/>
-          </a:fillRef>
-          <a:effectRef idx="2">
-            <a:schemeClr val="accent1"/>
-          </a:effectRef>
-          <a:fontRef idx="minor">
-            <a:schemeClr val="lt1"/>
-          </a:fontRef>
-        </p:style>
-        <p:txBody>
-          <a:bodyPr rtlCol="0" anchor="ctr"/>
-          <a:lstStyle/>
-          <a:p>
-            <a:pPr algn="ctr"/>
-          </a:p>
-        </p:txBody>
-      </p:sp>
-      <p:sp>
-        <p:nvSpPr>
-          <p:cNvPr id="11" name="Rectangle 10"/>
-          <p:cNvSpPr/>
-          <p:nvPr/>
-        </p:nvSpPr>
-        <p:spPr>
-          <a:xfrm>
-            <a:off x="10569651" y="3588471"/>
-            <a:ext cx="460857" cy="51206"/>
-          </a:xfrm>
-          <a:prstGeom prst="rect">
-            <a:avLst/>
-          </a:prstGeom>
-          <a:solidFill>
-            <a:srgbClr val="FBBF24"/>
-          </a:solidFill>
-          <a:ln>
-            <a:solidFill>
-              <a:srgbClr val="FBBF24"/>
-            </a:solidFill>
-          </a:ln>
-        </p:spPr>
-        <p:style>
-          <a:lnRef idx="1">
-            <a:schemeClr val="accent1"/>
-          </a:lnRef>
-          <a:fillRef idx="3">
-            <a:schemeClr val="accent1"/>
-          </a:fillRef>
-          <a:effectRef idx="2">
-            <a:schemeClr val="accent1"/>
-          </a:effectRef>
-          <a:fontRef idx="minor">
-            <a:schemeClr val="lt1"/>
-          </a:fontRef>
-        </p:style>
-        <p:txBody>
-          <a:bodyPr rtlCol="0" anchor="ctr"/>
-          <a:lstStyle/>
-          <a:p>
-            <a:pPr algn="ctr"/>
-          </a:p>
-        </p:txBody>
-      </p:sp>
-      <p:sp>
-        <p:nvSpPr>
-          <p:cNvPr id="12" name="Rounded Rectangle 11"/>
-          <p:cNvSpPr/>
-          <p:nvPr/>
-        </p:nvSpPr>
-        <p:spPr>
-          <a:xfrm>
-            <a:off x="8060537" y="3363163"/>
-            <a:ext cx="798819" cy="409651"/>
-          </a:xfrm>
-          <a:prstGeom prst="roundRect">
-            <a:avLst/>
-          </a:prstGeom>
-          <a:solidFill>
-            <a:srgbClr val="2563EB"/>
-          </a:solidFill>
-          <a:ln>
-            <a:solidFill>
-              <a:srgbClr val="2563EB"/>
-            </a:solidFill>
-          </a:ln>
-        </p:spPr>
-        <p:style>
-          <a:lnRef idx="1">
-            <a:schemeClr val="accent1"/>
-          </a:lnRef>
-          <a:fillRef idx="3">
-            <a:schemeClr val="accent1"/>
-          </a:fillRef>
-          <a:effectRef idx="2">
-            <a:schemeClr val="accent1"/>
-          </a:effectRef>
-          <a:fontRef idx="minor">
-            <a:schemeClr val="lt1"/>
-          </a:fontRef>
-        </p:style>
-        <p:txBody>
-          <a:bodyPr rtlCol="0" anchor="ctr"/>
-          <a:lstStyle/>
-          <a:p>
-            <a:pPr algn="ctr">
-              <a:defRPr sz="1100" b="1">
-                <a:solidFill>
-                  <a:srgbClr val="FFFFFF"/>
-                </a:solidFill>
-              </a:defRPr>
-            </a:pPr>
-            <a:r>
-              <a:t>EGO</a:t>
-            </a:r>
-          </a:p>
-        </p:txBody>
-      </p:sp>
-      <p:sp>
-        <p:nvSpPr>
-          <p:cNvPr id="13" name="Rounded Rectangle 12"/>
-          <p:cNvSpPr/>
-          <p:nvPr/>
-        </p:nvSpPr>
-        <p:spPr>
-          <a:xfrm>
-            <a:off x="9647936" y="1929384"/>
-            <a:ext cx="563270" cy="563270"/>
-          </a:xfrm>
-          <a:prstGeom prst="roundRect">
-            <a:avLst/>
-          </a:prstGeom>
-          <a:solidFill>
-            <a:srgbClr val="F97316"/>
-          </a:solidFill>
-          <a:ln>
-            <a:solidFill>
-              <a:srgbClr val="F97316"/>
-            </a:solidFill>
-          </a:ln>
-        </p:spPr>
-        <p:style>
-          <a:lnRef idx="1">
-            <a:schemeClr val="accent1"/>
-          </a:lnRef>
-          <a:fillRef idx="3">
-            <a:schemeClr val="accent1"/>
-          </a:fillRef>
-          <a:effectRef idx="2">
-            <a:schemeClr val="accent1"/>
-          </a:effectRef>
-          <a:fontRef idx="minor">
-            <a:schemeClr val="lt1"/>
-          </a:fontRef>
-        </p:style>
-        <p:txBody>
-          <a:bodyPr rtlCol="0" anchor="ctr"/>
-          <a:lstStyle/>
-          <a:p>
-            <a:pPr algn="ctr">
-              <a:defRPr sz="1100" b="1">
-                <a:solidFill>
-                  <a:srgbClr val="FFFFFF"/>
-                </a:solidFill>
-              </a:defRPr>
-            </a:pPr>
-            <a:r>
-              <a:t>TV</a:t>
+              <a:t>Scenario</a:t>
             </a:r>
           </a:p>
         </p:txBody>
       </p:sp>
       <p:cxnSp>
         <p:nvCxnSpPr>
-          <p:cNvPr id="14" name="Connector 13"/>
+          <p:cNvPr id="18" name="Connector 4"/>
           <p:cNvCxnSpPr/>
           <p:nvPr/>
         </p:nvCxnSpPr>
         <p:spPr>
           <a:xfrm>
-            <a:off x="9903968" y="2492654"/>
-            <a:ext cx="0" cy="972922"/>
+            <a:off x="1849120" y="4012692"/>
+            <a:ext cx="365760" cy="0"/>
           </a:xfrm>
           <a:prstGeom prst="line">
             <a:avLst/>
           </a:prstGeom>
           <a:ln w="25400">
             <a:solidFill>
-              <a:srgbClr val="16A34A"/>
+              <a:srgbClr val="4B5563"/>
             </a:solidFill>
           </a:ln>
         </p:spPr>
@@ -12066,23 +12328,79 @@
           </a:fontRef>
         </p:style>
       </p:cxnSp>
+      <p:sp>
+        <p:nvSpPr>
+          <p:cNvPr id="19" name="Rounded Rectangle 18"/>
+          <p:cNvSpPr/>
+          <p:nvPr/>
+        </p:nvSpPr>
+        <p:spPr>
+          <a:xfrm>
+            <a:off x="2260600" y="3665220"/>
+            <a:ext cx="1417320" cy="685800"/>
+          </a:xfrm>
+          <a:prstGeom prst="roundRect">
+            <a:avLst/>
+          </a:prstGeom>
+          <a:solidFill>
+            <a:srgbClr val="DBEAFE"/>
+          </a:solidFill>
+          <a:ln>
+            <a:solidFill>
+              <a:srgbClr val="2563EB"/>
+            </a:solidFill>
+          </a:ln>
+        </p:spPr>
+        <p:style>
+          <a:lnRef idx="1">
+            <a:schemeClr val="accent1"/>
+          </a:lnRef>
+          <a:fillRef idx="3">
+            <a:schemeClr val="accent1"/>
+          </a:fillRef>
+          <a:effectRef idx="2">
+            <a:schemeClr val="accent1"/>
+          </a:effectRef>
+          <a:fontRef idx="minor">
+            <a:schemeClr val="lt1"/>
+          </a:fontRef>
+        </p:style>
+        <p:txBody>
+          <a:bodyPr wrap="square" rtlCol="0" anchor="ctr"/>
+          <a:lstStyle/>
+          <a:p>
+            <a:pPr algn="ctr">
+              <a:defRPr sz="1300" b="1">
+                <a:solidFill>
+                  <a:srgbClr val="172554"/>
+                </a:solidFill>
+              </a:defRPr>
+            </a:pPr>
+            <a:r>
+              <a:rPr lang="en-US" altLang="en-US"/>
+              <a:t>Perception</a:t>
+            </a:r>
+            <a:endParaRPr lang="en-US" altLang="en-US"/>
+          </a:p>
+        </p:txBody>
+      </p:sp>
       <p:cxnSp>
         <p:nvCxnSpPr>
-          <p:cNvPr id="15" name="Connector 14"/>
+          <p:cNvPr id="20" name="Connector 6"/>
           <p:cNvCxnSpPr/>
           <p:nvPr/>
         </p:nvCxnSpPr>
         <p:spPr>
           <a:xfrm>
-            <a:off x="9903968" y="2492654"/>
-            <a:ext cx="0" cy="1433779"/>
+            <a:off x="3677920" y="4012692"/>
+            <a:ext cx="365760" cy="0"/>
           </a:xfrm>
           <a:prstGeom prst="line">
             <a:avLst/>
           </a:prstGeom>
           <a:ln w="25400">
             <a:solidFill>
-              <a:srgbClr val="F97316"/>
+              <a:srgbClr val="4B5563"/>
             </a:solidFill>
           </a:ln>
         </p:spPr>
@@ -12101,23 +12419,79 @@
           </a:fontRef>
         </p:style>
       </p:cxnSp>
+      <p:sp>
+        <p:nvSpPr>
+          <p:cNvPr id="21" name="Rounded Rectangle 20"/>
+          <p:cNvSpPr/>
+          <p:nvPr/>
+        </p:nvSpPr>
+        <p:spPr>
+          <a:xfrm>
+            <a:off x="4226560" y="3665220"/>
+            <a:ext cx="1417320" cy="685800"/>
+          </a:xfrm>
+          <a:prstGeom prst="roundRect">
+            <a:avLst/>
+          </a:prstGeom>
+          <a:solidFill>
+            <a:srgbClr val="FFEDD5"/>
+          </a:solidFill>
+          <a:ln>
+            <a:solidFill>
+              <a:srgbClr val="F97316"/>
+            </a:solidFill>
+          </a:ln>
+        </p:spPr>
+        <p:style>
+          <a:lnRef idx="1">
+            <a:schemeClr val="accent1"/>
+          </a:lnRef>
+          <a:fillRef idx="3">
+            <a:schemeClr val="accent1"/>
+          </a:fillRef>
+          <a:effectRef idx="2">
+            <a:schemeClr val="accent1"/>
+          </a:effectRef>
+          <a:fontRef idx="minor">
+            <a:schemeClr val="lt1"/>
+          </a:fontRef>
+        </p:style>
+        <p:txBody>
+          <a:bodyPr wrap="square" rtlCol="0" anchor="ctr"/>
+          <a:lstStyle/>
+          <a:p>
+            <a:pPr algn="ctr">
+              <a:defRPr sz="1300" b="1">
+                <a:solidFill>
+                  <a:srgbClr val="172554"/>
+                </a:solidFill>
+              </a:defRPr>
+            </a:pPr>
+            <a:r>
+              <a:rPr lang="en-US" altLang="en-US"/>
+              <a:t>Prediction</a:t>
+            </a:r>
+            <a:endParaRPr lang="en-US" altLang="en-US"/>
+          </a:p>
+        </p:txBody>
+      </p:sp>
       <p:cxnSp>
         <p:nvCxnSpPr>
-          <p:cNvPr id="16" name="Connector 15"/>
+          <p:cNvPr id="22" name="Connector 8"/>
           <p:cNvCxnSpPr/>
           <p:nvPr/>
         </p:nvCxnSpPr>
         <p:spPr>
           <a:xfrm>
-            <a:off x="9903968" y="2492654"/>
-            <a:ext cx="0" cy="1894637"/>
+            <a:off x="5643880" y="4012692"/>
+            <a:ext cx="365760" cy="0"/>
           </a:xfrm>
           <a:prstGeom prst="line">
             <a:avLst/>
           </a:prstGeom>
           <a:ln w="25400">
             <a:solidFill>
-              <a:srgbClr val="DC2626"/>
+              <a:srgbClr val="4B5563"/>
             </a:solidFill>
           </a:ln>
         </p:spPr>
@@ -12138,53 +12512,349 @@
       </p:cxnSp>
       <p:sp>
         <p:nvSpPr>
-          <p:cNvPr id="4" name="Arc 3"/>
+          <p:cNvPr id="23" name="Rounded Rectangle 22"/>
           <p:cNvSpPr/>
           <p:nvPr/>
         </p:nvSpPr>
         <p:spPr>
           <a:xfrm>
-            <a:off x="8099425" y="3543300"/>
-            <a:ext cx="1652270" cy="1998345"/>
-          </a:xfrm>
-          <a:prstGeom prst="arc">
-            <a:avLst/>
-          </a:prstGeom>
-          <a:noFill/>
+            <a:off x="6192520" y="3665220"/>
+            <a:ext cx="1417320" cy="685800"/>
+          </a:xfrm>
+          <a:prstGeom prst="roundRect">
+            <a:avLst/>
+          </a:prstGeom>
+          <a:solidFill>
+            <a:srgbClr val="DCFCE7"/>
+          </a:solidFill>
           <a:ln>
             <a:solidFill>
-              <a:srgbClr val="C00000"/>
+              <a:srgbClr val="16A34A"/>
             </a:solidFill>
           </a:ln>
-          <a:effectLst/>
-          <a:extLst>
-            <a:ext uri="{909E8E84-426E-40DD-AFC4-6F175D3DCCD1}">
-              <a14:hiddenFill xmlns:a14="http://schemas.microsoft.com/office/drawing/2010/main">
-                <a:solidFill>
-                  <a:srgbClr val="C00000"/>
-                </a:solidFill>
-              </a14:hiddenFill>
-            </a:ext>
-          </a:extLst>
+        </p:spPr>
+        <p:style>
+          <a:lnRef idx="1">
+            <a:schemeClr val="accent1"/>
+          </a:lnRef>
+          <a:fillRef idx="3">
+            <a:schemeClr val="accent1"/>
+          </a:fillRef>
+          <a:effectRef idx="2">
+            <a:schemeClr val="accent1"/>
+          </a:effectRef>
+          <a:fontRef idx="minor">
+            <a:schemeClr val="lt1"/>
+          </a:fontRef>
+        </p:style>
+        <p:txBody>
+          <a:bodyPr wrap="square" rtlCol="0" anchor="ctr"/>
+          <a:lstStyle/>
+          <a:p>
+            <a:pPr algn="ctr">
+              <a:defRPr sz="1300" b="1">
+                <a:solidFill>
+                  <a:srgbClr val="172554"/>
+                </a:solidFill>
+              </a:defRPr>
+            </a:pPr>
+            <a:r>
+              <a:rPr lang="en-US" altLang="en-US"/>
+              <a:t>Planning</a:t>
+            </a:r>
+            <a:endParaRPr lang="en-US" altLang="en-US"/>
+          </a:p>
+        </p:txBody>
+      </p:sp>
+      <p:cxnSp>
+        <p:nvCxnSpPr>
+          <p:cNvPr id="24" name="Connector 10"/>
+          <p:cNvCxnSpPr/>
+          <p:nvPr/>
+        </p:nvCxnSpPr>
+        <p:spPr>
+          <a:xfrm>
+            <a:off x="7609840" y="4012692"/>
+            <a:ext cx="365760" cy="0"/>
+          </a:xfrm>
+          <a:prstGeom prst="line">
+            <a:avLst/>
+          </a:prstGeom>
+          <a:ln w="25400">
+            <a:solidFill>
+              <a:srgbClr val="4B5563"/>
+            </a:solidFill>
+          </a:ln>
         </p:spPr>
         <p:style>
           <a:lnRef idx="2">
             <a:schemeClr val="accent1"/>
           </a:lnRef>
           <a:fillRef idx="0">
-            <a:srgbClr val="FFFFFF"/>
+            <a:schemeClr val="accent1"/>
           </a:fillRef>
-          <a:effectRef idx="0">
-            <a:srgbClr val="FFFFFF"/>
+          <a:effectRef idx="1">
+            <a:schemeClr val="accent1"/>
           </a:effectRef>
           <a:fontRef idx="minor">
             <a:schemeClr val="tx1"/>
           </a:fontRef>
         </p:style>
-        <p:txBody>
-          <a:bodyPr/>
-          <a:p>
-            <a:endParaRPr lang="en-US"/>
+      </p:cxnSp>
+      <p:sp>
+        <p:nvSpPr>
+          <p:cNvPr id="25" name="Rounded Rectangle 24"/>
+          <p:cNvSpPr/>
+          <p:nvPr/>
+        </p:nvSpPr>
+        <p:spPr>
+          <a:xfrm>
+            <a:off x="8158480" y="3665220"/>
+            <a:ext cx="1417320" cy="685800"/>
+          </a:xfrm>
+          <a:prstGeom prst="roundRect">
+            <a:avLst/>
+          </a:prstGeom>
+          <a:solidFill>
+            <a:srgbClr val="DBEAFE"/>
+          </a:solidFill>
+          <a:ln>
+            <a:solidFill>
+              <a:srgbClr val="2563EB"/>
+            </a:solidFill>
+          </a:ln>
+        </p:spPr>
+        <p:style>
+          <a:lnRef idx="1">
+            <a:schemeClr val="accent1"/>
+          </a:lnRef>
+          <a:fillRef idx="3">
+            <a:schemeClr val="accent1"/>
+          </a:fillRef>
+          <a:effectRef idx="2">
+            <a:schemeClr val="accent1"/>
+          </a:effectRef>
+          <a:fontRef idx="minor">
+            <a:schemeClr val="lt1"/>
+          </a:fontRef>
+        </p:style>
+        <p:txBody>
+          <a:bodyPr wrap="square" rtlCol="0" anchor="ctr"/>
+          <a:lstStyle/>
+          <a:p>
+            <a:pPr algn="ctr">
+              <a:defRPr sz="1300" b="1">
+                <a:solidFill>
+                  <a:srgbClr val="172554"/>
+                </a:solidFill>
+              </a:defRPr>
+            </a:pPr>
+            <a:r>
+              <a:rPr lang="en-US" altLang="en-US"/>
+              <a:t>Control</a:t>
+            </a:r>
+            <a:endParaRPr lang="en-US" altLang="en-US"/>
+          </a:p>
+        </p:txBody>
+      </p:sp>
+      <p:cxnSp>
+        <p:nvCxnSpPr>
+          <p:cNvPr id="26" name="Connector 12"/>
+          <p:cNvCxnSpPr/>
+          <p:nvPr/>
+        </p:nvCxnSpPr>
+        <p:spPr>
+          <a:xfrm>
+            <a:off x="9575800" y="4012692"/>
+            <a:ext cx="365759" cy="0"/>
+          </a:xfrm>
+          <a:prstGeom prst="line">
+            <a:avLst/>
+          </a:prstGeom>
+          <a:ln w="25400">
+            <a:solidFill>
+              <a:srgbClr val="4B5563"/>
+            </a:solidFill>
+          </a:ln>
+        </p:spPr>
+        <p:style>
+          <a:lnRef idx="2">
+            <a:schemeClr val="accent1"/>
+          </a:lnRef>
+          <a:fillRef idx="0">
+            <a:schemeClr val="accent1"/>
+          </a:fillRef>
+          <a:effectRef idx="1">
+            <a:schemeClr val="accent1"/>
+          </a:effectRef>
+          <a:fontRef idx="minor">
+            <a:schemeClr val="tx1"/>
+          </a:fontRef>
+        </p:style>
+      </p:cxnSp>
+      <p:sp>
+        <p:nvSpPr>
+          <p:cNvPr id="27" name="Rounded Rectangle 26"/>
+          <p:cNvSpPr/>
+          <p:nvPr/>
+        </p:nvSpPr>
+        <p:spPr>
+          <a:xfrm>
+            <a:off x="9804400" y="3665220"/>
+            <a:ext cx="1417320" cy="685800"/>
+          </a:xfrm>
+          <a:prstGeom prst="roundRect">
+            <a:avLst/>
+          </a:prstGeom>
+          <a:solidFill>
+            <a:srgbClr val="F3F4F6"/>
+          </a:solidFill>
+          <a:ln>
+            <a:solidFill>
+              <a:srgbClr val="4B5563"/>
+            </a:solidFill>
+          </a:ln>
+        </p:spPr>
+        <p:style>
+          <a:lnRef idx="1">
+            <a:schemeClr val="accent1"/>
+          </a:lnRef>
+          <a:fillRef idx="3">
+            <a:schemeClr val="accent1"/>
+          </a:fillRef>
+          <a:effectRef idx="2">
+            <a:schemeClr val="accent1"/>
+          </a:effectRef>
+          <a:fontRef idx="minor">
+            <a:schemeClr val="lt1"/>
+          </a:fontRef>
+        </p:style>
+        <p:txBody>
+          <a:bodyPr wrap="square" rtlCol="0" anchor="ctr"/>
+          <a:lstStyle/>
+          <a:p>
+            <a:pPr algn="ctr">
+              <a:defRPr sz="1300" b="1">
+                <a:solidFill>
+                  <a:srgbClr val="172554"/>
+                </a:solidFill>
+              </a:defRPr>
+            </a:pPr>
+            <a:r>
+              <a:t>Results</a:t>
+            </a:r>
+          </a:p>
+        </p:txBody>
+      </p:sp>
+      <p:sp>
+        <p:nvSpPr>
+          <p:cNvPr id="4" name="Text Box 3"/>
+          <p:cNvSpPr txBox="1"/>
+          <p:nvPr/>
+        </p:nvSpPr>
+        <p:spPr>
+          <a:xfrm>
+            <a:off x="431800" y="5012690"/>
+            <a:ext cx="9921875" cy="922020"/>
+          </a:xfrm>
+          <a:prstGeom prst="rect">
+            <a:avLst/>
+          </a:prstGeom>
+          <a:noFill/>
+        </p:spPr>
+        <p:txBody>
+          <a:bodyPr wrap="square" rtlCol="0" anchor="t">
+            <a:spAutoFit/>
+          </a:bodyPr>
+          <a:p>
+            <a:pPr marL="285750" indent="-285750" algn="l">
+              <a:buClrTx/>
+              <a:buSzTx/>
+              <a:buFont typeface="Arial" panose="020B0604020202090204" pitchFamily="34" charset="0"/>
+              <a:buChar char="•"/>
+              <a:defRPr sz="1500">
+                <a:solidFill>
+                  <a:srgbClr val="4B5563"/>
+                </a:solidFill>
+              </a:defRPr>
+            </a:pPr>
+            <a:r>
+              <a:rPr lang="en-US" altLang="en-US" sz="1800">
+                <a:solidFill>
+                  <a:srgbClr val="111827"/>
+                </a:solidFill>
+                <a:latin typeface="UCL Sans" pitchFamily="2" charset="77"/>
+                <a:sym typeface="+mn-ea"/>
+              </a:rPr>
+              <a:t>This is not general autonomous driving perception. </a:t>
+            </a:r>
+            <a:endParaRPr lang="en-US" altLang="en-US" sz="1800">
+              <a:solidFill>
+                <a:srgbClr val="111827"/>
+              </a:solidFill>
+              <a:latin typeface="UCL Sans" pitchFamily="2" charset="77"/>
+              <a:sym typeface="+mn-ea"/>
+            </a:endParaRPr>
+          </a:p>
+          <a:p>
+            <a:pPr marL="285750" indent="-285750" algn="l">
+              <a:buClrTx/>
+              <a:buSzTx/>
+              <a:buFont typeface="Arial" panose="020B0604020202090204" pitchFamily="34" charset="0"/>
+              <a:buChar char="•"/>
+              <a:defRPr sz="1500">
+                <a:solidFill>
+                  <a:srgbClr val="4B5563"/>
+                </a:solidFill>
+              </a:defRPr>
+            </a:pPr>
+            <a:r>
+              <a:rPr lang="en-US" altLang="en-US" sz="1800">
+                <a:solidFill>
+                  <a:srgbClr val="111827"/>
+                </a:solidFill>
+                <a:latin typeface="UCL Sans" pitchFamily="2" charset="77"/>
+                <a:sym typeface="+mn-ea"/>
+              </a:rPr>
+              <a:t>It is about decision-making and control under uncertain future behaviour.</a:t>
+            </a:r>
+            <a:endParaRPr lang="en-US" altLang="en-US" sz="1800">
+              <a:solidFill>
+                <a:srgbClr val="111827"/>
+              </a:solidFill>
+              <a:latin typeface="UCL Sans" pitchFamily="2" charset="77"/>
+              <a:sym typeface="+mn-ea"/>
+            </a:endParaRPr>
+          </a:p>
+          <a:p>
+            <a:pPr marL="285750" indent="-285750" algn="l">
+              <a:buClrTx/>
+              <a:buSzTx/>
+              <a:buFont typeface="Arial" panose="020B0604020202090204" pitchFamily="34" charset="0"/>
+              <a:buChar char="•"/>
+              <a:defRPr sz="1500">
+                <a:solidFill>
+                  <a:srgbClr val="4B5563"/>
+                </a:solidFill>
+              </a:defRPr>
+            </a:pPr>
+            <a:r>
+              <a:rPr lang="en-US" altLang="en-US" sz="1800">
+                <a:solidFill>
+                  <a:srgbClr val="FF0000"/>
+                </a:solidFill>
+                <a:latin typeface="UCL Sans" pitchFamily="2" charset="77"/>
+                <a:sym typeface="+mn-ea"/>
+              </a:rPr>
+              <a:t>Target vehicles may slow down, continue, turn, or behave unexpectedly.</a:t>
+            </a:r>
+            <a:endParaRPr lang="en-US" altLang="en-US" sz="1800">
+              <a:solidFill>
+                <a:srgbClr val="FF0000"/>
+              </a:solidFill>
+              <a:latin typeface="UCL Sans" pitchFamily="2" charset="77"/>
+              <a:sym typeface="+mn-ea"/>
+            </a:endParaRPr>
           </a:p>
         </p:txBody>
       </p:sp>
@@ -12223,24 +12893,31 @@
             <p:ph type="ctrTitle"/>
           </p:nvPr>
         </p:nvSpPr>
-        <p:spPr/>
+        <p:spPr>
+          <a:xfrm>
+            <a:off x="431800" y="409575"/>
+            <a:ext cx="11580495" cy="1009650"/>
+          </a:xfrm>
+        </p:spPr>
         <p:txBody>
           <a:bodyPr/>
           <a:lstStyle/>
           <a:p>
             <a:r>
-              <a:rPr lang="en-GB">
+              <a:rPr lang="en-US" altLang="en-GB">
                 <a:latin typeface="UCL Sans SemiBold"/>
               </a:rPr>
-              <a:t>Problem</a:t>
-            </a:r>
-            <a:endParaRPr lang="en-US"/>
-          </a:p>
-        </p:txBody>
-      </p:sp>
-      <p:sp>
-        <p:nvSpPr>
-          <p:cNvPr id="3" name="Text Placeholder 2"/>
+              <a:t>Problem: Crossing an Intersection</a:t>
+            </a:r>
+            <a:endParaRPr lang="en-US" altLang="en-GB">
+              <a:latin typeface="UCL Sans SemiBold"/>
+            </a:endParaRPr>
+          </a:p>
+        </p:txBody>
+      </p:sp>
+      <p:sp>
+        <p:nvSpPr>
+          <p:cNvPr id="5" name="Text Placeholder 4"/>
           <p:cNvSpPr>
             <a:spLocks noGrp="1"/>
           </p:cNvSpPr>
@@ -12250,83 +12927,171 @@
         </p:nvSpPr>
         <p:spPr>
           <a:xfrm>
-            <a:off x="440690" y="1157605"/>
-            <a:ext cx="11522075" cy="4904740"/>
+            <a:off x="440690" y="1381760"/>
+            <a:ext cx="7139940" cy="3528060"/>
           </a:xfrm>
         </p:spPr>
         <p:txBody>
           <a:bodyPr/>
           <a:lstStyle/>
           <a:p>
-            <a:r>
-              <a:rPr lang="en-US" altLang="en-US" dirty="0"/>
-              <a:t>One Predicted Future Is Not Enough, and t</a:t>
-            </a:r>
-            <a:r>
-              <a:rPr lang="en-US" altLang="en-US" dirty="0">
+            <a:pPr marL="57150" indent="-285750">
+              <a:buFont typeface="Arial" panose="020B0604020202090204" pitchFamily="34" charset="0"/>
+              <a:buChar char="•"/>
+              <a:defRPr sz="1500">
+                <a:solidFill>
+                  <a:srgbClr val="4B5563"/>
+                </a:solidFill>
+              </a:defRPr>
+            </a:pPr>
+            <a:r>
+              <a:rPr lang="en-US" altLang="en-US" sz="1800">
+                <a:solidFill>
+                  <a:srgbClr val="111827"/>
+                </a:solidFill>
                 <a:sym typeface="+mn-ea"/>
               </a:rPr>
-              <a:t>he key problem is uncertainty.</a:t>
-            </a:r>
-            <a:endParaRPr lang="en-US" altLang="en-US" dirty="0"/>
-          </a:p>
-          <a:p>
-            <a:endParaRPr lang="en-US" altLang="en-US" dirty="0"/>
-          </a:p>
-          <a:p>
-            <a:endParaRPr lang="en-US" altLang="en-US" dirty="0"/>
-          </a:p>
-          <a:p>
-            <a:endParaRPr lang="en-US" altLang="en-US" dirty="0"/>
-          </a:p>
-          <a:p>
-            <a:endParaRPr lang="en-US" altLang="en-US" dirty="0"/>
-          </a:p>
-          <a:p>
-            <a:endParaRPr lang="en-US" altLang="en-US" dirty="0"/>
-          </a:p>
-          <a:p>
-            <a:endParaRPr lang="en-US" altLang="en-US" dirty="0"/>
-          </a:p>
-          <a:p>
-            <a:endParaRPr lang="en-US" altLang="en-US" dirty="0"/>
-          </a:p>
-          <a:p>
-            <a:r>
-              <a:rPr lang="en-US" altLang="en-US" dirty="0"/>
-              <a:t>At an intersection, another car may continue forward, slow down, or move slightly differently from what we expect. If the self-driving car plans using only one predicted future, it may become over-confident and choose a risky action.</a:t>
-            </a:r>
-            <a:endParaRPr lang="en-US" altLang="en-US" dirty="0"/>
-          </a:p>
-          <a:p>
-            <a:r>
-              <a:rPr lang="en-US" altLang="en-US" dirty="0"/>
-              <a:t>The challenge is not only to follow a route, but to make a safe decision when several different futures are possible.</a:t>
-            </a:r>
-            <a:endParaRPr lang="en-US" altLang="en-US" dirty="0"/>
-          </a:p>
-        </p:txBody>
-      </p:sp>
-      <p:sp>
-        <p:nvSpPr>
-          <p:cNvPr id="5" name="Rounded Rectangle 4"/>
+              <a:t>In this project, the ego vehicle must cross an intersection while another vehicle may behave in several possible ways.</a:t>
+            </a:r>
+            <a:endParaRPr lang="en-US" altLang="en-US" sz="1800">
+              <a:solidFill>
+                <a:srgbClr val="111827"/>
+              </a:solidFill>
+              <a:sym typeface="+mn-ea"/>
+            </a:endParaRPr>
+          </a:p>
+          <a:p>
+            <a:pPr marL="57150" indent="-285750">
+              <a:buFont typeface="Arial" panose="020B0604020202090204" pitchFamily="34" charset="0"/>
+              <a:buChar char="•"/>
+              <a:defRPr sz="1500">
+                <a:solidFill>
+                  <a:srgbClr val="4B5563"/>
+                </a:solidFill>
+              </a:defRPr>
+            </a:pPr>
+            <a:endParaRPr lang="en-US" altLang="en-US" sz="1800">
+              <a:solidFill>
+                <a:srgbClr val="111827"/>
+              </a:solidFill>
+              <a:sym typeface="+mn-ea"/>
+            </a:endParaRPr>
+          </a:p>
+          <a:p>
+            <a:pPr marL="57150" indent="-285750">
+              <a:buFont typeface="Arial" panose="020B0604020202090204" pitchFamily="34" charset="0"/>
+              <a:buChar char="•"/>
+              <a:defRPr sz="1500">
+                <a:solidFill>
+                  <a:srgbClr val="4B5563"/>
+                </a:solidFill>
+              </a:defRPr>
+            </a:pPr>
+            <a:r>
+              <a:rPr lang="en-US" altLang="en-US" sz="1800">
+                <a:solidFill>
+                  <a:srgbClr val="111827"/>
+                </a:solidFill>
+                <a:sym typeface="+mn-ea"/>
+              </a:rPr>
+              <a:t>The car must observe the traffic situation, predict what may happen next, and choose a safe action.</a:t>
+            </a:r>
+            <a:endParaRPr lang="en-US" altLang="en-US" sz="1800">
+              <a:solidFill>
+                <a:srgbClr val="111827"/>
+              </a:solidFill>
+              <a:sym typeface="+mn-ea"/>
+            </a:endParaRPr>
+          </a:p>
+          <a:p>
+            <a:pPr marL="57150" indent="-285750">
+              <a:buFont typeface="Arial" panose="020B0604020202090204" pitchFamily="34" charset="0"/>
+              <a:buChar char="•"/>
+              <a:defRPr sz="1500">
+                <a:solidFill>
+                  <a:srgbClr val="4B5563"/>
+                </a:solidFill>
+              </a:defRPr>
+            </a:pPr>
+            <a:endParaRPr lang="en-US" altLang="en-US" sz="1800">
+              <a:solidFill>
+                <a:srgbClr val="111827"/>
+              </a:solidFill>
+              <a:sym typeface="+mn-ea"/>
+            </a:endParaRPr>
+          </a:p>
+          <a:p>
+            <a:pPr marL="57150" indent="-285750">
+              <a:buFont typeface="Arial" panose="020B0604020202090204" pitchFamily="34" charset="0"/>
+              <a:buChar char="•"/>
+              <a:defRPr sz="1500">
+                <a:solidFill>
+                  <a:srgbClr val="4B5563"/>
+                </a:solidFill>
+              </a:defRPr>
+            </a:pPr>
+            <a:r>
+              <a:rPr lang="en-US" altLang="en-US" sz="1800">
+                <a:solidFill>
+                  <a:srgbClr val="111827"/>
+                </a:solidFill>
+                <a:sym typeface="+mn-ea"/>
+              </a:rPr>
+              <a:t>This is a sequential decision-making problem: the car repeatedly observes, predicts, plans, acts, and then updates its plan.</a:t>
+            </a:r>
+            <a:endParaRPr lang="en-US" altLang="en-US" sz="1800">
+              <a:solidFill>
+                <a:srgbClr val="111827"/>
+              </a:solidFill>
+              <a:sym typeface="+mn-ea"/>
+            </a:endParaRPr>
+          </a:p>
+          <a:p>
+            <a:pPr>
+              <a:defRPr sz="1500">
+                <a:solidFill>
+                  <a:srgbClr val="4B5563"/>
+                </a:solidFill>
+              </a:defRPr>
+            </a:pPr>
+            <a:endParaRPr>
+              <a:solidFill>
+                <a:srgbClr val="111827"/>
+              </a:solidFill>
+            </a:endParaRPr>
+          </a:p>
+          <a:p>
+            <a:pPr>
+              <a:defRPr sz="1500">
+                <a:solidFill>
+                  <a:srgbClr val="4B5563"/>
+                </a:solidFill>
+              </a:defRPr>
+            </a:pPr>
+            <a:endParaRPr lang="en-GB"/>
+          </a:p>
+        </p:txBody>
+      </p:sp>
+      <p:sp>
+        <p:nvSpPr>
+          <p:cNvPr id="17" name="Rounded Rectangle 16"/>
           <p:cNvSpPr/>
           <p:nvPr/>
         </p:nvSpPr>
         <p:spPr>
           <a:xfrm>
-            <a:off x="1076960" y="1814830"/>
-            <a:ext cx="4297680" cy="502920"/>
+            <a:off x="868680" y="5179060"/>
+            <a:ext cx="5595620" cy="658495"/>
           </a:xfrm>
           <a:prstGeom prst="roundRect">
             <a:avLst/>
           </a:prstGeom>
           <a:solidFill>
-            <a:srgbClr val="FEE2E2"/>
+            <a:srgbClr val="DBEAFE"/>
           </a:solidFill>
           <a:ln>
             <a:solidFill>
-              <a:srgbClr val="DC2626"/>
+              <a:srgbClr val="2563EB"/>
             </a:solidFill>
           </a:ln>
         </p:spPr>
@@ -12349,14 +13114,14 @@
           <a:lstStyle/>
           <a:p>
             <a:pPr algn="ctr">
-              <a:defRPr sz="1700" b="1">
-                <a:solidFill>
-                  <a:srgbClr val="DC2626"/>
+              <a:defRPr sz="1800" b="1">
+                <a:solidFill>
+                  <a:srgbClr val="172554"/>
                 </a:solidFill>
               </a:defRPr>
             </a:pPr>
             <a:r>
-              <a:t>One guessed future</a:t>
+              <a:t>Like crossing a road: look, think, then move.</a:t>
             </a:r>
           </a:p>
         </p:txBody>
@@ -12369,8 +13134,8 @@
         </p:nvSpPr>
         <p:spPr>
           <a:xfrm>
-            <a:off x="1762760" y="2637790"/>
-            <a:ext cx="2834640" cy="658368"/>
+            <a:off x="9289491" y="1417320"/>
+            <a:ext cx="1126540" cy="4403750"/>
           </a:xfrm>
           <a:prstGeom prst="rect">
             <a:avLst/>
@@ -12403,29 +13168,30 @@
           <a:lstStyle/>
           <a:p>
             <a:pPr algn="ctr"/>
-          </a:p>
-        </p:txBody>
-      </p:sp>
-      <p:sp>
-        <p:nvSpPr>
-          <p:cNvPr id="7" name="Rounded Rectangle 6"/>
+            <a:endParaRPr sz="1800"/>
+          </a:p>
+        </p:txBody>
+      </p:sp>
+      <p:sp>
+        <p:nvSpPr>
+          <p:cNvPr id="7" name="Rectangle 6"/>
           <p:cNvSpPr/>
           <p:nvPr/>
         </p:nvSpPr>
         <p:spPr>
           <a:xfrm>
-            <a:off x="2037080" y="2756662"/>
-            <a:ext cx="822960" cy="411480"/>
-          </a:xfrm>
-          <a:prstGeom prst="roundRect">
+            <a:off x="7599680" y="3055924"/>
+            <a:ext cx="4403750" cy="1126540"/>
+          </a:xfrm>
+          <a:prstGeom prst="rect">
             <a:avLst/>
           </a:prstGeom>
           <a:solidFill>
-            <a:srgbClr val="2563EB"/>
+            <a:srgbClr val="374151"/>
           </a:solidFill>
           <a:ln>
             <a:solidFill>
-              <a:srgbClr val="2563EB"/>
+              <a:srgbClr val="374151"/>
             </a:solidFill>
           </a:ln>
         </p:spPr>
@@ -12447,39 +13213,31 @@
           <a:bodyPr rtlCol="0" anchor="ctr"/>
           <a:lstStyle/>
           <a:p>
-            <a:pPr algn="ctr">
-              <a:defRPr sz="1100" b="1">
-                <a:solidFill>
-                  <a:srgbClr val="FFFFFF"/>
-                </a:solidFill>
-              </a:defRPr>
-            </a:pPr>
-            <a:r>
-              <a:t>EGO</a:t>
-            </a:r>
-          </a:p>
-        </p:txBody>
-      </p:sp>
-      <p:sp>
-        <p:nvSpPr>
-          <p:cNvPr id="8" name="Rounded Rectangle 7"/>
+            <a:pPr algn="ctr"/>
+            <a:endParaRPr sz="1800"/>
+          </a:p>
+        </p:txBody>
+      </p:sp>
+      <p:sp>
+        <p:nvSpPr>
+          <p:cNvPr id="8" name="Rectangle 7"/>
           <p:cNvSpPr/>
           <p:nvPr/>
         </p:nvSpPr>
         <p:spPr>
           <a:xfrm>
-            <a:off x="3545840" y="2756662"/>
-            <a:ext cx="594360" cy="384048"/>
-          </a:xfrm>
-          <a:prstGeom prst="roundRect">
+            <a:off x="7804505" y="3588471"/>
+            <a:ext cx="460857" cy="51206"/>
+          </a:xfrm>
+          <a:prstGeom prst="rect">
             <a:avLst/>
           </a:prstGeom>
           <a:solidFill>
-            <a:srgbClr val="F97316"/>
+            <a:srgbClr val="FBBF24"/>
           </a:solidFill>
           <a:ln>
             <a:solidFill>
-              <a:srgbClr val="F97316"/>
+              <a:srgbClr val="FBBF24"/>
             </a:solidFill>
           </a:ln>
         </p:spPr>
@@ -12501,6 +13259,190 @@
           <a:bodyPr rtlCol="0" anchor="ctr"/>
           <a:lstStyle/>
           <a:p>
+            <a:pPr algn="ctr"/>
+            <a:endParaRPr sz="1800"/>
+          </a:p>
+        </p:txBody>
+      </p:sp>
+      <p:sp>
+        <p:nvSpPr>
+          <p:cNvPr id="9" name="Rectangle 8"/>
+          <p:cNvSpPr/>
+          <p:nvPr/>
+        </p:nvSpPr>
+        <p:spPr>
+          <a:xfrm>
+            <a:off x="8726220" y="3588471"/>
+            <a:ext cx="460857" cy="51206"/>
+          </a:xfrm>
+          <a:prstGeom prst="rect">
+            <a:avLst/>
+          </a:prstGeom>
+          <a:solidFill>
+            <a:srgbClr val="FBBF24"/>
+          </a:solidFill>
+          <a:ln>
+            <a:solidFill>
+              <a:srgbClr val="FBBF24"/>
+            </a:solidFill>
+          </a:ln>
+        </p:spPr>
+        <p:style>
+          <a:lnRef idx="1">
+            <a:schemeClr val="accent1"/>
+          </a:lnRef>
+          <a:fillRef idx="3">
+            <a:schemeClr val="accent1"/>
+          </a:fillRef>
+          <a:effectRef idx="2">
+            <a:schemeClr val="accent1"/>
+          </a:effectRef>
+          <a:fontRef idx="minor">
+            <a:schemeClr val="lt1"/>
+          </a:fontRef>
+        </p:style>
+        <p:txBody>
+          <a:bodyPr rtlCol="0" anchor="ctr"/>
+          <a:lstStyle/>
+          <a:p>
+            <a:pPr algn="ctr"/>
+            <a:endParaRPr sz="1800"/>
+          </a:p>
+        </p:txBody>
+      </p:sp>
+      <p:sp>
+        <p:nvSpPr>
+          <p:cNvPr id="10" name="Rectangle 9"/>
+          <p:cNvSpPr/>
+          <p:nvPr/>
+        </p:nvSpPr>
+        <p:spPr>
+          <a:xfrm>
+            <a:off x="9647936" y="3588471"/>
+            <a:ext cx="460857" cy="51206"/>
+          </a:xfrm>
+          <a:prstGeom prst="rect">
+            <a:avLst/>
+          </a:prstGeom>
+          <a:solidFill>
+            <a:srgbClr val="FBBF24"/>
+          </a:solidFill>
+          <a:ln>
+            <a:solidFill>
+              <a:srgbClr val="FBBF24"/>
+            </a:solidFill>
+          </a:ln>
+        </p:spPr>
+        <p:style>
+          <a:lnRef idx="1">
+            <a:schemeClr val="accent1"/>
+          </a:lnRef>
+          <a:fillRef idx="3">
+            <a:schemeClr val="accent1"/>
+          </a:fillRef>
+          <a:effectRef idx="2">
+            <a:schemeClr val="accent1"/>
+          </a:effectRef>
+          <a:fontRef idx="minor">
+            <a:schemeClr val="lt1"/>
+          </a:fontRef>
+        </p:style>
+        <p:txBody>
+          <a:bodyPr rtlCol="0" anchor="ctr"/>
+          <a:lstStyle/>
+          <a:p>
+            <a:pPr algn="ctr"/>
+            <a:endParaRPr sz="1800"/>
+          </a:p>
+        </p:txBody>
+      </p:sp>
+      <p:sp>
+        <p:nvSpPr>
+          <p:cNvPr id="11" name="Rectangle 10"/>
+          <p:cNvSpPr/>
+          <p:nvPr/>
+        </p:nvSpPr>
+        <p:spPr>
+          <a:xfrm>
+            <a:off x="10569651" y="3588471"/>
+            <a:ext cx="460857" cy="51206"/>
+          </a:xfrm>
+          <a:prstGeom prst="rect">
+            <a:avLst/>
+          </a:prstGeom>
+          <a:solidFill>
+            <a:srgbClr val="FBBF24"/>
+          </a:solidFill>
+          <a:ln>
+            <a:solidFill>
+              <a:srgbClr val="FBBF24"/>
+            </a:solidFill>
+          </a:ln>
+        </p:spPr>
+        <p:style>
+          <a:lnRef idx="1">
+            <a:schemeClr val="accent1"/>
+          </a:lnRef>
+          <a:fillRef idx="3">
+            <a:schemeClr val="accent1"/>
+          </a:fillRef>
+          <a:effectRef idx="2">
+            <a:schemeClr val="accent1"/>
+          </a:effectRef>
+          <a:fontRef idx="minor">
+            <a:schemeClr val="lt1"/>
+          </a:fontRef>
+        </p:style>
+        <p:txBody>
+          <a:bodyPr rtlCol="0" anchor="ctr"/>
+          <a:lstStyle/>
+          <a:p>
+            <a:pPr algn="ctr"/>
+            <a:endParaRPr sz="1800"/>
+          </a:p>
+        </p:txBody>
+      </p:sp>
+      <p:sp>
+        <p:nvSpPr>
+          <p:cNvPr id="12" name="Rounded Rectangle 11"/>
+          <p:cNvSpPr/>
+          <p:nvPr/>
+        </p:nvSpPr>
+        <p:spPr>
+          <a:xfrm>
+            <a:off x="8060537" y="3363163"/>
+            <a:ext cx="798819" cy="409651"/>
+          </a:xfrm>
+          <a:prstGeom prst="roundRect">
+            <a:avLst/>
+          </a:prstGeom>
+          <a:solidFill>
+            <a:srgbClr val="2563EB"/>
+          </a:solidFill>
+          <a:ln>
+            <a:solidFill>
+              <a:srgbClr val="2563EB"/>
+            </a:solidFill>
+          </a:ln>
+        </p:spPr>
+        <p:style>
+          <a:lnRef idx="1">
+            <a:schemeClr val="accent1"/>
+          </a:lnRef>
+          <a:fillRef idx="3">
+            <a:schemeClr val="accent1"/>
+          </a:fillRef>
+          <a:effectRef idx="2">
+            <a:schemeClr val="accent1"/>
+          </a:effectRef>
+          <a:fontRef idx="minor">
+            <a:schemeClr val="lt1"/>
+          </a:fontRef>
+        </p:style>
+        <p:txBody>
+          <a:bodyPr rtlCol="0" anchor="ctr"/>
+          <a:lstStyle/>
+          <a:p>
             <a:pPr algn="ctr">
               <a:defRPr sz="1100" b="1">
                 <a:solidFill>
@@ -12509,6 +13451,60 @@
               </a:defRPr>
             </a:pPr>
             <a:r>
+              <a:t>EGO</a:t>
+            </a:r>
+          </a:p>
+        </p:txBody>
+      </p:sp>
+      <p:sp>
+        <p:nvSpPr>
+          <p:cNvPr id="13" name="Rounded Rectangle 12"/>
+          <p:cNvSpPr/>
+          <p:nvPr/>
+        </p:nvSpPr>
+        <p:spPr>
+          <a:xfrm>
+            <a:off x="9647936" y="1929384"/>
+            <a:ext cx="563270" cy="563270"/>
+          </a:xfrm>
+          <a:prstGeom prst="roundRect">
+            <a:avLst/>
+          </a:prstGeom>
+          <a:solidFill>
+            <a:srgbClr val="F97316"/>
+          </a:solidFill>
+          <a:ln>
+            <a:solidFill>
+              <a:srgbClr val="F97316"/>
+            </a:solidFill>
+          </a:ln>
+        </p:spPr>
+        <p:style>
+          <a:lnRef idx="1">
+            <a:schemeClr val="accent1"/>
+          </a:lnRef>
+          <a:fillRef idx="3">
+            <a:schemeClr val="accent1"/>
+          </a:fillRef>
+          <a:effectRef idx="2">
+            <a:schemeClr val="accent1"/>
+          </a:effectRef>
+          <a:fontRef idx="minor">
+            <a:schemeClr val="lt1"/>
+          </a:fontRef>
+        </p:style>
+        <p:txBody>
+          <a:bodyPr rtlCol="0" anchor="ctr"/>
+          <a:lstStyle/>
+          <a:p>
+            <a:pPr algn="ctr">
+              <a:defRPr sz="1100" b="1">
+                <a:solidFill>
+                  <a:srgbClr val="FFFFFF"/>
+                </a:solidFill>
+              </a:defRPr>
+            </a:pPr>
+            <a:r>
               <a:t>TV</a:t>
             </a:r>
           </a:p>
@@ -12516,21 +13512,21 @@
       </p:sp>
       <p:cxnSp>
         <p:nvCxnSpPr>
-          <p:cNvPr id="9" name="Connector 8"/>
+          <p:cNvPr id="14" name="Connector 13"/>
           <p:cNvCxnSpPr/>
           <p:nvPr/>
         </p:nvCxnSpPr>
         <p:spPr>
           <a:xfrm>
-            <a:off x="4140200" y="2939542"/>
-            <a:ext cx="731520" cy="0"/>
+            <a:off x="9903968" y="2492654"/>
+            <a:ext cx="0" cy="972922"/>
           </a:xfrm>
           <a:prstGeom prst="line">
             <a:avLst/>
           </a:prstGeom>
-          <a:ln w="38100">
+          <a:ln w="25400">
             <a:solidFill>
-              <a:srgbClr val="DC2626"/>
+              <a:srgbClr val="16A34A"/>
             </a:solidFill>
           </a:ln>
         </p:spPr>
@@ -12549,248 +13545,6 @@
           </a:fontRef>
         </p:style>
       </p:cxnSp>
-      <p:sp>
-        <p:nvSpPr>
-          <p:cNvPr id="10" name="TextBox 9"/>
-          <p:cNvSpPr txBox="1"/>
-          <p:nvPr/>
-        </p:nvSpPr>
-        <p:spPr>
-          <a:xfrm>
-            <a:off x="1625600" y="3643630"/>
-            <a:ext cx="3108960" cy="274320"/>
-          </a:xfrm>
-          <a:prstGeom prst="rect">
-            <a:avLst/>
-          </a:prstGeom>
-          <a:noFill/>
-        </p:spPr>
-        <p:txBody>
-          <a:bodyPr wrap="none" anchor="ctr">
-            <a:spAutoFit/>
-          </a:bodyPr>
-          <a:lstStyle/>
-          <a:p>
-            <a:pPr algn="ctr">
-              <a:defRPr sz="1800" b="1">
-                <a:solidFill>
-                  <a:srgbClr val="DC2626"/>
-                </a:solidFill>
-              </a:defRPr>
-            </a:pPr>
-            <a:r>
-              <a:t>Too confident</a:t>
-            </a:r>
-          </a:p>
-        </p:txBody>
-      </p:sp>
-      <p:sp>
-        <p:nvSpPr>
-          <p:cNvPr id="11" name="Rounded Rectangle 10"/>
-          <p:cNvSpPr/>
-          <p:nvPr/>
-        </p:nvSpPr>
-        <p:spPr>
-          <a:xfrm>
-            <a:off x="6654800" y="1814830"/>
-            <a:ext cx="4297680" cy="502920"/>
-          </a:xfrm>
-          <a:prstGeom prst="roundRect">
-            <a:avLst/>
-          </a:prstGeom>
-          <a:solidFill>
-            <a:srgbClr val="DCFCE7"/>
-          </a:solidFill>
-          <a:ln>
-            <a:solidFill>
-              <a:srgbClr val="16A34A"/>
-            </a:solidFill>
-          </a:ln>
-        </p:spPr>
-        <p:style>
-          <a:lnRef idx="1">
-            <a:schemeClr val="accent1"/>
-          </a:lnRef>
-          <a:fillRef idx="3">
-            <a:schemeClr val="accent1"/>
-          </a:fillRef>
-          <a:effectRef idx="2">
-            <a:schemeClr val="accent1"/>
-          </a:effectRef>
-          <a:fontRef idx="minor">
-            <a:schemeClr val="lt1"/>
-          </a:fontRef>
-        </p:style>
-        <p:txBody>
-          <a:bodyPr lIns="109728" rIns="109728" rtlCol="0" anchor="ctr"/>
-          <a:lstStyle/>
-          <a:p>
-            <a:pPr algn="ctr">
-              <a:defRPr sz="1700" b="1">
-                <a:solidFill>
-                  <a:srgbClr val="172554"/>
-                </a:solidFill>
-              </a:defRPr>
-            </a:pPr>
-            <a:r>
-              <a:t>Several possible futures</a:t>
-            </a:r>
-          </a:p>
-        </p:txBody>
-      </p:sp>
-      <p:sp>
-        <p:nvSpPr>
-          <p:cNvPr id="12" name="Rectangle 11"/>
-          <p:cNvSpPr/>
-          <p:nvPr/>
-        </p:nvSpPr>
-        <p:spPr>
-          <a:xfrm>
-            <a:off x="7340600" y="2637790"/>
-            <a:ext cx="2834640" cy="658368"/>
-          </a:xfrm>
-          <a:prstGeom prst="rect">
-            <a:avLst/>
-          </a:prstGeom>
-          <a:solidFill>
-            <a:srgbClr val="374151"/>
-          </a:solidFill>
-          <a:ln>
-            <a:solidFill>
-              <a:srgbClr val="374151"/>
-            </a:solidFill>
-          </a:ln>
-        </p:spPr>
-        <p:style>
-          <a:lnRef idx="1">
-            <a:schemeClr val="accent1"/>
-          </a:lnRef>
-          <a:fillRef idx="3">
-            <a:schemeClr val="accent1"/>
-          </a:fillRef>
-          <a:effectRef idx="2">
-            <a:schemeClr val="accent1"/>
-          </a:effectRef>
-          <a:fontRef idx="minor">
-            <a:schemeClr val="lt1"/>
-          </a:fontRef>
-        </p:style>
-        <p:txBody>
-          <a:bodyPr rtlCol="0" anchor="ctr"/>
-          <a:lstStyle/>
-          <a:p>
-            <a:pPr algn="ctr"/>
-          </a:p>
-        </p:txBody>
-      </p:sp>
-      <p:sp>
-        <p:nvSpPr>
-          <p:cNvPr id="13" name="Rounded Rectangle 12"/>
-          <p:cNvSpPr/>
-          <p:nvPr/>
-        </p:nvSpPr>
-        <p:spPr>
-          <a:xfrm>
-            <a:off x="7614920" y="2756662"/>
-            <a:ext cx="822960" cy="411480"/>
-          </a:xfrm>
-          <a:prstGeom prst="roundRect">
-            <a:avLst/>
-          </a:prstGeom>
-          <a:solidFill>
-            <a:srgbClr val="2563EB"/>
-          </a:solidFill>
-          <a:ln>
-            <a:solidFill>
-              <a:srgbClr val="2563EB"/>
-            </a:solidFill>
-          </a:ln>
-        </p:spPr>
-        <p:style>
-          <a:lnRef idx="1">
-            <a:schemeClr val="accent1"/>
-          </a:lnRef>
-          <a:fillRef idx="3">
-            <a:schemeClr val="accent1"/>
-          </a:fillRef>
-          <a:effectRef idx="2">
-            <a:schemeClr val="accent1"/>
-          </a:effectRef>
-          <a:fontRef idx="minor">
-            <a:schemeClr val="lt1"/>
-          </a:fontRef>
-        </p:style>
-        <p:txBody>
-          <a:bodyPr rtlCol="0" anchor="ctr"/>
-          <a:lstStyle/>
-          <a:p>
-            <a:pPr algn="ctr">
-              <a:defRPr sz="1100" b="1">
-                <a:solidFill>
-                  <a:srgbClr val="FFFFFF"/>
-                </a:solidFill>
-              </a:defRPr>
-            </a:pPr>
-            <a:r>
-              <a:t>EGO</a:t>
-            </a:r>
-          </a:p>
-        </p:txBody>
-      </p:sp>
-      <p:sp>
-        <p:nvSpPr>
-          <p:cNvPr id="14" name="Rounded Rectangle 13"/>
-          <p:cNvSpPr/>
-          <p:nvPr/>
-        </p:nvSpPr>
-        <p:spPr>
-          <a:xfrm>
-            <a:off x="9123680" y="2756662"/>
-            <a:ext cx="594360" cy="384048"/>
-          </a:xfrm>
-          <a:prstGeom prst="roundRect">
-            <a:avLst/>
-          </a:prstGeom>
-          <a:solidFill>
-            <a:srgbClr val="F97316"/>
-          </a:solidFill>
-          <a:ln>
-            <a:solidFill>
-              <a:srgbClr val="F97316"/>
-            </a:solidFill>
-          </a:ln>
-        </p:spPr>
-        <p:style>
-          <a:lnRef idx="1">
-            <a:schemeClr val="accent1"/>
-          </a:lnRef>
-          <a:fillRef idx="3">
-            <a:schemeClr val="accent1"/>
-          </a:fillRef>
-          <a:effectRef idx="2">
-            <a:schemeClr val="accent1"/>
-          </a:effectRef>
-          <a:fontRef idx="minor">
-            <a:schemeClr val="lt1"/>
-          </a:fontRef>
-        </p:style>
-        <p:txBody>
-          <a:bodyPr rtlCol="0" anchor="ctr"/>
-          <a:lstStyle/>
-          <a:p>
-            <a:pPr algn="ctr">
-              <a:defRPr sz="1100" b="1">
-                <a:solidFill>
-                  <a:srgbClr val="FFFFFF"/>
-                </a:solidFill>
-              </a:defRPr>
-            </a:pPr>
-            <a:r>
-              <a:t>TV</a:t>
-            </a:r>
-          </a:p>
-        </p:txBody>
-      </p:sp>
       <p:cxnSp>
         <p:nvCxnSpPr>
           <p:cNvPr id="15" name="Connector 14"/>
@@ -12798,16 +13552,16 @@
           <p:nvPr/>
         </p:nvCxnSpPr>
         <p:spPr>
-          <a:xfrm flipV="1">
-            <a:off x="9718040" y="2409190"/>
-            <a:ext cx="685800" cy="530352"/>
+          <a:xfrm>
+            <a:off x="9903968" y="2492654"/>
+            <a:ext cx="0" cy="1433779"/>
           </a:xfrm>
           <a:prstGeom prst="line">
             <a:avLst/>
           </a:prstGeom>
-          <a:ln w="38100">
+          <a:ln w="25400">
             <a:solidFill>
-              <a:srgbClr val="16A34A"/>
+              <a:srgbClr val="F97316"/>
             </a:solidFill>
           </a:ln>
         </p:spPr>
@@ -12834,15 +13588,15 @@
         </p:nvCxnSpPr>
         <p:spPr>
           <a:xfrm>
-            <a:off x="9718040" y="2939542"/>
-            <a:ext cx="777240" cy="0"/>
+            <a:off x="9903968" y="2492654"/>
+            <a:ext cx="0" cy="1894637"/>
           </a:xfrm>
           <a:prstGeom prst="line">
             <a:avLst/>
           </a:prstGeom>
-          <a:ln w="38100">
+          <a:ln w="25400">
             <a:solidFill>
-              <a:srgbClr val="F97316"/>
+              <a:srgbClr val="DC2626"/>
             </a:solidFill>
           </a:ln>
         </p:spPr>
@@ -12861,73 +13615,55 @@
           </a:fontRef>
         </p:style>
       </p:cxnSp>
-      <p:cxnSp>
-        <p:nvCxnSpPr>
-          <p:cNvPr id="17" name="Connector 16"/>
-          <p:cNvCxnSpPr/>
+      <p:sp>
+        <p:nvSpPr>
+          <p:cNvPr id="4" name="Arc 3"/>
+          <p:cNvSpPr/>
           <p:nvPr/>
-        </p:nvCxnSpPr>
-        <p:spPr>
-          <a:xfrm>
-            <a:off x="9718040" y="2939542"/>
-            <a:ext cx="685800" cy="521208"/>
-          </a:xfrm>
-          <a:prstGeom prst="line">
-            <a:avLst/>
-          </a:prstGeom>
-          <a:ln w="38100">
+        </p:nvSpPr>
+        <p:spPr>
+          <a:xfrm>
+            <a:off x="8099425" y="3543300"/>
+            <a:ext cx="1652270" cy="1998345"/>
+          </a:xfrm>
+          <a:prstGeom prst="arc">
+            <a:avLst/>
+          </a:prstGeom>
+          <a:noFill/>
+          <a:ln>
             <a:solidFill>
-              <a:srgbClr val="DC2626"/>
+              <a:srgbClr val="C00000"/>
             </a:solidFill>
           </a:ln>
+          <a:effectLst/>
+          <a:extLst>
+            <a:ext uri="{909E8E84-426E-40DD-AFC4-6F175D3DCCD1}">
+              <a14:hiddenFill xmlns:a14="http://schemas.microsoft.com/office/drawing/2010/main">
+                <a:solidFill>
+                  <a:srgbClr val="C00000"/>
+                </a:solidFill>
+              </a14:hiddenFill>
+            </a:ext>
+          </a:extLst>
         </p:spPr>
         <p:style>
           <a:lnRef idx="2">
             <a:schemeClr val="accent1"/>
           </a:lnRef>
           <a:fillRef idx="0">
-            <a:schemeClr val="accent1"/>
+            <a:srgbClr val="FFFFFF"/>
           </a:fillRef>
-          <a:effectRef idx="1">
-            <a:schemeClr val="accent1"/>
+          <a:effectRef idx="0">
+            <a:srgbClr val="FFFFFF"/>
           </a:effectRef>
           <a:fontRef idx="minor">
             <a:schemeClr val="tx1"/>
           </a:fontRef>
         </p:style>
-      </p:cxnSp>
-      <p:sp>
-        <p:nvSpPr>
-          <p:cNvPr id="18" name="TextBox 17"/>
-          <p:cNvSpPr txBox="1"/>
-          <p:nvPr/>
-        </p:nvSpPr>
-        <p:spPr>
-          <a:xfrm>
-            <a:off x="7477760" y="3643630"/>
-            <a:ext cx="3108960" cy="274320"/>
-          </a:xfrm>
-          <a:prstGeom prst="rect">
-            <a:avLst/>
-          </a:prstGeom>
-          <a:noFill/>
-        </p:spPr>
-        <p:txBody>
-          <a:bodyPr wrap="none" anchor="ctr">
-            <a:spAutoFit/>
-          </a:bodyPr>
-          <a:lstStyle/>
-          <a:p>
-            <a:pPr algn="ctr">
-              <a:defRPr sz="1800" b="1">
-                <a:solidFill>
-                  <a:srgbClr val="16A34A"/>
-                </a:solidFill>
-              </a:defRPr>
-            </a:pPr>
-            <a:r>
-              <a:t>More careful</a:t>
-            </a:r>
+        <p:txBody>
+          <a:bodyPr/>
+          <a:p>
+            <a:endParaRPr lang="en-US" sz="1800"/>
           </a:p>
         </p:txBody>
       </p:sp>
@@ -12975,7 +13711,7 @@
               <a:rPr lang="en-GB">
                 <a:latin typeface="UCL Sans SemiBold"/>
               </a:rPr>
-              <a:t>Significance</a:t>
+              <a:t>Problem</a:t>
             </a:r>
             <a:endParaRPr lang="en-US"/>
           </a:p>
@@ -12993,26 +13729,91 @@
         </p:nvSpPr>
         <p:spPr>
           <a:xfrm>
-            <a:off x="440690" y="1155065"/>
-            <a:ext cx="11257915" cy="3528060"/>
+            <a:off x="440690" y="1157605"/>
+            <a:ext cx="11522075" cy="4709160"/>
           </a:xfrm>
         </p:spPr>
         <p:txBody>
           <a:bodyPr/>
           <a:lstStyle/>
           <a:p>
-            <a:pPr>
-              <a:defRPr sz="1500">
-                <a:solidFill>
-                  <a:srgbClr val="4B5563"/>
-                </a:solidFill>
-              </a:defRPr>
-            </a:pPr>
-            <a:r>
-              <a:rPr lang="en-US" altLang="en-US" sz="1800" dirty="0"/>
-              <a:t>Solving this problem helps autonomous vehicles become safer, less hesitant, and more comfortable in complex traffic.</a:t>
-            </a:r>
-            <a:endParaRPr lang="en-US" altLang="en-US" sz="1800" dirty="0"/>
+            <a:r>
+              <a:rPr lang="en-US" altLang="en-US" dirty="0"/>
+              <a:t>The key challenge is </a:t>
+            </a:r>
+            <a:r>
+              <a:rPr lang="en-US" altLang="en-US" dirty="0">
+                <a:solidFill>
+                  <a:srgbClr val="FF0000"/>
+                </a:solidFill>
+              </a:rPr>
+              <a:t>uncertainty</a:t>
+            </a:r>
+            <a:r>
+              <a:rPr lang="en-US" altLang="en-US" dirty="0"/>
+              <a:t>.</a:t>
+            </a:r>
+            <a:endParaRPr lang="en-US" altLang="en-US" dirty="0"/>
+          </a:p>
+          <a:p>
+            <a:endParaRPr lang="en-US" altLang="en-US" dirty="0">
+              <a:solidFill>
+                <a:srgbClr val="FF0000"/>
+              </a:solidFill>
+              <a:sym typeface="+mn-ea"/>
+            </a:endParaRPr>
+          </a:p>
+          <a:p>
+            <a:r>
+              <a:rPr lang="en-US" altLang="en-US" dirty="0">
+                <a:solidFill>
+                  <a:srgbClr val="FF0000"/>
+                </a:solidFill>
+                <a:sym typeface="+mn-ea"/>
+              </a:rPr>
+              <a:t>At an intersection, the target vehicle may have several possible future motions. </a:t>
+            </a:r>
+            <a:r>
+              <a:rPr lang="en-US" altLang="en-US" dirty="0">
+                <a:sym typeface="+mn-ea"/>
+              </a:rPr>
+              <a:t>If the ego vehicle plans using only one predicted future, it may become over-confident and choose a risky action.</a:t>
+            </a:r>
+            <a:endParaRPr lang="en-US" altLang="en-US" dirty="0"/>
+          </a:p>
+          <a:p>
+            <a:endParaRPr lang="en-US" altLang="en-US" dirty="0"/>
+          </a:p>
+          <a:p>
+            <a:endParaRPr lang="en-US" altLang="en-US" dirty="0"/>
+          </a:p>
+          <a:p>
+            <a:endParaRPr lang="en-US" altLang="en-US" dirty="0"/>
+          </a:p>
+          <a:p>
+            <a:endParaRPr lang="en-US" altLang="en-US" dirty="0"/>
+          </a:p>
+          <a:p>
+            <a:endParaRPr lang="en-US" altLang="en-US" dirty="0"/>
+          </a:p>
+          <a:p>
+            <a:endParaRPr lang="en-US" altLang="en-US" dirty="0"/>
+          </a:p>
+          <a:p>
+            <a:endParaRPr lang="en-US" altLang="en-US" dirty="0"/>
+          </a:p>
+          <a:p>
+            <a:r>
+              <a:rPr lang="en-US" altLang="en-US" dirty="0"/>
+              <a:t>The research problem is how to convert uncertain multimodal predictions into safe control actions.</a:t>
+            </a:r>
+            <a:endParaRPr lang="en-US" altLang="en-US" dirty="0"/>
+          </a:p>
+          <a:p>
+            <a:endParaRPr lang="en-US" altLang="en-US" dirty="0"/>
+          </a:p>
+          <a:p>
+            <a:endParaRPr lang="en-US" altLang="en-US" dirty="0"/>
           </a:p>
         </p:txBody>
       </p:sp>
@@ -13024,18 +13825,18 @@
         </p:nvSpPr>
         <p:spPr>
           <a:xfrm>
-            <a:off x="1097280" y="1955800"/>
-            <a:ext cx="2560320" cy="1097280"/>
+            <a:off x="1076960" y="2962910"/>
+            <a:ext cx="4297680" cy="502920"/>
           </a:xfrm>
           <a:prstGeom prst="roundRect">
             <a:avLst/>
           </a:prstGeom>
           <a:solidFill>
-            <a:srgbClr val="DCFCE7"/>
+            <a:srgbClr val="FEE2E2"/>
           </a:solidFill>
           <a:ln>
             <a:solidFill>
-              <a:srgbClr val="16A34A"/>
+              <a:srgbClr val="DC2626"/>
             </a:solidFill>
           </a:ln>
         </p:spPr>
@@ -13058,38 +13859,38 @@
           <a:lstStyle/>
           <a:p>
             <a:pPr algn="ctr">
-              <a:defRPr sz="2800" b="1">
-                <a:solidFill>
-                  <a:srgbClr val="172554"/>
+              <a:defRPr sz="1700" b="1">
+                <a:solidFill>
+                  <a:srgbClr val="DC2626"/>
                 </a:solidFill>
               </a:defRPr>
             </a:pPr>
             <a:r>
-              <a:t>Safe</a:t>
-            </a:r>
-          </a:p>
-        </p:txBody>
-      </p:sp>
-      <p:sp>
-        <p:nvSpPr>
-          <p:cNvPr id="6" name="Rounded Rectangle 5"/>
+              <a:t>One guessed future</a:t>
+            </a:r>
+          </a:p>
+        </p:txBody>
+      </p:sp>
+      <p:sp>
+        <p:nvSpPr>
+          <p:cNvPr id="6" name="Rectangle 5"/>
           <p:cNvSpPr/>
           <p:nvPr/>
         </p:nvSpPr>
         <p:spPr>
           <a:xfrm>
-            <a:off x="4754880" y="1955800"/>
-            <a:ext cx="2560320" cy="1097280"/>
-          </a:xfrm>
-          <a:prstGeom prst="roundRect">
+            <a:off x="1762760" y="3785870"/>
+            <a:ext cx="2834640" cy="658368"/>
+          </a:xfrm>
+          <a:prstGeom prst="rect">
             <a:avLst/>
           </a:prstGeom>
           <a:solidFill>
-            <a:srgbClr val="DBEAFE"/>
+            <a:srgbClr val="374151"/>
           </a:solidFill>
           <a:ln>
             <a:solidFill>
-              <a:srgbClr val="2563EB"/>
+              <a:srgbClr val="374151"/>
             </a:solidFill>
           </a:ln>
         </p:spPr>
@@ -13108,19 +13909,10 @@
           </a:fontRef>
         </p:style>
         <p:txBody>
-          <a:bodyPr lIns="109728" rIns="109728" rtlCol="0" anchor="ctr"/>
+          <a:bodyPr rtlCol="0" anchor="ctr"/>
           <a:lstStyle/>
           <a:p>
-            <a:pPr algn="ctr">
-              <a:defRPr sz="2800" b="1">
-                <a:solidFill>
-                  <a:srgbClr val="172554"/>
-                </a:solidFill>
-              </a:defRPr>
-            </a:pPr>
-            <a:r>
-              <a:t>Keep moving</a:t>
-            </a:r>
+            <a:pPr algn="ctr"/>
           </a:p>
         </p:txBody>
       </p:sp>
@@ -13132,18 +13924,18 @@
         </p:nvSpPr>
         <p:spPr>
           <a:xfrm>
-            <a:off x="8412480" y="1955800"/>
-            <a:ext cx="2560320" cy="1097280"/>
+            <a:off x="2037080" y="3904742"/>
+            <a:ext cx="822960" cy="411480"/>
           </a:xfrm>
           <a:prstGeom prst="roundRect">
             <a:avLst/>
           </a:prstGeom>
           <a:solidFill>
-            <a:srgbClr val="FFEDD5"/>
+            <a:srgbClr val="2563EB"/>
           </a:solidFill>
           <a:ln>
             <a:solidFill>
-              <a:srgbClr val="F97316"/>
+              <a:srgbClr val="2563EB"/>
             </a:solidFill>
           </a:ln>
         </p:spPr>
@@ -13162,32 +13954,121 @@
           </a:fontRef>
         </p:style>
         <p:txBody>
-          <a:bodyPr lIns="109728" rIns="109728" rtlCol="0" anchor="ctr"/>
+          <a:bodyPr rtlCol="0" anchor="ctr"/>
           <a:lstStyle/>
           <a:p>
             <a:pPr algn="ctr">
-              <a:defRPr sz="2800" b="1">
-                <a:solidFill>
-                  <a:srgbClr val="172554"/>
+              <a:defRPr sz="1100" b="1">
+                <a:solidFill>
+                  <a:srgbClr val="FFFFFF"/>
                 </a:solidFill>
               </a:defRPr>
             </a:pPr>
             <a:r>
-              <a:t>Smooth ride</a:t>
-            </a:r>
-          </a:p>
-        </p:txBody>
-      </p:sp>
-      <p:sp>
-        <p:nvSpPr>
-          <p:cNvPr id="8" name="TextBox 7"/>
+              <a:t>EGO</a:t>
+            </a:r>
+          </a:p>
+        </p:txBody>
+      </p:sp>
+      <p:sp>
+        <p:nvSpPr>
+          <p:cNvPr id="8" name="Rounded Rectangle 7"/>
+          <p:cNvSpPr/>
+          <p:nvPr/>
+        </p:nvSpPr>
+        <p:spPr>
+          <a:xfrm>
+            <a:off x="3545840" y="3904742"/>
+            <a:ext cx="594360" cy="384048"/>
+          </a:xfrm>
+          <a:prstGeom prst="roundRect">
+            <a:avLst/>
+          </a:prstGeom>
+          <a:solidFill>
+            <a:srgbClr val="F97316"/>
+          </a:solidFill>
+          <a:ln>
+            <a:solidFill>
+              <a:srgbClr val="F97316"/>
+            </a:solidFill>
+          </a:ln>
+        </p:spPr>
+        <p:style>
+          <a:lnRef idx="1">
+            <a:schemeClr val="accent1"/>
+          </a:lnRef>
+          <a:fillRef idx="3">
+            <a:schemeClr val="accent1"/>
+          </a:fillRef>
+          <a:effectRef idx="2">
+            <a:schemeClr val="accent1"/>
+          </a:effectRef>
+          <a:fontRef idx="minor">
+            <a:schemeClr val="lt1"/>
+          </a:fontRef>
+        </p:style>
+        <p:txBody>
+          <a:bodyPr rtlCol="0" anchor="ctr"/>
+          <a:lstStyle/>
+          <a:p>
+            <a:pPr algn="ctr">
+              <a:defRPr sz="1100" b="1">
+                <a:solidFill>
+                  <a:srgbClr val="FFFFFF"/>
+                </a:solidFill>
+              </a:defRPr>
+            </a:pPr>
+            <a:r>
+              <a:t>TV</a:t>
+            </a:r>
+          </a:p>
+        </p:txBody>
+      </p:sp>
+      <p:cxnSp>
+        <p:nvCxnSpPr>
+          <p:cNvPr id="9" name="Connector 8"/>
+          <p:cNvCxnSpPr/>
+          <p:nvPr/>
+        </p:nvCxnSpPr>
+        <p:spPr>
+          <a:xfrm>
+            <a:off x="4140200" y="4087622"/>
+            <a:ext cx="731520" cy="0"/>
+          </a:xfrm>
+          <a:prstGeom prst="line">
+            <a:avLst/>
+          </a:prstGeom>
+          <a:ln w="38100">
+            <a:solidFill>
+              <a:srgbClr val="DC2626"/>
+            </a:solidFill>
+          </a:ln>
+        </p:spPr>
+        <p:style>
+          <a:lnRef idx="2">
+            <a:schemeClr val="accent1"/>
+          </a:lnRef>
+          <a:fillRef idx="0">
+            <a:schemeClr val="accent1"/>
+          </a:fillRef>
+          <a:effectRef idx="1">
+            <a:schemeClr val="accent1"/>
+          </a:effectRef>
+          <a:fontRef idx="minor">
+            <a:schemeClr val="tx1"/>
+          </a:fontRef>
+        </p:style>
+      </p:cxnSp>
+      <p:sp>
+        <p:nvSpPr>
+          <p:cNvPr id="10" name="TextBox 9"/>
           <p:cNvSpPr txBox="1"/>
           <p:nvPr/>
         </p:nvSpPr>
         <p:spPr>
           <a:xfrm>
-            <a:off x="422910" y="3318510"/>
-            <a:ext cx="11219180" cy="2999740"/>
+            <a:off x="1625600" y="4791710"/>
+            <a:ext cx="3108960" cy="274320"/>
           </a:xfrm>
           <a:prstGeom prst="rect">
             <a:avLst/>
@@ -13195,162 +14076,368 @@
           <a:noFill/>
         </p:spPr>
         <p:txBody>
-          <a:bodyPr wrap="square">
+          <a:bodyPr wrap="none" anchor="ctr">
             <a:spAutoFit/>
           </a:bodyPr>
           <a:lstStyle/>
           <a:p>
-            <a:pPr marL="0">
-              <a:spcAft>
-                <a:spcPts val="900"/>
-              </a:spcAft>
-              <a:defRPr sz="2200">
-                <a:solidFill>
-                  <a:srgbClr val="111827"/>
+            <a:pPr algn="ctr">
+              <a:defRPr sz="1800" b="1">
+                <a:solidFill>
+                  <a:srgbClr val="DC2626"/>
                 </a:solidFill>
               </a:defRPr>
             </a:pPr>
             <a:r>
-              <a:rPr lang="en-US" altLang="en-US" sz="1800">
-                <a:latin typeface="UCL Sans" pitchFamily="2" charset="77"/>
-              </a:rPr>
-              <a:t>Intersections are important because vehicles interact closely and decisions must be made quickly.</a:t>
-            </a:r>
-            <a:endParaRPr lang="en-US" altLang="en-US" sz="1800">
-              <a:latin typeface="UCL Sans" pitchFamily="2" charset="77"/>
-            </a:endParaRPr>
-          </a:p>
-          <a:p>
-            <a:pPr marL="0">
-              <a:spcAft>
-                <a:spcPts val="900"/>
-              </a:spcAft>
-              <a:defRPr sz="2200">
-                <a:solidFill>
-                  <a:srgbClr val="111827"/>
+              <a:t>Too confident</a:t>
+            </a:r>
+          </a:p>
+        </p:txBody>
+      </p:sp>
+      <p:sp>
+        <p:nvSpPr>
+          <p:cNvPr id="11" name="Rounded Rectangle 10"/>
+          <p:cNvSpPr/>
+          <p:nvPr/>
+        </p:nvSpPr>
+        <p:spPr>
+          <a:xfrm>
+            <a:off x="6654800" y="2962910"/>
+            <a:ext cx="4297680" cy="502920"/>
+          </a:xfrm>
+          <a:prstGeom prst="roundRect">
+            <a:avLst/>
+          </a:prstGeom>
+          <a:solidFill>
+            <a:srgbClr val="DCFCE7"/>
+          </a:solidFill>
+          <a:ln>
+            <a:solidFill>
+              <a:srgbClr val="16A34A"/>
+            </a:solidFill>
+          </a:ln>
+        </p:spPr>
+        <p:style>
+          <a:lnRef idx="1">
+            <a:schemeClr val="accent1"/>
+          </a:lnRef>
+          <a:fillRef idx="3">
+            <a:schemeClr val="accent1"/>
+          </a:fillRef>
+          <a:effectRef idx="2">
+            <a:schemeClr val="accent1"/>
+          </a:effectRef>
+          <a:fontRef idx="minor">
+            <a:schemeClr val="lt1"/>
+          </a:fontRef>
+        </p:style>
+        <p:txBody>
+          <a:bodyPr lIns="109728" rIns="109728" rtlCol="0" anchor="ctr"/>
+          <a:lstStyle/>
+          <a:p>
+            <a:pPr algn="ctr">
+              <a:defRPr sz="1700" b="1">
+                <a:solidFill>
+                  <a:srgbClr val="172554"/>
                 </a:solidFill>
               </a:defRPr>
             </a:pPr>
             <a:r>
-              <a:rPr lang="en-US" altLang="en-US" sz="1800">
-                <a:latin typeface="UCL Sans" pitchFamily="2" charset="77"/>
-              </a:rPr>
-              <a:t>A good autonomous vehicle should satisfy three goals at the same time:</a:t>
-            </a:r>
-            <a:endParaRPr lang="en-US" altLang="en-US" sz="1800">
-              <a:latin typeface="UCL Sans" pitchFamily="2" charset="77"/>
-            </a:endParaRPr>
-          </a:p>
-          <a:p>
-            <a:pPr marL="285750" indent="-285750">
-              <a:spcAft>
-                <a:spcPts val="900"/>
-              </a:spcAft>
-              <a:buFont typeface="Arial" panose="020B0604020202090204" pitchFamily="34" charset="0"/>
-              <a:buChar char="•"/>
-              <a:defRPr sz="2200">
-                <a:solidFill>
-                  <a:srgbClr val="111827"/>
+              <a:t>Several possible futures</a:t>
+            </a:r>
+          </a:p>
+        </p:txBody>
+      </p:sp>
+      <p:sp>
+        <p:nvSpPr>
+          <p:cNvPr id="12" name="Rectangle 11"/>
+          <p:cNvSpPr/>
+          <p:nvPr/>
+        </p:nvSpPr>
+        <p:spPr>
+          <a:xfrm>
+            <a:off x="7340600" y="3785870"/>
+            <a:ext cx="2834640" cy="658368"/>
+          </a:xfrm>
+          <a:prstGeom prst="rect">
+            <a:avLst/>
+          </a:prstGeom>
+          <a:solidFill>
+            <a:srgbClr val="374151"/>
+          </a:solidFill>
+          <a:ln>
+            <a:solidFill>
+              <a:srgbClr val="374151"/>
+            </a:solidFill>
+          </a:ln>
+        </p:spPr>
+        <p:style>
+          <a:lnRef idx="1">
+            <a:schemeClr val="accent1"/>
+          </a:lnRef>
+          <a:fillRef idx="3">
+            <a:schemeClr val="accent1"/>
+          </a:fillRef>
+          <a:effectRef idx="2">
+            <a:schemeClr val="accent1"/>
+          </a:effectRef>
+          <a:fontRef idx="minor">
+            <a:schemeClr val="lt1"/>
+          </a:fontRef>
+        </p:style>
+        <p:txBody>
+          <a:bodyPr rtlCol="0" anchor="ctr"/>
+          <a:lstStyle/>
+          <a:p>
+            <a:pPr algn="ctr"/>
+          </a:p>
+        </p:txBody>
+      </p:sp>
+      <p:sp>
+        <p:nvSpPr>
+          <p:cNvPr id="13" name="Rounded Rectangle 12"/>
+          <p:cNvSpPr/>
+          <p:nvPr/>
+        </p:nvSpPr>
+        <p:spPr>
+          <a:xfrm>
+            <a:off x="7614920" y="3904742"/>
+            <a:ext cx="822960" cy="411480"/>
+          </a:xfrm>
+          <a:prstGeom prst="roundRect">
+            <a:avLst/>
+          </a:prstGeom>
+          <a:solidFill>
+            <a:srgbClr val="2563EB"/>
+          </a:solidFill>
+          <a:ln>
+            <a:solidFill>
+              <a:srgbClr val="2563EB"/>
+            </a:solidFill>
+          </a:ln>
+        </p:spPr>
+        <p:style>
+          <a:lnRef idx="1">
+            <a:schemeClr val="accent1"/>
+          </a:lnRef>
+          <a:fillRef idx="3">
+            <a:schemeClr val="accent1"/>
+          </a:fillRef>
+          <a:effectRef idx="2">
+            <a:schemeClr val="accent1"/>
+          </a:effectRef>
+          <a:fontRef idx="minor">
+            <a:schemeClr val="lt1"/>
+          </a:fontRef>
+        </p:style>
+        <p:txBody>
+          <a:bodyPr rtlCol="0" anchor="ctr"/>
+          <a:lstStyle/>
+          <a:p>
+            <a:pPr algn="ctr">
+              <a:defRPr sz="1100" b="1">
+                <a:solidFill>
+                  <a:srgbClr val="FFFFFF"/>
                 </a:solidFill>
               </a:defRPr>
             </a:pPr>
             <a:r>
-              <a:rPr lang="en-US" altLang="en-US" sz="1800">
-                <a:latin typeface="UCL Sans" pitchFamily="2" charset="77"/>
-              </a:rPr>
-              <a:t>Safety: avoid collision.</a:t>
-            </a:r>
-            <a:endParaRPr lang="en-US" altLang="en-US" sz="1800">
-              <a:latin typeface="UCL Sans" pitchFamily="2" charset="77"/>
-            </a:endParaRPr>
-          </a:p>
-          <a:p>
-            <a:pPr marL="285750" indent="-285750">
-              <a:spcAft>
-                <a:spcPts val="900"/>
-              </a:spcAft>
-              <a:buFont typeface="Arial" panose="020B0604020202090204" pitchFamily="34" charset="0"/>
-              <a:buChar char="•"/>
-              <a:defRPr sz="2200">
-                <a:solidFill>
-                  <a:srgbClr val="111827"/>
+              <a:t>EGO</a:t>
+            </a:r>
+          </a:p>
+        </p:txBody>
+      </p:sp>
+      <p:sp>
+        <p:nvSpPr>
+          <p:cNvPr id="14" name="Rounded Rectangle 13"/>
+          <p:cNvSpPr/>
+          <p:nvPr/>
+        </p:nvSpPr>
+        <p:spPr>
+          <a:xfrm>
+            <a:off x="9123680" y="3904742"/>
+            <a:ext cx="594360" cy="384048"/>
+          </a:xfrm>
+          <a:prstGeom prst="roundRect">
+            <a:avLst/>
+          </a:prstGeom>
+          <a:solidFill>
+            <a:srgbClr val="F97316"/>
+          </a:solidFill>
+          <a:ln>
+            <a:solidFill>
+              <a:srgbClr val="F97316"/>
+            </a:solidFill>
+          </a:ln>
+        </p:spPr>
+        <p:style>
+          <a:lnRef idx="1">
+            <a:schemeClr val="accent1"/>
+          </a:lnRef>
+          <a:fillRef idx="3">
+            <a:schemeClr val="accent1"/>
+          </a:fillRef>
+          <a:effectRef idx="2">
+            <a:schemeClr val="accent1"/>
+          </a:effectRef>
+          <a:fontRef idx="minor">
+            <a:schemeClr val="lt1"/>
+          </a:fontRef>
+        </p:style>
+        <p:txBody>
+          <a:bodyPr rtlCol="0" anchor="ctr"/>
+          <a:lstStyle/>
+          <a:p>
+            <a:pPr algn="ctr">
+              <a:defRPr sz="1100" b="1">
+                <a:solidFill>
+                  <a:srgbClr val="FFFFFF"/>
                 </a:solidFill>
               </a:defRPr>
             </a:pPr>
             <a:r>
-              <a:rPr lang="en-US" altLang="en-US" sz="1800">
-                <a:latin typeface="UCL Sans" pitchFamily="2" charset="77"/>
-              </a:rPr>
-              <a:t>Progress: keep moving instead of stopping unnecessarily.</a:t>
-            </a:r>
-            <a:endParaRPr lang="en-US" altLang="en-US" sz="1800">
-              <a:latin typeface="UCL Sans" pitchFamily="2" charset="77"/>
-            </a:endParaRPr>
-          </a:p>
-          <a:p>
-            <a:pPr marL="285750" indent="-285750">
-              <a:spcAft>
-                <a:spcPts val="900"/>
-              </a:spcAft>
-              <a:buFont typeface="Arial" panose="020B0604020202090204" pitchFamily="34" charset="0"/>
-              <a:buChar char="•"/>
-              <a:defRPr sz="2200">
-                <a:solidFill>
-                  <a:srgbClr val="111827"/>
+              <a:t>TV</a:t>
+            </a:r>
+          </a:p>
+        </p:txBody>
+      </p:sp>
+      <p:cxnSp>
+        <p:nvCxnSpPr>
+          <p:cNvPr id="15" name="Connector 14"/>
+          <p:cNvCxnSpPr/>
+          <p:nvPr/>
+        </p:nvCxnSpPr>
+        <p:spPr>
+          <a:xfrm flipV="1">
+            <a:off x="9718040" y="3557270"/>
+            <a:ext cx="685800" cy="530352"/>
+          </a:xfrm>
+          <a:prstGeom prst="line">
+            <a:avLst/>
+          </a:prstGeom>
+          <a:ln w="38100">
+            <a:solidFill>
+              <a:srgbClr val="16A34A"/>
+            </a:solidFill>
+          </a:ln>
+        </p:spPr>
+        <p:style>
+          <a:lnRef idx="2">
+            <a:schemeClr val="accent1"/>
+          </a:lnRef>
+          <a:fillRef idx="0">
+            <a:schemeClr val="accent1"/>
+          </a:fillRef>
+          <a:effectRef idx="1">
+            <a:schemeClr val="accent1"/>
+          </a:effectRef>
+          <a:fontRef idx="minor">
+            <a:schemeClr val="tx1"/>
+          </a:fontRef>
+        </p:style>
+      </p:cxnSp>
+      <p:cxnSp>
+        <p:nvCxnSpPr>
+          <p:cNvPr id="16" name="Connector 15"/>
+          <p:cNvCxnSpPr/>
+          <p:nvPr/>
+        </p:nvCxnSpPr>
+        <p:spPr>
+          <a:xfrm>
+            <a:off x="9718040" y="4087622"/>
+            <a:ext cx="777240" cy="0"/>
+          </a:xfrm>
+          <a:prstGeom prst="line">
+            <a:avLst/>
+          </a:prstGeom>
+          <a:ln w="38100">
+            <a:solidFill>
+              <a:srgbClr val="F97316"/>
+            </a:solidFill>
+          </a:ln>
+        </p:spPr>
+        <p:style>
+          <a:lnRef idx="2">
+            <a:schemeClr val="accent1"/>
+          </a:lnRef>
+          <a:fillRef idx="0">
+            <a:schemeClr val="accent1"/>
+          </a:fillRef>
+          <a:effectRef idx="1">
+            <a:schemeClr val="accent1"/>
+          </a:effectRef>
+          <a:fontRef idx="minor">
+            <a:schemeClr val="tx1"/>
+          </a:fontRef>
+        </p:style>
+      </p:cxnSp>
+      <p:cxnSp>
+        <p:nvCxnSpPr>
+          <p:cNvPr id="17" name="Connector 16"/>
+          <p:cNvCxnSpPr/>
+          <p:nvPr/>
+        </p:nvCxnSpPr>
+        <p:spPr>
+          <a:xfrm>
+            <a:off x="9718040" y="4087622"/>
+            <a:ext cx="685800" cy="521208"/>
+          </a:xfrm>
+          <a:prstGeom prst="line">
+            <a:avLst/>
+          </a:prstGeom>
+          <a:ln w="38100">
+            <a:solidFill>
+              <a:srgbClr val="DC2626"/>
+            </a:solidFill>
+          </a:ln>
+        </p:spPr>
+        <p:style>
+          <a:lnRef idx="2">
+            <a:schemeClr val="accent1"/>
+          </a:lnRef>
+          <a:fillRef idx="0">
+            <a:schemeClr val="accent1"/>
+          </a:fillRef>
+          <a:effectRef idx="1">
+            <a:schemeClr val="accent1"/>
+          </a:effectRef>
+          <a:fontRef idx="minor">
+            <a:schemeClr val="tx1"/>
+          </a:fontRef>
+        </p:style>
+      </p:cxnSp>
+      <p:sp>
+        <p:nvSpPr>
+          <p:cNvPr id="18" name="TextBox 17"/>
+          <p:cNvSpPr txBox="1"/>
+          <p:nvPr/>
+        </p:nvSpPr>
+        <p:spPr>
+          <a:xfrm>
+            <a:off x="7477760" y="4791710"/>
+            <a:ext cx="3108960" cy="274320"/>
+          </a:xfrm>
+          <a:prstGeom prst="rect">
+            <a:avLst/>
+          </a:prstGeom>
+          <a:noFill/>
+        </p:spPr>
+        <p:txBody>
+          <a:bodyPr wrap="none" anchor="ctr">
+            <a:spAutoFit/>
+          </a:bodyPr>
+          <a:lstStyle/>
+          <a:p>
+            <a:pPr algn="ctr">
+              <a:defRPr sz="1800" b="1">
+                <a:solidFill>
+                  <a:srgbClr val="16A34A"/>
                 </a:solidFill>
               </a:defRPr>
             </a:pPr>
             <a:r>
-              <a:rPr lang="en-US" altLang="en-US" sz="1800">
-                <a:latin typeface="UCL Sans" pitchFamily="2" charset="77"/>
-              </a:rPr>
-              <a:t>Comfort: avoid sudden or rough control actions.</a:t>
-            </a:r>
-            <a:endParaRPr lang="en-US" altLang="en-US" sz="1800">
-              <a:latin typeface="UCL Sans" pitchFamily="2" charset="77"/>
-            </a:endParaRPr>
-          </a:p>
-          <a:p>
-            <a:pPr marL="0">
-              <a:spcAft>
-                <a:spcPts val="900"/>
-              </a:spcAft>
-              <a:defRPr sz="2200">
-                <a:solidFill>
-                  <a:srgbClr val="111827"/>
-                </a:solidFill>
-              </a:defRPr>
-            </a:pPr>
-            <a:endParaRPr lang="en-US" altLang="en-US" sz="1800">
-              <a:latin typeface="UCL Sans" pitchFamily="2" charset="77"/>
-            </a:endParaRPr>
-          </a:p>
-          <a:p>
-            <a:pPr marL="0">
-              <a:spcAft>
-                <a:spcPts val="900"/>
-              </a:spcAft>
-              <a:defRPr sz="2200">
-                <a:solidFill>
-                  <a:srgbClr val="111827"/>
-                </a:solidFill>
-              </a:defRPr>
-            </a:pPr>
-            <a:r>
-              <a:rPr lang="en-US" altLang="en-US" sz="1800">
-                <a:solidFill>
-                  <a:srgbClr val="FF0000"/>
-                </a:solidFill>
-                <a:latin typeface="UCL Sans" pitchFamily="2" charset="77"/>
-              </a:rPr>
-              <a:t>If this problem is solved, autonomous vehicles can handle more complex urban driving situations with better safety and reliability.</a:t>
-            </a:r>
-            <a:endParaRPr lang="en-US" altLang="en-US" sz="1800">
-              <a:solidFill>
-                <a:srgbClr val="FF0000"/>
-              </a:solidFill>
-              <a:latin typeface="UCL Sans" pitchFamily="2" charset="77"/>
-            </a:endParaRPr>
+              <a:t>More careful</a:t>
+            </a:r>
           </a:p>
         </p:txBody>
       </p:sp>
@@ -13395,44 +14482,40 @@
           <a:lstStyle/>
           <a:p>
             <a:r>
-              <a:rPr lang="en-GB" dirty="0">
+              <a:rPr lang="en-GB">
                 <a:latin typeface="UCL Sans SemiBold"/>
               </a:rPr>
-              <a:t>State of the art</a:t>
-            </a:r>
-            <a:endParaRPr lang="en-US" dirty="0"/>
-          </a:p>
-        </p:txBody>
-      </p:sp>
-      <p:sp>
-        <p:nvSpPr>
-          <p:cNvPr id="5" name="TextBox 4"/>
-          <p:cNvSpPr txBox="1"/>
-          <p:nvPr/>
-        </p:nvSpPr>
-        <p:spPr>
-          <a:xfrm>
-            <a:off x="822960" y="1874520"/>
-            <a:ext cx="4638675" cy="2261235"/>
-          </a:xfrm>
-          <a:prstGeom prst="rect">
-            <a:avLst/>
-          </a:prstGeom>
-          <a:noFill/>
-        </p:spPr>
-        <p:txBody>
-          <a:bodyPr wrap="square">
-            <a:spAutoFit/>
-          </a:bodyPr>
+              <a:t>Significance</a:t>
+            </a:r>
+            <a:endParaRPr lang="en-US"/>
+          </a:p>
+        </p:txBody>
+      </p:sp>
+      <p:sp>
+        <p:nvSpPr>
+          <p:cNvPr id="3" name="Text Placeholder 2"/>
+          <p:cNvSpPr>
+            <a:spLocks noGrp="1"/>
+          </p:cNvSpPr>
+          <p:nvPr>
+            <p:ph type="body" sz="quarter" idx="11"/>
+          </p:nvPr>
+        </p:nvSpPr>
+        <p:spPr>
+          <a:xfrm>
+            <a:off x="440690" y="1155065"/>
+            <a:ext cx="11257915" cy="3528060"/>
+          </a:xfrm>
+        </p:spPr>
+        <p:txBody>
+          <a:bodyPr/>
           <a:lstStyle/>
           <a:p>
-            <a:pPr marL="0" indent="0">
+            <a:pPr marL="0">
               <a:spcAft>
-                <a:spcPts val="600"/>
+                <a:spcPts val="900"/>
               </a:spcAft>
-              <a:buFont typeface="Arial" panose="020B0604020202090204" pitchFamily="34" charset="0"/>
-              <a:buNone/>
-              <a:defRPr sz="1700">
+              <a:defRPr sz="2200">
                 <a:solidFill>
                   <a:srgbClr val="111827"/>
                 </a:solidFill>
@@ -13440,22 +14523,20 @@
             </a:pPr>
             <a:r>
               <a:rPr lang="en-US" altLang="en-US" sz="1800">
-                <a:latin typeface="UCL Sans" pitchFamily="2" charset="77"/>
+                <a:sym typeface="+mn-ea"/>
               </a:rPr>
-              <a:t>Existing autonomous driving methods have made strong progress in:</a:t>
+              <a:t>Intersections are high-risk scenarios because vehicles interact closely and decisions must be made quickly.</a:t>
             </a:r>
             <a:endParaRPr lang="en-US" altLang="en-US" sz="1800">
               <a:latin typeface="UCL Sans" pitchFamily="2" charset="77"/>
             </a:endParaRPr>
           </a:p>
           <a:p>
-            <a:pPr marL="285750" indent="-285750">
+            <a:pPr marL="0">
               <a:spcAft>
-                <a:spcPts val="600"/>
+                <a:spcPts val="900"/>
               </a:spcAft>
-              <a:buFont typeface="Arial" panose="020B0604020202090204" pitchFamily="34" charset="0"/>
-              <a:buChar char="•"/>
-              <a:defRPr sz="1700">
+              <a:defRPr sz="2200">
                 <a:solidFill>
                   <a:srgbClr val="111827"/>
                 </a:solidFill>
@@ -13463,149 +14544,46 @@
             </a:pPr>
             <a:r>
               <a:rPr lang="en-US" altLang="en-US" sz="1800">
-                <a:latin typeface="UCL Sans" pitchFamily="2" charset="77"/>
+                <a:sym typeface="+mn-ea"/>
               </a:rPr>
-              <a:t>Route following and obstacle avoidance.</a:t>
+              <a:t>A good autonomous driving planner should satisfy three goals:</a:t>
             </a:r>
             <a:endParaRPr lang="en-US" altLang="en-US" sz="1800">
               <a:latin typeface="UCL Sans" pitchFamily="2" charset="77"/>
             </a:endParaRPr>
           </a:p>
           <a:p>
-            <a:pPr marL="285750" indent="-285750">
-              <a:spcAft>
-                <a:spcPts val="600"/>
-              </a:spcAft>
-              <a:buFont typeface="Arial" panose="020B0604020202090204" pitchFamily="34" charset="0"/>
-              <a:buChar char="•"/>
-              <a:defRPr sz="1700">
-                <a:solidFill>
-                  <a:srgbClr val="111827"/>
+            <a:pPr>
+              <a:defRPr sz="1500">
+                <a:solidFill>
+                  <a:srgbClr val="4B5563"/>
                 </a:solidFill>
               </a:defRPr>
             </a:pPr>
-            <a:r>
-              <a:rPr lang="en-US" altLang="en-US" sz="1800">
-                <a:latin typeface="UCL Sans" pitchFamily="2" charset="77"/>
-              </a:rPr>
-              <a:t>Predicting nearby vehicles.</a:t>
-            </a:r>
-            <a:endParaRPr lang="en-US" altLang="en-US" sz="1800">
-              <a:latin typeface="UCL Sans" pitchFamily="2" charset="77"/>
-            </a:endParaRPr>
-          </a:p>
-          <a:p>
-            <a:pPr marL="285750" indent="-285750">
-              <a:spcAft>
-                <a:spcPts val="600"/>
-              </a:spcAft>
-              <a:buFont typeface="Arial" panose="020B0604020202090204" pitchFamily="34" charset="0"/>
-              <a:buChar char="•"/>
-              <a:defRPr sz="1700">
-                <a:solidFill>
-                  <a:srgbClr val="111827"/>
-                </a:solidFill>
-              </a:defRPr>
-            </a:pPr>
-            <a:r>
-              <a:rPr lang="en-US" altLang="en-US" sz="1800">
-                <a:latin typeface="UCL Sans" pitchFamily="2" charset="77"/>
-              </a:rPr>
-              <a:t>Producing multiple possible future trajectories.</a:t>
-            </a:r>
-            <a:endParaRPr lang="en-US" altLang="en-US" sz="1800">
-              <a:latin typeface="UCL Sans" pitchFamily="2" charset="77"/>
-            </a:endParaRPr>
-          </a:p>
-        </p:txBody>
-      </p:sp>
-      <p:sp>
-        <p:nvSpPr>
-          <p:cNvPr id="7" name="TextBox 6"/>
-          <p:cNvSpPr txBox="1"/>
-          <p:nvPr/>
-        </p:nvSpPr>
-        <p:spPr>
-          <a:xfrm>
-            <a:off x="6492240" y="1874519"/>
-            <a:ext cx="4297680" cy="1276350"/>
-          </a:xfrm>
-          <a:prstGeom prst="rect">
-            <a:avLst/>
-          </a:prstGeom>
-          <a:noFill/>
-        </p:spPr>
-        <p:txBody>
-          <a:bodyPr wrap="square">
-            <a:spAutoFit/>
-          </a:bodyPr>
-          <a:lstStyle/>
-          <a:p>
-            <a:pPr>
-              <a:spcAft>
-                <a:spcPts val="600"/>
-              </a:spcAft>
-              <a:defRPr sz="1700">
-                <a:solidFill>
-                  <a:srgbClr val="111827"/>
-                </a:solidFill>
-              </a:defRPr>
-            </a:pPr>
-            <a:r>
-              <a:rPr lang="en-US" altLang="en-US" sz="1800">
-                <a:latin typeface="UCL Sans" pitchFamily="2" charset="77"/>
-              </a:rPr>
-              <a:t>Remaining gap:</a:t>
-            </a:r>
-            <a:endParaRPr lang="en-US" altLang="en-US" sz="1800">
-              <a:latin typeface="UCL Sans" pitchFamily="2" charset="77"/>
-            </a:endParaRPr>
-          </a:p>
-          <a:p>
-            <a:pPr marL="285750" indent="-285750">
-              <a:spcAft>
-                <a:spcPts val="600"/>
-              </a:spcAft>
-              <a:buFont typeface="Arial" panose="020B0604020202090204" pitchFamily="34" charset="0"/>
-              <a:buChar char="•"/>
-              <a:defRPr sz="1700">
-                <a:solidFill>
-                  <a:srgbClr val="111827"/>
-                </a:solidFill>
-              </a:defRPr>
-            </a:pPr>
-            <a:r>
-              <a:rPr lang="en-US" altLang="en-US" sz="1800">
-                <a:latin typeface="UCL Sans" pitchFamily="2" charset="77"/>
-              </a:rPr>
-              <a:t>Prediction gives possible futures, but the controller still needs to use them safely.</a:t>
-            </a:r>
-            <a:endParaRPr lang="en-US" altLang="en-US" sz="1800">
-              <a:latin typeface="UCL Sans" pitchFamily="2" charset="77"/>
-            </a:endParaRPr>
-          </a:p>
-        </p:txBody>
-      </p:sp>
-      <p:sp>
-        <p:nvSpPr>
-          <p:cNvPr id="8" name="Rounded Rectangle 7"/>
+            <a:endParaRPr lang="en-US" altLang="en-US" sz="1800" dirty="0"/>
+          </a:p>
+        </p:txBody>
+      </p:sp>
+      <p:sp>
+        <p:nvSpPr>
+          <p:cNvPr id="4" name="Rounded Rectangle 3"/>
           <p:cNvSpPr/>
           <p:nvPr/>
         </p:nvSpPr>
         <p:spPr>
           <a:xfrm>
-            <a:off x="842645" y="4307840"/>
-            <a:ext cx="3317875" cy="565150"/>
+            <a:off x="1097280" y="2574290"/>
+            <a:ext cx="2560320" cy="1097280"/>
           </a:xfrm>
           <a:prstGeom prst="roundRect">
             <a:avLst/>
           </a:prstGeom>
           <a:solidFill>
-            <a:srgbClr val="F3F4F6"/>
+            <a:srgbClr val="DCFCE7"/>
           </a:solidFill>
           <a:ln>
             <a:solidFill>
-              <a:srgbClr val="D1D5DB"/>
+              <a:srgbClr val="16A34A"/>
             </a:solidFill>
           </a:ln>
         </p:spPr>
@@ -13624,48 +14602,47 @@
           </a:fontRef>
         </p:style>
         <p:txBody>
-          <a:bodyPr wrap="square" lIns="164592" tIns="91440" rIns="164592" bIns="73152" rtlCol="0" anchor="ctr"/>
+          <a:bodyPr lIns="109728" rIns="109728" rtlCol="0" anchor="ctr"/>
           <a:lstStyle/>
           <a:p>
-            <a:pPr algn="l">
-              <a:defRPr sz="1500">
-                <a:solidFill>
-                  <a:srgbClr val="111827"/>
+            <a:pPr algn="ctr">
+              <a:defRPr sz="2800" b="1">
+                <a:solidFill>
+                  <a:srgbClr val="172554"/>
                 </a:solidFill>
               </a:defRPr>
             </a:pPr>
             <a:r>
-              <a:rPr lang="en-US" altLang="en-US" sz="1800">
-                <a:latin typeface="UCL Sans" pitchFamily="2" charset="77"/>
-              </a:rPr>
-              <a:t>What I want to introduce</a:t>
-            </a:r>
-            <a:endParaRPr lang="en-US" altLang="en-US" sz="1800">
-              <a:latin typeface="UCL Sans" pitchFamily="2" charset="77"/>
-            </a:endParaRPr>
-          </a:p>
-        </p:txBody>
-      </p:sp>
-      <p:sp>
-        <p:nvSpPr>
-          <p:cNvPr id="4" name="Rounded Rectangle 3"/>
+              <a:t>Safe</a:t>
+            </a:r>
+            <a:r>
+              <a:rPr lang="en-US"/>
+              <a:t>ty</a:t>
+            </a:r>
+            <a:endParaRPr lang="en-US"/>
+          </a:p>
+        </p:txBody>
+      </p:sp>
+      <p:sp>
+        <p:nvSpPr>
+          <p:cNvPr id="9" name="Rounded Rectangle 8"/>
           <p:cNvSpPr/>
           <p:nvPr/>
         </p:nvSpPr>
         <p:spPr>
           <a:xfrm>
-            <a:off x="731520" y="1234440"/>
-            <a:ext cx="3840480" cy="502920"/>
+            <a:off x="4754880" y="2574290"/>
+            <a:ext cx="2560320" cy="1097280"/>
           </a:xfrm>
           <a:prstGeom prst="roundRect">
             <a:avLst/>
           </a:prstGeom>
           <a:solidFill>
-            <a:srgbClr val="FFEDD5"/>
+            <a:srgbClr val="DBEAFE"/>
           </a:solidFill>
           <a:ln>
             <a:solidFill>
-              <a:srgbClr val="F97316"/>
+              <a:srgbClr val="2563EB"/>
             </a:solidFill>
           </a:ln>
         </p:spPr>
@@ -13684,42 +14661,44 @@
           </a:fontRef>
         </p:style>
         <p:txBody>
-          <a:bodyPr wrap="square" rtlCol="0" anchor="ctr"/>
+          <a:bodyPr lIns="109728" rIns="109728" rtlCol="0" anchor="ctr"/>
           <a:lstStyle/>
           <a:p>
             <a:pPr algn="ctr">
-              <a:defRPr sz="1600" b="1">
+              <a:defRPr sz="2800" b="1">
                 <a:solidFill>
                   <a:srgbClr val="172554"/>
                 </a:solidFill>
               </a:defRPr>
             </a:pPr>
             <a:r>
-              <a:t>What existing methods often do</a:t>
-            </a:r>
-          </a:p>
-        </p:txBody>
-      </p:sp>
-      <p:sp>
-        <p:nvSpPr>
-          <p:cNvPr id="6" name="Rounded Rectangle 5"/>
+              <a:rPr lang="en-US" altLang="en-US"/>
+              <a:t>Progress</a:t>
+            </a:r>
+            <a:endParaRPr lang="en-US" altLang="en-US"/>
+          </a:p>
+        </p:txBody>
+      </p:sp>
+      <p:sp>
+        <p:nvSpPr>
+          <p:cNvPr id="10" name="Rounded Rectangle 9"/>
           <p:cNvSpPr/>
           <p:nvPr/>
         </p:nvSpPr>
         <p:spPr>
           <a:xfrm>
-            <a:off x="6400800" y="1234440"/>
-            <a:ext cx="3840480" cy="502920"/>
+            <a:off x="8412480" y="2574290"/>
+            <a:ext cx="2560320" cy="1097280"/>
           </a:xfrm>
           <a:prstGeom prst="roundRect">
             <a:avLst/>
           </a:prstGeom>
           <a:solidFill>
-            <a:srgbClr val="DCFCE7"/>
+            <a:srgbClr val="FFEDD5"/>
           </a:solidFill>
           <a:ln>
             <a:solidFill>
-              <a:srgbClr val="16A34A"/>
+              <a:srgbClr val="F97316"/>
             </a:solidFill>
           </a:ln>
         </p:spPr>
@@ -13738,11 +14717,11 @@
           </a:fontRef>
         </p:style>
         <p:txBody>
-          <a:bodyPr wrap="square" rtlCol="0" anchor="ctr"/>
+          <a:bodyPr lIns="109728" rIns="109728" rtlCol="0" anchor="ctr"/>
           <a:lstStyle/>
           <a:p>
             <a:pPr algn="ctr">
-              <a:defRPr sz="1600" b="1">
+              <a:defRPr sz="2800" b="1">
                 <a:solidFill>
                   <a:srgbClr val="172554"/>
                 </a:solidFill>
@@ -13750,11 +14729,7 @@
             </a:pPr>
             <a:r>
               <a:rPr lang="en-US"/>
-              <a:t>Remaining </a:t>
-            </a:r>
-            <a:r>
-              <a:rPr lang="en-US"/>
-              <a:t>Gap</a:t>
+              <a:t>Comfort</a:t>
             </a:r>
             <a:endParaRPr lang="en-US"/>
           </a:p>
@@ -13762,14 +14737,14 @@
       </p:sp>
       <p:sp>
         <p:nvSpPr>
-          <p:cNvPr id="3" name="Text Box 2"/>
+          <p:cNvPr id="11" name="TextBox 7"/>
           <p:cNvSpPr txBox="1"/>
           <p:nvPr/>
         </p:nvSpPr>
         <p:spPr>
           <a:xfrm>
-            <a:off x="822325" y="5071110"/>
-            <a:ext cx="10763885" cy="1875790"/>
+            <a:off x="422910" y="3937000"/>
+            <a:ext cx="11219180" cy="2214880"/>
           </a:xfrm>
           <a:prstGeom prst="rect">
             <a:avLst/>
@@ -13777,110 +14752,137 @@
           <a:noFill/>
         </p:spPr>
         <p:txBody>
-          <a:bodyPr wrap="square" rtlCol="0" anchor="t">
-            <a:noAutofit/>
+          <a:bodyPr wrap="square">
+            <a:spAutoFit/>
           </a:bodyPr>
+          <a:lstStyle/>
           <a:p>
             <a:pPr marL="285750" indent="-285750">
+              <a:spcAft>
+                <a:spcPts val="900"/>
+              </a:spcAft>
               <a:buFont typeface="Arial" panose="020B0604020202090204" pitchFamily="34" charset="0"/>
               <a:buChar char="•"/>
+              <a:defRPr sz="2200">
+                <a:solidFill>
+                  <a:srgbClr val="111827"/>
+                </a:solidFill>
+              </a:defRPr>
             </a:pPr>
             <a:r>
-              <a:rPr lang="en-US" altLang="en-US" sz="1800">
-                <a:solidFill>
-                  <a:srgbClr val="111827"/>
-                </a:solidFill>
+              <a:rPr lang="en-US" altLang="en-US" sz="1800" b="1">
                 <a:latin typeface="UCL Sans" pitchFamily="2" charset="77"/>
               </a:rPr>
-              <a:t>Use several predicted futures.</a:t>
+              <a:t>Safety</a:t>
+            </a:r>
+            <a:r>
+              <a:rPr lang="en-US" altLang="en-US" sz="1800">
+                <a:latin typeface="UCL Sans" pitchFamily="2" charset="77"/>
+              </a:rPr>
+              <a:t>: avoid collision.</a:t>
+            </a:r>
+            <a:endParaRPr lang="en-US" altLang="en-US" sz="1800">
+              <a:latin typeface="UCL Sans" pitchFamily="2" charset="77"/>
+            </a:endParaRPr>
+          </a:p>
+          <a:p>
+            <a:pPr marL="285750" indent="-285750">
+              <a:spcAft>
+                <a:spcPts val="900"/>
+              </a:spcAft>
+              <a:buFont typeface="Arial" panose="020B0604020202090204" pitchFamily="34" charset="0"/>
+              <a:buChar char="•"/>
+              <a:defRPr sz="2200">
+                <a:solidFill>
+                  <a:srgbClr val="111827"/>
+                </a:solidFill>
+              </a:defRPr>
+            </a:pPr>
+            <a:r>
+              <a:rPr lang="en-US" altLang="en-US" sz="1800" b="1">
+                <a:latin typeface="UCL Sans" pitchFamily="2" charset="77"/>
+              </a:rPr>
+              <a:t>Progress</a:t>
+            </a:r>
+            <a:r>
+              <a:rPr lang="en-US" altLang="en-US" sz="1800">
+                <a:latin typeface="UCL Sans" pitchFamily="2" charset="77"/>
+              </a:rPr>
+              <a:t>: avoid unnecessary stopping or hesitation.</a:t>
+            </a:r>
+            <a:endParaRPr lang="en-US" altLang="en-US" sz="1800">
+              <a:latin typeface="UCL Sans" pitchFamily="2" charset="77"/>
+            </a:endParaRPr>
+          </a:p>
+          <a:p>
+            <a:pPr marL="285750" indent="-285750">
+              <a:spcAft>
+                <a:spcPts val="900"/>
+              </a:spcAft>
+              <a:buFont typeface="Arial" panose="020B0604020202090204" pitchFamily="34" charset="0"/>
+              <a:buChar char="•"/>
+              <a:defRPr sz="2200">
+                <a:solidFill>
+                  <a:srgbClr val="111827"/>
+                </a:solidFill>
+              </a:defRPr>
+            </a:pPr>
+            <a:r>
+              <a:rPr lang="en-US" altLang="en-US" sz="1800" b="1">
+                <a:latin typeface="UCL Sans" pitchFamily="2" charset="77"/>
+              </a:rPr>
+              <a:t>Comfort</a:t>
+            </a:r>
+            <a:r>
+              <a:rPr lang="en-US" altLang="en-US" sz="1800">
+                <a:latin typeface="UCL Sans" pitchFamily="2" charset="77"/>
+              </a:rPr>
+              <a:t>: avoid sudden acceleration, braking, or steering.</a:t>
+            </a:r>
+            <a:endParaRPr lang="en-US" altLang="en-US" sz="1800">
+              <a:latin typeface="UCL Sans" pitchFamily="2" charset="77"/>
+            </a:endParaRPr>
+          </a:p>
+          <a:p>
+            <a:pPr marL="0" indent="0">
+              <a:spcAft>
+                <a:spcPts val="900"/>
+              </a:spcAft>
+              <a:buFont typeface="Arial" panose="020B0604020202090204" pitchFamily="34" charset="0"/>
+              <a:buNone/>
+              <a:defRPr sz="2200">
+                <a:solidFill>
+                  <a:srgbClr val="111827"/>
+                </a:solidFill>
+              </a:defRPr>
+            </a:pPr>
+            <a:endParaRPr lang="en-US" altLang="en-US" sz="1800">
+              <a:latin typeface="UCL Sans" pitchFamily="2" charset="77"/>
+            </a:endParaRPr>
+          </a:p>
+          <a:p>
+            <a:pPr marL="0">
+              <a:spcAft>
+                <a:spcPts val="900"/>
+              </a:spcAft>
+              <a:defRPr sz="2200">
+                <a:solidFill>
+                  <a:srgbClr val="111827"/>
+                </a:solidFill>
+              </a:defRPr>
+            </a:pPr>
+            <a:r>
+              <a:rPr lang="en-US" altLang="en-US" sz="1800">
+                <a:solidFill>
+                  <a:srgbClr val="FF0000"/>
+                </a:solidFill>
+                <a:latin typeface="UCL Sans" pitchFamily="2" charset="77"/>
+              </a:rPr>
+              <a:t>If this problem is solved, autonomous vehicles can handle more complex urban driving situations with better safety and reliability.</a:t>
             </a:r>
             <a:endParaRPr lang="en-US" altLang="en-US" sz="1800">
               <a:solidFill>
-                <a:srgbClr val="111827"/>
-              </a:solidFill>
-              <a:latin typeface="UCL Sans" pitchFamily="2" charset="77"/>
-            </a:endParaRPr>
-          </a:p>
-          <a:p>
-            <a:pPr marL="285750" indent="-285750">
-              <a:buFont typeface="Arial" panose="020B0604020202090204" pitchFamily="34" charset="0"/>
-              <a:buChar char="•"/>
-            </a:pPr>
-            <a:r>
-              <a:rPr lang="en-US" altLang="en-US" sz="1800">
-                <a:solidFill>
-                  <a:srgbClr val="111827"/>
-                </a:solidFill>
-                <a:latin typeface="UCL Sans" pitchFamily="2" charset="77"/>
-              </a:rPr>
-              <a:t>Give future behaviours a safety budget.</a:t>
-            </a:r>
-            <a:endParaRPr lang="en-US" altLang="en-US" sz="1800">
-              <a:solidFill>
-                <a:srgbClr val="111827"/>
-              </a:solidFill>
-              <a:latin typeface="UCL Sans" pitchFamily="2" charset="77"/>
-            </a:endParaRPr>
-          </a:p>
-          <a:p>
-            <a:pPr marL="285750" indent="-285750">
-              <a:buFont typeface="Arial" panose="020B0604020202090204" pitchFamily="34" charset="0"/>
-              <a:buChar char="•"/>
-            </a:pPr>
-            <a:r>
-              <a:rPr lang="en-US" altLang="en-US" sz="1800">
-                <a:solidFill>
-                  <a:srgbClr val="111827"/>
-                </a:solidFill>
-                <a:latin typeface="UCL Sans" pitchFamily="2" charset="77"/>
-              </a:rPr>
-              <a:t>Re-plan after every new observation.</a:t>
-            </a:r>
-            <a:endParaRPr lang="en-US" altLang="en-US" sz="1800">
-              <a:solidFill>
-                <a:srgbClr val="111827"/>
-              </a:solidFill>
-              <a:latin typeface="UCL Sans" pitchFamily="2" charset="77"/>
-            </a:endParaRPr>
-          </a:p>
-          <a:p>
-            <a:pPr marL="285750" indent="-285750">
-              <a:buFont typeface="Arial" panose="020B0604020202090204" pitchFamily="34" charset="0"/>
-              <a:buChar char="•"/>
-            </a:pPr>
-            <a:r>
-              <a:rPr lang="en-US" altLang="en-US" sz="1800">
-                <a:solidFill>
-                  <a:srgbClr val="111827"/>
-                </a:solidFill>
-                <a:latin typeface="UCL Sans" pitchFamily="2" charset="77"/>
-              </a:rPr>
-              <a:t>Choose actions that balance safety and progress.</a:t>
-            </a:r>
-            <a:endParaRPr lang="en-US" altLang="en-US" sz="1800">
-              <a:solidFill>
-                <a:srgbClr val="111827"/>
-              </a:solidFill>
-              <a:latin typeface="UCL Sans" pitchFamily="2" charset="77"/>
-            </a:endParaRPr>
-          </a:p>
-          <a:p>
-            <a:pPr marL="285750" indent="-285750">
-              <a:buFont typeface="Arial" panose="020B0604020202090204" pitchFamily="34" charset="0"/>
-              <a:buChar char="•"/>
-            </a:pPr>
-            <a:r>
-              <a:rPr lang="en-US" altLang="en-US" sz="1800">
-                <a:solidFill>
-                  <a:srgbClr val="111827"/>
-                </a:solidFill>
-                <a:latin typeface="UCL Sans" pitchFamily="2" charset="77"/>
-              </a:rPr>
-              <a:t>My project focuses on the missing link between prediction and control: how to turn uncertain future predictions into safe driving actions.</a:t>
-            </a:r>
-            <a:endParaRPr lang="en-US" altLang="en-US" sz="1800">
-              <a:solidFill>
-                <a:srgbClr val="111827"/>
+                <a:srgbClr val="FF0000"/>
               </a:solidFill>
               <a:latin typeface="UCL Sans" pitchFamily="2" charset="77"/>
             </a:endParaRPr>
@@ -13928,81 +14930,25 @@
           <a:lstStyle/>
           <a:p>
             <a:r>
-              <a:rPr lang="en-GB">
+              <a:rPr lang="en-GB" dirty="0">
                 <a:latin typeface="UCL Sans SemiBold"/>
               </a:rPr>
-              <a:t>Hypothesis</a:t>
-            </a:r>
-            <a:endParaRPr lang="en-US"/>
-          </a:p>
-        </p:txBody>
-      </p:sp>
-      <p:sp>
-        <p:nvSpPr>
-          <p:cNvPr id="4" name="Rounded Rectangle 3"/>
-          <p:cNvSpPr/>
-          <p:nvPr/>
-        </p:nvSpPr>
-        <p:spPr>
-          <a:xfrm>
-            <a:off x="568960" y="1270000"/>
-            <a:ext cx="5702935" cy="548640"/>
-          </a:xfrm>
-          <a:prstGeom prst="roundRect">
-            <a:avLst/>
-          </a:prstGeom>
-          <a:solidFill>
-            <a:srgbClr val="DBEAFE"/>
-          </a:solidFill>
-          <a:ln>
-            <a:solidFill>
-              <a:srgbClr val="2563EB"/>
-            </a:solidFill>
-          </a:ln>
-        </p:spPr>
-        <p:style>
-          <a:lnRef idx="1">
-            <a:schemeClr val="accent1"/>
-          </a:lnRef>
-          <a:fillRef idx="3">
-            <a:schemeClr val="accent1"/>
-          </a:fillRef>
-          <a:effectRef idx="2">
-            <a:schemeClr val="accent1"/>
-          </a:effectRef>
-          <a:fontRef idx="minor">
-            <a:schemeClr val="lt1"/>
-          </a:fontRef>
-        </p:style>
-        <p:txBody>
-          <a:bodyPr wrap="square" rtlCol="0" anchor="ctr"/>
-          <a:lstStyle/>
-          <a:p>
-            <a:pPr algn="ctr">
-              <a:defRPr sz="1800" b="1">
-                <a:solidFill>
-                  <a:srgbClr val="172554"/>
-                </a:solidFill>
-              </a:defRPr>
-            </a:pPr>
-            <a:r>
-              <a:rPr lang="en-US" altLang="en-US"/>
-              <a:t>Planning With Several Futures Should Be Safer</a:t>
-            </a:r>
-            <a:endParaRPr lang="en-US" altLang="en-US"/>
-          </a:p>
-        </p:txBody>
-      </p:sp>
-      <p:sp>
-        <p:nvSpPr>
-          <p:cNvPr id="5" name="TextBox 4"/>
+              <a:t>State of the Art</a:t>
+            </a:r>
+            <a:endParaRPr lang="en-US" dirty="0"/>
+          </a:p>
+        </p:txBody>
+      </p:sp>
+      <p:sp>
+        <p:nvSpPr>
+          <p:cNvPr id="3" name="Text Box 2"/>
           <p:cNvSpPr txBox="1"/>
           <p:nvPr/>
         </p:nvSpPr>
         <p:spPr>
           <a:xfrm>
-            <a:off x="568960" y="2128520"/>
-            <a:ext cx="10175240" cy="922020"/>
+            <a:off x="-381000" y="6500495"/>
+            <a:ext cx="10357485" cy="306705"/>
           </a:xfrm>
           <a:prstGeom prst="rect">
             <a:avLst/>
@@ -14010,12 +14956,13 @@
           <a:noFill/>
         </p:spPr>
         <p:txBody>
-          <a:bodyPr wrap="square" lIns="73152" rIns="73152">
+          <a:bodyPr wrap="square" rtlCol="0" anchor="t">
             <a:spAutoFit/>
           </a:bodyPr>
-          <a:lstStyle/>
-          <a:p>
-            <a:pPr algn="l">
+          <a:p>
+            <a:pPr lvl="1" indent="0" algn="l">
+              <a:buFont typeface="Arial" panose="020B0604020202090204" pitchFamily="34" charset="0"/>
+              <a:buNone/>
               <a:defRPr sz="2300" b="1">
                 <a:solidFill>
                   <a:srgbClr val="172554"/>
@@ -14023,33 +14970,35 @@
               </a:defRPr>
             </a:pPr>
             <a:r>
-              <a:rPr lang="en-US" altLang="en-US" sz="1800" b="0">
+              <a:rPr lang="en-US" altLang="en-US" sz="1400">
                 <a:solidFill>
                   <a:srgbClr val="111827"/>
                 </a:solidFill>
                 <a:latin typeface="UCL Sans" pitchFamily="2" charset="77"/>
+                <a:sym typeface="+mn-ea"/>
               </a:rPr>
-              <a:t>If the self-driving car considers several possible futures of the target vehicle, and if it uses risk-aware constraints when planning, then it should cross the intersection more safely than a weaker planner.</a:t>
-            </a:r>
-            <a:endParaRPr lang="en-US" altLang="en-US" sz="1800" b="0">
+              <a:t>SMPC: Stochastic Model Predictive Control; optimises actions while limiting collision risk under uncertainty.</a:t>
+            </a:r>
+            <a:endParaRPr lang="en-US" altLang="en-US" sz="1400">
               <a:solidFill>
                 <a:srgbClr val="111827"/>
               </a:solidFill>
               <a:latin typeface="UCL Sans" pitchFamily="2" charset="77"/>
+              <a:sym typeface="+mn-ea"/>
             </a:endParaRPr>
           </a:p>
         </p:txBody>
       </p:sp>
       <p:sp>
         <p:nvSpPr>
-          <p:cNvPr id="7" name="TextBox 6"/>
+          <p:cNvPr id="4" name="TextBox 4"/>
           <p:cNvSpPr txBox="1"/>
           <p:nvPr/>
         </p:nvSpPr>
         <p:spPr>
           <a:xfrm>
-            <a:off x="540385" y="3622040"/>
-            <a:ext cx="9899015" cy="645160"/>
+            <a:off x="568960" y="1327785"/>
+            <a:ext cx="11155045" cy="4765040"/>
           </a:xfrm>
           <a:prstGeom prst="rect">
             <a:avLst/>
@@ -14058,9 +15007,87 @@
         </p:spPr>
         <p:txBody>
           <a:bodyPr wrap="square">
-            <a:spAutoFit/>
+            <a:noAutofit/>
           </a:bodyPr>
           <a:lstStyle/>
+          <a:p>
+            <a:pPr marL="0" indent="0">
+              <a:spcAft>
+                <a:spcPts val="600"/>
+              </a:spcAft>
+              <a:buFont typeface="Arial" panose="020B0604020202090204" pitchFamily="34" charset="0"/>
+              <a:buNone/>
+              <a:defRPr sz="1700">
+                <a:solidFill>
+                  <a:srgbClr val="111827"/>
+                </a:solidFill>
+              </a:defRPr>
+            </a:pPr>
+            <a:r>
+              <a:rPr lang="en-US" altLang="en-US" sz="1800" b="1">
+                <a:latin typeface="UCL Sans" pitchFamily="2" charset="77"/>
+              </a:rPr>
+              <a:t>Current research: </a:t>
+            </a:r>
+            <a:endParaRPr lang="en-US" altLang="en-US" sz="1800">
+              <a:latin typeface="UCL Sans" pitchFamily="2" charset="77"/>
+            </a:endParaRPr>
+          </a:p>
+          <a:p>
+            <a:pPr marL="742950" lvl="1" indent="-285750">
+              <a:spcAft>
+                <a:spcPts val="600"/>
+              </a:spcAft>
+              <a:buFont typeface="Arial" panose="020B0604020202090204" pitchFamily="34" charset="0"/>
+              <a:buChar char="•"/>
+              <a:defRPr sz="1700">
+                <a:solidFill>
+                  <a:srgbClr val="111827"/>
+                </a:solidFill>
+              </a:defRPr>
+            </a:pPr>
+            <a:r>
+              <a:rPr lang="en-US" altLang="en-US" sz="1800">
+                <a:solidFill>
+                  <a:srgbClr val="FF0000"/>
+                </a:solidFill>
+                <a:latin typeface="UCL Sans" pitchFamily="2" charset="77"/>
+              </a:rPr>
+              <a:t>MultiPath </a:t>
+            </a:r>
+            <a:r>
+              <a:rPr lang="en-US" altLang="en-US" sz="1800">
+                <a:latin typeface="UCL Sans" pitchFamily="2" charset="77"/>
+              </a:rPr>
+              <a:t>predicts several likely paths and the uncertainty of each path.</a:t>
+            </a:r>
+            <a:endParaRPr lang="en-US" altLang="en-US" sz="1800">
+              <a:latin typeface="UCL Sans" pitchFamily="2" charset="77"/>
+            </a:endParaRPr>
+          </a:p>
+          <a:p>
+            <a:pPr marL="742950" lvl="1" indent="-285750">
+              <a:spcAft>
+                <a:spcPts val="600"/>
+              </a:spcAft>
+              <a:buFont typeface="Arial" panose="020B0604020202090204" pitchFamily="34" charset="0"/>
+              <a:buChar char="•"/>
+              <a:defRPr sz="1700">
+                <a:solidFill>
+                  <a:srgbClr val="111827"/>
+                </a:solidFill>
+              </a:defRPr>
+            </a:pPr>
+            <a:r>
+              <a:rPr lang="en-US" altLang="en-US" sz="1800">
+                <a:latin typeface="UCL Sans" pitchFamily="2" charset="77"/>
+              </a:rPr>
+              <a:t>Good for representing uncertainty, but it does not choose the ego vehicle's action.</a:t>
+            </a:r>
+            <a:endParaRPr lang="en-US" altLang="en-US" sz="1800">
+              <a:latin typeface="UCL Sans" pitchFamily="2" charset="77"/>
+            </a:endParaRPr>
+          </a:p>
           <a:p>
             <a:pPr marL="285750" indent="-285750">
               <a:spcAft>
@@ -14068,528 +15095,228 @@
               </a:spcAft>
               <a:buFont typeface="Arial" panose="020B0604020202090204" pitchFamily="34" charset="0"/>
               <a:buChar char="•"/>
-              <a:defRPr sz="1800">
+              <a:defRPr sz="1700">
                 <a:solidFill>
                   <a:srgbClr val="111827"/>
                 </a:solidFill>
               </a:defRPr>
             </a:pPr>
-            <a:r>
-              <a:rPr lang="en-US" altLang="en-US">
+            <a:endParaRPr lang="en-US" altLang="en-US" sz="1800">
+              <a:latin typeface="UCL Sans" pitchFamily="2" charset="77"/>
+            </a:endParaRPr>
+          </a:p>
+          <a:p>
+            <a:pPr marL="0" indent="0">
+              <a:spcAft>
+                <a:spcPts val="600"/>
+              </a:spcAft>
+              <a:buFont typeface="Arial" panose="020B0604020202090204" pitchFamily="34" charset="0"/>
+              <a:buNone/>
+              <a:defRPr sz="1700">
+                <a:solidFill>
+                  <a:srgbClr val="111827"/>
+                </a:solidFill>
+              </a:defRPr>
+            </a:pPr>
+            <a:r>
+              <a:rPr lang="en-US" altLang="en-US" sz="1800">
                 <a:latin typeface="UCL Sans" pitchFamily="2" charset="77"/>
               </a:rPr>
-              <a:t>The central idea is to convert uncertain multimodal predictions into probabilistic safety constraints inside the control optimisation problem.</a:t>
-            </a:r>
-            <a:endParaRPr lang="en-US" altLang="en-US">
+              <a:t>However, </a:t>
+            </a:r>
+            <a:r>
+              <a:rPr lang="en-US" altLang="en-US" sz="1800" b="1">
+                <a:latin typeface="UCL Sans" pitchFamily="2" charset="77"/>
+              </a:rPr>
+              <a:t>prediction alone does not decide what the ego car should do</a:t>
+            </a:r>
+            <a:r>
+              <a:rPr lang="en-US" altLang="en-US" sz="1800">
+                <a:latin typeface="UCL Sans" pitchFamily="2" charset="77"/>
+              </a:rPr>
+              <a:t>.</a:t>
+            </a:r>
+            <a:endParaRPr lang="en-US" altLang="en-US" sz="1800">
               <a:latin typeface="UCL Sans" pitchFamily="2" charset="77"/>
             </a:endParaRPr>
           </a:p>
-        </p:txBody>
-      </p:sp>
-      <p:sp>
-        <p:nvSpPr>
-          <p:cNvPr id="9" name="Rounded Rectangle 8"/>
-          <p:cNvSpPr/>
-          <p:nvPr/>
-        </p:nvSpPr>
-        <p:spPr>
-          <a:xfrm>
-            <a:off x="558800" y="5227320"/>
-            <a:ext cx="1417320" cy="685800"/>
-          </a:xfrm>
-          <a:prstGeom prst="roundRect">
-            <a:avLst/>
-          </a:prstGeom>
-          <a:solidFill>
-            <a:srgbClr val="F3F4F6"/>
-          </a:solidFill>
-          <a:ln>
-            <a:solidFill>
-              <a:srgbClr val="4B5563"/>
-            </a:solidFill>
-          </a:ln>
-        </p:spPr>
-        <p:style>
-          <a:lnRef idx="1">
-            <a:schemeClr val="accent1"/>
-          </a:lnRef>
-          <a:fillRef idx="3">
-            <a:schemeClr val="accent1"/>
-          </a:fillRef>
-          <a:effectRef idx="2">
-            <a:schemeClr val="accent1"/>
-          </a:effectRef>
-          <a:fontRef idx="minor">
-            <a:schemeClr val="lt1"/>
-          </a:fontRef>
-        </p:style>
-        <p:txBody>
-          <a:bodyPr wrap="square" rtlCol="0" anchor="ctr"/>
-          <a:lstStyle/>
-          <a:p>
-            <a:pPr algn="ctr">
-              <a:defRPr sz="1300" b="1">
-                <a:solidFill>
-                  <a:srgbClr val="172554"/>
+          <a:p>
+            <a:pPr marL="742950" lvl="1" indent="-285750">
+              <a:spcAft>
+                <a:spcPts val="600"/>
+              </a:spcAft>
+              <a:buFont typeface="Arial" panose="020B0604020202090204" pitchFamily="34" charset="0"/>
+              <a:buChar char="•"/>
+              <a:defRPr sz="1700">
+                <a:solidFill>
+                  <a:srgbClr val="111827"/>
                 </a:solidFill>
               </a:defRPr>
             </a:pPr>
             <a:r>
-              <a:t>Scenario</a:t>
-            </a:r>
-          </a:p>
-        </p:txBody>
-      </p:sp>
-      <p:cxnSp>
-        <p:nvCxnSpPr>
-          <p:cNvPr id="10" name="Connector 4"/>
-          <p:cNvCxnSpPr/>
-          <p:nvPr/>
-        </p:nvCxnSpPr>
-        <p:spPr>
-          <a:xfrm>
-            <a:off x="1976120" y="5574792"/>
-            <a:ext cx="365760" cy="0"/>
-          </a:xfrm>
-          <a:prstGeom prst="line">
-            <a:avLst/>
-          </a:prstGeom>
-          <a:ln w="25400">
-            <a:solidFill>
-              <a:srgbClr val="4B5563"/>
-            </a:solidFill>
-          </a:ln>
-        </p:spPr>
-        <p:style>
-          <a:lnRef idx="2">
-            <a:schemeClr val="accent1"/>
-          </a:lnRef>
-          <a:fillRef idx="0">
-            <a:schemeClr val="accent1"/>
-          </a:fillRef>
-          <a:effectRef idx="1">
-            <a:schemeClr val="accent1"/>
-          </a:effectRef>
-          <a:fontRef idx="minor">
-            <a:schemeClr val="tx1"/>
-          </a:fontRef>
-        </p:style>
-      </p:cxnSp>
-      <p:sp>
-        <p:nvSpPr>
-          <p:cNvPr id="11" name="Rounded Rectangle 10"/>
-          <p:cNvSpPr/>
-          <p:nvPr/>
-        </p:nvSpPr>
-        <p:spPr>
-          <a:xfrm>
-            <a:off x="2387600" y="5227320"/>
-            <a:ext cx="1417320" cy="685800"/>
-          </a:xfrm>
-          <a:prstGeom prst="roundRect">
-            <a:avLst/>
-          </a:prstGeom>
-          <a:solidFill>
-            <a:srgbClr val="DBEAFE"/>
-          </a:solidFill>
-          <a:ln>
-            <a:solidFill>
-              <a:srgbClr val="2563EB"/>
-            </a:solidFill>
-          </a:ln>
-        </p:spPr>
-        <p:style>
-          <a:lnRef idx="1">
-            <a:schemeClr val="accent1"/>
-          </a:lnRef>
-          <a:fillRef idx="3">
-            <a:schemeClr val="accent1"/>
-          </a:fillRef>
-          <a:effectRef idx="2">
-            <a:schemeClr val="accent1"/>
-          </a:effectRef>
-          <a:fontRef idx="minor">
-            <a:schemeClr val="lt1"/>
-          </a:fontRef>
-        </p:style>
-        <p:txBody>
-          <a:bodyPr wrap="square" rtlCol="0" anchor="ctr"/>
-          <a:lstStyle/>
-          <a:p>
-            <a:pPr algn="ctr">
-              <a:defRPr sz="1300" b="1">
-                <a:solidFill>
-                  <a:srgbClr val="172554"/>
+              <a:rPr lang="en-US" altLang="en-US" sz="1800">
+                <a:latin typeface="UCL Sans" pitchFamily="2" charset="77"/>
+              </a:rPr>
+              <a:t>The planner must turn uncertain futures into safe actions.</a:t>
+            </a:r>
+            <a:endParaRPr lang="en-US" altLang="en-US" sz="1800">
+              <a:latin typeface="UCL Sans" pitchFamily="2" charset="77"/>
+            </a:endParaRPr>
+          </a:p>
+          <a:p>
+            <a:pPr marL="742950" lvl="1" indent="-285750">
+              <a:spcAft>
+                <a:spcPts val="600"/>
+              </a:spcAft>
+              <a:buFont typeface="Arial" panose="020B0604020202090204" pitchFamily="34" charset="0"/>
+              <a:buChar char="•"/>
+              <a:defRPr sz="1700">
+                <a:solidFill>
+                  <a:srgbClr val="111827"/>
                 </a:solidFill>
               </a:defRPr>
             </a:pPr>
             <a:r>
-              <a:t>Simulator</a:t>
-            </a:r>
-          </a:p>
-        </p:txBody>
-      </p:sp>
-      <p:cxnSp>
-        <p:nvCxnSpPr>
-          <p:cNvPr id="12" name="Connector 6"/>
-          <p:cNvCxnSpPr/>
-          <p:nvPr/>
-        </p:nvCxnSpPr>
-        <p:spPr>
-          <a:xfrm>
-            <a:off x="3804920" y="5574792"/>
-            <a:ext cx="365760" cy="0"/>
-          </a:xfrm>
-          <a:prstGeom prst="line">
-            <a:avLst/>
-          </a:prstGeom>
-          <a:ln w="25400">
-            <a:solidFill>
-              <a:srgbClr val="4B5563"/>
-            </a:solidFill>
-          </a:ln>
-        </p:spPr>
-        <p:style>
-          <a:lnRef idx="2">
-            <a:schemeClr val="accent1"/>
-          </a:lnRef>
-          <a:fillRef idx="0">
-            <a:schemeClr val="accent1"/>
-          </a:fillRef>
-          <a:effectRef idx="1">
-            <a:schemeClr val="accent1"/>
-          </a:effectRef>
-          <a:fontRef idx="minor">
-            <a:schemeClr val="tx1"/>
-          </a:fontRef>
-        </p:style>
-      </p:cxnSp>
-      <p:sp>
-        <p:nvSpPr>
-          <p:cNvPr id="13" name="Rounded Rectangle 12"/>
-          <p:cNvSpPr/>
-          <p:nvPr/>
-        </p:nvSpPr>
-        <p:spPr>
-          <a:xfrm>
-            <a:off x="4353560" y="5227320"/>
-            <a:ext cx="1417320" cy="685800"/>
-          </a:xfrm>
-          <a:prstGeom prst="roundRect">
-            <a:avLst/>
-          </a:prstGeom>
-          <a:solidFill>
-            <a:srgbClr val="FFEDD5"/>
-          </a:solidFill>
-          <a:ln>
-            <a:solidFill>
-              <a:srgbClr val="F97316"/>
-            </a:solidFill>
-          </a:ln>
-        </p:spPr>
-        <p:style>
-          <a:lnRef idx="1">
-            <a:schemeClr val="accent1"/>
-          </a:lnRef>
-          <a:fillRef idx="3">
-            <a:schemeClr val="accent1"/>
-          </a:fillRef>
-          <a:effectRef idx="2">
-            <a:schemeClr val="accent1"/>
-          </a:effectRef>
-          <a:fontRef idx="minor">
-            <a:schemeClr val="lt1"/>
-          </a:fontRef>
-        </p:style>
-        <p:txBody>
-          <a:bodyPr wrap="square" rtlCol="0" anchor="ctr"/>
-          <a:lstStyle/>
-          <a:p>
-            <a:pPr algn="ctr">
-              <a:defRPr sz="1300" b="1">
-                <a:solidFill>
-                  <a:srgbClr val="172554"/>
+              <a:rPr lang="en-US" altLang="en-US" sz="1800">
+                <a:latin typeface="UCL Sans" pitchFamily="2" charset="77"/>
+              </a:rPr>
+              <a:t>SMPC uses probabilistic safety constraints to plan under uncertainty.</a:t>
+            </a:r>
+            <a:endParaRPr lang="en-US" altLang="en-US" sz="1800">
+              <a:latin typeface="UCL Sans" pitchFamily="2" charset="77"/>
+            </a:endParaRPr>
+          </a:p>
+          <a:p>
+            <a:pPr marL="0" indent="0">
+              <a:spcAft>
+                <a:spcPts val="600"/>
+              </a:spcAft>
+              <a:buFont typeface="Arial" panose="020B0604020202090204" pitchFamily="34" charset="0"/>
+              <a:buNone/>
+              <a:defRPr sz="1700">
+                <a:solidFill>
+                  <a:srgbClr val="111827"/>
                 </a:solidFill>
               </a:defRPr>
             </a:pPr>
-            <a:r>
-              <a:t>Possible</a:t>
-            </a:r>
-            <a:br/>
-            <a:r>
-              <a:t>futures</a:t>
-            </a:r>
-          </a:p>
-        </p:txBody>
-      </p:sp>
-      <p:cxnSp>
-        <p:nvCxnSpPr>
-          <p:cNvPr id="14" name="Connector 8"/>
-          <p:cNvCxnSpPr/>
-          <p:nvPr/>
-        </p:nvCxnSpPr>
-        <p:spPr>
-          <a:xfrm>
-            <a:off x="5770880" y="5574792"/>
-            <a:ext cx="365760" cy="0"/>
-          </a:xfrm>
-          <a:prstGeom prst="line">
-            <a:avLst/>
-          </a:prstGeom>
-          <a:ln w="25400">
-            <a:solidFill>
-              <a:srgbClr val="4B5563"/>
-            </a:solidFill>
-          </a:ln>
-        </p:spPr>
-        <p:style>
-          <a:lnRef idx="2">
-            <a:schemeClr val="accent1"/>
-          </a:lnRef>
-          <a:fillRef idx="0">
-            <a:schemeClr val="accent1"/>
-          </a:fillRef>
-          <a:effectRef idx="1">
-            <a:schemeClr val="accent1"/>
-          </a:effectRef>
-          <a:fontRef idx="minor">
-            <a:schemeClr val="tx1"/>
-          </a:fontRef>
-        </p:style>
-      </p:cxnSp>
-      <p:sp>
-        <p:nvSpPr>
-          <p:cNvPr id="17" name="Rounded Rectangle 16"/>
-          <p:cNvSpPr/>
-          <p:nvPr/>
-        </p:nvSpPr>
-        <p:spPr>
-          <a:xfrm>
-            <a:off x="6319520" y="5227320"/>
-            <a:ext cx="1417320" cy="685800"/>
-          </a:xfrm>
-          <a:prstGeom prst="roundRect">
-            <a:avLst/>
-          </a:prstGeom>
-          <a:solidFill>
-            <a:srgbClr val="DCFCE7"/>
-          </a:solidFill>
-          <a:ln>
-            <a:solidFill>
-              <a:srgbClr val="16A34A"/>
-            </a:solidFill>
-          </a:ln>
-        </p:spPr>
-        <p:style>
-          <a:lnRef idx="1">
-            <a:schemeClr val="accent1"/>
-          </a:lnRef>
-          <a:fillRef idx="3">
-            <a:schemeClr val="accent1"/>
-          </a:fillRef>
-          <a:effectRef idx="2">
-            <a:schemeClr val="accent1"/>
-          </a:effectRef>
-          <a:fontRef idx="minor">
-            <a:schemeClr val="lt1"/>
-          </a:fontRef>
-        </p:style>
-        <p:txBody>
-          <a:bodyPr wrap="square" rtlCol="0" anchor="ctr"/>
-          <a:lstStyle/>
-          <a:p>
-            <a:pPr algn="ctr">
-              <a:defRPr sz="1300" b="1">
-                <a:solidFill>
-                  <a:srgbClr val="172554"/>
+            <a:endParaRPr lang="en-US" altLang="en-US" sz="1800">
+              <a:latin typeface="UCL Sans" pitchFamily="2" charset="77"/>
+            </a:endParaRPr>
+          </a:p>
+          <a:p>
+            <a:pPr marL="0" indent="0">
+              <a:spcAft>
+                <a:spcPts val="600"/>
+              </a:spcAft>
+              <a:buFont typeface="Arial" panose="020B0604020202090204" pitchFamily="34" charset="0"/>
+              <a:buNone/>
+              <a:defRPr sz="1700">
+                <a:solidFill>
+                  <a:srgbClr val="111827"/>
                 </a:solidFill>
               </a:defRPr>
             </a:pPr>
             <a:r>
-              <a:t>Safe</a:t>
-            </a:r>
-            <a:br/>
-            <a:r>
-              <a:t>planner</a:t>
-            </a:r>
-          </a:p>
-        </p:txBody>
-      </p:sp>
-      <p:cxnSp>
-        <p:nvCxnSpPr>
-          <p:cNvPr id="18" name="Connector 10"/>
-          <p:cNvCxnSpPr/>
-          <p:nvPr/>
-        </p:nvCxnSpPr>
-        <p:spPr>
-          <a:xfrm>
-            <a:off x="7736840" y="5574792"/>
-            <a:ext cx="365760" cy="0"/>
-          </a:xfrm>
-          <a:prstGeom prst="line">
-            <a:avLst/>
-          </a:prstGeom>
-          <a:ln w="25400">
-            <a:solidFill>
-              <a:srgbClr val="4B5563"/>
-            </a:solidFill>
-          </a:ln>
-        </p:spPr>
-        <p:style>
-          <a:lnRef idx="2">
-            <a:schemeClr val="accent1"/>
-          </a:lnRef>
-          <a:fillRef idx="0">
-            <a:schemeClr val="accent1"/>
-          </a:fillRef>
-          <a:effectRef idx="1">
-            <a:schemeClr val="accent1"/>
-          </a:effectRef>
-          <a:fontRef idx="minor">
-            <a:schemeClr val="tx1"/>
-          </a:fontRef>
-        </p:style>
-      </p:cxnSp>
-      <p:sp>
-        <p:nvSpPr>
-          <p:cNvPr id="19" name="Rounded Rectangle 18"/>
-          <p:cNvSpPr/>
-          <p:nvPr/>
-        </p:nvSpPr>
-        <p:spPr>
-          <a:xfrm>
-            <a:off x="8285480" y="5227320"/>
-            <a:ext cx="1417320" cy="685800"/>
-          </a:xfrm>
-          <a:prstGeom prst="roundRect">
-            <a:avLst/>
-          </a:prstGeom>
-          <a:solidFill>
-            <a:srgbClr val="DBEAFE"/>
-          </a:solidFill>
-          <a:ln>
-            <a:solidFill>
-              <a:srgbClr val="2563EB"/>
-            </a:solidFill>
-          </a:ln>
-        </p:spPr>
-        <p:style>
-          <a:lnRef idx="1">
-            <a:schemeClr val="accent1"/>
-          </a:lnRef>
-          <a:fillRef idx="3">
-            <a:schemeClr val="accent1"/>
-          </a:fillRef>
-          <a:effectRef idx="2">
-            <a:schemeClr val="accent1"/>
-          </a:effectRef>
-          <a:fontRef idx="minor">
-            <a:schemeClr val="lt1"/>
-          </a:fontRef>
-        </p:style>
-        <p:txBody>
-          <a:bodyPr wrap="square" rtlCol="0" anchor="ctr"/>
-          <a:lstStyle/>
-          <a:p>
-            <a:pPr algn="ctr">
-              <a:defRPr sz="1300" b="1">
-                <a:solidFill>
-                  <a:srgbClr val="172554"/>
+              <a:rPr lang="en-US" altLang="en-US" sz="1800" b="1">
+                <a:latin typeface="UCL Sans" pitchFamily="2" charset="77"/>
+              </a:rPr>
+              <a:t>The remaining gap:</a:t>
+            </a:r>
+            <a:endParaRPr lang="en-US" altLang="en-US" sz="1800">
+              <a:latin typeface="UCL Sans" pitchFamily="2" charset="77"/>
+            </a:endParaRPr>
+          </a:p>
+          <a:p>
+            <a:pPr marL="742950" lvl="1" indent="-285750">
+              <a:spcAft>
+                <a:spcPts val="600"/>
+              </a:spcAft>
+              <a:buFont typeface="Arial" panose="020B0604020202090204" pitchFamily="34" charset="0"/>
+              <a:buChar char="•"/>
+              <a:defRPr sz="1700">
+                <a:solidFill>
+                  <a:srgbClr val="111827"/>
                 </a:solidFill>
               </a:defRPr>
             </a:pPr>
             <a:r>
-              <a:t>Action</a:t>
-            </a:r>
-          </a:p>
-        </p:txBody>
-      </p:sp>
-      <p:cxnSp>
-        <p:nvCxnSpPr>
-          <p:cNvPr id="20" name="Connector 12"/>
-          <p:cNvCxnSpPr/>
-          <p:nvPr/>
-        </p:nvCxnSpPr>
-        <p:spPr>
-          <a:xfrm>
-            <a:off x="9702800" y="5574792"/>
-            <a:ext cx="365759" cy="0"/>
-          </a:xfrm>
-          <a:prstGeom prst="line">
-            <a:avLst/>
-          </a:prstGeom>
-          <a:ln w="25400">
-            <a:solidFill>
-              <a:srgbClr val="4B5563"/>
-            </a:solidFill>
-          </a:ln>
-        </p:spPr>
-        <p:style>
-          <a:lnRef idx="2">
-            <a:schemeClr val="accent1"/>
-          </a:lnRef>
-          <a:fillRef idx="0">
-            <a:schemeClr val="accent1"/>
-          </a:fillRef>
-          <a:effectRef idx="1">
-            <a:schemeClr val="accent1"/>
-          </a:effectRef>
-          <a:fontRef idx="minor">
-            <a:schemeClr val="tx1"/>
-          </a:fontRef>
-        </p:style>
-      </p:cxnSp>
-      <p:sp>
-        <p:nvSpPr>
-          <p:cNvPr id="21" name="Rounded Rectangle 20"/>
-          <p:cNvSpPr/>
-          <p:nvPr/>
-        </p:nvSpPr>
-        <p:spPr>
-          <a:xfrm>
-            <a:off x="9931400" y="5227320"/>
-            <a:ext cx="1417320" cy="685800"/>
-          </a:xfrm>
-          <a:prstGeom prst="roundRect">
-            <a:avLst/>
-          </a:prstGeom>
-          <a:solidFill>
-            <a:srgbClr val="F3F4F6"/>
-          </a:solidFill>
-          <a:ln>
-            <a:solidFill>
-              <a:srgbClr val="4B5563"/>
-            </a:solidFill>
-          </a:ln>
-        </p:spPr>
-        <p:style>
-          <a:lnRef idx="1">
-            <a:schemeClr val="accent1"/>
-          </a:lnRef>
-          <a:fillRef idx="3">
-            <a:schemeClr val="accent1"/>
-          </a:fillRef>
-          <a:effectRef idx="2">
-            <a:schemeClr val="accent1"/>
-          </a:effectRef>
-          <a:fontRef idx="minor">
-            <a:schemeClr val="lt1"/>
-          </a:fontRef>
-        </p:style>
-        <p:txBody>
-          <a:bodyPr wrap="square" rtlCol="0" anchor="ctr"/>
-          <a:lstStyle/>
-          <a:p>
-            <a:pPr algn="ctr">
-              <a:defRPr sz="1300" b="1">
-                <a:solidFill>
-                  <a:srgbClr val="172554"/>
+              <a:rPr lang="en-US" altLang="en-US" sz="1800">
+                <a:latin typeface="UCL Sans" pitchFamily="2" charset="77"/>
+              </a:rPr>
+              <a:t>How to use multimodal predictions in a safe, efficient, closed-loop controller.</a:t>
+            </a:r>
+            <a:endParaRPr lang="en-US" altLang="en-US" sz="1800">
+              <a:latin typeface="UCL Sans" pitchFamily="2" charset="77"/>
+            </a:endParaRPr>
+          </a:p>
+          <a:p>
+            <a:pPr lvl="1" indent="0">
+              <a:spcAft>
+                <a:spcPts val="600"/>
+              </a:spcAft>
+              <a:buFont typeface="Arial" panose="020B0604020202090204" pitchFamily="34" charset="0"/>
+              <a:buNone/>
+              <a:defRPr sz="1700">
+                <a:solidFill>
+                  <a:srgbClr val="111827"/>
                 </a:solidFill>
               </a:defRPr>
             </a:pPr>
-            <a:r>
-              <a:t>Results</a:t>
-            </a:r>
+            <a:endParaRPr lang="en-US" altLang="en-US" sz="1800">
+              <a:latin typeface="UCL Sans" pitchFamily="2" charset="77"/>
+            </a:endParaRPr>
+          </a:p>
+          <a:p>
+            <a:pPr marL="0" indent="0">
+              <a:spcAft>
+                <a:spcPts val="600"/>
+              </a:spcAft>
+              <a:buFont typeface="Arial" panose="020B0604020202090204" pitchFamily="34" charset="0"/>
+              <a:buNone/>
+              <a:defRPr sz="1700">
+                <a:solidFill>
+                  <a:srgbClr val="111827"/>
+                </a:solidFill>
+              </a:defRPr>
+            </a:pPr>
+            <a:r>
+              <a:rPr lang="en-US" altLang="en-US" sz="1800">
+                <a:latin typeface="UCL Sans" pitchFamily="2" charset="77"/>
+              </a:rPr>
+              <a:t>My project: </a:t>
+            </a:r>
+            <a:endParaRPr lang="en-US" altLang="en-US" sz="1800">
+              <a:latin typeface="UCL Sans" pitchFamily="2" charset="77"/>
+            </a:endParaRPr>
+          </a:p>
+          <a:p>
+            <a:pPr marL="742950" lvl="1" indent="-285750">
+              <a:spcAft>
+                <a:spcPts val="600"/>
+              </a:spcAft>
+              <a:buFont typeface="Arial" panose="020B0604020202090204" pitchFamily="34" charset="0"/>
+              <a:buChar char="•"/>
+              <a:defRPr sz="1700">
+                <a:solidFill>
+                  <a:srgbClr val="111827"/>
+                </a:solidFill>
+              </a:defRPr>
+            </a:pPr>
+            <a:r>
+              <a:rPr lang="en-US" altLang="en-US" sz="1800">
+                <a:solidFill>
+                  <a:srgbClr val="FF0000"/>
+                </a:solidFill>
+                <a:latin typeface="UCL Sans" pitchFamily="2" charset="77"/>
+              </a:rPr>
+              <a:t>Produce and evaluate risk-aware SMPC in an intersection scenario with CARLA simulator.</a:t>
+            </a:r>
+            <a:endParaRPr lang="en-US" altLang="en-US" sz="1800">
+              <a:solidFill>
+                <a:srgbClr val="FF0000"/>
+              </a:solidFill>
+              <a:latin typeface="UCL Sans" pitchFamily="2" charset="77"/>
+            </a:endParaRPr>
           </a:p>
         </p:txBody>
       </p:sp>
@@ -14620,207 +15347,6 @@
       </p:grpSpPr>
       <p:sp>
         <p:nvSpPr>
-          <p:cNvPr id="4" name="Text Box 3"/>
-          <p:cNvSpPr txBox="1"/>
-          <p:nvPr/>
-        </p:nvSpPr>
-        <p:spPr>
-          <a:xfrm>
-            <a:off x="436245" y="1144270"/>
-            <a:ext cx="11000740" cy="4523105"/>
-          </a:xfrm>
-          <a:prstGeom prst="rect">
-            <a:avLst/>
-          </a:prstGeom>
-          <a:noFill/>
-        </p:spPr>
-        <p:txBody>
-          <a:bodyPr wrap="square" rtlCol="0" anchor="t">
-            <a:spAutoFit/>
-          </a:bodyPr>
-          <a:p>
-            <a:r>
-              <a:rPr lang="en-US" altLang="en-US" sz="1800">
-                <a:solidFill>
-                  <a:srgbClr val="111827"/>
-                </a:solidFill>
-                <a:latin typeface="UCL Sans" pitchFamily="2" charset="77"/>
-              </a:rPr>
-              <a:t>First, I configure a CARLA intersection scenario with an ego vehicle and a target vehicle. At each simulation step, the system reads the current vehicle states, predicts several possible future motions of the target vehicle, solves the SMPC control problem, and applies the action back to the ego vehicle.</a:t>
-            </a:r>
-            <a:endParaRPr lang="en-US" altLang="en-US" sz="1800">
-              <a:solidFill>
-                <a:srgbClr val="111827"/>
-              </a:solidFill>
-              <a:latin typeface="UCL Sans" pitchFamily="2" charset="77"/>
-            </a:endParaRPr>
-          </a:p>
-          <a:p>
-            <a:endParaRPr lang="en-US" altLang="en-US" sz="1800">
-              <a:solidFill>
-                <a:srgbClr val="111827"/>
-              </a:solidFill>
-              <a:latin typeface="UCL Sans" pitchFamily="2" charset="77"/>
-            </a:endParaRPr>
-          </a:p>
-          <a:p>
-            <a:endParaRPr lang="en-US" altLang="en-US" sz="1800">
-              <a:solidFill>
-                <a:srgbClr val="111827"/>
-              </a:solidFill>
-              <a:latin typeface="UCL Sans" pitchFamily="2" charset="77"/>
-            </a:endParaRPr>
-          </a:p>
-          <a:p>
-            <a:endParaRPr lang="en-US" altLang="en-US" sz="1800">
-              <a:solidFill>
-                <a:srgbClr val="111827"/>
-              </a:solidFill>
-              <a:latin typeface="UCL Sans" pitchFamily="2" charset="77"/>
-            </a:endParaRPr>
-          </a:p>
-          <a:p>
-            <a:endParaRPr lang="en-US" altLang="en-US" sz="1800">
-              <a:solidFill>
-                <a:srgbClr val="111827"/>
-              </a:solidFill>
-              <a:latin typeface="UCL Sans" pitchFamily="2" charset="77"/>
-            </a:endParaRPr>
-          </a:p>
-          <a:p>
-            <a:pPr marL="285750" indent="-285750">
-              <a:buFont typeface="Arial" panose="020B0604020202090204" pitchFamily="34" charset="0"/>
-              <a:buChar char="•"/>
-            </a:pPr>
-            <a:r>
-              <a:rPr lang="en-US" altLang="en-US" sz="1800">
-                <a:solidFill>
-                  <a:srgbClr val="111827"/>
-                </a:solidFill>
-                <a:latin typeface="UCL Sans" pitchFamily="2" charset="77"/>
-              </a:rPr>
-              <a:t>No-TV baseline.</a:t>
-            </a:r>
-            <a:endParaRPr lang="en-US" altLang="en-US" sz="1800">
-              <a:solidFill>
-                <a:srgbClr val="111827"/>
-              </a:solidFill>
-              <a:latin typeface="UCL Sans" pitchFamily="2" charset="77"/>
-            </a:endParaRPr>
-          </a:p>
-          <a:p>
-            <a:pPr marL="285750" indent="-285750">
-              <a:buFont typeface="Arial" panose="020B0604020202090204" pitchFamily="34" charset="0"/>
-              <a:buChar char="•"/>
-            </a:pPr>
-            <a:r>
-              <a:rPr lang="en-US" altLang="en-US" sz="1800">
-                <a:solidFill>
-                  <a:srgbClr val="111827"/>
-                </a:solidFill>
-                <a:latin typeface="UCL Sans" pitchFamily="2" charset="77"/>
-              </a:rPr>
-              <a:t>No-TV closed-loop baseline.</a:t>
-            </a:r>
-            <a:endParaRPr lang="en-US" altLang="en-US" sz="1800">
-              <a:solidFill>
-                <a:srgbClr val="111827"/>
-              </a:solidFill>
-              <a:latin typeface="UCL Sans" pitchFamily="2" charset="77"/>
-            </a:endParaRPr>
-          </a:p>
-          <a:p>
-            <a:pPr marL="285750" indent="-285750">
-              <a:buFont typeface="Arial" panose="020B0604020202090204" pitchFamily="34" charset="0"/>
-              <a:buChar char="•"/>
-            </a:pPr>
-            <a:r>
-              <a:rPr lang="en-US" altLang="en-US" sz="1800">
-                <a:solidFill>
-                  <a:srgbClr val="111827"/>
-                </a:solidFill>
-                <a:latin typeface="UCL Sans" pitchFamily="2" charset="77"/>
-              </a:rPr>
-              <a:t>Variable-risk SMPC.</a:t>
-            </a:r>
-            <a:endParaRPr lang="en-US" altLang="en-US" sz="1800">
-              <a:solidFill>
-                <a:srgbClr val="111827"/>
-              </a:solidFill>
-              <a:latin typeface="UCL Sans" pitchFamily="2" charset="77"/>
-            </a:endParaRPr>
-          </a:p>
-          <a:p>
-            <a:pPr marL="285750" indent="-285750">
-              <a:buFont typeface="Arial" panose="020B0604020202090204" pitchFamily="34" charset="0"/>
-              <a:buChar char="•"/>
-            </a:pPr>
-            <a:r>
-              <a:rPr lang="en-US" altLang="en-US" sz="1800">
-                <a:solidFill>
-                  <a:srgbClr val="111827"/>
-                </a:solidFill>
-                <a:latin typeface="UCL Sans" pitchFamily="2" charset="77"/>
-              </a:rPr>
-              <a:t>Fixed-risk SMPC.</a:t>
-            </a:r>
-            <a:endParaRPr lang="en-US" altLang="en-US" sz="1800">
-              <a:solidFill>
-                <a:srgbClr val="111827"/>
-              </a:solidFill>
-              <a:latin typeface="UCL Sans" pitchFamily="2" charset="77"/>
-            </a:endParaRPr>
-          </a:p>
-          <a:p>
-            <a:pPr marL="285750" indent="-285750">
-              <a:buFont typeface="Arial" panose="020B0604020202090204" pitchFamily="34" charset="0"/>
-              <a:buChar char="•"/>
-            </a:pPr>
-            <a:r>
-              <a:rPr lang="en-US" altLang="en-US" sz="1800">
-                <a:solidFill>
-                  <a:srgbClr val="111827"/>
-                </a:solidFill>
-                <a:latin typeface="UCL Sans" pitchFamily="2" charset="77"/>
-              </a:rPr>
-              <a:t>Open-loop SMPC.</a:t>
-            </a:r>
-            <a:endParaRPr lang="en-US" altLang="en-US" sz="1800">
-              <a:solidFill>
-                <a:srgbClr val="111827"/>
-              </a:solidFill>
-              <a:latin typeface="UCL Sans" pitchFamily="2" charset="77"/>
-            </a:endParaRPr>
-          </a:p>
-          <a:p>
-            <a:endParaRPr lang="en-US" altLang="en-US" sz="1800">
-              <a:solidFill>
-                <a:srgbClr val="111827"/>
-              </a:solidFill>
-              <a:latin typeface="UCL Sans" pitchFamily="2" charset="77"/>
-            </a:endParaRPr>
-          </a:p>
-          <a:p>
-            <a:r>
-              <a:rPr lang="en-US" altLang="en-US" sz="1800">
-                <a:solidFill>
-                  <a:srgbClr val="111827"/>
-                </a:solidFill>
-                <a:latin typeface="UCL Sans" pitchFamily="2" charset="77"/>
-              </a:rPr>
-              <a:t>Finally, I evaluate the results using completion time, solver feasibility, minimum distance to the target vehicle, path deviation, and comfort-related metrics.</a:t>
-            </a:r>
-            <a:endParaRPr lang="en-US" altLang="en-US" sz="1800">
-              <a:solidFill>
-                <a:srgbClr val="111827"/>
-              </a:solidFill>
-              <a:latin typeface="UCL Sans" pitchFamily="2" charset="77"/>
-            </a:endParaRPr>
-          </a:p>
-        </p:txBody>
-      </p:sp>
-      <p:sp>
-        <p:nvSpPr>
           <p:cNvPr id="2" name="Title 1"/>
           <p:cNvSpPr>
             <a:spLocks noGrp="1"/>
@@ -14838,75 +15364,403 @@
               <a:rPr lang="en-GB">
                 <a:latin typeface="UCL Sans SemiBold"/>
               </a:rPr>
-              <a:t>Execution plan</a:t>
+              <a:t>Hypothesis</a:t>
             </a:r>
             <a:endParaRPr lang="en-US"/>
           </a:p>
         </p:txBody>
       </p:sp>
-      <p:sp>
-        <p:nvSpPr>
-          <p:cNvPr id="6" name="Rounded Rectangle 5"/>
-          <p:cNvSpPr/>
+      <p:grpSp>
+        <p:nvGrpSpPr>
+          <p:cNvPr id="6" name="Group 5"/>
+          <p:cNvGrpSpPr/>
           <p:nvPr/>
-        </p:nvSpPr>
-        <p:spPr>
-          <a:xfrm>
-            <a:off x="568960" y="2555240"/>
-            <a:ext cx="3549015" cy="502920"/>
-          </a:xfrm>
-          <a:prstGeom prst="roundRect">
-            <a:avLst/>
-          </a:prstGeom>
-          <a:solidFill>
-            <a:srgbClr val="DCFCE7"/>
-          </a:solidFill>
-          <a:ln>
+        </p:nvGrpSpPr>
+        <p:grpSpPr>
+          <a:xfrm>
+            <a:off x="568960" y="1214755"/>
+            <a:ext cx="10175240" cy="4772660"/>
+            <a:chOff x="896" y="1687"/>
+            <a:chExt cx="16024" cy="7516"/>
+          </a:xfrm>
+        </p:grpSpPr>
+        <p:sp>
+          <p:nvSpPr>
+            <p:cNvPr id="4" name="Rounded Rectangle 3"/>
+            <p:cNvSpPr/>
+            <p:nvPr/>
+          </p:nvSpPr>
+          <p:spPr>
+            <a:xfrm>
+              <a:off x="896" y="1687"/>
+              <a:ext cx="8981" cy="864"/>
+            </a:xfrm>
+            <a:prstGeom prst="roundRect">
+              <a:avLst/>
+            </a:prstGeom>
             <a:solidFill>
-              <a:srgbClr val="16A34A"/>
+              <a:srgbClr val="DBEAFE"/>
             </a:solidFill>
-          </a:ln>
-        </p:spPr>
-        <p:style>
-          <a:lnRef idx="1">
-            <a:schemeClr val="accent1"/>
-          </a:lnRef>
-          <a:fillRef idx="3">
-            <a:schemeClr val="accent1"/>
-          </a:fillRef>
-          <a:effectRef idx="2">
-            <a:schemeClr val="accent1"/>
-          </a:effectRef>
-          <a:fontRef idx="minor">
-            <a:schemeClr val="lt1"/>
-          </a:fontRef>
-        </p:style>
-        <p:txBody>
-          <a:bodyPr wrap="square" rtlCol="0" anchor="ctr"/>
-          <a:lstStyle/>
-          <a:p>
-            <a:pPr algn="ctr">
-              <a:defRPr sz="1700" b="1">
-                <a:solidFill>
-                  <a:srgbClr val="172554"/>
-                </a:solidFill>
-              </a:defRPr>
-            </a:pPr>
-            <a:r>
-              <a:t>How I test it</a:t>
-            </a:r>
-            <a:r>
-              <a:rPr lang="en-US"/>
-              <a:t> - By </a:t>
-            </a:r>
-            <a:r>
-              <a:rPr lang="en-US"/>
-              <a:t>Comparing</a:t>
-            </a:r>
-            <a:endParaRPr lang="en-US"/>
-          </a:p>
-        </p:txBody>
-      </p:sp>
+            <a:ln>
+              <a:solidFill>
+                <a:srgbClr val="2563EB"/>
+              </a:solidFill>
+            </a:ln>
+          </p:spPr>
+          <p:style>
+            <a:lnRef idx="1">
+              <a:schemeClr val="accent1"/>
+            </a:lnRef>
+            <a:fillRef idx="3">
+              <a:schemeClr val="accent1"/>
+            </a:fillRef>
+            <a:effectRef idx="2">
+              <a:schemeClr val="accent1"/>
+            </a:effectRef>
+            <a:fontRef idx="minor">
+              <a:schemeClr val="lt1"/>
+            </a:fontRef>
+          </p:style>
+          <p:txBody>
+            <a:bodyPr wrap="square" rtlCol="0" anchor="ctr"/>
+            <a:lstStyle/>
+            <a:p>
+              <a:pPr algn="ctr">
+                <a:defRPr sz="1800" b="1">
+                  <a:solidFill>
+                    <a:srgbClr val="172554"/>
+                  </a:solidFill>
+                </a:defRPr>
+              </a:pPr>
+              <a:r>
+                <a:rPr lang="en-US" altLang="en-US"/>
+                <a:t>Planning With Several Futures Should Be Safer</a:t>
+              </a:r>
+              <a:endParaRPr lang="en-US" altLang="en-US"/>
+            </a:p>
+          </p:txBody>
+        </p:sp>
+        <p:sp>
+          <p:nvSpPr>
+            <p:cNvPr id="5" name="TextBox 4"/>
+            <p:cNvSpPr txBox="1"/>
+            <p:nvPr/>
+          </p:nvSpPr>
+          <p:spPr>
+            <a:xfrm>
+              <a:off x="896" y="2952"/>
+              <a:ext cx="16024" cy="6251"/>
+            </a:xfrm>
+            <a:prstGeom prst="rect">
+              <a:avLst/>
+            </a:prstGeom>
+            <a:noFill/>
+          </p:spPr>
+          <p:txBody>
+            <a:bodyPr wrap="square" lIns="73152" rIns="73152">
+              <a:spAutoFit/>
+            </a:bodyPr>
+            <a:lstStyle/>
+            <a:p>
+              <a:pPr marL="0" indent="0" algn="l">
+                <a:buNone/>
+                <a:defRPr sz="2300" b="1">
+                  <a:solidFill>
+                    <a:srgbClr val="172554"/>
+                  </a:solidFill>
+                </a:defRPr>
+              </a:pPr>
+              <a:r>
+                <a:rPr lang="en-US" altLang="en-US" sz="1800" b="0">
+                  <a:solidFill>
+                    <a:srgbClr val="111827"/>
+                  </a:solidFill>
+                  <a:latin typeface="UCL Sans" pitchFamily="2" charset="77"/>
+                </a:rPr>
+                <a:t>Research question:</a:t>
+              </a:r>
+              <a:endParaRPr lang="en-US" altLang="en-US" sz="1800" b="0">
+                <a:solidFill>
+                  <a:srgbClr val="111827"/>
+                </a:solidFill>
+                <a:latin typeface="UCL Sans" pitchFamily="2" charset="77"/>
+              </a:endParaRPr>
+            </a:p>
+            <a:p>
+              <a:pPr marL="742950" lvl="1" indent="-285750" algn="l">
+                <a:buFont typeface="Arial" panose="020B0604020202090204" pitchFamily="34" charset="0"/>
+                <a:buChar char="•"/>
+                <a:defRPr sz="2300" b="1">
+                  <a:solidFill>
+                    <a:srgbClr val="172554"/>
+                  </a:solidFill>
+                </a:defRPr>
+              </a:pPr>
+              <a:r>
+                <a:rPr lang="en-US" altLang="en-US" sz="1800" b="0">
+                  <a:solidFill>
+                    <a:srgbClr val="111827"/>
+                  </a:solidFill>
+                  <a:latin typeface="UCL Sans" pitchFamily="2" charset="77"/>
+                </a:rPr>
+                <a:t>Can a self-driving car cross an intersection more safely by </a:t>
+              </a:r>
+              <a:r>
+                <a:rPr lang="en-US" altLang="en-US" sz="1800">
+                  <a:solidFill>
+                    <a:srgbClr val="111827"/>
+                  </a:solidFill>
+                  <a:latin typeface="UCL Sans" pitchFamily="2" charset="77"/>
+                </a:rPr>
+                <a:t>planning with several possible futures</a:t>
+              </a:r>
+              <a:r>
+                <a:rPr lang="en-US" altLang="en-US" sz="1800" b="0">
+                  <a:solidFill>
+                    <a:srgbClr val="111827"/>
+                  </a:solidFill>
+                  <a:latin typeface="UCL Sans" pitchFamily="2" charset="77"/>
+                </a:rPr>
+                <a:t> of the target vehicle?</a:t>
+              </a:r>
+              <a:endParaRPr lang="en-US" altLang="en-US" sz="1800" b="0">
+                <a:solidFill>
+                  <a:srgbClr val="111827"/>
+                </a:solidFill>
+                <a:latin typeface="UCL Sans" pitchFamily="2" charset="77"/>
+              </a:endParaRPr>
+            </a:p>
+            <a:p>
+              <a:pPr marL="0" lvl="0" indent="0" algn="l">
+                <a:buNone/>
+                <a:defRPr sz="2300" b="1">
+                  <a:solidFill>
+                    <a:srgbClr val="172554"/>
+                  </a:solidFill>
+                </a:defRPr>
+              </a:pPr>
+              <a:endParaRPr lang="en-US" altLang="en-US" sz="1800" b="0">
+                <a:solidFill>
+                  <a:srgbClr val="111827"/>
+                </a:solidFill>
+                <a:latin typeface="UCL Sans" pitchFamily="2" charset="77"/>
+              </a:endParaRPr>
+            </a:p>
+            <a:p>
+              <a:pPr marL="0" lvl="0" indent="0" algn="l">
+                <a:buNone/>
+                <a:defRPr sz="2300" b="1">
+                  <a:solidFill>
+                    <a:srgbClr val="172554"/>
+                  </a:solidFill>
+                </a:defRPr>
+              </a:pPr>
+              <a:r>
+                <a:rPr lang="en-US" altLang="en-US" sz="1800" b="0">
+                  <a:solidFill>
+                    <a:srgbClr val="111827"/>
+                  </a:solidFill>
+                  <a:latin typeface="UCL Sans" pitchFamily="2" charset="77"/>
+                </a:rPr>
+                <a:t>Hypothesis:</a:t>
+              </a:r>
+              <a:endParaRPr lang="en-US" altLang="en-US" sz="1800" b="0">
+                <a:solidFill>
+                  <a:srgbClr val="111827"/>
+                </a:solidFill>
+                <a:latin typeface="UCL Sans" pitchFamily="2" charset="77"/>
+              </a:endParaRPr>
+            </a:p>
+            <a:p>
+              <a:pPr marL="742950" lvl="1" indent="-285750" algn="l">
+                <a:buFont typeface="Arial" panose="020B0604020202090204" pitchFamily="34" charset="0"/>
+                <a:buChar char="•"/>
+                <a:defRPr sz="2300" b="1">
+                  <a:solidFill>
+                    <a:srgbClr val="172554"/>
+                  </a:solidFill>
+                </a:defRPr>
+              </a:pPr>
+              <a:r>
+                <a:rPr lang="en-US" altLang="en-US" sz="1800" b="0">
+                  <a:solidFill>
+                    <a:srgbClr val="111827"/>
+                  </a:solidFill>
+                  <a:latin typeface="UCL Sans" pitchFamily="2" charset="77"/>
+                </a:rPr>
+                <a:t>If the ego vehicle considers </a:t>
+              </a:r>
+              <a:r>
+                <a:rPr lang="en-US" altLang="en-US" sz="1800">
+                  <a:solidFill>
+                    <a:srgbClr val="111827"/>
+                  </a:solidFill>
+                  <a:latin typeface="UCL Sans" pitchFamily="2" charset="77"/>
+                </a:rPr>
+                <a:t>multimodal predictions</a:t>
+              </a:r>
+              <a:r>
+                <a:rPr lang="en-US" altLang="en-US" sz="1800" b="0">
+                  <a:solidFill>
+                    <a:srgbClr val="111827"/>
+                  </a:solidFill>
+                  <a:latin typeface="UCL Sans" pitchFamily="2" charset="77"/>
+                </a:rPr>
+                <a:t> and allocates risk inside the controller (SMPC), then it should be safer and less over-confident than weaker baselines.</a:t>
+              </a:r>
+              <a:endParaRPr lang="en-US" altLang="en-US" sz="1800" b="0">
+                <a:solidFill>
+                  <a:srgbClr val="111827"/>
+                </a:solidFill>
+                <a:latin typeface="UCL Sans" pitchFamily="2" charset="77"/>
+              </a:endParaRPr>
+            </a:p>
+            <a:p>
+              <a:pPr algn="l">
+                <a:defRPr sz="2300" b="1">
+                  <a:solidFill>
+                    <a:srgbClr val="172554"/>
+                  </a:solidFill>
+                </a:defRPr>
+              </a:pPr>
+              <a:endParaRPr lang="en-US" altLang="en-US" sz="1800" b="0">
+                <a:solidFill>
+                  <a:srgbClr val="111827"/>
+                </a:solidFill>
+                <a:latin typeface="UCL Sans" pitchFamily="2" charset="77"/>
+              </a:endParaRPr>
+            </a:p>
+            <a:p>
+              <a:pPr algn="l">
+                <a:defRPr sz="2300" b="1">
+                  <a:solidFill>
+                    <a:srgbClr val="172554"/>
+                  </a:solidFill>
+                </a:defRPr>
+              </a:pPr>
+              <a:r>
+                <a:rPr lang="en-US" altLang="en-US" sz="1800" b="0">
+                  <a:solidFill>
+                    <a:srgbClr val="111827"/>
+                  </a:solidFill>
+                  <a:latin typeface="UCL Sans" pitchFamily="2" charset="77"/>
+                </a:rPr>
+                <a:t>Success criteria:</a:t>
+              </a:r>
+              <a:endParaRPr lang="en-US" altLang="en-US" sz="1800" b="0">
+                <a:solidFill>
+                  <a:srgbClr val="111827"/>
+                </a:solidFill>
+                <a:latin typeface="UCL Sans" pitchFamily="2" charset="77"/>
+              </a:endParaRPr>
+            </a:p>
+            <a:p>
+              <a:pPr marL="742950" lvl="1" indent="-285750" algn="l">
+                <a:buFont typeface="Arial" panose="020B0604020202090204" pitchFamily="34" charset="0"/>
+                <a:buChar char="•"/>
+                <a:defRPr sz="2300" b="1">
+                  <a:solidFill>
+                    <a:srgbClr val="172554"/>
+                  </a:solidFill>
+                </a:defRPr>
+              </a:pPr>
+              <a:r>
+                <a:rPr lang="en-US" altLang="en-US" sz="1800" b="0">
+                  <a:solidFill>
+                    <a:srgbClr val="111827"/>
+                  </a:solidFill>
+                  <a:latin typeface="UCL Sans" pitchFamily="2" charset="77"/>
+                </a:rPr>
+                <a:t>Higher minimum distance to the target vehicle.</a:t>
+              </a:r>
+              <a:endParaRPr lang="en-US" altLang="en-US" sz="1800" b="0">
+                <a:solidFill>
+                  <a:srgbClr val="111827"/>
+                </a:solidFill>
+                <a:latin typeface="UCL Sans" pitchFamily="2" charset="77"/>
+              </a:endParaRPr>
+            </a:p>
+            <a:p>
+              <a:pPr marL="742950" lvl="1" indent="-285750" algn="l">
+                <a:buFont typeface="Arial" panose="020B0604020202090204" pitchFamily="34" charset="0"/>
+                <a:buChar char="•"/>
+                <a:defRPr sz="2300" b="1">
+                  <a:solidFill>
+                    <a:srgbClr val="172554"/>
+                  </a:solidFill>
+                </a:defRPr>
+              </a:pPr>
+              <a:r>
+                <a:rPr lang="en-US" altLang="en-US" sz="1800" b="0">
+                  <a:solidFill>
+                    <a:srgbClr val="111827"/>
+                  </a:solidFill>
+                  <a:latin typeface="UCL Sans" pitchFamily="2" charset="77"/>
+                </a:rPr>
+                <a:t>High solver feasibility.</a:t>
+              </a:r>
+              <a:endParaRPr lang="en-US" altLang="en-US" sz="1800" b="0">
+                <a:solidFill>
+                  <a:srgbClr val="111827"/>
+                </a:solidFill>
+                <a:latin typeface="UCL Sans" pitchFamily="2" charset="77"/>
+              </a:endParaRPr>
+            </a:p>
+            <a:p>
+              <a:pPr marL="742950" lvl="1" indent="-285750" algn="l">
+                <a:buFont typeface="Arial" panose="020B0604020202090204" pitchFamily="34" charset="0"/>
+                <a:buChar char="•"/>
+                <a:defRPr sz="2300" b="1">
+                  <a:solidFill>
+                    <a:srgbClr val="172554"/>
+                  </a:solidFill>
+                </a:defRPr>
+              </a:pPr>
+              <a:r>
+                <a:rPr lang="en-US" altLang="en-US" sz="1800" b="0">
+                  <a:solidFill>
+                    <a:srgbClr val="111827"/>
+                  </a:solidFill>
+                  <a:latin typeface="UCL Sans" pitchFamily="2" charset="77"/>
+                </a:rPr>
+                <a:t>Reasonable completion time.</a:t>
+              </a:r>
+              <a:endParaRPr lang="en-US" altLang="en-US" sz="1800" b="0">
+                <a:solidFill>
+                  <a:srgbClr val="111827"/>
+                </a:solidFill>
+                <a:latin typeface="UCL Sans" pitchFamily="2" charset="77"/>
+              </a:endParaRPr>
+            </a:p>
+            <a:p>
+              <a:pPr marL="742950" lvl="1" indent="-285750" algn="l">
+                <a:buFont typeface="Arial" panose="020B0604020202090204" pitchFamily="34" charset="0"/>
+                <a:buChar char="•"/>
+                <a:defRPr sz="2300" b="1">
+                  <a:solidFill>
+                    <a:srgbClr val="172554"/>
+                  </a:solidFill>
+                </a:defRPr>
+              </a:pPr>
+              <a:r>
+                <a:rPr lang="en-US" altLang="en-US" sz="1800" b="0">
+                  <a:solidFill>
+                    <a:srgbClr val="111827"/>
+                  </a:solidFill>
+                  <a:latin typeface="UCL Sans" pitchFamily="2" charset="77"/>
+                </a:rPr>
+                <a:t>Smooth and stable control actions.</a:t>
+              </a:r>
+              <a:endParaRPr lang="en-US" altLang="en-US" sz="1800" b="0">
+                <a:solidFill>
+                  <a:srgbClr val="111827"/>
+                </a:solidFill>
+                <a:latin typeface="UCL Sans" pitchFamily="2" charset="77"/>
+              </a:endParaRPr>
+            </a:p>
+          </p:txBody>
+        </p:sp>
+      </p:grpSp>
     </p:spTree>
   </p:cSld>
   <p:clrMapOvr>
@@ -14924,7 +15778,14 @@
         <p:cNvGrpSpPr/>
         <p:nvPr/>
       </p:nvGrpSpPr>
-      <p:grpSpPr/>
+      <p:grpSpPr>
+        <a:xfrm>
+          <a:off x="0" y="0"/>
+          <a:ext cx="0" cy="0"/>
+          <a:chOff x="0" y="0"/>
+          <a:chExt cx="0" cy="0"/>
+        </a:xfrm>
+      </p:grpSpPr>
       <p:sp>
         <p:nvSpPr>
           <p:cNvPr id="2" name="Title 1"/>
@@ -14935,19 +15796,14 @@
             <p:ph type="ctrTitle"/>
           </p:nvPr>
         </p:nvSpPr>
-        <p:spPr>
-          <a:xfrm>
-            <a:off x="431800" y="409575"/>
-            <a:ext cx="7550785" cy="838835"/>
-          </a:xfrm>
-        </p:spPr>
+        <p:spPr/>
         <p:txBody>
           <a:bodyPr/>
+          <a:lstStyle/>
           <a:p>
             <a:r>
               <a:rPr lang="en-GB">
                 <a:latin typeface="UCL Sans SemiBold"/>
-                <a:sym typeface="+mn-ea"/>
               </a:rPr>
               <a:t>Execution plan</a:t>
             </a:r>
@@ -14955,9 +15811,461 @@
           </a:p>
         </p:txBody>
       </p:sp>
+      <p:grpSp>
+        <p:nvGrpSpPr>
+          <p:cNvPr id="8" name="Group 7"/>
+          <p:cNvGrpSpPr/>
+          <p:nvPr/>
+        </p:nvGrpSpPr>
+        <p:grpSpPr>
+          <a:xfrm>
+            <a:off x="1331595" y="3808730"/>
+            <a:ext cx="10694950" cy="2301875"/>
+            <a:chOff x="687" y="5337"/>
+            <a:chExt cx="17119" cy="3625"/>
+          </a:xfrm>
+        </p:grpSpPr>
+        <p:grpSp>
+          <p:nvGrpSpPr>
+            <p:cNvPr id="3" name="Group 2"/>
+            <p:cNvGrpSpPr/>
+            <p:nvPr/>
+          </p:nvGrpSpPr>
+          <p:grpSpPr>
+            <a:xfrm>
+              <a:off x="687" y="5337"/>
+              <a:ext cx="6834" cy="3322"/>
+              <a:chOff x="687" y="3824"/>
+              <a:chExt cx="6834" cy="3322"/>
+            </a:xfrm>
+          </p:grpSpPr>
+          <p:sp>
+            <p:nvSpPr>
+              <p:cNvPr id="4" name="Text Box 3"/>
+              <p:cNvSpPr txBox="1"/>
+              <p:nvPr/>
+            </p:nvSpPr>
+            <p:spPr>
+              <a:xfrm>
+                <a:off x="687" y="4776"/>
+                <a:ext cx="6834" cy="2370"/>
+              </a:xfrm>
+              <a:prstGeom prst="rect">
+                <a:avLst/>
+              </a:prstGeom>
+              <a:noFill/>
+            </p:spPr>
+            <p:txBody>
+              <a:bodyPr wrap="square" rtlCol="0" anchor="t">
+                <a:noAutofit/>
+              </a:bodyPr>
+              <a:p>
+                <a:pPr marL="285750" indent="-285750">
+                  <a:buFont typeface="Arial" panose="020B0604020202090204" pitchFamily="34" charset="0"/>
+                  <a:buChar char="•"/>
+                </a:pPr>
+                <a:r>
+                  <a:rPr lang="en-US" altLang="en-US" sz="1800">
+                    <a:solidFill>
+                      <a:srgbClr val="111827"/>
+                    </a:solidFill>
+                    <a:latin typeface="UCL Sans" pitchFamily="2" charset="77"/>
+                  </a:rPr>
+                  <a:t>No-TV baseline</a:t>
+                </a:r>
+                <a:r>
+                  <a:rPr lang="en-US" altLang="en-US" sz="1800">
+                    <a:solidFill>
+                      <a:srgbClr val="111827"/>
+                    </a:solidFill>
+                    <a:latin typeface="UCL Sans" pitchFamily="2" charset="77"/>
+                  </a:rPr>
+                  <a:t>s.</a:t>
+                </a:r>
+                <a:endParaRPr lang="en-US" altLang="en-US" sz="1800">
+                  <a:solidFill>
+                    <a:srgbClr val="111827"/>
+                  </a:solidFill>
+                  <a:latin typeface="UCL Sans" pitchFamily="2" charset="77"/>
+                </a:endParaRPr>
+              </a:p>
+              <a:p>
+                <a:pPr marL="742950" lvl="1" indent="-285750">
+                  <a:buFont typeface="Arial" panose="020B0604020202090204" pitchFamily="34" charset="0"/>
+                  <a:buChar char="•"/>
+                </a:pPr>
+                <a:r>
+                  <a:rPr lang="en-US" altLang="en-US" sz="1800">
+                    <a:solidFill>
+                      <a:srgbClr val="FF0000"/>
+                    </a:solidFill>
+                    <a:latin typeface="UCL Sans" pitchFamily="2" charset="77"/>
+                  </a:rPr>
+                  <a:t>ideal path and time</a:t>
+                </a:r>
+                <a:endParaRPr lang="en-US" altLang="en-US" sz="1800">
+                  <a:solidFill>
+                    <a:srgbClr val="FF0000"/>
+                  </a:solidFill>
+                  <a:latin typeface="UCL Sans" pitchFamily="2" charset="77"/>
+                </a:endParaRPr>
+              </a:p>
+              <a:p>
+                <a:pPr marL="285750" indent="-285750">
+                  <a:buFont typeface="Arial" panose="020B0604020202090204" pitchFamily="34" charset="0"/>
+                  <a:buChar char="•"/>
+                </a:pPr>
+                <a:r>
+                  <a:rPr lang="en-US" altLang="en-US" sz="1800">
+                    <a:solidFill>
+                      <a:srgbClr val="111827"/>
+                    </a:solidFill>
+                    <a:latin typeface="UCL Sans" pitchFamily="2" charset="77"/>
+                    <a:sym typeface="+mn-ea"/>
+                  </a:rPr>
+                  <a:t>Fixed-risk SMPC.</a:t>
+                </a:r>
+                <a:endParaRPr lang="en-US" altLang="en-US" sz="1800">
+                  <a:solidFill>
+                    <a:srgbClr val="111827"/>
+                  </a:solidFill>
+                  <a:latin typeface="UCL Sans" pitchFamily="2" charset="77"/>
+                </a:endParaRPr>
+              </a:p>
+              <a:p>
+                <a:pPr marL="742950" lvl="1" indent="-285750">
+                  <a:buFont typeface="Arial" panose="020B0604020202090204" pitchFamily="34" charset="0"/>
+                  <a:buChar char="•"/>
+                </a:pPr>
+                <a:r>
+                  <a:rPr lang="en-US" altLang="en-US" sz="1800">
+                    <a:solidFill>
+                      <a:srgbClr val="FF0000"/>
+                    </a:solidFill>
+                    <a:latin typeface="UCL Sans" pitchFamily="2" charset="77"/>
+                    <a:sym typeface="+mn-ea"/>
+                  </a:rPr>
+                  <a:t>basic uncertainty handling</a:t>
+                </a:r>
+                <a:endParaRPr lang="en-US" altLang="en-US" sz="1800">
+                  <a:solidFill>
+                    <a:srgbClr val="FF0000"/>
+                  </a:solidFill>
+                  <a:latin typeface="UCL Sans" pitchFamily="2" charset="77"/>
+                </a:endParaRPr>
+              </a:p>
+              <a:p>
+                <a:pPr marL="285750" indent="-285750">
+                  <a:buFont typeface="Arial" panose="020B0604020202090204" pitchFamily="34" charset="0"/>
+                  <a:buChar char="•"/>
+                </a:pPr>
+                <a:r>
+                  <a:rPr lang="en-US" altLang="en-US" sz="1800">
+                    <a:solidFill>
+                      <a:srgbClr val="111827"/>
+                    </a:solidFill>
+                    <a:latin typeface="UCL Sans" pitchFamily="2" charset="77"/>
+                  </a:rPr>
+                  <a:t>Variable-risk SMPC.</a:t>
+                </a:r>
+                <a:endParaRPr lang="en-US" altLang="en-US" sz="1800">
+                  <a:solidFill>
+                    <a:srgbClr val="111827"/>
+                  </a:solidFill>
+                  <a:latin typeface="UCL Sans" pitchFamily="2" charset="77"/>
+                </a:endParaRPr>
+              </a:p>
+              <a:p>
+                <a:pPr marL="742950" lvl="1" indent="-285750">
+                  <a:buFont typeface="Arial" panose="020B0604020202090204" pitchFamily="34" charset="0"/>
+                  <a:buChar char="•"/>
+                </a:pPr>
+                <a:r>
+                  <a:rPr lang="en-US" altLang="en-US" sz="1800">
+                    <a:solidFill>
+                      <a:srgbClr val="FF0000"/>
+                    </a:solidFill>
+                    <a:latin typeface="UCL Sans" pitchFamily="2" charset="77"/>
+                  </a:rPr>
+                  <a:t>adaptive risk allocation</a:t>
+                </a:r>
+                <a:endParaRPr lang="en-US" altLang="en-US" sz="1800">
+                  <a:solidFill>
+                    <a:srgbClr val="FF0000"/>
+                  </a:solidFill>
+                  <a:latin typeface="UCL Sans" pitchFamily="2" charset="77"/>
+                </a:endParaRPr>
+              </a:p>
+            </p:txBody>
+          </p:sp>
+          <p:sp>
+            <p:nvSpPr>
+              <p:cNvPr id="6" name="Rounded Rectangle 5"/>
+              <p:cNvSpPr/>
+              <p:nvPr/>
+            </p:nvSpPr>
+            <p:spPr>
+              <a:xfrm>
+                <a:off x="896" y="3824"/>
+                <a:ext cx="5589" cy="792"/>
+              </a:xfrm>
+              <a:prstGeom prst="roundRect">
+                <a:avLst/>
+              </a:prstGeom>
+              <a:solidFill>
+                <a:srgbClr val="DCFCE7"/>
+              </a:solidFill>
+              <a:ln>
+                <a:solidFill>
+                  <a:srgbClr val="16A34A"/>
+                </a:solidFill>
+              </a:ln>
+            </p:spPr>
+            <p:style>
+              <a:lnRef idx="1">
+                <a:schemeClr val="accent1"/>
+              </a:lnRef>
+              <a:fillRef idx="3">
+                <a:schemeClr val="accent1"/>
+              </a:fillRef>
+              <a:effectRef idx="2">
+                <a:schemeClr val="accent1"/>
+              </a:effectRef>
+              <a:fontRef idx="minor">
+                <a:schemeClr val="lt1"/>
+              </a:fontRef>
+            </p:style>
+            <p:txBody>
+              <a:bodyPr wrap="square" rtlCol="0" anchor="ctr"/>
+              <a:lstStyle/>
+              <a:p>
+                <a:pPr algn="ctr">
+                  <a:defRPr sz="1700" b="1">
+                    <a:solidFill>
+                      <a:srgbClr val="172554"/>
+                    </a:solidFill>
+                  </a:defRPr>
+                </a:pPr>
+                <a:r>
+                  <a:t>Testing: compare policies</a:t>
+                </a:r>
+                <a:endParaRPr lang="en-US"/>
+              </a:p>
+            </p:txBody>
+          </p:sp>
+        </p:grpSp>
+        <p:sp>
+          <p:nvSpPr>
+            <p:cNvPr id="5" name="Rounded Rectangle 4"/>
+            <p:cNvSpPr/>
+            <p:nvPr/>
+          </p:nvSpPr>
+          <p:spPr>
+            <a:xfrm>
+              <a:off x="8302" y="5337"/>
+              <a:ext cx="5688" cy="792"/>
+            </a:xfrm>
+            <a:prstGeom prst="roundRect">
+              <a:avLst/>
+            </a:prstGeom>
+            <a:solidFill>
+              <a:schemeClr val="accent6">
+                <a:lumMod val="20000"/>
+                <a:lumOff val="80000"/>
+              </a:schemeClr>
+            </a:solidFill>
+            <a:ln w="12700" cap="flat" cmpd="sng">
+              <a:solidFill>
+                <a:schemeClr val="accent6"/>
+              </a:solidFill>
+              <a:prstDash val="solid"/>
+              <a:miter lim="800000"/>
+            </a:ln>
+          </p:spPr>
+          <p:style>
+            <a:lnRef idx="1">
+              <a:schemeClr val="accent1"/>
+            </a:lnRef>
+            <a:fillRef idx="3">
+              <a:schemeClr val="accent1"/>
+            </a:fillRef>
+            <a:effectRef idx="2">
+              <a:schemeClr val="accent1"/>
+            </a:effectRef>
+            <a:fontRef idx="minor">
+              <a:schemeClr val="lt1"/>
+            </a:fontRef>
+          </p:style>
+          <p:txBody>
+            <a:bodyPr wrap="square" rtlCol="0" anchor="ctr"/>
+            <a:lstStyle/>
+            <a:p>
+              <a:pPr algn="ctr">
+                <a:defRPr sz="1700" b="1">
+                  <a:solidFill>
+                    <a:srgbClr val="172554"/>
+                  </a:solidFill>
+                </a:defRPr>
+              </a:pPr>
+              <a:r>
+                <a:t>Evaluation: use metrics</a:t>
+              </a:r>
+              <a:endParaRPr lang="en-US"/>
+            </a:p>
+          </p:txBody>
+        </p:sp>
+        <p:sp>
+          <p:nvSpPr>
+            <p:cNvPr id="7" name="Text Box 6"/>
+            <p:cNvSpPr txBox="1"/>
+            <p:nvPr/>
+          </p:nvSpPr>
+          <p:spPr>
+            <a:xfrm>
+              <a:off x="8206" y="6201"/>
+              <a:ext cx="9600" cy="2761"/>
+            </a:xfrm>
+            <a:prstGeom prst="rect">
+              <a:avLst/>
+            </a:prstGeom>
+            <a:noFill/>
+          </p:spPr>
+          <p:txBody>
+            <a:bodyPr wrap="square" rtlCol="0" anchor="t">
+              <a:spAutoFit/>
+            </a:bodyPr>
+            <a:p>
+              <a:pPr marL="285750" indent="-285750">
+                <a:buFont typeface="Arial" panose="020B0604020202090204" pitchFamily="34" charset="0"/>
+                <a:buChar char="•"/>
+              </a:pPr>
+              <a:r>
+                <a:rPr lang="en-US" altLang="en-US" sz="1800">
+                  <a:solidFill>
+                    <a:srgbClr val="111827"/>
+                  </a:solidFill>
+                  <a:latin typeface="UCL Sans" pitchFamily="2" charset="77"/>
+                </a:rPr>
+                <a:t>Completion time.</a:t>
+              </a:r>
+              <a:endParaRPr lang="en-US" altLang="en-US" sz="1800">
+                <a:solidFill>
+                  <a:srgbClr val="111827"/>
+                </a:solidFill>
+                <a:latin typeface="UCL Sans" pitchFamily="2" charset="77"/>
+              </a:endParaRPr>
+            </a:p>
+            <a:p>
+              <a:pPr marL="285750" indent="-285750">
+                <a:buFont typeface="Arial" panose="020B0604020202090204" pitchFamily="34" charset="0"/>
+                <a:buChar char="•"/>
+              </a:pPr>
+              <a:r>
+                <a:rPr lang="en-US" altLang="en-US" sz="1800">
+                  <a:solidFill>
+                    <a:srgbClr val="111827"/>
+                  </a:solidFill>
+                  <a:latin typeface="UCL Sans" pitchFamily="2" charset="77"/>
+                </a:rPr>
+                <a:t>Solver feasibility.</a:t>
+              </a:r>
+              <a:endParaRPr lang="en-US" altLang="en-US" sz="1800">
+                <a:solidFill>
+                  <a:srgbClr val="111827"/>
+                </a:solidFill>
+                <a:latin typeface="UCL Sans" pitchFamily="2" charset="77"/>
+              </a:endParaRPr>
+            </a:p>
+            <a:p>
+              <a:pPr marL="285750" indent="-285750">
+                <a:buFont typeface="Arial" panose="020B0604020202090204" pitchFamily="34" charset="0"/>
+                <a:buChar char="•"/>
+              </a:pPr>
+              <a:r>
+                <a:rPr lang="en-US" altLang="en-US" sz="1800">
+                  <a:solidFill>
+                    <a:srgbClr val="111827"/>
+                  </a:solidFill>
+                  <a:latin typeface="UCL Sans" pitchFamily="2" charset="77"/>
+                </a:rPr>
+                <a:t>Minimum distance to target vehicle.</a:t>
+              </a:r>
+              <a:endParaRPr lang="en-US" altLang="en-US" sz="1800">
+                <a:solidFill>
+                  <a:srgbClr val="111827"/>
+                </a:solidFill>
+                <a:latin typeface="UCL Sans" pitchFamily="2" charset="77"/>
+              </a:endParaRPr>
+            </a:p>
+            <a:p>
+              <a:pPr marL="285750" indent="-285750">
+                <a:buFont typeface="Arial" panose="020B0604020202090204" pitchFamily="34" charset="0"/>
+                <a:buChar char="•"/>
+              </a:pPr>
+              <a:r>
+                <a:rPr lang="en-US" altLang="en-US" sz="1800">
+                  <a:solidFill>
+                    <a:srgbClr val="111827"/>
+                  </a:solidFill>
+                  <a:latin typeface="UCL Sans" pitchFamily="2" charset="77"/>
+                </a:rPr>
+                <a:t>Path deviation.</a:t>
+              </a:r>
+              <a:endParaRPr lang="en-US" altLang="en-US" sz="1800">
+                <a:solidFill>
+                  <a:srgbClr val="111827"/>
+                </a:solidFill>
+                <a:latin typeface="UCL Sans" pitchFamily="2" charset="77"/>
+              </a:endParaRPr>
+            </a:p>
+            <a:p>
+              <a:pPr marL="285750" indent="-285750">
+                <a:buFont typeface="Arial" panose="020B0604020202090204" pitchFamily="34" charset="0"/>
+                <a:buChar char="•"/>
+              </a:pPr>
+              <a:r>
+                <a:rPr lang="en-US" altLang="en-US" sz="1800">
+                  <a:solidFill>
+                    <a:srgbClr val="111827"/>
+                  </a:solidFill>
+                  <a:latin typeface="UCL Sans" pitchFamily="2" charset="77"/>
+                </a:rPr>
+                <a:t>Comfort / jerk.</a:t>
+              </a:r>
+              <a:endParaRPr lang="en-US" altLang="en-US" sz="1800">
+                <a:solidFill>
+                  <a:srgbClr val="111827"/>
+                </a:solidFill>
+                <a:latin typeface="UCL Sans" pitchFamily="2" charset="77"/>
+              </a:endParaRPr>
+            </a:p>
+            <a:p>
+              <a:pPr marL="285750" indent="-285750">
+                <a:buFont typeface="Arial" panose="020B0604020202090204" pitchFamily="34" charset="0"/>
+                <a:buChar char="•"/>
+              </a:pPr>
+              <a:r>
+                <a:rPr lang="en-US" altLang="en-US" sz="1800">
+                  <a:solidFill>
+                    <a:srgbClr val="111827"/>
+                  </a:solidFill>
+                  <a:latin typeface="UCL Sans" pitchFamily="2" charset="77"/>
+                </a:rPr>
+                <a:t>Solve time.</a:t>
+              </a:r>
+              <a:endParaRPr lang="en-US" altLang="en-US" sz="1800">
+                <a:solidFill>
+                  <a:srgbClr val="111827"/>
+                </a:solidFill>
+                <a:latin typeface="UCL Sans" pitchFamily="2" charset="77"/>
+              </a:endParaRPr>
+            </a:p>
+          </p:txBody>
+        </p:sp>
+      </p:grpSp>
       <p:pic>
         <p:nvPicPr>
-          <p:cNvPr id="22" name="Picture 21"/>
+          <p:cNvPr id="16" name="Picture 15"/>
           <p:cNvPicPr>
             <a:picLocks noChangeAspect="1"/>
           </p:cNvPicPr>
@@ -14971,14 +16279,64 @@
         </p:blipFill>
         <p:spPr>
           <a:xfrm>
-            <a:off x="198120" y="1449070"/>
-            <a:ext cx="11729085" cy="4269105"/>
+            <a:off x="341630" y="1430655"/>
+            <a:ext cx="11469370" cy="1636395"/>
           </a:xfrm>
           <a:prstGeom prst="rect">
             <a:avLst/>
           </a:prstGeom>
         </p:spPr>
       </p:pic>
+      <p:sp>
+        <p:nvSpPr>
+          <p:cNvPr id="22" name="Text Box 21"/>
+          <p:cNvSpPr txBox="1"/>
+          <p:nvPr/>
+        </p:nvSpPr>
+        <p:spPr>
+          <a:xfrm>
+            <a:off x="-456565" y="6524625"/>
+            <a:ext cx="12672695" cy="306705"/>
+          </a:xfrm>
+          <a:prstGeom prst="rect">
+            <a:avLst/>
+          </a:prstGeom>
+          <a:noFill/>
+        </p:spPr>
+        <p:txBody>
+          <a:bodyPr wrap="square" rtlCol="0" anchor="t">
+            <a:spAutoFit/>
+          </a:bodyPr>
+          <a:p>
+            <a:pPr lvl="1" indent="0" algn="l">
+              <a:buFont typeface="Arial" panose="020B0604020202090204" pitchFamily="34" charset="0"/>
+              <a:buNone/>
+              <a:defRPr sz="2300" b="1">
+                <a:solidFill>
+                  <a:srgbClr val="172554"/>
+                </a:solidFill>
+              </a:defRPr>
+            </a:pPr>
+            <a:r>
+              <a:rPr lang="en-US" altLang="en-US" sz="1400">
+                <a:solidFill>
+                  <a:srgbClr val="111827"/>
+                </a:solidFill>
+                <a:latin typeface="UCL Sans" pitchFamily="2" charset="77"/>
+                <a:sym typeface="+mn-ea"/>
+              </a:rPr>
+              <a:t>GMM: Gaussian Mixture Model; represents target-vehicle futures as weighted trajectories with probability, mean, and covariance</a:t>
+            </a:r>
+            <a:endParaRPr lang="en-US" altLang="en-US" sz="1400">
+              <a:solidFill>
+                <a:srgbClr val="111827"/>
+              </a:solidFill>
+              <a:latin typeface="UCL Sans" pitchFamily="2" charset="77"/>
+              <a:sym typeface="+mn-ea"/>
+            </a:endParaRPr>
+          </a:p>
+        </p:txBody>
+      </p:sp>
     </p:spTree>
   </p:cSld>
   <p:clrMapOvr>
@@ -14996,14 +16354,7 @@
         <p:cNvGrpSpPr/>
         <p:nvPr/>
       </p:nvGrpSpPr>
-      <p:grpSpPr>
-        <a:xfrm>
-          <a:off x="0" y="0"/>
-          <a:ext cx="0" cy="0"/>
-          <a:chOff x="0" y="0"/>
-          <a:chExt cx="0" cy="0"/>
-        </a:xfrm>
-      </p:grpSpPr>
+      <p:grpSpPr/>
       <p:sp>
         <p:nvSpPr>
           <p:cNvPr id="2" name="Title 1"/>
@@ -15014,463 +16365,50 @@
             <p:ph type="ctrTitle"/>
           </p:nvPr>
         </p:nvSpPr>
-        <p:spPr/>
+        <p:spPr>
+          <a:xfrm>
+            <a:off x="431800" y="409575"/>
+            <a:ext cx="7550785" cy="838835"/>
+          </a:xfrm>
+        </p:spPr>
         <p:txBody>
           <a:bodyPr/>
-          <a:lstStyle/>
           <a:p>
             <a:r>
               <a:rPr lang="en-GB">
                 <a:latin typeface="UCL Sans SemiBold"/>
+                <a:sym typeface="+mn-ea"/>
               </a:rPr>
-              <a:t>Risk analysis</a:t>
+              <a:t>Execution plan</a:t>
             </a:r>
             <a:endParaRPr lang="en-US"/>
           </a:p>
         </p:txBody>
       </p:sp>
-      <p:graphicFrame>
-        <p:nvGraphicFramePr>
-          <p:cNvPr id="4" name="Table 3"/>
-          <p:cNvGraphicFramePr>
-            <a:graphicFrameLocks noGrp="1"/>
-          </p:cNvGraphicFramePr>
+      <p:pic>
+        <p:nvPicPr>
+          <p:cNvPr id="22" name="Picture 21"/>
+          <p:cNvPicPr>
+            <a:picLocks noChangeAspect="1"/>
+          </p:cNvPicPr>
           <p:nvPr/>
-        </p:nvGraphicFramePr>
-        <p:xfrm>
-          <a:off x="904240" y="1579880"/>
-          <a:ext cx="10193020" cy="2673350"/>
-        </p:xfrm>
-        <a:graphic>
-          <a:graphicData uri="http://schemas.openxmlformats.org/drawingml/2006/table">
-            <a:tbl>
-              <a:tblPr firstRow="1" bandRow="1">
-                <a:tableStyleId>{5C22544A-7EE6-4342-B048-85BDC9FD1C3A}</a:tableStyleId>
-              </a:tblPr>
-              <a:tblGrid>
-                <a:gridCol w="2633980"/>
-                <a:gridCol w="3665220"/>
-                <a:gridCol w="3893820"/>
-              </a:tblGrid>
-              <a:tr h="534670">
-                <a:tc>
-                  <a:txBody>
-                    <a:bodyPr/>
-                    <a:lstStyle/>
-                    <a:p>
-                      <a:pPr algn="ctr">
-                        <a:defRPr sz="1200" b="1">
-                          <a:solidFill>
-                            <a:srgbClr val="FFFFFF"/>
-                          </a:solidFill>
-                        </a:defRPr>
-                      </a:pPr>
-                      <a:r>
-                        <a:t>Risk</a:t>
-                      </a:r>
-                    </a:p>
-                  </a:txBody>
-                  <a:tcPr marL="36576" marR="36576" anchor="ctr">
-                    <a:solidFill>
-                      <a:srgbClr val="172554"/>
-                    </a:solidFill>
-                  </a:tcPr>
-                </a:tc>
-                <a:tc>
-                  <a:txBody>
-                    <a:bodyPr/>
-                    <a:lstStyle/>
-                    <a:p>
-                      <a:pPr algn="ctr">
-                        <a:defRPr sz="1200" b="1">
-                          <a:solidFill>
-                            <a:srgbClr val="FFFFFF"/>
-                          </a:solidFill>
-                        </a:defRPr>
-                      </a:pPr>
-                      <a:r>
-                        <a:t>Why it matters</a:t>
-                      </a:r>
-                    </a:p>
-                  </a:txBody>
-                  <a:tcPr marL="36576" marR="36576" anchor="ctr">
-                    <a:solidFill>
-                      <a:srgbClr val="172554"/>
-                    </a:solidFill>
-                  </a:tcPr>
-                </a:tc>
-                <a:tc>
-                  <a:txBody>
-                    <a:bodyPr/>
-                    <a:lstStyle/>
-                    <a:p>
-                      <a:pPr algn="ctr">
-                        <a:defRPr sz="1200" b="1">
-                          <a:solidFill>
-                            <a:srgbClr val="FFFFFF"/>
-                          </a:solidFill>
-                        </a:defRPr>
-                      </a:pPr>
-                      <a:r>
-                        <a:t>My response</a:t>
-                      </a:r>
-                    </a:p>
-                  </a:txBody>
-                  <a:tcPr marL="36576" marR="36576" anchor="ctr">
-                    <a:solidFill>
-                      <a:srgbClr val="172554"/>
-                    </a:solidFill>
-                  </a:tcPr>
-                </a:tc>
-              </a:tr>
-              <a:tr h="534670">
-                <a:tc>
-                  <a:txBody>
-                    <a:bodyPr/>
-                    <a:lstStyle/>
-                    <a:p>
-                      <a:pPr algn="ctr">
-                        <a:defRPr sz="1200">
-                          <a:solidFill>
-                            <a:srgbClr val="111827"/>
-                          </a:solidFill>
-                        </a:defRPr>
-                      </a:pPr>
-                      <a:r>
-                        <a:t>Simulator is slow</a:t>
-                      </a:r>
-                    </a:p>
-                  </a:txBody>
-                  <a:tcPr marL="36576" marR="36576" anchor="ctr">
-                    <a:solidFill>
-                      <a:srgbClr val="FFFFFF"/>
-                    </a:solidFill>
-                  </a:tcPr>
-                </a:tc>
-                <a:tc>
-                  <a:txBody>
-                    <a:bodyPr/>
-                    <a:lstStyle/>
-                    <a:p>
-                      <a:pPr algn="ctr">
-                        <a:defRPr sz="1200">
-                          <a:solidFill>
-                            <a:srgbClr val="111827"/>
-                          </a:solidFill>
-                        </a:defRPr>
-                      </a:pPr>
-                      <a:r>
-                        <a:t>Experiments take time</a:t>
-                      </a:r>
-                    </a:p>
-                  </a:txBody>
-                  <a:tcPr marL="36576" marR="36576" anchor="ctr">
-                    <a:solidFill>
-                      <a:srgbClr val="FFFFFF"/>
-                    </a:solidFill>
-                  </a:tcPr>
-                </a:tc>
-                <a:tc>
-                  <a:txBody>
-                    <a:bodyPr/>
-                    <a:lstStyle/>
-                    <a:p>
-                      <a:pPr algn="ctr">
-                        <a:defRPr sz="1200">
-                          <a:solidFill>
-                            <a:srgbClr val="111827"/>
-                          </a:solidFill>
-                        </a:defRPr>
-                      </a:pPr>
-                      <a:r>
-                        <a:t>Run small pilots first</a:t>
-                      </a:r>
-                    </a:p>
-                  </a:txBody>
-                  <a:tcPr marL="36576" marR="36576" anchor="ctr">
-                    <a:solidFill>
-                      <a:srgbClr val="FFFFFF"/>
-                    </a:solidFill>
-                  </a:tcPr>
-                </a:tc>
-              </a:tr>
-              <a:tr h="534670">
-                <a:tc>
-                  <a:txBody>
-                    <a:bodyPr/>
-                    <a:lstStyle/>
-                    <a:p>
-                      <a:pPr algn="ctr">
-                        <a:defRPr sz="1200">
-                          <a:solidFill>
-                            <a:srgbClr val="111827"/>
-                          </a:solidFill>
-                        </a:defRPr>
-                      </a:pPr>
-                      <a:r>
-                        <a:t>Planner fails</a:t>
-                      </a:r>
-                    </a:p>
-                  </a:txBody>
-                  <a:tcPr marL="36576" marR="36576" anchor="ctr">
-                    <a:solidFill>
-                      <a:srgbClr val="F3F4F6"/>
-                    </a:solidFill>
-                  </a:tcPr>
-                </a:tc>
-                <a:tc>
-                  <a:txBody>
-                    <a:bodyPr/>
-                    <a:lstStyle/>
-                    <a:p>
-                      <a:pPr algn="ctr">
-                        <a:defRPr sz="1200">
-                          <a:solidFill>
-                            <a:srgbClr val="111827"/>
-                          </a:solidFill>
-                        </a:defRPr>
-                      </a:pPr>
-                      <a:r>
-                        <a:t>Car may not move safely</a:t>
-                      </a:r>
-                    </a:p>
-                  </a:txBody>
-                  <a:tcPr marL="36576" marR="36576" anchor="ctr">
-                    <a:solidFill>
-                      <a:srgbClr val="F3F4F6"/>
-                    </a:solidFill>
-                  </a:tcPr>
-                </a:tc>
-                <a:tc>
-                  <a:txBody>
-                    <a:bodyPr/>
-                    <a:lstStyle/>
-                    <a:p>
-                      <a:pPr algn="ctr">
-                        <a:defRPr sz="1200">
-                          <a:solidFill>
-                            <a:srgbClr val="111827"/>
-                          </a:solidFill>
-                        </a:defRPr>
-                      </a:pPr>
-                      <a:r>
-                        <a:t>Save debug files</a:t>
-                      </a:r>
-                    </a:p>
-                  </a:txBody>
-                  <a:tcPr marL="36576" marR="36576" anchor="ctr">
-                    <a:solidFill>
-                      <a:srgbClr val="F3F4F6"/>
-                    </a:solidFill>
-                  </a:tcPr>
-                </a:tc>
-              </a:tr>
-              <a:tr h="534670">
-                <a:tc>
-                  <a:txBody>
-                    <a:bodyPr/>
-                    <a:lstStyle/>
-                    <a:p>
-                      <a:pPr algn="ctr">
-                        <a:defRPr sz="1200">
-                          <a:solidFill>
-                            <a:srgbClr val="111827"/>
-                          </a:solidFill>
-                        </a:defRPr>
-                      </a:pPr>
-                      <a:r>
-                        <a:t>Path is not neat</a:t>
-                      </a:r>
-                    </a:p>
-                  </a:txBody>
-                  <a:tcPr marL="36576" marR="36576" anchor="ctr">
-                    <a:solidFill>
-                      <a:srgbClr val="FFFFFF"/>
-                    </a:solidFill>
-                  </a:tcPr>
-                </a:tc>
-                <a:tc>
-                  <a:txBody>
-                    <a:bodyPr/>
-                    <a:lstStyle/>
-                    <a:p>
-                      <a:pPr algn="ctr">
-                        <a:defRPr sz="1200">
-                          <a:solidFill>
-                            <a:srgbClr val="111827"/>
-                          </a:solidFill>
-                        </a:defRPr>
-                      </a:pPr>
-                      <a:r>
-                        <a:t>Results look weak</a:t>
-                      </a:r>
-                    </a:p>
-                  </a:txBody>
-                  <a:tcPr marL="36576" marR="36576" anchor="ctr">
-                    <a:solidFill>
-                      <a:srgbClr val="FFFFFF"/>
-                    </a:solidFill>
-                  </a:tcPr>
-                </a:tc>
-                <a:tc>
-                  <a:txBody>
-                    <a:bodyPr/>
-                    <a:lstStyle/>
-                    <a:p>
-                      <a:pPr algn="ctr">
-                        <a:defRPr sz="1200">
-                          <a:solidFill>
-                            <a:srgbClr val="111827"/>
-                          </a:solidFill>
-                        </a:defRPr>
-                      </a:pPr>
-                      <a:r>
-                        <a:t>Tune tracking</a:t>
-                      </a:r>
-                    </a:p>
-                  </a:txBody>
-                  <a:tcPr marL="36576" marR="36576" anchor="ctr">
-                    <a:solidFill>
-                      <a:srgbClr val="FFFFFF"/>
-                    </a:solidFill>
-                  </a:tcPr>
-                </a:tc>
-              </a:tr>
-              <a:tr h="534670">
-                <a:tc>
-                  <a:txBody>
-                    <a:bodyPr/>
-                    <a:lstStyle/>
-                    <a:p>
-                      <a:pPr algn="ctr">
-                        <a:defRPr sz="1200">
-                          <a:solidFill>
-                            <a:srgbClr val="111827"/>
-                          </a:solidFill>
-                        </a:defRPr>
-                      </a:pPr>
-                      <a:r>
-                        <a:t>Too few tests</a:t>
-                      </a:r>
-                    </a:p>
-                  </a:txBody>
-                  <a:tcPr marL="36576" marR="36576" anchor="ctr">
-                    <a:solidFill>
-                      <a:srgbClr val="F3F4F6"/>
-                    </a:solidFill>
-                  </a:tcPr>
-                </a:tc>
-                <a:tc>
-                  <a:txBody>
-                    <a:bodyPr/>
-                    <a:lstStyle/>
-                    <a:p>
-                      <a:pPr algn="ctr">
-                        <a:defRPr sz="1200">
-                          <a:solidFill>
-                            <a:srgbClr val="111827"/>
-                          </a:solidFill>
-                        </a:defRPr>
-                      </a:pPr>
-                      <a:r>
-                        <a:t>Claims are not strong</a:t>
-                      </a:r>
-                    </a:p>
-                  </a:txBody>
-                  <a:tcPr marL="36576" marR="36576" anchor="ctr">
-                    <a:solidFill>
-                      <a:srgbClr val="F3F4F6"/>
-                    </a:solidFill>
-                  </a:tcPr>
-                </a:tc>
-                <a:tc>
-                  <a:txBody>
-                    <a:bodyPr/>
-                    <a:lstStyle/>
-                    <a:p>
-                      <a:pPr algn="ctr">
-                        <a:defRPr sz="1200">
-                          <a:solidFill>
-                            <a:srgbClr val="111827"/>
-                          </a:solidFill>
-                        </a:defRPr>
-                      </a:pPr>
-                      <a:r>
-                        <a:t>Scale gradually</a:t>
-                      </a:r>
-                    </a:p>
-                  </a:txBody>
-                  <a:tcPr marL="36576" marR="36576" anchor="ctr">
-                    <a:solidFill>
-                      <a:srgbClr val="F3F4F6"/>
-                    </a:solidFill>
-                  </a:tcPr>
-                </a:tc>
-              </a:tr>
-            </a:tbl>
-          </a:graphicData>
-        </a:graphic>
-      </p:graphicFrame>
-      <p:sp>
-        <p:nvSpPr>
-          <p:cNvPr id="5" name="Rounded Rectangle 4"/>
-          <p:cNvSpPr/>
-          <p:nvPr/>
-        </p:nvSpPr>
-        <p:spPr>
-          <a:xfrm>
-            <a:off x="868680" y="4663440"/>
-            <a:ext cx="10241280" cy="960120"/>
-          </a:xfrm>
-          <a:prstGeom prst="roundRect">
-            <a:avLst/>
-          </a:prstGeom>
-          <a:solidFill>
-            <a:srgbClr val="FFEDD5"/>
-          </a:solidFill>
-          <a:ln>
-            <a:solidFill>
-              <a:srgbClr val="F97316"/>
-            </a:solidFill>
-          </a:ln>
-        </p:spPr>
-        <p:style>
-          <a:lnRef idx="1">
-            <a:schemeClr val="accent1"/>
-          </a:lnRef>
-          <a:fillRef idx="3">
-            <a:schemeClr val="accent1"/>
-          </a:fillRef>
-          <a:effectRef idx="2">
-            <a:schemeClr val="accent1"/>
-          </a:effectRef>
-          <a:fontRef idx="minor">
-            <a:schemeClr val="lt1"/>
-          </a:fontRef>
-        </p:style>
-        <p:txBody>
-          <a:bodyPr wrap="square" lIns="164592" tIns="91440" rIns="164592" bIns="73152" rtlCol="0" anchor="ctr"/>
-          <a:lstStyle/>
-          <a:p>
-            <a:pPr algn="l">
-              <a:defRPr sz="1500">
-                <a:solidFill>
-                  <a:srgbClr val="111827"/>
-                </a:solidFill>
-              </a:defRPr>
-            </a:pPr>
-            <a:r>
-              <a:rPr sz="1800">
-                <a:latin typeface="UCL Sans" pitchFamily="2" charset="77"/>
-              </a:rPr>
-              <a:t>The biggest risk is not only whether the car can finish once. I also need to show that it can finish reliably, with a reasonable path, across more starting conditions. This is why I am using small pilots before full experiments.</a:t>
-            </a:r>
-            <a:endParaRPr sz="1800">
-              <a:latin typeface="UCL Sans" pitchFamily="2" charset="77"/>
-            </a:endParaRPr>
-          </a:p>
-        </p:txBody>
-      </p:sp>
+        </p:nvPicPr>
+        <p:blipFill>
+          <a:blip r:embed="rId1"/>
+          <a:stretch>
+            <a:fillRect/>
+          </a:stretch>
+        </p:blipFill>
+        <p:spPr>
+          <a:xfrm>
+            <a:off x="198120" y="1449070"/>
+            <a:ext cx="11729085" cy="4269105"/>
+          </a:xfrm>
+          <a:prstGeom prst="rect">
+            <a:avLst/>
+          </a:prstGeom>
+        </p:spPr>
+      </p:pic>
     </p:spTree>
   </p:cSld>
   <p:clrMapOvr>
@@ -16600,8 +17538,8 @@
 </file>
 
 <file path=customXml/item1.xml><?xml version="1.0" encoding="utf-8"?>
-<ct:contentTypeSchema xmlns:ct="http://schemas.microsoft.com/office/2006/metadata/contentType" xmlns:ma="http://schemas.microsoft.com/office/2006/metadata/properties/metaAttributes" ct:_="" ma:_="" ma:contentTypeID="0x010100A12A0662030DBC4F99C1FA9D93D14A4C" ma:contentTypeName="Document" ma:contentTypeVersion="" ma:contentTypeDescription="Create a new document." ma:contentTypeScope="" ma:versionID="601ee87aba0edee35dd0bd1031319f69">
-  <xsd:schema xmlns:ns2="1d368349-1023-48e7-96c9-f9d028f6f0fb" xmlns:ns3="1aa119c2-5735-4356-91ec-0ca074bf9097" xmlns:ns4="32f397aa-99c0-43f4-9b94-7b5d785faf95" xmlns:xsd="http://www.w3.org/2001/XMLSchema" xmlns:p="http://schemas.microsoft.com/office/2006/metadata/properties" xmlns:xs="http://www.w3.org/2001/XMLSchema" ma:root="true" ns2:_="" ns4:_="" ns3:_="" targetNamespace="http://schemas.microsoft.com/office/2006/metadata/properties" ma:fieldsID="ceaa2ff74debb88eeec5ab219e85c5f9">
+<ct:contentTypeSchema xmlns:ct="http://schemas.microsoft.com/office/2006/metadata/contentType" xmlns:ma="http://schemas.microsoft.com/office/2006/metadata/properties/metaAttributes" ma:_="" ma:contentTypeName="Document" ma:contentTypeID="0x010100A12A0662030DBC4F99C1FA9D93D14A4C" ma:versionID="601ee87aba0edee35dd0bd1031319f69" ma:contentTypeDescription="Create a new document." ma:contentTypeVersion="" ct:_="" ma:contentTypeScope="">
+  <xsd:schema xmlns:p="http://schemas.microsoft.com/office/2006/metadata/properties" xmlns:ns2="1d368349-1023-48e7-96c9-f9d028f6f0fb" xmlns:ns3="1aa119c2-5735-4356-91ec-0ca074bf9097" xmlns:ns4="32f397aa-99c0-43f4-9b94-7b5d785faf95" xmlns:xsd="http://www.w3.org/2001/XMLSchema" xmlns:xs="http://www.w3.org/2001/XMLSchema" ma:root="true" ns2:_="" ns4:_="" targetNamespace="http://schemas.microsoft.com/office/2006/metadata/properties" ns3:_="" ma:fieldsID="ceaa2ff74debb88eeec5ab219e85c5f9">
     <xsd:import namespace="1d368349-1023-48e7-96c9-f9d028f6f0fb"/>
     <xsd:import namespace="1aa119c2-5735-4356-91ec-0ca074bf9097"/>
     <xsd:import namespace="32f397aa-99c0-43f4-9b94-7b5d785faf95"/>
@@ -16611,23 +17549,23 @@
           <xsd:element name="documentManagement">
             <xsd:complexType>
               <xsd:all>
-                <xsd:element ref="ns2:MediaServiceMetadata" minOccurs="0"/>
-                <xsd:element ref="ns2:MediaServiceFastMetadata" minOccurs="0"/>
-                <xsd:element ref="ns2:MediaServiceAutoKeyPoints" minOccurs="0"/>
-                <xsd:element ref="ns2:MediaServiceKeyPoints" minOccurs="0"/>
-                <xsd:element ref="ns2:MediaServiceAutoTags" minOccurs="0"/>
-                <xsd:element ref="ns2:MediaServiceOCR" minOccurs="0"/>
-                <xsd:element ref="ns2:MediaServiceGenerationTime" minOccurs="0"/>
-                <xsd:element ref="ns2:MediaServiceEventHashCode" minOccurs="0"/>
-                <xsd:element ref="ns2:MediaServiceDateTaken" minOccurs="0"/>
-                <xsd:element ref="ns3:SharedWithUsers" minOccurs="0"/>
-                <xsd:element ref="ns3:SharedWithDetails" minOccurs="0"/>
-                <xsd:element ref="ns2:MediaServiceLocation" minOccurs="0"/>
-                <xsd:element ref="ns2:MediaLengthInSeconds" minOccurs="0"/>
-                <xsd:element ref="ns2:lcf76f155ced4ddcb4097134ff3c332f" minOccurs="0"/>
-                <xsd:element ref="ns4:TaxCatchAll" minOccurs="0"/>
-                <xsd:element ref="ns2:MediaServiceObjectDetectorVersions" minOccurs="0"/>
-                <xsd:element ref="ns2:MediaServiceSearchProperties" minOccurs="0"/>
+                <xsd:element minOccurs="0" ref="ns2:MediaServiceMetadata"/>
+                <xsd:element minOccurs="0" ref="ns2:MediaServiceFastMetadata"/>
+                <xsd:element minOccurs="0" ref="ns2:MediaServiceAutoKeyPoints"/>
+                <xsd:element minOccurs="0" ref="ns2:MediaServiceKeyPoints"/>
+                <xsd:element minOccurs="0" ref="ns2:MediaServiceAutoTags"/>
+                <xsd:element minOccurs="0" ref="ns2:MediaServiceOCR"/>
+                <xsd:element minOccurs="0" ref="ns2:MediaServiceGenerationTime"/>
+                <xsd:element minOccurs="0" ref="ns2:MediaServiceEventHashCode"/>
+                <xsd:element minOccurs="0" ref="ns2:MediaServiceDateTaken"/>
+                <xsd:element minOccurs="0" ref="ns3:SharedWithUsers"/>
+                <xsd:element minOccurs="0" ref="ns3:SharedWithDetails"/>
+                <xsd:element minOccurs="0" ref="ns2:MediaServiceLocation"/>
+                <xsd:element minOccurs="0" ref="ns2:MediaLengthInSeconds"/>
+                <xsd:element minOccurs="0" ref="ns2:lcf76f155ced4ddcb4097134ff3c332f"/>
+                <xsd:element minOccurs="0" ref="ns4:TaxCatchAll"/>
+                <xsd:element minOccurs="0" ref="ns2:MediaServiceObjectDetectorVersions"/>
+                <xsd:element minOccurs="0" ref="ns2:MediaServiceSearchProperties"/>
               </xsd:all>
             </xsd:complexType>
           </xsd:element>
@@ -16635,100 +17573,100 @@
       </xsd:complexType>
     </xsd:element>
   </xsd:schema>
-  <xsd:schema xmlns:xsd="http://www.w3.org/2001/XMLSchema" xmlns:pc="http://schemas.microsoft.com/office/infopath/2007/PartnerControls" xmlns:dms="http://schemas.microsoft.com/office/2006/documentManagement/types" xmlns:xs="http://www.w3.org/2001/XMLSchema" elementFormDefault="qualified" targetNamespace="1d368349-1023-48e7-96c9-f9d028f6f0fb">
+  <xsd:schema xmlns:pc="http://schemas.microsoft.com/office/infopath/2007/PartnerControls" xmlns:xsd="http://www.w3.org/2001/XMLSchema" xmlns:xs="http://www.w3.org/2001/XMLSchema" xmlns:dms="http://schemas.microsoft.com/office/2006/documentManagement/types" elementFormDefault="qualified" targetNamespace="1d368349-1023-48e7-96c9-f9d028f6f0fb">
     <xsd:import namespace="http://schemas.microsoft.com/office/2006/documentManagement/types"/>
     <xsd:import namespace="http://schemas.microsoft.com/office/infopath/2007/PartnerControls"/>
-    <xsd:element nillable="true" ma:hidden="true" name="MediaServiceMetadata" ma:index="8" ma:internalName="MediaServiceMetadata" ma:readOnly="true" ma:displayName="MediaServiceMetadata">
+    <xsd:element ma:hidden="true" ma:index="8" ma:internalName="MediaServiceMetadata" name="MediaServiceMetadata" ma:displayName="MediaServiceMetadata" ma:readOnly="true" nillable="true">
       <xsd:simpleType>
         <xsd:restriction base="dms:Note"/>
       </xsd:simpleType>
     </xsd:element>
-    <xsd:element nillable="true" ma:hidden="true" name="MediaServiceFastMetadata" ma:index="9" ma:internalName="MediaServiceFastMetadata" ma:readOnly="true" ma:displayName="MediaServiceFastMetadata">
+    <xsd:element ma:hidden="true" ma:index="9" ma:internalName="MediaServiceFastMetadata" name="MediaServiceFastMetadata" ma:displayName="MediaServiceFastMetadata" ma:readOnly="true" nillable="true">
       <xsd:simpleType>
         <xsd:restriction base="dms:Note"/>
       </xsd:simpleType>
     </xsd:element>
-    <xsd:element nillable="true" ma:hidden="true" name="MediaServiceAutoKeyPoints" ma:index="10" ma:internalName="MediaServiceAutoKeyPoints" ma:readOnly="true" ma:displayName="MediaServiceAutoKeyPoints">
+    <xsd:element ma:hidden="true" ma:index="10" ma:internalName="MediaServiceAutoKeyPoints" name="MediaServiceAutoKeyPoints" ma:displayName="MediaServiceAutoKeyPoints" ma:readOnly="true" nillable="true">
       <xsd:simpleType>
         <xsd:restriction base="dms:Note"/>
       </xsd:simpleType>
     </xsd:element>
-    <xsd:element nillable="true" name="MediaServiceKeyPoints" ma:index="11" ma:internalName="MediaServiceKeyPoints" ma:readOnly="true" ma:displayName="KeyPoints">
+    <xsd:element ma:index="11" ma:internalName="MediaServiceKeyPoints" name="MediaServiceKeyPoints" ma:displayName="KeyPoints" ma:readOnly="true" nillable="true">
       <xsd:simpleType>
         <xsd:restriction base="dms:Note">
           <xsd:maxLength value="255"/>
         </xsd:restriction>
       </xsd:simpleType>
     </xsd:element>
-    <xsd:element nillable="true" name="MediaServiceAutoTags" ma:index="12" ma:internalName="MediaServiceAutoTags" ma:readOnly="true" ma:displayName="Tags">
+    <xsd:element ma:index="12" ma:internalName="MediaServiceAutoTags" name="MediaServiceAutoTags" ma:displayName="Tags" ma:readOnly="true" nillable="true">
       <xsd:simpleType>
         <xsd:restriction base="dms:Text"/>
       </xsd:simpleType>
     </xsd:element>
-    <xsd:element nillable="true" name="MediaServiceOCR" ma:index="13" ma:internalName="MediaServiceOCR" ma:readOnly="true" ma:displayName="Extracted Text">
+    <xsd:element ma:index="13" ma:internalName="MediaServiceOCR" name="MediaServiceOCR" ma:displayName="Extracted Text" ma:readOnly="true" nillable="true">
       <xsd:simpleType>
         <xsd:restriction base="dms:Note">
           <xsd:maxLength value="255"/>
         </xsd:restriction>
       </xsd:simpleType>
     </xsd:element>
-    <xsd:element nillable="true" ma:hidden="true" name="MediaServiceGenerationTime" ma:index="14" ma:internalName="MediaServiceGenerationTime" ma:readOnly="true" ma:displayName="MediaServiceGenerationTime">
+    <xsd:element ma:hidden="true" ma:index="14" ma:internalName="MediaServiceGenerationTime" name="MediaServiceGenerationTime" ma:displayName="MediaServiceGenerationTime" ma:readOnly="true" nillable="true">
       <xsd:simpleType>
         <xsd:restriction base="dms:Text"/>
       </xsd:simpleType>
     </xsd:element>
-    <xsd:element nillable="true" ma:hidden="true" name="MediaServiceEventHashCode" ma:index="15" ma:internalName="MediaServiceEventHashCode" ma:readOnly="true" ma:displayName="MediaServiceEventHashCode">
+    <xsd:element ma:hidden="true" ma:index="15" ma:internalName="MediaServiceEventHashCode" name="MediaServiceEventHashCode" ma:displayName="MediaServiceEventHashCode" ma:readOnly="true" nillable="true">
       <xsd:simpleType>
         <xsd:restriction base="dms:Text"/>
       </xsd:simpleType>
     </xsd:element>
-    <xsd:element nillable="true" ma:hidden="true" name="MediaServiceDateTaken" ma:index="16" ma:internalName="MediaServiceDateTaken" ma:readOnly="true" ma:displayName="MediaServiceDateTaken">
+    <xsd:element ma:hidden="true" ma:index="16" ma:internalName="MediaServiceDateTaken" name="MediaServiceDateTaken" ma:displayName="MediaServiceDateTaken" ma:readOnly="true" nillable="true">
       <xsd:simpleType>
         <xsd:restriction base="dms:Text"/>
       </xsd:simpleType>
     </xsd:element>
-    <xsd:element nillable="true" name="MediaServiceLocation" ma:index="19" ma:internalName="MediaServiceLocation" ma:readOnly="true" ma:displayName="Location">
+    <xsd:element ma:index="19" ma:internalName="MediaServiceLocation" name="MediaServiceLocation" ma:displayName="Location" ma:readOnly="true" nillable="true">
       <xsd:simpleType>
         <xsd:restriction base="dms:Text"/>
       </xsd:simpleType>
     </xsd:element>
-    <xsd:element nillable="true" ma:hidden="true" name="MediaLengthInSeconds" ma:index="20" ma:internalName="MediaLengthInSeconds" ma:readOnly="true" ma:displayName="MediaLengthInSeconds">
+    <xsd:element ma:hidden="true" ma:index="20" ma:internalName="MediaLengthInSeconds" name="MediaLengthInSeconds" ma:displayName="MediaLengthInSeconds" ma:readOnly="true" nillable="true">
       <xsd:simpleType>
         <xsd:restriction base="dms:Unknown"/>
       </xsd:simpleType>
     </xsd:element>
-    <xsd:element ma:isKeyword="false" ma:taxonomy="true" ma:termSetId="09814cd3-568e-fe90-9814-8d621ff8fb84" nillable="true" name="lcf76f155ced4ddcb4097134ff3c332f" ma:sspId="579a89b1-2c2c-4f7f-9bd7-7914fb13a02b" ma:index="22" ma:internalName="lcf76f155ced4ddcb4097134ff3c332f" ma:taxonomyFieldName="MediaServiceImageTags" ma:open="true" ma:taxonomyMulti="true" ma:fieldId="{5cf76f15-5ced-4ddc-b409-7134ff3c332f}" ma:anchorId="fba54fb3-c3e1-fe81-a776-ca4b69148c4d" ma:readOnly="false" ma:displayName="Image Tags">
+    <xsd:element ma:termSetId="09814cd3-568e-fe90-9814-8d621ff8fb84" ma:sspId="579a89b1-2c2c-4f7f-9bd7-7914fb13a02b" ma:taxonomy="true" ma:index="22" ma:internalName="lcf76f155ced4ddcb4097134ff3c332f" ma:taxonomyFieldName="MediaServiceImageTags" ma:fieldId="{5cf76f15-5ced-4ddc-b409-7134ff3c332f}" name="lcf76f155ced4ddcb4097134ff3c332f" ma:anchorId="fba54fb3-c3e1-fe81-a776-ca4b69148c4d" ma:displayName="Image Tags" ma:isKeyword="false" ma:taxonomyMulti="true" ma:readOnly="false" nillable="true" ma:open="true">
       <xsd:complexType>
         <xsd:sequence>
-          <xsd:element ref="pc:Terms" maxOccurs="1" minOccurs="0"/>
+          <xsd:element maxOccurs="1" minOccurs="0" ref="pc:Terms"/>
         </xsd:sequence>
       </xsd:complexType>
     </xsd:element>
-    <xsd:element nillable="true" ma:hidden="true" name="MediaServiceObjectDetectorVersions" ma:index="24" ma:internalName="MediaServiceObjectDetectorVersions" ma:readOnly="true" ma:displayName="MediaServiceObjectDetectorVersions" ma:indexed="true">
+    <xsd:element ma:hidden="true" ma:index="24" ma:internalName="MediaServiceObjectDetectorVersions" name="MediaServiceObjectDetectorVersions" ma:displayName="MediaServiceObjectDetectorVersions" ma:indexed="true" ma:readOnly="true" nillable="true">
       <xsd:simpleType>
         <xsd:restriction base="dms:Text"/>
       </xsd:simpleType>
     </xsd:element>
-    <xsd:element nillable="true" ma:hidden="true" name="MediaServiceSearchProperties" ma:index="25" ma:internalName="MediaServiceSearchProperties" ma:readOnly="true" ma:displayName="MediaServiceSearchProperties">
+    <xsd:element ma:hidden="true" ma:index="25" ma:internalName="MediaServiceSearchProperties" name="MediaServiceSearchProperties" ma:displayName="MediaServiceSearchProperties" ma:readOnly="true" nillable="true">
       <xsd:simpleType>
         <xsd:restriction base="dms:Note"/>
       </xsd:simpleType>
     </xsd:element>
   </xsd:schema>
-  <xsd:schema xmlns:xsd="http://www.w3.org/2001/XMLSchema" xmlns:pc="http://schemas.microsoft.com/office/infopath/2007/PartnerControls" xmlns:dms="http://schemas.microsoft.com/office/2006/documentManagement/types" xmlns:xs="http://www.w3.org/2001/XMLSchema" elementFormDefault="qualified" targetNamespace="1aa119c2-5735-4356-91ec-0ca074bf9097">
+  <xsd:schema xmlns:pc="http://schemas.microsoft.com/office/infopath/2007/PartnerControls" xmlns:xsd="http://www.w3.org/2001/XMLSchema" xmlns:xs="http://www.w3.org/2001/XMLSchema" xmlns:dms="http://schemas.microsoft.com/office/2006/documentManagement/types" elementFormDefault="qualified" targetNamespace="1aa119c2-5735-4356-91ec-0ca074bf9097">
     <xsd:import namespace="http://schemas.microsoft.com/office/2006/documentManagement/types"/>
     <xsd:import namespace="http://schemas.microsoft.com/office/infopath/2007/PartnerControls"/>
-    <xsd:element nillable="true" name="SharedWithUsers" ma:index="17" ma:internalName="SharedWithUsers" ma:readOnly="true" ma:displayName="Shared With">
+    <xsd:element ma:index="17" ma:internalName="SharedWithUsers" name="SharedWithUsers" ma:displayName="Shared With" ma:readOnly="true" nillable="true">
       <xsd:complexType>
         <xsd:complexContent>
           <xsd:extension base="dms:UserMulti">
             <xsd:sequence>
-              <xsd:element name="UserInfo" maxOccurs="unbounded" minOccurs="0">
+              <xsd:element maxOccurs="unbounded" minOccurs="0" name="UserInfo">
                 <xsd:complexType>
                   <xsd:sequence>
-                    <xsd:element name="DisplayName" minOccurs="0" type="xsd:string"/>
-                    <xsd:element nillable="true" name="AccountId" minOccurs="0" type="dms:UserId"/>
-                    <xsd:element name="AccountType" minOccurs="0" type="xsd:string"/>
+                    <xsd:element type="xsd:string" minOccurs="0" name="DisplayName"/>
+                    <xsd:element type="dms:UserId" minOccurs="0" name="AccountId" nillable="true"/>
+                    <xsd:element type="xsd:string" minOccurs="0" name="AccountType"/>
                   </xsd:sequence>
                 </xsd:complexType>
               </xsd:element>
@@ -16737,7 +17675,7 @@
         </xsd:complexContent>
       </xsd:complexType>
     </xsd:element>
-    <xsd:element nillable="true" name="SharedWithDetails" ma:index="18" ma:internalName="SharedWithDetails" ma:readOnly="true" ma:displayName="Shared With Details">
+    <xsd:element ma:index="18" ma:internalName="SharedWithDetails" name="SharedWithDetails" ma:displayName="Shared With Details" ma:readOnly="true" nillable="true">
       <xsd:simpleType>
         <xsd:restriction base="dms:Note">
           <xsd:maxLength value="255"/>
@@ -16745,48 +17683,48 @@
       </xsd:simpleType>
     </xsd:element>
   </xsd:schema>
-  <xsd:schema xmlns:xsd="http://www.w3.org/2001/XMLSchema" xmlns:pc="http://schemas.microsoft.com/office/infopath/2007/PartnerControls" xmlns:dms="http://schemas.microsoft.com/office/2006/documentManagement/types" xmlns:xs="http://www.w3.org/2001/XMLSchema" elementFormDefault="qualified" targetNamespace="32f397aa-99c0-43f4-9b94-7b5d785faf95">
+  <xsd:schema xmlns:pc="http://schemas.microsoft.com/office/infopath/2007/PartnerControls" xmlns:xsd="http://www.w3.org/2001/XMLSchema" xmlns:xs="http://www.w3.org/2001/XMLSchema" xmlns:dms="http://schemas.microsoft.com/office/2006/documentManagement/types" elementFormDefault="qualified" targetNamespace="32f397aa-99c0-43f4-9b94-7b5d785faf95">
     <xsd:import namespace="http://schemas.microsoft.com/office/2006/documentManagement/types"/>
     <xsd:import namespace="http://schemas.microsoft.com/office/infopath/2007/PartnerControls"/>
-    <xsd:element nillable="true" ma:hidden="true" name="TaxCatchAll" ma:web="32f397aa-99c0-43f4-9b94-7b5d785faf95" ma:index="23" ma:internalName="TaxCatchAll" ma:list="{d117ceb8-fbd8-4cd5-a93e-9fc1393353fc}" ma:displayName="Taxonomy Catch All Column" ma:showField="CatchAllData">
+    <xsd:element ma:hidden="true" ma:index="23" ma:internalName="TaxCatchAll" ma:web="32f397aa-99c0-43f4-9b94-7b5d785faf95" ma:showField="CatchAllData" name="TaxCatchAll" ma:displayName="Taxonomy Catch All Column" ma:list="{d117ceb8-fbd8-4cd5-a93e-9fc1393353fc}" nillable="true">
       <xsd:complexType>
         <xsd:complexContent>
           <xsd:extension base="dms:MultiChoiceLookup">
             <xsd:sequence>
-              <xsd:element nillable="true" name="Value" maxOccurs="unbounded" minOccurs="0" type="dms:Lookup"/>
+              <xsd:element type="dms:Lookup" maxOccurs="unbounded" minOccurs="0" name="Value" nillable="true"/>
             </xsd:sequence>
           </xsd:extension>
         </xsd:complexContent>
       </xsd:complexType>
     </xsd:element>
   </xsd:schema>
-  <xsd:schema xmlns:odoc="http://schemas.microsoft.com/internal/obd" xmlns="http://schemas.openxmlformats.org/package/2006/metadata/core-properties" xmlns:dcterms="http://purl.org/dc/terms/" xmlns:xsd="http://www.w3.org/2001/XMLSchema" xmlns:dc="http://purl.org/dc/elements/1.1/" xmlns:xsi="http://www.w3.org/2001/XMLSchema-instance" blockDefault="#all" attributeFormDefault="unqualified" elementFormDefault="qualified" targetNamespace="http://schemas.openxmlformats.org/package/2006/metadata/core-properties">
+  <xsd:schema xmlns="http://schemas.openxmlformats.org/package/2006/metadata/core-properties" xmlns:dc="http://purl.org/dc/elements/1.1/" xmlns:xsd="http://www.w3.org/2001/XMLSchema" xmlns:dcterms="http://purl.org/dc/terms/" xmlns:xsi="http://www.w3.org/2001/XMLSchema-instance" xmlns:odoc="http://schemas.microsoft.com/internal/obd" attributeFormDefault="unqualified" elementFormDefault="qualified" targetNamespace="http://schemas.openxmlformats.org/package/2006/metadata/core-properties" blockDefault="#all">
     <xsd:import namespace="http://purl.org/dc/elements/1.1/" schemaLocation="http://dublincore.org/schemas/xmls/qdc/2003/04/02/dc.xsd"/>
     <xsd:import namespace="http://purl.org/dc/terms/" schemaLocation="http://dublincore.org/schemas/xmls/qdc/2003/04/02/dcterms.xsd"/>
-    <xsd:element name="coreProperties" type="CT_coreProperties"/>
+    <xsd:element type="CT_coreProperties" name="coreProperties"/>
     <xsd:complexType name="CT_coreProperties">
       <xsd:all>
-        <xsd:element ref="dc:creator" maxOccurs="1" minOccurs="0"/>
-        <xsd:element ref="dcterms:created" maxOccurs="1" minOccurs="0"/>
-        <xsd:element ref="dc:identifier" maxOccurs="1" minOccurs="0"/>
-        <xsd:element name="contentType" ma:index="0" maxOccurs="1" minOccurs="0" type="xsd:string" ma:displayName="Content Type"/>
-        <xsd:element ref="dc:title" ma:index="4" maxOccurs="1" minOccurs="0" ma:displayName="Title"/>
-        <xsd:element ref="dc:subject" maxOccurs="1" minOccurs="0"/>
-        <xsd:element ref="dc:description" maxOccurs="1" minOccurs="0"/>
-        <xsd:element name="keywords" maxOccurs="1" minOccurs="0" type="xsd:string"/>
-        <xsd:element ref="dc:language" maxOccurs="1" minOccurs="0"/>
-        <xsd:element name="category" maxOccurs="1" minOccurs="0" type="xsd:string"/>
-        <xsd:element name="version" maxOccurs="1" minOccurs="0" type="xsd:string"/>
-        <xsd:element name="revision" maxOccurs="1" minOccurs="0" type="xsd:string">
+        <xsd:element maxOccurs="1" minOccurs="0" ref="dc:creator"/>
+        <xsd:element maxOccurs="1" minOccurs="0" ref="dcterms:created"/>
+        <xsd:element maxOccurs="1" minOccurs="0" ref="dc:identifier"/>
+        <xsd:element ma:index="0" type="xsd:string" maxOccurs="1" minOccurs="0" name="contentType" ma:displayName="Content Type"/>
+        <xsd:element ma:index="4" maxOccurs="1" minOccurs="0" ma:displayName="Title" ref="dc:title"/>
+        <xsd:element maxOccurs="1" minOccurs="0" ref="dc:subject"/>
+        <xsd:element maxOccurs="1" minOccurs="0" ref="dc:description"/>
+        <xsd:element type="xsd:string" maxOccurs="1" minOccurs="0" name="keywords"/>
+        <xsd:element maxOccurs="1" minOccurs="0" ref="dc:language"/>
+        <xsd:element type="xsd:string" maxOccurs="1" minOccurs="0" name="category"/>
+        <xsd:element type="xsd:string" maxOccurs="1" minOccurs="0" name="version"/>
+        <xsd:element type="xsd:string" maxOccurs="1" minOccurs="0" name="revision">
           <xsd:annotation>
             <xsd:documentation>
                         This value indicates the number of saves or revisions. The application is responsible for updating this value after each revision.
                     </xsd:documentation>
           </xsd:annotation>
         </xsd:element>
-        <xsd:element name="lastModifiedBy" maxOccurs="1" minOccurs="0" type="xsd:string"/>
-        <xsd:element ref="dcterms:modified" maxOccurs="1" minOccurs="0"/>
-        <xsd:element name="contentStatus" maxOccurs="1" minOccurs="0" type="xsd:string"/>
+        <xsd:element type="xsd:string" maxOccurs="1" minOccurs="0" name="lastModifiedBy"/>
+        <xsd:element maxOccurs="1" minOccurs="0" ref="dcterms:modified"/>
+        <xsd:element type="xsd:string" maxOccurs="1" minOccurs="0" name="contentStatus"/>
       </xsd:all>
     </xsd:complexType>
   </xsd:schema>
@@ -16794,19 +17732,19 @@
     <xs:element name="Person">
       <xs:complexType>
         <xs:sequence>
-          <xs:element ref="pc:DisplayName" minOccurs="0"/>
-          <xs:element ref="pc:AccountId" minOccurs="0"/>
-          <xs:element ref="pc:AccountType" minOccurs="0"/>
+          <xs:element minOccurs="0" ref="pc:DisplayName"/>
+          <xs:element minOccurs="0" ref="pc:AccountId"/>
+          <xs:element minOccurs="0" ref="pc:AccountType"/>
         </xs:sequence>
       </xs:complexType>
     </xs:element>
-    <xs:element name="DisplayName" type="xs:string"/>
-    <xs:element name="AccountId" type="xs:string"/>
-    <xs:element name="AccountType" type="xs:string"/>
+    <xs:element type="xs:string" name="DisplayName"/>
+    <xs:element type="xs:string" name="AccountId"/>
+    <xs:element type="xs:string" name="AccountType"/>
     <xs:element name="BDCAssociatedEntity">
       <xs:complexType>
         <xs:sequence>
-          <xs:element ref="pc:BDCEntity" maxOccurs="unbounded" minOccurs="0"/>
+          <xs:element maxOccurs="unbounded" minOccurs="0" ref="pc:BDCEntity"/>
         </xs:sequence>
         <xs:attribute ref="pc:EntityNamespace"/>
         <xs:attribute ref="pc:EntityName"/>
@@ -16814,53 +17752,53 @@
         <xs:attribute ref="pc:AssociationName"/>
       </xs:complexType>
     </xs:element>
-    <xs:attribute name="EntityNamespace" type="xs:string"/>
-    <xs:attribute name="EntityName" type="xs:string"/>
-    <xs:attribute name="SystemInstanceName" type="xs:string"/>
-    <xs:attribute name="AssociationName" type="xs:string"/>
+    <xs:attribute type="xs:string" name="EntityNamespace"/>
+    <xs:attribute type="xs:string" name="EntityName"/>
+    <xs:attribute type="xs:string" name="SystemInstanceName"/>
+    <xs:attribute type="xs:string" name="AssociationName"/>
     <xs:element name="BDCEntity">
       <xs:complexType>
         <xs:sequence>
-          <xs:element ref="pc:EntityDisplayName" minOccurs="0"/>
-          <xs:element ref="pc:EntityInstanceReference" minOccurs="0"/>
-          <xs:element ref="pc:EntityId1" minOccurs="0"/>
-          <xs:element ref="pc:EntityId2" minOccurs="0"/>
-          <xs:element ref="pc:EntityId3" minOccurs="0"/>
-          <xs:element ref="pc:EntityId4" minOccurs="0"/>
-          <xs:element ref="pc:EntityId5" minOccurs="0"/>
+          <xs:element minOccurs="0" ref="pc:EntityDisplayName"/>
+          <xs:element minOccurs="0" ref="pc:EntityInstanceReference"/>
+          <xs:element minOccurs="0" ref="pc:EntityId1"/>
+          <xs:element minOccurs="0" ref="pc:EntityId2"/>
+          <xs:element minOccurs="0" ref="pc:EntityId3"/>
+          <xs:element minOccurs="0" ref="pc:EntityId4"/>
+          <xs:element minOccurs="0" ref="pc:EntityId5"/>
         </xs:sequence>
       </xs:complexType>
     </xs:element>
-    <xs:element name="EntityDisplayName" type="xs:string"/>
-    <xs:element name="EntityInstanceReference" type="xs:string"/>
-    <xs:element name="EntityId1" type="xs:string"/>
-    <xs:element name="EntityId2" type="xs:string"/>
-    <xs:element name="EntityId3" type="xs:string"/>
-    <xs:element name="EntityId4" type="xs:string"/>
-    <xs:element name="EntityId5" type="xs:string"/>
+    <xs:element type="xs:string" name="EntityDisplayName"/>
+    <xs:element type="xs:string" name="EntityInstanceReference"/>
+    <xs:element type="xs:string" name="EntityId1"/>
+    <xs:element type="xs:string" name="EntityId2"/>
+    <xs:element type="xs:string" name="EntityId3"/>
+    <xs:element type="xs:string" name="EntityId4"/>
+    <xs:element type="xs:string" name="EntityId5"/>
     <xs:element name="Terms">
       <xs:complexType>
         <xs:sequence>
-          <xs:element ref="pc:TermInfo" maxOccurs="unbounded" minOccurs="0"/>
+          <xs:element maxOccurs="unbounded" minOccurs="0" ref="pc:TermInfo"/>
         </xs:sequence>
       </xs:complexType>
     </xs:element>
     <xs:element name="TermInfo">
       <xs:complexType>
         <xs:sequence>
-          <xs:element ref="pc:TermName" minOccurs="0"/>
-          <xs:element ref="pc:TermId" minOccurs="0"/>
+          <xs:element minOccurs="0" ref="pc:TermName"/>
+          <xs:element minOccurs="0" ref="pc:TermId"/>
         </xs:sequence>
       </xs:complexType>
     </xs:element>
-    <xs:element name="TermName" type="xs:string"/>
-    <xs:element name="TermId" type="xs:string"/>
+    <xs:element type="xs:string" name="TermName"/>
+    <xs:element type="xs:string" name="TermId"/>
   </xs:schema>
 </ct:contentTypeSchema>
 </file>
 
 <file path=customXml/item2.xml><?xml version="1.0" encoding="utf-8"?>
-<p:properties xmlns:pc="http://schemas.microsoft.com/office/infopath/2007/PartnerControls" xmlns:xsi="http://www.w3.org/2001/XMLSchema-instance" xmlns:p="http://schemas.microsoft.com/office/2006/metadata/properties">
+<p:properties xmlns:pc="http://schemas.microsoft.com/office/infopath/2007/PartnerControls" xmlns:p="http://schemas.microsoft.com/office/2006/metadata/properties" xmlns:xsi="http://www.w3.org/2001/XMLSchema-instance">
   <documentManagement>
     <lcf76f155ced4ddcb4097134ff3c332f xmlns="1d368349-1023-48e7-96c9-f9d028f6f0fb">
       <Terms xmlns="http://schemas.microsoft.com/office/infopath/2007/PartnerControls"/>

--- a/docs/presentation/25027138 - Presentation.pptx
+++ b/docs/presentation/25027138 - Presentation.pptx
@@ -14947,8 +14947,8 @@
         </p:nvSpPr>
         <p:spPr>
           <a:xfrm>
-            <a:off x="-381000" y="6500495"/>
-            <a:ext cx="10357485" cy="306705"/>
+            <a:off x="-456565" y="6572250"/>
+            <a:ext cx="10810240" cy="306705"/>
           </a:xfrm>
           <a:prstGeom prst="rect">
             <a:avLst/>
@@ -14977,11 +14977,41 @@
                 <a:latin typeface="UCL Sans" pitchFamily="2" charset="77"/>
                 <a:sym typeface="+mn-ea"/>
               </a:rPr>
-              <a:t>SMPC: Stochastic Model Predictive Control; optimises actions while limiting collision risk under uncertainty.</a:t>
+              <a:t>SMPC (</a:t>
+            </a:r>
+            <a:r>
+              <a:rPr lang="en-US" altLang="en-US" sz="1400">
+                <a:solidFill>
+                  <a:srgbClr val="111827"/>
+                </a:solidFill>
+                <a:latin typeface="UCL Sans" pitchFamily="2" charset="77"/>
+                <a:sym typeface="+mn-ea"/>
+              </a:rPr>
+              <a:t>Stochastic Model Predictive Control</a:t>
+            </a:r>
+            <a:r>
+              <a:rPr lang="en-US" altLang="en-US" sz="1400">
+                <a:solidFill>
+                  <a:srgbClr val="111827"/>
+                </a:solidFill>
+                <a:latin typeface="UCL Sans" pitchFamily="2" charset="77"/>
+                <a:sym typeface="+mn-ea"/>
+              </a:rPr>
+              <a:t>): </a:t>
+            </a:r>
+            <a:r>
+              <a:rPr lang="en-US" altLang="en-US" sz="1400">
+                <a:solidFill>
+                  <a:schemeClr val="tx1"/>
+                </a:solidFill>
+                <a:latin typeface="UCL Sans" pitchFamily="2" charset="77"/>
+                <a:sym typeface="+mn-ea"/>
+              </a:rPr>
+              <a:t>plans what the car should do while considering uncertain future paths.</a:t>
             </a:r>
             <a:endParaRPr lang="en-US" altLang="en-US" sz="1400">
               <a:solidFill>
-                <a:srgbClr val="111827"/>
+                <a:schemeClr val="tx1"/>
               </a:solidFill>
               <a:latin typeface="UCL Sans" pitchFamily="2" charset="77"/>
               <a:sym typeface="+mn-ea"/>
@@ -15819,7 +15849,7 @@
         </p:nvGrpSpPr>
         <p:grpSpPr>
           <a:xfrm>
-            <a:off x="1331595" y="3808730"/>
+            <a:off x="1331595" y="3593465"/>
             <a:ext cx="10694950" cy="2301875"/>
             <a:chOff x="687" y="5337"/>
             <a:chExt cx="17119" cy="3625"/>
@@ -16295,8 +16325,8 @@
         </p:nvSpPr>
         <p:spPr>
           <a:xfrm>
-            <a:off x="-456565" y="6524625"/>
-            <a:ext cx="12672695" cy="306705"/>
+            <a:off x="-456565" y="6342380"/>
+            <a:ext cx="12672695" cy="521970"/>
           </a:xfrm>
           <a:prstGeom prst="rect">
             <a:avLst/>
@@ -16325,7 +16355,55 @@
                 <a:latin typeface="UCL Sans" pitchFamily="2" charset="77"/>
                 <a:sym typeface="+mn-ea"/>
               </a:rPr>
-              <a:t>GMM: Gaussian Mixture Model; represents target-vehicle futures as weighted trajectories with probability, mean, and covariance</a:t>
+              <a:t>GMM (</a:t>
+            </a:r>
+            <a:r>
+              <a:rPr lang="en-US" altLang="en-US" sz="1400">
+                <a:solidFill>
+                  <a:srgbClr val="111827"/>
+                </a:solidFill>
+                <a:latin typeface="UCL Sans" pitchFamily="2" charset="77"/>
+                <a:sym typeface="+mn-ea"/>
+              </a:rPr>
+              <a:t>Gaussian Mixture Model</a:t>
+            </a:r>
+            <a:r>
+              <a:rPr lang="en-US" altLang="en-US" sz="1400">
+                <a:solidFill>
+                  <a:srgbClr val="111827"/>
+                </a:solidFill>
+                <a:latin typeface="UCL Sans" pitchFamily="2" charset="77"/>
+                <a:sym typeface="+mn-ea"/>
+              </a:rPr>
+              <a:t>) : represents possible target-vehicle futures using probabilities and uncertainty.</a:t>
+            </a:r>
+            <a:endParaRPr lang="en-US" altLang="en-US" sz="1400">
+              <a:solidFill>
+                <a:srgbClr val="111827"/>
+              </a:solidFill>
+              <a:latin typeface="UCL Sans" pitchFamily="2" charset="77"/>
+              <a:sym typeface="+mn-ea"/>
+            </a:endParaRPr>
+          </a:p>
+          <a:p>
+            <a:pPr lvl="1" indent="0" algn="l">
+              <a:buFont typeface="Arial" panose="020B0604020202090204" pitchFamily="34" charset="0"/>
+              <a:buNone/>
+              <a:defRPr sz="2300" b="1">
+                <a:solidFill>
+                  <a:srgbClr val="172554"/>
+                </a:solidFill>
+              </a:defRPr>
+            </a:pPr>
+            <a:r>
+              <a:rPr lang="en-US" altLang="en-US" sz="1400">
+                <a:solidFill>
+                  <a:srgbClr val="111827"/>
+                </a:solidFill>
+                <a:latin typeface="UCL Sans" pitchFamily="2" charset="77"/>
+                <a:sym typeface="+mn-ea"/>
+              </a:rPr>
+              <a:t>SMPC: a planning method that chooses safe actions while accounting for uncertain future paths.</a:t>
             </a:r>
             <a:endParaRPr lang="en-US" altLang="en-US" sz="1400">
               <a:solidFill>
@@ -17538,8 +17616,8 @@
 </file>
 
 <file path=customXml/item1.xml><?xml version="1.0" encoding="utf-8"?>
-<ct:contentTypeSchema xmlns:ct="http://schemas.microsoft.com/office/2006/metadata/contentType" xmlns:ma="http://schemas.microsoft.com/office/2006/metadata/properties/metaAttributes" ma:_="" ma:contentTypeName="Document" ma:contentTypeID="0x010100A12A0662030DBC4F99C1FA9D93D14A4C" ma:versionID="601ee87aba0edee35dd0bd1031319f69" ma:contentTypeDescription="Create a new document." ma:contentTypeVersion="" ct:_="" ma:contentTypeScope="">
-  <xsd:schema xmlns:p="http://schemas.microsoft.com/office/2006/metadata/properties" xmlns:ns2="1d368349-1023-48e7-96c9-f9d028f6f0fb" xmlns:ns3="1aa119c2-5735-4356-91ec-0ca074bf9097" xmlns:ns4="32f397aa-99c0-43f4-9b94-7b5d785faf95" xmlns:xsd="http://www.w3.org/2001/XMLSchema" xmlns:xs="http://www.w3.org/2001/XMLSchema" ma:root="true" ns2:_="" ns4:_="" targetNamespace="http://schemas.microsoft.com/office/2006/metadata/properties" ns3:_="" ma:fieldsID="ceaa2ff74debb88eeec5ab219e85c5f9">
+<ct:contentTypeSchema xmlns:ma="http://schemas.microsoft.com/office/2006/metadata/properties/metaAttributes" xmlns:ct="http://schemas.microsoft.com/office/2006/metadata/contentType" ma:contentTypeName="Document" ct:_="" ma:_="" ma:versionID="601ee87aba0edee35dd0bd1031319f69" ma:contentTypeID="0x010100A12A0662030DBC4F99C1FA9D93D14A4C" ma:contentTypeVersion="" ma:contentTypeDescription="Create a new document." ma:contentTypeScope="">
+  <xsd:schema xmlns:xsd="http://www.w3.org/2001/XMLSchema" xmlns:xs="http://www.w3.org/2001/XMLSchema" xmlns:ns2="1d368349-1023-48e7-96c9-f9d028f6f0fb" xmlns:ns3="1aa119c2-5735-4356-91ec-0ca074bf9097" xmlns:p="http://schemas.microsoft.com/office/2006/metadata/properties" xmlns:ns4="32f397aa-99c0-43f4-9b94-7b5d785faf95" ns3:_="" ma:root="true" ma:fieldsID="ceaa2ff74debb88eeec5ab219e85c5f9" ns2:_="" ns4:_="" targetNamespace="http://schemas.microsoft.com/office/2006/metadata/properties">
     <xsd:import namespace="1d368349-1023-48e7-96c9-f9d028f6f0fb"/>
     <xsd:import namespace="1aa119c2-5735-4356-91ec-0ca074bf9097"/>
     <xsd:import namespace="32f397aa-99c0-43f4-9b94-7b5d785faf95"/>
@@ -17573,90 +17651,90 @@
       </xsd:complexType>
     </xsd:element>
   </xsd:schema>
-  <xsd:schema xmlns:pc="http://schemas.microsoft.com/office/infopath/2007/PartnerControls" xmlns:xsd="http://www.w3.org/2001/XMLSchema" xmlns:xs="http://www.w3.org/2001/XMLSchema" xmlns:dms="http://schemas.microsoft.com/office/2006/documentManagement/types" elementFormDefault="qualified" targetNamespace="1d368349-1023-48e7-96c9-f9d028f6f0fb">
+  <xsd:schema xmlns:xsd="http://www.w3.org/2001/XMLSchema" xmlns:xs="http://www.w3.org/2001/XMLSchema" xmlns:dms="http://schemas.microsoft.com/office/2006/documentManagement/types" xmlns:pc="http://schemas.microsoft.com/office/infopath/2007/PartnerControls" elementFormDefault="qualified" targetNamespace="1d368349-1023-48e7-96c9-f9d028f6f0fb">
     <xsd:import namespace="http://schemas.microsoft.com/office/2006/documentManagement/types"/>
     <xsd:import namespace="http://schemas.microsoft.com/office/infopath/2007/PartnerControls"/>
-    <xsd:element ma:hidden="true" ma:index="8" ma:internalName="MediaServiceMetadata" name="MediaServiceMetadata" ma:displayName="MediaServiceMetadata" ma:readOnly="true" nillable="true">
+    <xsd:element name="MediaServiceMetadata" ma:internalName="MediaServiceMetadata" ma:readOnly="true" nillable="true" ma:index="8" ma:hidden="true" ma:displayName="MediaServiceMetadata">
       <xsd:simpleType>
         <xsd:restriction base="dms:Note"/>
       </xsd:simpleType>
     </xsd:element>
-    <xsd:element ma:hidden="true" ma:index="9" ma:internalName="MediaServiceFastMetadata" name="MediaServiceFastMetadata" ma:displayName="MediaServiceFastMetadata" ma:readOnly="true" nillable="true">
+    <xsd:element name="MediaServiceFastMetadata" ma:internalName="MediaServiceFastMetadata" ma:readOnly="true" nillable="true" ma:index="9" ma:hidden="true" ma:displayName="MediaServiceFastMetadata">
       <xsd:simpleType>
         <xsd:restriction base="dms:Note"/>
       </xsd:simpleType>
     </xsd:element>
-    <xsd:element ma:hidden="true" ma:index="10" ma:internalName="MediaServiceAutoKeyPoints" name="MediaServiceAutoKeyPoints" ma:displayName="MediaServiceAutoKeyPoints" ma:readOnly="true" nillable="true">
+    <xsd:element name="MediaServiceAutoKeyPoints" ma:internalName="MediaServiceAutoKeyPoints" ma:readOnly="true" nillable="true" ma:index="10" ma:hidden="true" ma:displayName="MediaServiceAutoKeyPoints">
       <xsd:simpleType>
         <xsd:restriction base="dms:Note"/>
       </xsd:simpleType>
     </xsd:element>
-    <xsd:element ma:index="11" ma:internalName="MediaServiceKeyPoints" name="MediaServiceKeyPoints" ma:displayName="KeyPoints" ma:readOnly="true" nillable="true">
+    <xsd:element name="MediaServiceKeyPoints" ma:internalName="MediaServiceKeyPoints" ma:readOnly="true" nillable="true" ma:index="11" ma:displayName="KeyPoints">
       <xsd:simpleType>
         <xsd:restriction base="dms:Note">
           <xsd:maxLength value="255"/>
         </xsd:restriction>
       </xsd:simpleType>
     </xsd:element>
-    <xsd:element ma:index="12" ma:internalName="MediaServiceAutoTags" name="MediaServiceAutoTags" ma:displayName="Tags" ma:readOnly="true" nillable="true">
+    <xsd:element name="MediaServiceAutoTags" ma:internalName="MediaServiceAutoTags" ma:readOnly="true" nillable="true" ma:index="12" ma:displayName="Tags">
       <xsd:simpleType>
         <xsd:restriction base="dms:Text"/>
       </xsd:simpleType>
     </xsd:element>
-    <xsd:element ma:index="13" ma:internalName="MediaServiceOCR" name="MediaServiceOCR" ma:displayName="Extracted Text" ma:readOnly="true" nillable="true">
+    <xsd:element name="MediaServiceOCR" ma:internalName="MediaServiceOCR" ma:readOnly="true" nillable="true" ma:index="13" ma:displayName="Extracted Text">
       <xsd:simpleType>
         <xsd:restriction base="dms:Note">
           <xsd:maxLength value="255"/>
         </xsd:restriction>
       </xsd:simpleType>
     </xsd:element>
-    <xsd:element ma:hidden="true" ma:index="14" ma:internalName="MediaServiceGenerationTime" name="MediaServiceGenerationTime" ma:displayName="MediaServiceGenerationTime" ma:readOnly="true" nillable="true">
+    <xsd:element name="MediaServiceGenerationTime" ma:internalName="MediaServiceGenerationTime" ma:readOnly="true" nillable="true" ma:index="14" ma:hidden="true" ma:displayName="MediaServiceGenerationTime">
       <xsd:simpleType>
         <xsd:restriction base="dms:Text"/>
       </xsd:simpleType>
     </xsd:element>
-    <xsd:element ma:hidden="true" ma:index="15" ma:internalName="MediaServiceEventHashCode" name="MediaServiceEventHashCode" ma:displayName="MediaServiceEventHashCode" ma:readOnly="true" nillable="true">
+    <xsd:element name="MediaServiceEventHashCode" ma:internalName="MediaServiceEventHashCode" ma:readOnly="true" nillable="true" ma:index="15" ma:hidden="true" ma:displayName="MediaServiceEventHashCode">
       <xsd:simpleType>
         <xsd:restriction base="dms:Text"/>
       </xsd:simpleType>
     </xsd:element>
-    <xsd:element ma:hidden="true" ma:index="16" ma:internalName="MediaServiceDateTaken" name="MediaServiceDateTaken" ma:displayName="MediaServiceDateTaken" ma:readOnly="true" nillable="true">
+    <xsd:element name="MediaServiceDateTaken" ma:internalName="MediaServiceDateTaken" ma:readOnly="true" nillable="true" ma:index="16" ma:hidden="true" ma:displayName="MediaServiceDateTaken">
       <xsd:simpleType>
         <xsd:restriction base="dms:Text"/>
       </xsd:simpleType>
     </xsd:element>
-    <xsd:element ma:index="19" ma:internalName="MediaServiceLocation" name="MediaServiceLocation" ma:displayName="Location" ma:readOnly="true" nillable="true">
+    <xsd:element name="MediaServiceLocation" ma:internalName="MediaServiceLocation" ma:readOnly="true" nillable="true" ma:index="19" ma:displayName="Location">
       <xsd:simpleType>
         <xsd:restriction base="dms:Text"/>
       </xsd:simpleType>
     </xsd:element>
-    <xsd:element ma:hidden="true" ma:index="20" ma:internalName="MediaLengthInSeconds" name="MediaLengthInSeconds" ma:displayName="MediaLengthInSeconds" ma:readOnly="true" nillable="true">
+    <xsd:element name="MediaLengthInSeconds" ma:internalName="MediaLengthInSeconds" ma:readOnly="true" nillable="true" ma:index="20" ma:hidden="true" ma:displayName="MediaLengthInSeconds">
       <xsd:simpleType>
         <xsd:restriction base="dms:Unknown"/>
       </xsd:simpleType>
     </xsd:element>
-    <xsd:element ma:termSetId="09814cd3-568e-fe90-9814-8d621ff8fb84" ma:sspId="579a89b1-2c2c-4f7f-9bd7-7914fb13a02b" ma:taxonomy="true" ma:index="22" ma:internalName="lcf76f155ced4ddcb4097134ff3c332f" ma:taxonomyFieldName="MediaServiceImageTags" ma:fieldId="{5cf76f15-5ced-4ddc-b409-7134ff3c332f}" name="lcf76f155ced4ddcb4097134ff3c332f" ma:anchorId="fba54fb3-c3e1-fe81-a776-ca4b69148c4d" ma:displayName="Image Tags" ma:isKeyword="false" ma:taxonomyMulti="true" ma:readOnly="false" nillable="true" ma:open="true">
+    <xsd:element ma:termSetId="09814cd3-568e-fe90-9814-8d621ff8fb84" ma:taxonomyMulti="true" name="lcf76f155ced4ddcb4097134ff3c332f" ma:anchorId="fba54fb3-c3e1-fe81-a776-ca4b69148c4d" ma:internalName="lcf76f155ced4ddcb4097134ff3c332f" ma:fieldId="{5cf76f15-5ced-4ddc-b409-7134ff3c332f}" ma:readOnly="false" nillable="true" ma:sspId="579a89b1-2c2c-4f7f-9bd7-7914fb13a02b" ma:taxonomy="true" ma:index="22" ma:isKeyword="false" ma:open="true" ma:taxonomyFieldName="MediaServiceImageTags" ma:displayName="Image Tags">
       <xsd:complexType>
         <xsd:sequence>
           <xsd:element maxOccurs="1" minOccurs="0" ref="pc:Terms"/>
         </xsd:sequence>
       </xsd:complexType>
     </xsd:element>
-    <xsd:element ma:hidden="true" ma:index="24" ma:internalName="MediaServiceObjectDetectorVersions" name="MediaServiceObjectDetectorVersions" ma:displayName="MediaServiceObjectDetectorVersions" ma:indexed="true" ma:readOnly="true" nillable="true">
+    <xsd:element name="MediaServiceObjectDetectorVersions" ma:internalName="MediaServiceObjectDetectorVersions" ma:readOnly="true" ma:indexed="true" nillable="true" ma:index="24" ma:hidden="true" ma:displayName="MediaServiceObjectDetectorVersions">
       <xsd:simpleType>
         <xsd:restriction base="dms:Text"/>
       </xsd:simpleType>
     </xsd:element>
-    <xsd:element ma:hidden="true" ma:index="25" ma:internalName="MediaServiceSearchProperties" name="MediaServiceSearchProperties" ma:displayName="MediaServiceSearchProperties" ma:readOnly="true" nillable="true">
+    <xsd:element name="MediaServiceSearchProperties" ma:internalName="MediaServiceSearchProperties" ma:readOnly="true" nillable="true" ma:index="25" ma:hidden="true" ma:displayName="MediaServiceSearchProperties">
       <xsd:simpleType>
         <xsd:restriction base="dms:Note"/>
       </xsd:simpleType>
     </xsd:element>
   </xsd:schema>
-  <xsd:schema xmlns:pc="http://schemas.microsoft.com/office/infopath/2007/PartnerControls" xmlns:xsd="http://www.w3.org/2001/XMLSchema" xmlns:xs="http://www.w3.org/2001/XMLSchema" xmlns:dms="http://schemas.microsoft.com/office/2006/documentManagement/types" elementFormDefault="qualified" targetNamespace="1aa119c2-5735-4356-91ec-0ca074bf9097">
+  <xsd:schema xmlns:xsd="http://www.w3.org/2001/XMLSchema" xmlns:xs="http://www.w3.org/2001/XMLSchema" xmlns:dms="http://schemas.microsoft.com/office/2006/documentManagement/types" xmlns:pc="http://schemas.microsoft.com/office/infopath/2007/PartnerControls" elementFormDefault="qualified" targetNamespace="1aa119c2-5735-4356-91ec-0ca074bf9097">
     <xsd:import namespace="http://schemas.microsoft.com/office/2006/documentManagement/types"/>
     <xsd:import namespace="http://schemas.microsoft.com/office/infopath/2007/PartnerControls"/>
-    <xsd:element ma:index="17" ma:internalName="SharedWithUsers" name="SharedWithUsers" ma:displayName="Shared With" ma:readOnly="true" nillable="true">
+    <xsd:element name="SharedWithUsers" ma:internalName="SharedWithUsers" ma:readOnly="true" nillable="true" ma:index="17" ma:displayName="Shared With">
       <xsd:complexType>
         <xsd:complexContent>
           <xsd:extension base="dms:UserMulti">
@@ -17664,9 +17742,9 @@
               <xsd:element maxOccurs="unbounded" minOccurs="0" name="UserInfo">
                 <xsd:complexType>
                   <xsd:sequence>
-                    <xsd:element type="xsd:string" minOccurs="0" name="DisplayName"/>
-                    <xsd:element type="dms:UserId" minOccurs="0" name="AccountId" nillable="true"/>
-                    <xsd:element type="xsd:string" minOccurs="0" name="AccountType"/>
+                    <xsd:element minOccurs="0" name="DisplayName" type="xsd:string"/>
+                    <xsd:element minOccurs="0" name="AccountId" nillable="true" type="dms:UserId"/>
+                    <xsd:element minOccurs="0" name="AccountType" type="xsd:string"/>
                   </xsd:sequence>
                 </xsd:complexType>
               </xsd:element>
@@ -17675,7 +17753,7 @@
         </xsd:complexContent>
       </xsd:complexType>
     </xsd:element>
-    <xsd:element ma:index="18" ma:internalName="SharedWithDetails" name="SharedWithDetails" ma:displayName="Shared With Details" ma:readOnly="true" nillable="true">
+    <xsd:element name="SharedWithDetails" ma:internalName="SharedWithDetails" ma:readOnly="true" nillable="true" ma:index="18" ma:displayName="Shared With Details">
       <xsd:simpleType>
         <xsd:restriction base="dms:Note">
           <xsd:maxLength value="255"/>
@@ -17683,52 +17761,52 @@
       </xsd:simpleType>
     </xsd:element>
   </xsd:schema>
-  <xsd:schema xmlns:pc="http://schemas.microsoft.com/office/infopath/2007/PartnerControls" xmlns:xsd="http://www.w3.org/2001/XMLSchema" xmlns:xs="http://www.w3.org/2001/XMLSchema" xmlns:dms="http://schemas.microsoft.com/office/2006/documentManagement/types" elementFormDefault="qualified" targetNamespace="32f397aa-99c0-43f4-9b94-7b5d785faf95">
+  <xsd:schema xmlns:xsd="http://www.w3.org/2001/XMLSchema" xmlns:xs="http://www.w3.org/2001/XMLSchema" xmlns:dms="http://schemas.microsoft.com/office/2006/documentManagement/types" xmlns:pc="http://schemas.microsoft.com/office/infopath/2007/PartnerControls" elementFormDefault="qualified" targetNamespace="32f397aa-99c0-43f4-9b94-7b5d785faf95">
     <xsd:import namespace="http://schemas.microsoft.com/office/2006/documentManagement/types"/>
     <xsd:import namespace="http://schemas.microsoft.com/office/infopath/2007/PartnerControls"/>
-    <xsd:element ma:hidden="true" ma:index="23" ma:internalName="TaxCatchAll" ma:web="32f397aa-99c0-43f4-9b94-7b5d785faf95" ma:showField="CatchAllData" name="TaxCatchAll" ma:displayName="Taxonomy Catch All Column" ma:list="{d117ceb8-fbd8-4cd5-a93e-9fc1393353fc}" nillable="true">
+    <xsd:element name="TaxCatchAll" ma:internalName="TaxCatchAll" nillable="true" ma:index="23" ma:web="32f397aa-99c0-43f4-9b94-7b5d785faf95" ma:showField="CatchAllData" ma:list="{d117ceb8-fbd8-4cd5-a93e-9fc1393353fc}" ma:hidden="true" ma:displayName="Taxonomy Catch All Column">
       <xsd:complexType>
         <xsd:complexContent>
           <xsd:extension base="dms:MultiChoiceLookup">
             <xsd:sequence>
-              <xsd:element type="dms:Lookup" maxOccurs="unbounded" minOccurs="0" name="Value" nillable="true"/>
+              <xsd:element maxOccurs="unbounded" minOccurs="0" name="Value" nillable="true" type="dms:Lookup"/>
             </xsd:sequence>
           </xsd:extension>
         </xsd:complexContent>
       </xsd:complexType>
     </xsd:element>
   </xsd:schema>
-  <xsd:schema xmlns="http://schemas.openxmlformats.org/package/2006/metadata/core-properties" xmlns:dc="http://purl.org/dc/elements/1.1/" xmlns:xsd="http://www.w3.org/2001/XMLSchema" xmlns:dcterms="http://purl.org/dc/terms/" xmlns:xsi="http://www.w3.org/2001/XMLSchema-instance" xmlns:odoc="http://schemas.microsoft.com/internal/obd" attributeFormDefault="unqualified" elementFormDefault="qualified" targetNamespace="http://schemas.openxmlformats.org/package/2006/metadata/core-properties" blockDefault="#all">
+  <xsd:schema xmlns:xsd="http://www.w3.org/2001/XMLSchema" xmlns:xsi="http://www.w3.org/2001/XMLSchema-instance" xmlns="http://schemas.openxmlformats.org/package/2006/metadata/core-properties" xmlns:dcterms="http://purl.org/dc/terms/" xmlns:odoc="http://schemas.microsoft.com/internal/obd" xmlns:dc="http://purl.org/dc/elements/1.1/" elementFormDefault="qualified" attributeFormDefault="unqualified" targetNamespace="http://schemas.openxmlformats.org/package/2006/metadata/core-properties" blockDefault="#all">
     <xsd:import namespace="http://purl.org/dc/elements/1.1/" schemaLocation="http://dublincore.org/schemas/xmls/qdc/2003/04/02/dc.xsd"/>
     <xsd:import namespace="http://purl.org/dc/terms/" schemaLocation="http://dublincore.org/schemas/xmls/qdc/2003/04/02/dcterms.xsd"/>
-    <xsd:element type="CT_coreProperties" name="coreProperties"/>
+    <xsd:element name="coreProperties" type="CT_coreProperties"/>
     <xsd:complexType name="CT_coreProperties">
       <xsd:all>
         <xsd:element maxOccurs="1" minOccurs="0" ref="dc:creator"/>
         <xsd:element maxOccurs="1" minOccurs="0" ref="dcterms:created"/>
         <xsd:element maxOccurs="1" minOccurs="0" ref="dc:identifier"/>
-        <xsd:element ma:index="0" type="xsd:string" maxOccurs="1" minOccurs="0" name="contentType" ma:displayName="Content Type"/>
-        <xsd:element ma:index="4" maxOccurs="1" minOccurs="0" ma:displayName="Title" ref="dc:title"/>
+        <xsd:element maxOccurs="1" minOccurs="0" name="contentType" ma:index="0" type="xsd:string" ma:displayName="Content Type"/>
+        <xsd:element maxOccurs="1" minOccurs="0" ma:index="4" ref="dc:title" ma:displayName="Title"/>
         <xsd:element maxOccurs="1" minOccurs="0" ref="dc:subject"/>
         <xsd:element maxOccurs="1" minOccurs="0" ref="dc:description"/>
-        <xsd:element type="xsd:string" maxOccurs="1" minOccurs="0" name="keywords"/>
+        <xsd:element maxOccurs="1" minOccurs="0" name="keywords" type="xsd:string"/>
         <xsd:element maxOccurs="1" minOccurs="0" ref="dc:language"/>
-        <xsd:element type="xsd:string" maxOccurs="1" minOccurs="0" name="category"/>
-        <xsd:element type="xsd:string" maxOccurs="1" minOccurs="0" name="version"/>
-        <xsd:element type="xsd:string" maxOccurs="1" minOccurs="0" name="revision">
+        <xsd:element maxOccurs="1" minOccurs="0" name="category" type="xsd:string"/>
+        <xsd:element maxOccurs="1" minOccurs="0" name="version" type="xsd:string"/>
+        <xsd:element maxOccurs="1" minOccurs="0" name="revision" type="xsd:string">
           <xsd:annotation>
             <xsd:documentation>
                         This value indicates the number of saves or revisions. The application is responsible for updating this value after each revision.
                     </xsd:documentation>
           </xsd:annotation>
         </xsd:element>
-        <xsd:element type="xsd:string" maxOccurs="1" minOccurs="0" name="lastModifiedBy"/>
+        <xsd:element maxOccurs="1" minOccurs="0" name="lastModifiedBy" type="xsd:string"/>
         <xsd:element maxOccurs="1" minOccurs="0" ref="dcterms:modified"/>
-        <xsd:element type="xsd:string" maxOccurs="1" minOccurs="0" name="contentStatus"/>
+        <xsd:element maxOccurs="1" minOccurs="0" name="contentStatus" type="xsd:string"/>
       </xsd:all>
     </xsd:complexType>
   </xsd:schema>
-  <xs:schema xmlns:pc="http://schemas.microsoft.com/office/infopath/2007/PartnerControls" xmlns:xs="http://www.w3.org/2001/XMLSchema" attributeFormDefault="unqualified" elementFormDefault="qualified" targetNamespace="http://schemas.microsoft.com/office/infopath/2007/PartnerControls">
+  <xs:schema xmlns:xs="http://www.w3.org/2001/XMLSchema" xmlns:pc="http://schemas.microsoft.com/office/infopath/2007/PartnerControls" elementFormDefault="qualified" attributeFormDefault="unqualified" targetNamespace="http://schemas.microsoft.com/office/infopath/2007/PartnerControls">
     <xs:element name="Person">
       <xs:complexType>
         <xs:sequence>
@@ -17738,9 +17816,9 @@
         </xs:sequence>
       </xs:complexType>
     </xs:element>
-    <xs:element type="xs:string" name="DisplayName"/>
-    <xs:element type="xs:string" name="AccountId"/>
-    <xs:element type="xs:string" name="AccountType"/>
+    <xs:element name="DisplayName" type="xs:string"/>
+    <xs:element name="AccountId" type="xs:string"/>
+    <xs:element name="AccountType" type="xs:string"/>
     <xs:element name="BDCAssociatedEntity">
       <xs:complexType>
         <xs:sequence>
@@ -17752,10 +17830,10 @@
         <xs:attribute ref="pc:AssociationName"/>
       </xs:complexType>
     </xs:element>
-    <xs:attribute type="xs:string" name="EntityNamespace"/>
-    <xs:attribute type="xs:string" name="EntityName"/>
-    <xs:attribute type="xs:string" name="SystemInstanceName"/>
-    <xs:attribute type="xs:string" name="AssociationName"/>
+    <xs:attribute name="EntityNamespace" type="xs:string"/>
+    <xs:attribute name="EntityName" type="xs:string"/>
+    <xs:attribute name="SystemInstanceName" type="xs:string"/>
+    <xs:attribute name="AssociationName" type="xs:string"/>
     <xs:element name="BDCEntity">
       <xs:complexType>
         <xs:sequence>
@@ -17769,13 +17847,13 @@
         </xs:sequence>
       </xs:complexType>
     </xs:element>
-    <xs:element type="xs:string" name="EntityDisplayName"/>
-    <xs:element type="xs:string" name="EntityInstanceReference"/>
-    <xs:element type="xs:string" name="EntityId1"/>
-    <xs:element type="xs:string" name="EntityId2"/>
-    <xs:element type="xs:string" name="EntityId3"/>
-    <xs:element type="xs:string" name="EntityId4"/>
-    <xs:element type="xs:string" name="EntityId5"/>
+    <xs:element name="EntityDisplayName" type="xs:string"/>
+    <xs:element name="EntityInstanceReference" type="xs:string"/>
+    <xs:element name="EntityId1" type="xs:string"/>
+    <xs:element name="EntityId2" type="xs:string"/>
+    <xs:element name="EntityId3" type="xs:string"/>
+    <xs:element name="EntityId4" type="xs:string"/>
+    <xs:element name="EntityId5" type="xs:string"/>
     <xs:element name="Terms">
       <xs:complexType>
         <xs:sequence>
@@ -17791,14 +17869,14 @@
         </xs:sequence>
       </xs:complexType>
     </xs:element>
-    <xs:element type="xs:string" name="TermName"/>
-    <xs:element type="xs:string" name="TermId"/>
+    <xs:element name="TermName" type="xs:string"/>
+    <xs:element name="TermId" type="xs:string"/>
   </xs:schema>
 </ct:contentTypeSchema>
 </file>
 
 <file path=customXml/item2.xml><?xml version="1.0" encoding="utf-8"?>
-<p:properties xmlns:pc="http://schemas.microsoft.com/office/infopath/2007/PartnerControls" xmlns:p="http://schemas.microsoft.com/office/2006/metadata/properties" xmlns:xsi="http://www.w3.org/2001/XMLSchema-instance">
+<p:properties xmlns:xsi="http://www.w3.org/2001/XMLSchema-instance" xmlns:pc="http://schemas.microsoft.com/office/infopath/2007/PartnerControls" xmlns:p="http://schemas.microsoft.com/office/2006/metadata/properties">
   <documentManagement>
     <lcf76f155ced4ddcb4097134ff3c332f xmlns="1d368349-1023-48e7-96c9-f9d028f6f0fb">
       <Terms xmlns="http://schemas.microsoft.com/office/infopath/2007/PartnerControls"/>

--- a/docs/presentation/25027138 - Presentation.pptx
+++ b/docs/presentation/25027138 - Presentation.pptx
@@ -12197,7 +12197,33 @@
                   <a:srgbClr val="111827"/>
                 </a:solidFill>
               </a:rPr>
-              <a:t>This project focuses on how a self-driving car plans a safe action when another vehicle may move in several possible ways.</a:t>
+              <a:t>This project focuses on motion planning:</a:t>
+            </a:r>
+            <a:endParaRPr lang="en-US" altLang="en-US" sz="1800">
+              <a:solidFill>
+                <a:srgbClr val="111827"/>
+              </a:solidFill>
+            </a:endParaRPr>
+          </a:p>
+          <a:p>
+            <a:pPr marL="514350" lvl="1" indent="-285750" algn="l">
+              <a:buClrTx/>
+              <a:buSzTx/>
+              <a:buFont typeface="Arial" panose="020B0604020202090204" pitchFamily="34" charset="0"/>
+              <a:buChar char="•"/>
+              <a:defRPr sz="1500">
+                <a:solidFill>
+                  <a:srgbClr val="4B5563"/>
+                </a:solidFill>
+              </a:defRPr>
+            </a:pPr>
+            <a:r>
+              <a:rPr lang="en-US" altLang="en-US" sz="1800">
+                <a:solidFill>
+                  <a:srgbClr val="111827"/>
+                </a:solidFill>
+              </a:rPr>
+              <a:t>how the ego car decides a safe action when another vehicle may slow down, continue, or move differently.</a:t>
             </a:r>
             <a:endParaRPr lang="en-US" altLang="en-US" sz="1800">
               <a:solidFill>
@@ -12221,22 +12247,6 @@
               </a:solidFill>
             </a:endParaRPr>
           </a:p>
-          <a:p>
-            <a:pPr algn="l">
-              <a:buClrTx/>
-              <a:buSzTx/>
-              <a:defRPr sz="1500">
-                <a:solidFill>
-                  <a:srgbClr val="4B5563"/>
-                </a:solidFill>
-              </a:defRPr>
-            </a:pPr>
-            <a:endParaRPr lang="en-US" altLang="en-US" sz="1800">
-              <a:solidFill>
-                <a:srgbClr val="111827"/>
-              </a:solidFill>
-            </a:endParaRPr>
-          </a:p>
         </p:txBody>
       </p:sp>
       <p:sp>
@@ -12247,7 +12257,7 @@
         </p:nvSpPr>
         <p:spPr>
           <a:xfrm>
-            <a:off x="431800" y="3665220"/>
+            <a:off x="431800" y="3880485"/>
             <a:ext cx="1417320" cy="685800"/>
           </a:xfrm>
           <a:prstGeom prst="roundRect">
@@ -12301,7 +12311,7 @@
         </p:nvCxnSpPr>
         <p:spPr>
           <a:xfrm>
-            <a:off x="1849120" y="4012692"/>
+            <a:off x="1849120" y="4227957"/>
             <a:ext cx="365760" cy="0"/>
           </a:xfrm>
           <a:prstGeom prst="line">
@@ -12336,7 +12346,7 @@
         </p:nvSpPr>
         <p:spPr>
           <a:xfrm>
-            <a:off x="2260600" y="3665220"/>
+            <a:off x="2260600" y="3880485"/>
             <a:ext cx="1417320" cy="685800"/>
           </a:xfrm>
           <a:prstGeom prst="roundRect">
@@ -12392,7 +12402,7 @@
         </p:nvCxnSpPr>
         <p:spPr>
           <a:xfrm>
-            <a:off x="3677920" y="4012692"/>
+            <a:off x="3677920" y="4227957"/>
             <a:ext cx="365760" cy="0"/>
           </a:xfrm>
           <a:prstGeom prst="line">
@@ -12427,7 +12437,7 @@
         </p:nvSpPr>
         <p:spPr>
           <a:xfrm>
-            <a:off x="4226560" y="3665220"/>
+            <a:off x="4226560" y="3880485"/>
             <a:ext cx="1417320" cy="685800"/>
           </a:xfrm>
           <a:prstGeom prst="roundRect">
@@ -12483,7 +12493,7 @@
         </p:nvCxnSpPr>
         <p:spPr>
           <a:xfrm>
-            <a:off x="5643880" y="4012692"/>
+            <a:off x="5643880" y="4227957"/>
             <a:ext cx="365760" cy="0"/>
           </a:xfrm>
           <a:prstGeom prst="line">
@@ -12518,7 +12528,7 @@
         </p:nvSpPr>
         <p:spPr>
           <a:xfrm>
-            <a:off x="6192520" y="3665220"/>
+            <a:off x="6192520" y="3880485"/>
             <a:ext cx="1417320" cy="685800"/>
           </a:xfrm>
           <a:prstGeom prst="roundRect">
@@ -12574,7 +12584,7 @@
         </p:nvCxnSpPr>
         <p:spPr>
           <a:xfrm>
-            <a:off x="7609840" y="4012692"/>
+            <a:off x="7609840" y="4227957"/>
             <a:ext cx="365760" cy="0"/>
           </a:xfrm>
           <a:prstGeom prst="line">
@@ -12609,7 +12619,7 @@
         </p:nvSpPr>
         <p:spPr>
           <a:xfrm>
-            <a:off x="8158480" y="3665220"/>
+            <a:off x="8158480" y="3880485"/>
             <a:ext cx="1417320" cy="685800"/>
           </a:xfrm>
           <a:prstGeom prst="roundRect">
@@ -12665,7 +12675,7 @@
         </p:nvCxnSpPr>
         <p:spPr>
           <a:xfrm>
-            <a:off x="9575800" y="4012692"/>
+            <a:off x="9575800" y="4227957"/>
             <a:ext cx="365759" cy="0"/>
           </a:xfrm>
           <a:prstGeom prst="line">
@@ -12700,7 +12710,7 @@
         </p:nvSpPr>
         <p:spPr>
           <a:xfrm>
-            <a:off x="9804400" y="3665220"/>
+            <a:off x="9804400" y="3880485"/>
             <a:ext cx="1417320" cy="685800"/>
           </a:xfrm>
           <a:prstGeom prst="roundRect">
@@ -12754,8 +12764,8 @@
         </p:nvSpPr>
         <p:spPr>
           <a:xfrm>
-            <a:off x="431800" y="5012690"/>
-            <a:ext cx="9921875" cy="922020"/>
+            <a:off x="431800" y="5299710"/>
+            <a:ext cx="9921875" cy="645160"/>
           </a:xfrm>
           <a:prstGeom prst="rect">
             <a:avLst/>
@@ -12817,36 +12827,6 @@
                 <a:sym typeface="+mn-ea"/>
               </a:rPr>
               <a:t>It is about decision-making and control under uncertain future behaviour.</a:t>
-            </a:r>
-            <a:endParaRPr lang="en-US" altLang="en-US" sz="1800">
-              <a:solidFill>
-                <a:srgbClr val="111827"/>
-              </a:solidFill>
-              <a:latin typeface="UCL Sans" pitchFamily="2" charset="77"/>
-              <a:sym typeface="+mn-ea"/>
-            </a:endParaRPr>
-          </a:p>
-          <a:p>
-            <a:pPr marL="285750" indent="-285750" algn="l">
-              <a:buClrTx/>
-              <a:buSzTx/>
-              <a:buFont typeface="Arial" panose="020B0604020202090204" pitchFamily="34" charset="0"/>
-              <a:buChar char="•"/>
-              <a:defRPr sz="1500">
-                <a:solidFill>
-                  <a:srgbClr val="4B5563"/>
-                </a:solidFill>
-              </a:defRPr>
-            </a:pPr>
-            <a:r>
-              <a:rPr lang="en-US" altLang="en-US" sz="1800">
-                <a:solidFill>
-                  <a:srgbClr val="FF0000"/>
-                </a:solidFill>
-                <a:latin typeface="UCL Sans" pitchFamily="2" charset="77"/>
-                <a:sym typeface="+mn-ea"/>
-              </a:rPr>
-              <a:t>Target vehicles may slow down, continue, turn, or behave unexpectedly.</a:t>
             </a:r>
             <a:endParaRPr lang="en-US" altLang="en-US" sz="1800">
               <a:solidFill>
@@ -12867,7 +12847,7 @@
 </file>
 
 <file path=ppt/slides/slide3.xml><?xml version="1.0" encoding="utf-8"?>
-<p:sld xmlns:a="http://schemas.openxmlformats.org/drawingml/2006/main" xmlns:r="http://schemas.openxmlformats.org/officeDocument/2006/relationships" xmlns:p="http://schemas.openxmlformats.org/presentationml/2006/main">
+<p:sld xmlns:a="http://schemas.openxmlformats.org/drawingml/2006/main" xmlns:p="http://schemas.openxmlformats.org/presentationml/2006/main" xmlns:r="http://schemas.openxmlformats.org/officeDocument/2006/relationships">
   <p:cSld>
     <p:spTree>
       <p:nvGrpSpPr>
@@ -12907,9 +12887,15 @@
               <a:rPr lang="en-US" altLang="en-GB">
                 <a:latin typeface="UCL Sans SemiBold"/>
               </a:rPr>
-              <a:t>Problem: Crossing an Intersection</a:t>
-            </a:r>
-            <a:endParaRPr lang="en-US" altLang="en-GB">
+              <a:t>Problem: </a:t>
+            </a:r>
+            <a:r>
+              <a:rPr lang="en-US" altLang="en-US">
+                <a:latin typeface="UCL Sans SemiBold"/>
+              </a:rPr>
+              <a:t>Crossing an Intersection Safely</a:t>
+            </a:r>
+            <a:endParaRPr lang="en-US" altLang="en-US">
               <a:latin typeface="UCL Sans SemiBold"/>
             </a:endParaRPr>
           </a:p>
@@ -12951,7 +12937,7 @@
                 </a:solidFill>
                 <a:sym typeface="+mn-ea"/>
               </a:rPr>
-              <a:t>In this project, the ego vehicle must cross an intersection while another vehicle may behave in several possible ways.</a:t>
+              <a:t>The ego vehicle must cross an intersection while another vehicle may behave in different ways.</a:t>
             </a:r>
             <a:endParaRPr lang="en-US" altLang="en-US" sz="1800">
               <a:solidFill>
@@ -12961,9 +12947,8 @@
             </a:endParaRPr>
           </a:p>
           <a:p>
-            <a:pPr marL="57150" indent="-285750">
+            <a:pPr indent="0">
               <a:buFont typeface="Arial" panose="020B0604020202090204" pitchFamily="34" charset="0"/>
-              <a:buChar char="•"/>
               <a:defRPr sz="1500">
                 <a:solidFill>
                   <a:srgbClr val="4B5563"/>
@@ -12994,7 +12979,7 @@
                 </a:solidFill>
                 <a:sym typeface="+mn-ea"/>
               </a:rPr>
-              <a:t>The car must observe the traffic situation, predict what may happen next, and choose a safe action.</a:t>
+              <a:t>The target vehicle may continue, slow down, or move slightly differently from what is expected.</a:t>
             </a:r>
             <a:endParaRPr lang="en-US" altLang="en-US" sz="1800">
               <a:solidFill>
@@ -13004,9 +12989,8 @@
             </a:endParaRPr>
           </a:p>
           <a:p>
-            <a:pPr marL="57150" indent="-285750">
+            <a:pPr indent="0">
               <a:buFont typeface="Arial" panose="020B0604020202090204" pitchFamily="34" charset="0"/>
-              <a:buChar char="•"/>
               <a:defRPr sz="1500">
                 <a:solidFill>
                   <a:srgbClr val="4B5563"/>
@@ -13035,15 +13019,13 @@
                 <a:solidFill>
                   <a:srgbClr val="111827"/>
                 </a:solidFill>
-                <a:sym typeface="+mn-ea"/>
               </a:rPr>
-              <a:t>This is a sequential decision-making problem: the car repeatedly observes, predicts, plans, acts, and then updates its plan.</a:t>
+              <a:t>The ego vehicle must make repeated decisions: observe the traffic, predict possible futures, plan an action, and update the plan.</a:t>
             </a:r>
             <a:endParaRPr lang="en-US" altLang="en-US" sz="1800">
               <a:solidFill>
                 <a:srgbClr val="111827"/>
               </a:solidFill>
-              <a:sym typeface="+mn-ea"/>
             </a:endParaRPr>
           </a:p>
           <a:p>
@@ -13054,22 +13036,12 @@
                 </a:solidFill>
               </a:defRPr>
             </a:pPr>
-            <a:endParaRPr>
+            <a:endParaRPr lang="en-US" altLang="en-US" sz="1800">
               <a:solidFill>
                 <a:srgbClr val="111827"/>
               </a:solidFill>
             </a:endParaRPr>
           </a:p>
-          <a:p>
-            <a:pPr>
-              <a:defRPr sz="1500">
-                <a:solidFill>
-                  <a:srgbClr val="4B5563"/>
-                </a:solidFill>
-              </a:defRPr>
-            </a:pPr>
-            <a:endParaRPr lang="en-GB"/>
-          </a:p>
         </p:txBody>
       </p:sp>
       <p:sp>
@@ -13080,7 +13052,7 @@
         </p:nvSpPr>
         <p:spPr>
           <a:xfrm>
-            <a:off x="868680" y="5179060"/>
+            <a:off x="868680" y="4820285"/>
             <a:ext cx="5595620" cy="658495"/>
           </a:xfrm>
           <a:prstGeom prst="roundRect">
@@ -13126,407 +13098,25 @@
           </a:p>
         </p:txBody>
       </p:sp>
-      <p:sp>
-        <p:nvSpPr>
-          <p:cNvPr id="6" name="Rectangle 5"/>
-          <p:cNvSpPr/>
-          <p:nvPr/>
-        </p:nvSpPr>
-        <p:spPr>
-          <a:xfrm>
-            <a:off x="9289491" y="1417320"/>
-            <a:ext cx="1126540" cy="4403750"/>
-          </a:xfrm>
-          <a:prstGeom prst="rect">
-            <a:avLst/>
-          </a:prstGeom>
-          <a:solidFill>
-            <a:srgbClr val="374151"/>
-          </a:solidFill>
-          <a:ln>
-            <a:solidFill>
-              <a:srgbClr val="374151"/>
-            </a:solidFill>
-          </a:ln>
-        </p:spPr>
-        <p:style>
-          <a:lnRef idx="1">
-            <a:schemeClr val="accent1"/>
-          </a:lnRef>
-          <a:fillRef idx="3">
-            <a:schemeClr val="accent1"/>
-          </a:fillRef>
-          <a:effectRef idx="2">
-            <a:schemeClr val="accent1"/>
-          </a:effectRef>
-          <a:fontRef idx="minor">
-            <a:schemeClr val="lt1"/>
-          </a:fontRef>
-        </p:style>
-        <p:txBody>
-          <a:bodyPr rtlCol="0" anchor="ctr"/>
-          <a:lstStyle/>
-          <a:p>
-            <a:pPr algn="ctr"/>
-            <a:endParaRPr sz="1800"/>
-          </a:p>
-        </p:txBody>
-      </p:sp>
-      <p:sp>
-        <p:nvSpPr>
-          <p:cNvPr id="7" name="Rectangle 6"/>
-          <p:cNvSpPr/>
-          <p:nvPr/>
-        </p:nvSpPr>
-        <p:spPr>
-          <a:xfrm>
-            <a:off x="7599680" y="3055924"/>
-            <a:ext cx="4403750" cy="1126540"/>
-          </a:xfrm>
-          <a:prstGeom prst="rect">
-            <a:avLst/>
-          </a:prstGeom>
-          <a:solidFill>
-            <a:srgbClr val="374151"/>
-          </a:solidFill>
-          <a:ln>
-            <a:solidFill>
-              <a:srgbClr val="374151"/>
-            </a:solidFill>
-          </a:ln>
-        </p:spPr>
-        <p:style>
-          <a:lnRef idx="1">
-            <a:schemeClr val="accent1"/>
-          </a:lnRef>
-          <a:fillRef idx="3">
-            <a:schemeClr val="accent1"/>
-          </a:fillRef>
-          <a:effectRef idx="2">
-            <a:schemeClr val="accent1"/>
-          </a:effectRef>
-          <a:fontRef idx="minor">
-            <a:schemeClr val="lt1"/>
-          </a:fontRef>
-        </p:style>
-        <p:txBody>
-          <a:bodyPr rtlCol="0" anchor="ctr"/>
-          <a:lstStyle/>
-          <a:p>
-            <a:pPr algn="ctr"/>
-            <a:endParaRPr sz="1800"/>
-          </a:p>
-        </p:txBody>
-      </p:sp>
-      <p:sp>
-        <p:nvSpPr>
-          <p:cNvPr id="8" name="Rectangle 7"/>
-          <p:cNvSpPr/>
-          <p:nvPr/>
-        </p:nvSpPr>
-        <p:spPr>
-          <a:xfrm>
-            <a:off x="7804505" y="3588471"/>
-            <a:ext cx="460857" cy="51206"/>
-          </a:xfrm>
-          <a:prstGeom prst="rect">
-            <a:avLst/>
-          </a:prstGeom>
-          <a:solidFill>
-            <a:srgbClr val="FBBF24"/>
-          </a:solidFill>
-          <a:ln>
-            <a:solidFill>
-              <a:srgbClr val="FBBF24"/>
-            </a:solidFill>
-          </a:ln>
-        </p:spPr>
-        <p:style>
-          <a:lnRef idx="1">
-            <a:schemeClr val="accent1"/>
-          </a:lnRef>
-          <a:fillRef idx="3">
-            <a:schemeClr val="accent1"/>
-          </a:fillRef>
-          <a:effectRef idx="2">
-            <a:schemeClr val="accent1"/>
-          </a:effectRef>
-          <a:fontRef idx="minor">
-            <a:schemeClr val="lt1"/>
-          </a:fontRef>
-        </p:style>
-        <p:txBody>
-          <a:bodyPr rtlCol="0" anchor="ctr"/>
-          <a:lstStyle/>
-          <a:p>
-            <a:pPr algn="ctr"/>
-            <a:endParaRPr sz="1800"/>
-          </a:p>
-        </p:txBody>
-      </p:sp>
-      <p:sp>
-        <p:nvSpPr>
-          <p:cNvPr id="9" name="Rectangle 8"/>
-          <p:cNvSpPr/>
-          <p:nvPr/>
-        </p:nvSpPr>
-        <p:spPr>
-          <a:xfrm>
-            <a:off x="8726220" y="3588471"/>
-            <a:ext cx="460857" cy="51206"/>
-          </a:xfrm>
-          <a:prstGeom prst="rect">
-            <a:avLst/>
-          </a:prstGeom>
-          <a:solidFill>
-            <a:srgbClr val="FBBF24"/>
-          </a:solidFill>
-          <a:ln>
-            <a:solidFill>
-              <a:srgbClr val="FBBF24"/>
-            </a:solidFill>
-          </a:ln>
-        </p:spPr>
-        <p:style>
-          <a:lnRef idx="1">
-            <a:schemeClr val="accent1"/>
-          </a:lnRef>
-          <a:fillRef idx="3">
-            <a:schemeClr val="accent1"/>
-          </a:fillRef>
-          <a:effectRef idx="2">
-            <a:schemeClr val="accent1"/>
-          </a:effectRef>
-          <a:fontRef idx="minor">
-            <a:schemeClr val="lt1"/>
-          </a:fontRef>
-        </p:style>
-        <p:txBody>
-          <a:bodyPr rtlCol="0" anchor="ctr"/>
-          <a:lstStyle/>
-          <a:p>
-            <a:pPr algn="ctr"/>
-            <a:endParaRPr sz="1800"/>
-          </a:p>
-        </p:txBody>
-      </p:sp>
-      <p:sp>
-        <p:nvSpPr>
-          <p:cNvPr id="10" name="Rectangle 9"/>
-          <p:cNvSpPr/>
-          <p:nvPr/>
-        </p:nvSpPr>
-        <p:spPr>
-          <a:xfrm>
-            <a:off x="9647936" y="3588471"/>
-            <a:ext cx="460857" cy="51206"/>
-          </a:xfrm>
-          <a:prstGeom prst="rect">
-            <a:avLst/>
-          </a:prstGeom>
-          <a:solidFill>
-            <a:srgbClr val="FBBF24"/>
-          </a:solidFill>
-          <a:ln>
-            <a:solidFill>
-              <a:srgbClr val="FBBF24"/>
-            </a:solidFill>
-          </a:ln>
-        </p:spPr>
-        <p:style>
-          <a:lnRef idx="1">
-            <a:schemeClr val="accent1"/>
-          </a:lnRef>
-          <a:fillRef idx="3">
-            <a:schemeClr val="accent1"/>
-          </a:fillRef>
-          <a:effectRef idx="2">
-            <a:schemeClr val="accent1"/>
-          </a:effectRef>
-          <a:fontRef idx="minor">
-            <a:schemeClr val="lt1"/>
-          </a:fontRef>
-        </p:style>
-        <p:txBody>
-          <a:bodyPr rtlCol="0" anchor="ctr"/>
-          <a:lstStyle/>
-          <a:p>
-            <a:pPr algn="ctr"/>
-            <a:endParaRPr sz="1800"/>
-          </a:p>
-        </p:txBody>
-      </p:sp>
-      <p:sp>
-        <p:nvSpPr>
-          <p:cNvPr id="11" name="Rectangle 10"/>
-          <p:cNvSpPr/>
-          <p:nvPr/>
-        </p:nvSpPr>
-        <p:spPr>
-          <a:xfrm>
-            <a:off x="10569651" y="3588471"/>
-            <a:ext cx="460857" cy="51206"/>
-          </a:xfrm>
-          <a:prstGeom prst="rect">
-            <a:avLst/>
-          </a:prstGeom>
-          <a:solidFill>
-            <a:srgbClr val="FBBF24"/>
-          </a:solidFill>
-          <a:ln>
-            <a:solidFill>
-              <a:srgbClr val="FBBF24"/>
-            </a:solidFill>
-          </a:ln>
-        </p:spPr>
-        <p:style>
-          <a:lnRef idx="1">
-            <a:schemeClr val="accent1"/>
-          </a:lnRef>
-          <a:fillRef idx="3">
-            <a:schemeClr val="accent1"/>
-          </a:fillRef>
-          <a:effectRef idx="2">
-            <a:schemeClr val="accent1"/>
-          </a:effectRef>
-          <a:fontRef idx="minor">
-            <a:schemeClr val="lt1"/>
-          </a:fontRef>
-        </p:style>
-        <p:txBody>
-          <a:bodyPr rtlCol="0" anchor="ctr"/>
-          <a:lstStyle/>
-          <a:p>
-            <a:pPr algn="ctr"/>
-            <a:endParaRPr sz="1800"/>
-          </a:p>
-        </p:txBody>
-      </p:sp>
-      <p:sp>
-        <p:nvSpPr>
-          <p:cNvPr id="12" name="Rounded Rectangle 11"/>
-          <p:cNvSpPr/>
-          <p:nvPr/>
-        </p:nvSpPr>
-        <p:spPr>
-          <a:xfrm>
-            <a:off x="8060537" y="3363163"/>
-            <a:ext cx="798819" cy="409651"/>
-          </a:xfrm>
-          <a:prstGeom prst="roundRect">
-            <a:avLst/>
-          </a:prstGeom>
-          <a:solidFill>
-            <a:srgbClr val="2563EB"/>
-          </a:solidFill>
-          <a:ln>
-            <a:solidFill>
-              <a:srgbClr val="2563EB"/>
-            </a:solidFill>
-          </a:ln>
-        </p:spPr>
-        <p:style>
-          <a:lnRef idx="1">
-            <a:schemeClr val="accent1"/>
-          </a:lnRef>
-          <a:fillRef idx="3">
-            <a:schemeClr val="accent1"/>
-          </a:fillRef>
-          <a:effectRef idx="2">
-            <a:schemeClr val="accent1"/>
-          </a:effectRef>
-          <a:fontRef idx="minor">
-            <a:schemeClr val="lt1"/>
-          </a:fontRef>
-        </p:style>
-        <p:txBody>
-          <a:bodyPr rtlCol="0" anchor="ctr"/>
-          <a:lstStyle/>
-          <a:p>
-            <a:pPr algn="ctr">
-              <a:defRPr sz="1100" b="1">
-                <a:solidFill>
-                  <a:srgbClr val="FFFFFF"/>
-                </a:solidFill>
-              </a:defRPr>
-            </a:pPr>
-            <a:r>
-              <a:t>EGO</a:t>
-            </a:r>
-          </a:p>
-        </p:txBody>
-      </p:sp>
-      <p:sp>
-        <p:nvSpPr>
-          <p:cNvPr id="13" name="Rounded Rectangle 12"/>
-          <p:cNvSpPr/>
-          <p:nvPr/>
-        </p:nvSpPr>
-        <p:spPr>
-          <a:xfrm>
-            <a:off x="9647936" y="1929384"/>
-            <a:ext cx="563270" cy="563270"/>
-          </a:xfrm>
-          <a:prstGeom prst="roundRect">
-            <a:avLst/>
-          </a:prstGeom>
-          <a:solidFill>
-            <a:srgbClr val="F97316"/>
-          </a:solidFill>
-          <a:ln>
-            <a:solidFill>
-              <a:srgbClr val="F97316"/>
-            </a:solidFill>
-          </a:ln>
-        </p:spPr>
-        <p:style>
-          <a:lnRef idx="1">
-            <a:schemeClr val="accent1"/>
-          </a:lnRef>
-          <a:fillRef idx="3">
-            <a:schemeClr val="accent1"/>
-          </a:fillRef>
-          <a:effectRef idx="2">
-            <a:schemeClr val="accent1"/>
-          </a:effectRef>
-          <a:fontRef idx="minor">
-            <a:schemeClr val="lt1"/>
-          </a:fontRef>
-        </p:style>
-        <p:txBody>
-          <a:bodyPr rtlCol="0" anchor="ctr"/>
-          <a:lstStyle/>
-          <a:p>
-            <a:pPr algn="ctr">
-              <a:defRPr sz="1100" b="1">
-                <a:solidFill>
-                  <a:srgbClr val="FFFFFF"/>
-                </a:solidFill>
-              </a:defRPr>
-            </a:pPr>
-            <a:r>
-              <a:t>TV</a:t>
-            </a:r>
-          </a:p>
-        </p:txBody>
-      </p:sp>
       <p:cxnSp>
         <p:nvCxnSpPr>
-          <p:cNvPr id="14" name="Connector 13"/>
-          <p:cNvCxnSpPr/>
+          <p:cNvPr id="16" name="Connector 15"/>
+          <p:cNvCxnSpPr>
+            <a:stCxn id="13" idx="2"/>
+          </p:cNvCxnSpPr>
           <p:nvPr/>
         </p:nvCxnSpPr>
         <p:spPr>
           <a:xfrm>
-            <a:off x="9903968" y="2492654"/>
-            <a:ext cx="0" cy="972922"/>
+            <a:off x="9550273" y="2492654"/>
+            <a:ext cx="74295" cy="1872615"/>
           </a:xfrm>
           <a:prstGeom prst="line">
             <a:avLst/>
           </a:prstGeom>
           <a:ln w="25400">
             <a:solidFill>
-              <a:srgbClr val="16A34A"/>
+              <a:srgbClr val="DC2626"/>
             </a:solidFill>
           </a:ln>
         </p:spPr>
@@ -13545,128 +13135,69 @@
           </a:fontRef>
         </p:style>
       </p:cxnSp>
-      <p:cxnSp>
-        <p:nvCxnSpPr>
-          <p:cNvPr id="15" name="Connector 14"/>
-          <p:cNvCxnSpPr/>
+      <p:sp>
+        <p:nvSpPr>
+          <p:cNvPr id="3" name="Text Box 2"/>
+          <p:cNvSpPr txBox="1"/>
           <p:nvPr/>
-        </p:nvCxnSpPr>
-        <p:spPr>
-          <a:xfrm>
-            <a:off x="9903968" y="2492654"/>
-            <a:ext cx="0" cy="1433779"/>
-          </a:xfrm>
-          <a:prstGeom prst="line">
-            <a:avLst/>
-          </a:prstGeom>
-          <a:ln w="25400">
-            <a:solidFill>
-              <a:srgbClr val="F97316"/>
-            </a:solidFill>
-          </a:ln>
-        </p:spPr>
-        <p:style>
-          <a:lnRef idx="2">
-            <a:schemeClr val="accent1"/>
-          </a:lnRef>
-          <a:fillRef idx="0">
-            <a:schemeClr val="accent1"/>
-          </a:fillRef>
-          <a:effectRef idx="1">
-            <a:schemeClr val="accent1"/>
-          </a:effectRef>
-          <a:fontRef idx="minor">
-            <a:schemeClr val="tx1"/>
-          </a:fontRef>
-        </p:style>
-      </p:cxnSp>
-      <p:cxnSp>
-        <p:nvCxnSpPr>
-          <p:cNvPr id="16" name="Connector 15"/>
-          <p:cNvCxnSpPr/>
-          <p:nvPr/>
-        </p:nvCxnSpPr>
-        <p:spPr>
-          <a:xfrm>
-            <a:off x="9903968" y="2492654"/>
-            <a:ext cx="0" cy="1894637"/>
-          </a:xfrm>
-          <a:prstGeom prst="line">
-            <a:avLst/>
-          </a:prstGeom>
-          <a:ln w="25400">
-            <a:solidFill>
-              <a:srgbClr val="DC2626"/>
-            </a:solidFill>
-          </a:ln>
-        </p:spPr>
-        <p:style>
-          <a:lnRef idx="2">
-            <a:schemeClr val="accent1"/>
-          </a:lnRef>
-          <a:fillRef idx="0">
-            <a:schemeClr val="accent1"/>
-          </a:fillRef>
-          <a:effectRef idx="1">
-            <a:schemeClr val="accent1"/>
-          </a:effectRef>
-          <a:fontRef idx="minor">
-            <a:schemeClr val="tx1"/>
-          </a:fontRef>
-        </p:style>
-      </p:cxnSp>
-      <p:sp>
-        <p:nvSpPr>
-          <p:cNvPr id="4" name="Arc 3"/>
-          <p:cNvSpPr/>
-          <p:nvPr/>
-        </p:nvSpPr>
-        <p:spPr>
-          <a:xfrm>
-            <a:off x="8099425" y="3543300"/>
-            <a:ext cx="1652270" cy="1998345"/>
-          </a:xfrm>
-          <a:prstGeom prst="arc">
+        </p:nvSpPr>
+        <p:spPr>
+          <a:xfrm>
+            <a:off x="618490" y="6003925"/>
+            <a:ext cx="7929880" cy="368300"/>
+          </a:xfrm>
+          <a:prstGeom prst="rect">
             <a:avLst/>
           </a:prstGeom>
           <a:noFill/>
-          <a:ln>
-            <a:solidFill>
-              <a:srgbClr val="C00000"/>
-            </a:solidFill>
-          </a:ln>
-          <a:effectLst/>
-          <a:extLst>
-            <a:ext uri="{909E8E84-426E-40DD-AFC4-6F175D3DCCD1}">
-              <a14:hiddenFill xmlns:a14="http://schemas.microsoft.com/office/drawing/2010/main">
-                <a:solidFill>
-                  <a:srgbClr val="C00000"/>
-                </a:solidFill>
-              </a14:hiddenFill>
-            </a:ext>
-          </a:extLst>
-        </p:spPr>
-        <p:style>
-          <a:lnRef idx="2">
-            <a:schemeClr val="accent1"/>
-          </a:lnRef>
-          <a:fillRef idx="0">
-            <a:srgbClr val="FFFFFF"/>
-          </a:fillRef>
-          <a:effectRef idx="0">
-            <a:srgbClr val="FFFFFF"/>
-          </a:effectRef>
-          <a:fontRef idx="minor">
-            <a:schemeClr val="tx1"/>
-          </a:fontRef>
-        </p:style>
+        </p:spPr>
         <p:txBody>
-          <a:bodyPr/>
-          <a:p>
-            <a:endParaRPr lang="en-US" sz="1800"/>
+          <a:bodyPr wrap="square" rtlCol="0" anchor="t">
+            <a:spAutoFit/>
+          </a:bodyPr>
+          <a:p>
+            <a:r>
+              <a:rPr lang="en-US" altLang="en-US" sz="1800" b="1">
+                <a:solidFill>
+                  <a:schemeClr val="tx1"/>
+                </a:solidFill>
+                <a:latin typeface="UCL Sans" pitchFamily="2" charset="77"/>
+              </a:rPr>
+              <a:t>This is a sequential decision-making problem under uncertainty.</a:t>
+            </a:r>
+            <a:endParaRPr lang="en-US" altLang="en-US" sz="1800" b="1">
+              <a:solidFill>
+                <a:schemeClr val="tx1"/>
+              </a:solidFill>
+              <a:latin typeface="UCL Sans" pitchFamily="2" charset="77"/>
+            </a:endParaRPr>
           </a:p>
         </p:txBody>
       </p:sp>
+      <p:pic>
+        <p:nvPicPr>
+          <p:cNvPr id="18" name="UK left-hand traffic intersection diagram"/>
+          <p:cNvPicPr>
+            <a:picLocks noChangeAspect="1"/>
+          </p:cNvPicPr>
+          <p:nvPr/>
+        </p:nvPicPr>
+        <p:blipFill>
+          <a:blip r:embed="rId3"/>
+          <a:stretch>
+            <a:fillRect/>
+          </a:stretch>
+        </p:blipFill>
+        <p:spPr>
+          <a:xfrm>
+            <a:off x="7550000" y="1380000"/>
+            <a:ext cx="4550000" cy="4550000"/>
+          </a:xfrm>
+          <a:prstGeom prst="rect">
+            <a:avLst/>
+          </a:prstGeom>
+        </p:spPr>
+      </p:pic>
     </p:spTree>
   </p:cSld>
   <p:clrMapOvr>
@@ -13702,18 +13233,21 @@
             <p:ph type="ctrTitle"/>
           </p:nvPr>
         </p:nvSpPr>
-        <p:spPr/>
+        <p:spPr>
+          <a:xfrm>
+            <a:off x="431800" y="409575"/>
+            <a:ext cx="11428730" cy="1009650"/>
+          </a:xfrm>
+        </p:spPr>
         <p:txBody>
           <a:bodyPr/>
           <a:lstStyle/>
           <a:p>
             <a:r>
-              <a:rPr lang="en-GB">
-                <a:latin typeface="UCL Sans SemiBold"/>
-              </a:rPr>
-              <a:t>Problem</a:t>
-            </a:r>
-            <a:endParaRPr lang="en-US"/>
+              <a:rPr lang="en-US" altLang="en-US"/>
+              <a:t>Core Problem: One Predicted Future Is Not Enough</a:t>
+            </a:r>
+            <a:endParaRPr lang="en-US" altLang="en-US"/>
           </a:p>
         </p:txBody>
       </p:sp>
@@ -13730,7 +13264,7 @@
         <p:spPr>
           <a:xfrm>
             <a:off x="440690" y="1157605"/>
-            <a:ext cx="11522075" cy="4709160"/>
+            <a:ext cx="11522075" cy="2290445"/>
           </a:xfrm>
         </p:spPr>
         <p:txBody>
@@ -13739,336 +13273,722 @@
           <a:p>
             <a:r>
               <a:rPr lang="en-US" altLang="en-US" dirty="0"/>
-              <a:t>The key challenge is </a:t>
-            </a:r>
-            <a:r>
-              <a:rPr lang="en-US" altLang="en-US" dirty="0">
-                <a:solidFill>
-                  <a:srgbClr val="FF0000"/>
-                </a:solidFill>
-              </a:rPr>
-              <a:t>uncertainty</a:t>
+              <a:t>At intersections, the target vehicle has several possible futures, and the ego vehicle does not know which one will happen. </a:t>
             </a:r>
             <a:r>
               <a:rPr lang="en-US" altLang="en-US" dirty="0"/>
-              <a:t>.</a:t>
+              <a:t>It may:</a:t>
             </a:r>
             <a:endParaRPr lang="en-US" altLang="en-US" dirty="0"/>
           </a:p>
           <a:p>
-            <a:endParaRPr lang="en-US" altLang="en-US" dirty="0">
+            <a:pPr marL="57150" indent="-285750">
+              <a:buFont typeface="Arial" panose="020B0604020202090204" pitchFamily="34" charset="0"/>
+              <a:buChar char="•"/>
+            </a:pPr>
+            <a:r>
+              <a:rPr lang="en-US" altLang="en-US" dirty="0"/>
+              <a:t>choose an unsafe action</a:t>
+            </a:r>
+            <a:endParaRPr lang="en-US" altLang="en-US" dirty="0"/>
+          </a:p>
+          <a:p>
+            <a:pPr marL="57150" indent="-285750">
+              <a:buFont typeface="Arial" panose="020B0604020202090204" pitchFamily="34" charset="0"/>
+              <a:buChar char="•"/>
+            </a:pPr>
+            <a:r>
+              <a:rPr lang="en-US" altLang="en-US" dirty="0"/>
+              <a:t>stop too conservatively</a:t>
+            </a:r>
+            <a:endParaRPr lang="en-US" altLang="en-US" dirty="0"/>
+          </a:p>
+          <a:p>
+            <a:pPr marL="57150" indent="-285750">
+              <a:buFont typeface="Arial" panose="020B0604020202090204" pitchFamily="34" charset="0"/>
+              <a:buChar char="•"/>
+            </a:pPr>
+            <a:r>
+              <a:rPr lang="en-US" altLang="en-US" dirty="0"/>
+              <a:t>or fail to make progress.</a:t>
+            </a:r>
+            <a:endParaRPr lang="en-US" altLang="en-US" dirty="0"/>
+          </a:p>
+          <a:p>
+            <a:endParaRPr lang="en-US" altLang="en-US" dirty="0"/>
+          </a:p>
+          <a:p>
+            <a:endParaRPr lang="en-US" altLang="en-US" dirty="0"/>
+          </a:p>
+          <a:p>
+            <a:endParaRPr lang="en-US" altLang="en-US" dirty="0"/>
+          </a:p>
+          <a:p>
+            <a:endParaRPr lang="en-US" altLang="en-US" dirty="0"/>
+          </a:p>
+          <a:p>
+            <a:endParaRPr lang="en-US" altLang="en-US" dirty="0"/>
+          </a:p>
+          <a:p>
+            <a:endParaRPr lang="en-US" altLang="en-US" dirty="0"/>
+          </a:p>
+          <a:p>
+            <a:endParaRPr lang="en-US" altLang="en-US" dirty="0"/>
+          </a:p>
+          <a:p>
+            <a:endParaRPr lang="en-US" altLang="en-US" dirty="0"/>
+          </a:p>
+        </p:txBody>
+      </p:sp>
+      <p:grpSp>
+        <p:nvGrpSpPr>
+          <p:cNvPr id="4" name="Group 3"/>
+          <p:cNvGrpSpPr/>
+          <p:nvPr/>
+        </p:nvGrpSpPr>
+        <p:grpSpPr>
+          <a:xfrm>
+            <a:off x="1148715" y="3321685"/>
+            <a:ext cx="9875520" cy="2103120"/>
+            <a:chOff x="1696" y="4666"/>
+            <a:chExt cx="15552" cy="3312"/>
+          </a:xfrm>
+        </p:grpSpPr>
+        <p:sp>
+          <p:nvSpPr>
+            <p:cNvPr id="5" name="Rounded Rectangle 4"/>
+            <p:cNvSpPr/>
+            <p:nvPr/>
+          </p:nvSpPr>
+          <p:spPr>
+            <a:xfrm>
+              <a:off x="1696" y="4666"/>
+              <a:ext cx="6768" cy="792"/>
+            </a:xfrm>
+            <a:prstGeom prst="roundRect">
+              <a:avLst/>
+            </a:prstGeom>
+            <a:solidFill>
+              <a:srgbClr val="FEE2E2"/>
+            </a:solidFill>
+            <a:ln>
               <a:solidFill>
-                <a:srgbClr val="FF0000"/>
+                <a:srgbClr val="DC2626"/>
               </a:solidFill>
-              <a:sym typeface="+mn-ea"/>
-            </a:endParaRPr>
-          </a:p>
-          <a:p>
-            <a:r>
-              <a:rPr lang="en-US" altLang="en-US" dirty="0">
-                <a:solidFill>
-                  <a:srgbClr val="FF0000"/>
-                </a:solidFill>
-                <a:sym typeface="+mn-ea"/>
-              </a:rPr>
-              <a:t>At an intersection, the target vehicle may have several possible future motions. </a:t>
-            </a:r>
-            <a:r>
-              <a:rPr lang="en-US" altLang="en-US" dirty="0">
-                <a:sym typeface="+mn-ea"/>
-              </a:rPr>
-              <a:t>If the ego vehicle plans using only one predicted future, it may become over-confident and choose a risky action.</a:t>
-            </a:r>
-            <a:endParaRPr lang="en-US" altLang="en-US" dirty="0"/>
-          </a:p>
-          <a:p>
-            <a:endParaRPr lang="en-US" altLang="en-US" dirty="0"/>
-          </a:p>
-          <a:p>
-            <a:endParaRPr lang="en-US" altLang="en-US" dirty="0"/>
-          </a:p>
-          <a:p>
-            <a:endParaRPr lang="en-US" altLang="en-US" dirty="0"/>
-          </a:p>
-          <a:p>
-            <a:endParaRPr lang="en-US" altLang="en-US" dirty="0"/>
-          </a:p>
-          <a:p>
-            <a:endParaRPr lang="en-US" altLang="en-US" dirty="0"/>
-          </a:p>
-          <a:p>
-            <a:endParaRPr lang="en-US" altLang="en-US" dirty="0"/>
-          </a:p>
-          <a:p>
-            <a:endParaRPr lang="en-US" altLang="en-US" dirty="0"/>
-          </a:p>
-          <a:p>
-            <a:r>
-              <a:rPr lang="en-US" altLang="en-US" dirty="0"/>
-              <a:t>The research problem is how to convert uncertain multimodal predictions into safe control actions.</a:t>
-            </a:r>
-            <a:endParaRPr lang="en-US" altLang="en-US" dirty="0"/>
-          </a:p>
-          <a:p>
-            <a:endParaRPr lang="en-US" altLang="en-US" dirty="0"/>
-          </a:p>
-          <a:p>
-            <a:endParaRPr lang="en-US" altLang="en-US" dirty="0"/>
-          </a:p>
-        </p:txBody>
-      </p:sp>
-      <p:sp>
-        <p:nvSpPr>
-          <p:cNvPr id="5" name="Rounded Rectangle 4"/>
-          <p:cNvSpPr/>
-          <p:nvPr/>
-        </p:nvSpPr>
-        <p:spPr>
-          <a:xfrm>
-            <a:off x="1076960" y="2962910"/>
-            <a:ext cx="4297680" cy="502920"/>
-          </a:xfrm>
-          <a:prstGeom prst="roundRect">
-            <a:avLst/>
-          </a:prstGeom>
-          <a:solidFill>
-            <a:srgbClr val="FEE2E2"/>
-          </a:solidFill>
-          <a:ln>
-            <a:solidFill>
-              <a:srgbClr val="DC2626"/>
-            </a:solidFill>
-          </a:ln>
-        </p:spPr>
-        <p:style>
-          <a:lnRef idx="1">
-            <a:schemeClr val="accent1"/>
-          </a:lnRef>
-          <a:fillRef idx="3">
-            <a:schemeClr val="accent1"/>
-          </a:fillRef>
-          <a:effectRef idx="2">
-            <a:schemeClr val="accent1"/>
-          </a:effectRef>
-          <a:fontRef idx="minor">
-            <a:schemeClr val="lt1"/>
-          </a:fontRef>
-        </p:style>
-        <p:txBody>
-          <a:bodyPr lIns="109728" rIns="109728" rtlCol="0" anchor="ctr"/>
-          <a:lstStyle/>
-          <a:p>
-            <a:pPr algn="ctr">
-              <a:defRPr sz="1700" b="1">
-                <a:solidFill>
-                  <a:srgbClr val="DC2626"/>
-                </a:solidFill>
-              </a:defRPr>
-            </a:pPr>
-            <a:r>
-              <a:t>One guessed future</a:t>
-            </a:r>
-          </a:p>
-        </p:txBody>
-      </p:sp>
-      <p:sp>
-        <p:nvSpPr>
-          <p:cNvPr id="6" name="Rectangle 5"/>
-          <p:cNvSpPr/>
-          <p:nvPr/>
-        </p:nvSpPr>
-        <p:spPr>
-          <a:xfrm>
-            <a:off x="1762760" y="3785870"/>
-            <a:ext cx="2834640" cy="658368"/>
-          </a:xfrm>
-          <a:prstGeom prst="rect">
-            <a:avLst/>
-          </a:prstGeom>
-          <a:solidFill>
-            <a:srgbClr val="374151"/>
-          </a:solidFill>
-          <a:ln>
+            </a:ln>
+          </p:spPr>
+          <p:style>
+            <a:lnRef idx="1">
+              <a:schemeClr val="accent1"/>
+            </a:lnRef>
+            <a:fillRef idx="3">
+              <a:schemeClr val="accent1"/>
+            </a:fillRef>
+            <a:effectRef idx="2">
+              <a:schemeClr val="accent1"/>
+            </a:effectRef>
+            <a:fontRef idx="minor">
+              <a:schemeClr val="lt1"/>
+            </a:fontRef>
+          </p:style>
+          <p:txBody>
+            <a:bodyPr lIns="109728" rIns="109728" rtlCol="0" anchor="ctr"/>
+            <a:lstStyle/>
+            <a:p>
+              <a:pPr algn="ctr">
+                <a:defRPr sz="1700" b="1">
+                  <a:solidFill>
+                    <a:srgbClr val="DC2626"/>
+                  </a:solidFill>
+                </a:defRPr>
+              </a:pPr>
+              <a:r>
+                <a:t>One guessed future</a:t>
+              </a:r>
+            </a:p>
+          </p:txBody>
+        </p:sp>
+        <p:sp>
+          <p:nvSpPr>
+            <p:cNvPr id="6" name="Rectangle 5"/>
+            <p:cNvSpPr/>
+            <p:nvPr/>
+          </p:nvSpPr>
+          <p:spPr>
+            <a:xfrm>
+              <a:off x="2776" y="5962"/>
+              <a:ext cx="4464" cy="1037"/>
+            </a:xfrm>
+            <a:prstGeom prst="rect">
+              <a:avLst/>
+            </a:prstGeom>
             <a:solidFill>
               <a:srgbClr val="374151"/>
             </a:solidFill>
-          </a:ln>
-        </p:spPr>
-        <p:style>
-          <a:lnRef idx="1">
-            <a:schemeClr val="accent1"/>
-          </a:lnRef>
-          <a:fillRef idx="3">
-            <a:schemeClr val="accent1"/>
-          </a:fillRef>
-          <a:effectRef idx="2">
-            <a:schemeClr val="accent1"/>
-          </a:effectRef>
-          <a:fontRef idx="minor">
-            <a:schemeClr val="lt1"/>
-          </a:fontRef>
-        </p:style>
-        <p:txBody>
-          <a:bodyPr rtlCol="0" anchor="ctr"/>
-          <a:lstStyle/>
-          <a:p>
-            <a:pPr algn="ctr"/>
-          </a:p>
-        </p:txBody>
-      </p:sp>
-      <p:sp>
-        <p:nvSpPr>
-          <p:cNvPr id="7" name="Rounded Rectangle 6"/>
-          <p:cNvSpPr/>
-          <p:nvPr/>
-        </p:nvSpPr>
-        <p:spPr>
-          <a:xfrm>
-            <a:off x="2037080" y="3904742"/>
-            <a:ext cx="822960" cy="411480"/>
-          </a:xfrm>
-          <a:prstGeom prst="roundRect">
-            <a:avLst/>
-          </a:prstGeom>
-          <a:solidFill>
-            <a:srgbClr val="2563EB"/>
-          </a:solidFill>
-          <a:ln>
+            <a:ln>
+              <a:solidFill>
+                <a:srgbClr val="374151"/>
+              </a:solidFill>
+            </a:ln>
+          </p:spPr>
+          <p:style>
+            <a:lnRef idx="1">
+              <a:schemeClr val="accent1"/>
+            </a:lnRef>
+            <a:fillRef idx="3">
+              <a:schemeClr val="accent1"/>
+            </a:fillRef>
+            <a:effectRef idx="2">
+              <a:schemeClr val="accent1"/>
+            </a:effectRef>
+            <a:fontRef idx="minor">
+              <a:schemeClr val="lt1"/>
+            </a:fontRef>
+          </p:style>
+          <p:txBody>
+            <a:bodyPr rtlCol="0" anchor="ctr"/>
+            <a:lstStyle/>
+            <a:p>
+              <a:pPr algn="ctr"/>
+            </a:p>
+          </p:txBody>
+        </p:sp>
+        <p:sp>
+          <p:nvSpPr>
+            <p:cNvPr id="7" name="Rounded Rectangle 6"/>
+            <p:cNvSpPr/>
+            <p:nvPr/>
+          </p:nvSpPr>
+          <p:spPr>
+            <a:xfrm>
+              <a:off x="3208" y="6149"/>
+              <a:ext cx="1296" cy="648"/>
+            </a:xfrm>
+            <a:prstGeom prst="roundRect">
+              <a:avLst/>
+            </a:prstGeom>
             <a:solidFill>
               <a:srgbClr val="2563EB"/>
             </a:solidFill>
-          </a:ln>
-        </p:spPr>
-        <p:style>
-          <a:lnRef idx="1">
-            <a:schemeClr val="accent1"/>
-          </a:lnRef>
-          <a:fillRef idx="3">
-            <a:schemeClr val="accent1"/>
-          </a:fillRef>
-          <a:effectRef idx="2">
-            <a:schemeClr val="accent1"/>
-          </a:effectRef>
-          <a:fontRef idx="minor">
-            <a:schemeClr val="lt1"/>
-          </a:fontRef>
-        </p:style>
-        <p:txBody>
-          <a:bodyPr rtlCol="0" anchor="ctr"/>
-          <a:lstStyle/>
-          <a:p>
-            <a:pPr algn="ctr">
-              <a:defRPr sz="1100" b="1">
-                <a:solidFill>
-                  <a:srgbClr val="FFFFFF"/>
-                </a:solidFill>
-              </a:defRPr>
-            </a:pPr>
-            <a:r>
-              <a:t>EGO</a:t>
-            </a:r>
-          </a:p>
-        </p:txBody>
-      </p:sp>
-      <p:sp>
-        <p:nvSpPr>
-          <p:cNvPr id="8" name="Rounded Rectangle 7"/>
-          <p:cNvSpPr/>
-          <p:nvPr/>
-        </p:nvSpPr>
-        <p:spPr>
-          <a:xfrm>
-            <a:off x="3545840" y="3904742"/>
-            <a:ext cx="594360" cy="384048"/>
-          </a:xfrm>
-          <a:prstGeom prst="roundRect">
-            <a:avLst/>
-          </a:prstGeom>
-          <a:solidFill>
-            <a:srgbClr val="F97316"/>
-          </a:solidFill>
-          <a:ln>
+            <a:ln>
+              <a:solidFill>
+                <a:srgbClr val="2563EB"/>
+              </a:solidFill>
+            </a:ln>
+          </p:spPr>
+          <p:style>
+            <a:lnRef idx="1">
+              <a:schemeClr val="accent1"/>
+            </a:lnRef>
+            <a:fillRef idx="3">
+              <a:schemeClr val="accent1"/>
+            </a:fillRef>
+            <a:effectRef idx="2">
+              <a:schemeClr val="accent1"/>
+            </a:effectRef>
+            <a:fontRef idx="minor">
+              <a:schemeClr val="lt1"/>
+            </a:fontRef>
+          </p:style>
+          <p:txBody>
+            <a:bodyPr rtlCol="0" anchor="ctr"/>
+            <a:lstStyle/>
+            <a:p>
+              <a:pPr algn="ctr">
+                <a:defRPr sz="1100" b="1">
+                  <a:solidFill>
+                    <a:srgbClr val="FFFFFF"/>
+                  </a:solidFill>
+                </a:defRPr>
+              </a:pPr>
+              <a:r>
+                <a:t>EGO</a:t>
+              </a:r>
+            </a:p>
+          </p:txBody>
+        </p:sp>
+        <p:sp>
+          <p:nvSpPr>
+            <p:cNvPr id="8" name="Rounded Rectangle 7"/>
+            <p:cNvSpPr/>
+            <p:nvPr/>
+          </p:nvSpPr>
+          <p:spPr>
+            <a:xfrm>
+              <a:off x="5584" y="6149"/>
+              <a:ext cx="936" cy="605"/>
+            </a:xfrm>
+            <a:prstGeom prst="roundRect">
+              <a:avLst/>
+            </a:prstGeom>
             <a:solidFill>
               <a:srgbClr val="F97316"/>
             </a:solidFill>
-          </a:ln>
-        </p:spPr>
-        <p:style>
-          <a:lnRef idx="1">
-            <a:schemeClr val="accent1"/>
-          </a:lnRef>
-          <a:fillRef idx="3">
-            <a:schemeClr val="accent1"/>
-          </a:fillRef>
-          <a:effectRef idx="2">
-            <a:schemeClr val="accent1"/>
-          </a:effectRef>
-          <a:fontRef idx="minor">
-            <a:schemeClr val="lt1"/>
-          </a:fontRef>
-        </p:style>
-        <p:txBody>
-          <a:bodyPr rtlCol="0" anchor="ctr"/>
-          <a:lstStyle/>
-          <a:p>
-            <a:pPr algn="ctr">
-              <a:defRPr sz="1100" b="1">
-                <a:solidFill>
-                  <a:srgbClr val="FFFFFF"/>
-                </a:solidFill>
-              </a:defRPr>
-            </a:pPr>
-            <a:r>
-              <a:t>TV</a:t>
-            </a:r>
-          </a:p>
-        </p:txBody>
-      </p:sp>
-      <p:cxnSp>
-        <p:nvCxnSpPr>
-          <p:cNvPr id="9" name="Connector 8"/>
-          <p:cNvCxnSpPr/>
-          <p:nvPr/>
-        </p:nvCxnSpPr>
-        <p:spPr>
-          <a:xfrm>
-            <a:off x="4140200" y="4087622"/>
-            <a:ext cx="731520" cy="0"/>
-          </a:xfrm>
-          <a:prstGeom prst="line">
-            <a:avLst/>
-          </a:prstGeom>
-          <a:ln w="38100">
+            <a:ln>
+              <a:solidFill>
+                <a:srgbClr val="F97316"/>
+              </a:solidFill>
+            </a:ln>
+          </p:spPr>
+          <p:style>
+            <a:lnRef idx="1">
+              <a:schemeClr val="accent1"/>
+            </a:lnRef>
+            <a:fillRef idx="3">
+              <a:schemeClr val="accent1"/>
+            </a:fillRef>
+            <a:effectRef idx="2">
+              <a:schemeClr val="accent1"/>
+            </a:effectRef>
+            <a:fontRef idx="minor">
+              <a:schemeClr val="lt1"/>
+            </a:fontRef>
+          </p:style>
+          <p:txBody>
+            <a:bodyPr rtlCol="0" anchor="ctr"/>
+            <a:lstStyle/>
+            <a:p>
+              <a:pPr algn="ctr">
+                <a:defRPr sz="1100" b="1">
+                  <a:solidFill>
+                    <a:srgbClr val="FFFFFF"/>
+                  </a:solidFill>
+                </a:defRPr>
+              </a:pPr>
+              <a:r>
+                <a:t>TV</a:t>
+              </a:r>
+            </a:p>
+          </p:txBody>
+        </p:sp>
+        <p:cxnSp>
+          <p:nvCxnSpPr>
+            <p:cNvPr id="9" name="Connector 8"/>
+            <p:cNvCxnSpPr/>
+            <p:nvPr/>
+          </p:nvCxnSpPr>
+          <p:spPr>
+            <a:xfrm>
+              <a:off x="6520" y="6437"/>
+              <a:ext cx="1152" cy="0"/>
+            </a:xfrm>
+            <a:prstGeom prst="line">
+              <a:avLst/>
+            </a:prstGeom>
+            <a:ln w="38100">
+              <a:solidFill>
+                <a:srgbClr val="DC2626"/>
+              </a:solidFill>
+            </a:ln>
+          </p:spPr>
+          <p:style>
+            <a:lnRef idx="2">
+              <a:schemeClr val="accent1"/>
+            </a:lnRef>
+            <a:fillRef idx="0">
+              <a:schemeClr val="accent1"/>
+            </a:fillRef>
+            <a:effectRef idx="1">
+              <a:schemeClr val="accent1"/>
+            </a:effectRef>
+            <a:fontRef idx="minor">
+              <a:schemeClr val="tx1"/>
+            </a:fontRef>
+          </p:style>
+        </p:cxnSp>
+        <p:sp>
+          <p:nvSpPr>
+            <p:cNvPr id="10" name="TextBox 9"/>
+            <p:cNvSpPr txBox="1"/>
+            <p:nvPr/>
+          </p:nvSpPr>
+          <p:spPr>
+            <a:xfrm>
+              <a:off x="2560" y="7546"/>
+              <a:ext cx="4896" cy="432"/>
+            </a:xfrm>
+            <a:prstGeom prst="rect">
+              <a:avLst/>
+            </a:prstGeom>
+            <a:noFill/>
+          </p:spPr>
+          <p:txBody>
+            <a:bodyPr wrap="none" anchor="ctr">
+              <a:spAutoFit/>
+            </a:bodyPr>
+            <a:lstStyle/>
+            <a:p>
+              <a:pPr algn="ctr">
+                <a:defRPr sz="1800" b="1">
+                  <a:solidFill>
+                    <a:srgbClr val="DC2626"/>
+                  </a:solidFill>
+                </a:defRPr>
+              </a:pPr>
+              <a:r>
+                <a:t>Too confident</a:t>
+              </a:r>
+            </a:p>
+          </p:txBody>
+        </p:sp>
+        <p:sp>
+          <p:nvSpPr>
+            <p:cNvPr id="11" name="Rounded Rectangle 10"/>
+            <p:cNvSpPr/>
+            <p:nvPr/>
+          </p:nvSpPr>
+          <p:spPr>
+            <a:xfrm>
+              <a:off x="10480" y="4666"/>
+              <a:ext cx="6768" cy="792"/>
+            </a:xfrm>
+            <a:prstGeom prst="roundRect">
+              <a:avLst/>
+            </a:prstGeom>
             <a:solidFill>
-              <a:srgbClr val="DC2626"/>
+              <a:srgbClr val="DCFCE7"/>
             </a:solidFill>
-          </a:ln>
-        </p:spPr>
-        <p:style>
-          <a:lnRef idx="2">
-            <a:schemeClr val="accent1"/>
-          </a:lnRef>
-          <a:fillRef idx="0">
-            <a:schemeClr val="accent1"/>
-          </a:fillRef>
-          <a:effectRef idx="1">
-            <a:schemeClr val="accent1"/>
-          </a:effectRef>
-          <a:fontRef idx="minor">
-            <a:schemeClr val="tx1"/>
-          </a:fontRef>
-        </p:style>
-      </p:cxnSp>
-      <p:sp>
-        <p:nvSpPr>
-          <p:cNvPr id="10" name="TextBox 9"/>
+            <a:ln>
+              <a:solidFill>
+                <a:srgbClr val="16A34A"/>
+              </a:solidFill>
+            </a:ln>
+          </p:spPr>
+          <p:style>
+            <a:lnRef idx="1">
+              <a:schemeClr val="accent1"/>
+            </a:lnRef>
+            <a:fillRef idx="3">
+              <a:schemeClr val="accent1"/>
+            </a:fillRef>
+            <a:effectRef idx="2">
+              <a:schemeClr val="accent1"/>
+            </a:effectRef>
+            <a:fontRef idx="minor">
+              <a:schemeClr val="lt1"/>
+            </a:fontRef>
+          </p:style>
+          <p:txBody>
+            <a:bodyPr lIns="109728" rIns="109728" rtlCol="0" anchor="ctr"/>
+            <a:lstStyle/>
+            <a:p>
+              <a:pPr algn="ctr">
+                <a:defRPr sz="1700" b="1">
+                  <a:solidFill>
+                    <a:srgbClr val="172554"/>
+                  </a:solidFill>
+                </a:defRPr>
+              </a:pPr>
+              <a:r>
+                <a:t>Several possible futures</a:t>
+              </a:r>
+            </a:p>
+          </p:txBody>
+        </p:sp>
+        <p:sp>
+          <p:nvSpPr>
+            <p:cNvPr id="12" name="Rectangle 11"/>
+            <p:cNvSpPr/>
+            <p:nvPr/>
+          </p:nvSpPr>
+          <p:spPr>
+            <a:xfrm>
+              <a:off x="11560" y="5962"/>
+              <a:ext cx="4464" cy="1037"/>
+            </a:xfrm>
+            <a:prstGeom prst="rect">
+              <a:avLst/>
+            </a:prstGeom>
+            <a:solidFill>
+              <a:srgbClr val="374151"/>
+            </a:solidFill>
+            <a:ln>
+              <a:solidFill>
+                <a:srgbClr val="374151"/>
+              </a:solidFill>
+            </a:ln>
+          </p:spPr>
+          <p:style>
+            <a:lnRef idx="1">
+              <a:schemeClr val="accent1"/>
+            </a:lnRef>
+            <a:fillRef idx="3">
+              <a:schemeClr val="accent1"/>
+            </a:fillRef>
+            <a:effectRef idx="2">
+              <a:schemeClr val="accent1"/>
+            </a:effectRef>
+            <a:fontRef idx="minor">
+              <a:schemeClr val="lt1"/>
+            </a:fontRef>
+          </p:style>
+          <p:txBody>
+            <a:bodyPr rtlCol="0" anchor="ctr"/>
+            <a:lstStyle/>
+            <a:p>
+              <a:pPr algn="ctr"/>
+            </a:p>
+          </p:txBody>
+        </p:sp>
+        <p:sp>
+          <p:nvSpPr>
+            <p:cNvPr id="13" name="Rounded Rectangle 12"/>
+            <p:cNvSpPr/>
+            <p:nvPr/>
+          </p:nvSpPr>
+          <p:spPr>
+            <a:xfrm>
+              <a:off x="11992" y="6149"/>
+              <a:ext cx="1296" cy="648"/>
+            </a:xfrm>
+            <a:prstGeom prst="roundRect">
+              <a:avLst/>
+            </a:prstGeom>
+            <a:solidFill>
+              <a:srgbClr val="2563EB"/>
+            </a:solidFill>
+            <a:ln>
+              <a:solidFill>
+                <a:srgbClr val="2563EB"/>
+              </a:solidFill>
+            </a:ln>
+          </p:spPr>
+          <p:style>
+            <a:lnRef idx="1">
+              <a:schemeClr val="accent1"/>
+            </a:lnRef>
+            <a:fillRef idx="3">
+              <a:schemeClr val="accent1"/>
+            </a:fillRef>
+            <a:effectRef idx="2">
+              <a:schemeClr val="accent1"/>
+            </a:effectRef>
+            <a:fontRef idx="minor">
+              <a:schemeClr val="lt1"/>
+            </a:fontRef>
+          </p:style>
+          <p:txBody>
+            <a:bodyPr rtlCol="0" anchor="ctr"/>
+            <a:lstStyle/>
+            <a:p>
+              <a:pPr algn="ctr">
+                <a:defRPr sz="1100" b="1">
+                  <a:solidFill>
+                    <a:srgbClr val="FFFFFF"/>
+                  </a:solidFill>
+                </a:defRPr>
+              </a:pPr>
+              <a:r>
+                <a:t>EGO</a:t>
+              </a:r>
+            </a:p>
+          </p:txBody>
+        </p:sp>
+        <p:sp>
+          <p:nvSpPr>
+            <p:cNvPr id="14" name="Rounded Rectangle 13"/>
+            <p:cNvSpPr/>
+            <p:nvPr/>
+          </p:nvSpPr>
+          <p:spPr>
+            <a:xfrm>
+              <a:off x="14368" y="6149"/>
+              <a:ext cx="936" cy="605"/>
+            </a:xfrm>
+            <a:prstGeom prst="roundRect">
+              <a:avLst/>
+            </a:prstGeom>
+            <a:solidFill>
+              <a:srgbClr val="F97316"/>
+            </a:solidFill>
+            <a:ln>
+              <a:solidFill>
+                <a:srgbClr val="F97316"/>
+              </a:solidFill>
+            </a:ln>
+          </p:spPr>
+          <p:style>
+            <a:lnRef idx="1">
+              <a:schemeClr val="accent1"/>
+            </a:lnRef>
+            <a:fillRef idx="3">
+              <a:schemeClr val="accent1"/>
+            </a:fillRef>
+            <a:effectRef idx="2">
+              <a:schemeClr val="accent1"/>
+            </a:effectRef>
+            <a:fontRef idx="minor">
+              <a:schemeClr val="lt1"/>
+            </a:fontRef>
+          </p:style>
+          <p:txBody>
+            <a:bodyPr rtlCol="0" anchor="ctr"/>
+            <a:lstStyle/>
+            <a:p>
+              <a:pPr algn="ctr">
+                <a:defRPr sz="1100" b="1">
+                  <a:solidFill>
+                    <a:srgbClr val="FFFFFF"/>
+                  </a:solidFill>
+                </a:defRPr>
+              </a:pPr>
+              <a:r>
+                <a:t>TV</a:t>
+              </a:r>
+            </a:p>
+          </p:txBody>
+        </p:sp>
+        <p:cxnSp>
+          <p:nvCxnSpPr>
+            <p:cNvPr id="15" name="Connector 14"/>
+            <p:cNvCxnSpPr/>
+            <p:nvPr/>
+          </p:nvCxnSpPr>
+          <p:spPr>
+            <a:xfrm flipV="1">
+              <a:off x="15304" y="5602"/>
+              <a:ext cx="1080" cy="835"/>
+            </a:xfrm>
+            <a:prstGeom prst="line">
+              <a:avLst/>
+            </a:prstGeom>
+            <a:ln w="38100">
+              <a:solidFill>
+                <a:srgbClr val="16A34A"/>
+              </a:solidFill>
+            </a:ln>
+          </p:spPr>
+          <p:style>
+            <a:lnRef idx="2">
+              <a:schemeClr val="accent1"/>
+            </a:lnRef>
+            <a:fillRef idx="0">
+              <a:schemeClr val="accent1"/>
+            </a:fillRef>
+            <a:effectRef idx="1">
+              <a:schemeClr val="accent1"/>
+            </a:effectRef>
+            <a:fontRef idx="minor">
+              <a:schemeClr val="tx1"/>
+            </a:fontRef>
+          </p:style>
+        </p:cxnSp>
+        <p:cxnSp>
+          <p:nvCxnSpPr>
+            <p:cNvPr id="16" name="Connector 15"/>
+            <p:cNvCxnSpPr/>
+            <p:nvPr/>
+          </p:nvCxnSpPr>
+          <p:spPr>
+            <a:xfrm>
+              <a:off x="15304" y="6437"/>
+              <a:ext cx="1224" cy="0"/>
+            </a:xfrm>
+            <a:prstGeom prst="line">
+              <a:avLst/>
+            </a:prstGeom>
+            <a:ln w="38100">
+              <a:solidFill>
+                <a:srgbClr val="F97316"/>
+              </a:solidFill>
+            </a:ln>
+          </p:spPr>
+          <p:style>
+            <a:lnRef idx="2">
+              <a:schemeClr val="accent1"/>
+            </a:lnRef>
+            <a:fillRef idx="0">
+              <a:schemeClr val="accent1"/>
+            </a:fillRef>
+            <a:effectRef idx="1">
+              <a:schemeClr val="accent1"/>
+            </a:effectRef>
+            <a:fontRef idx="minor">
+              <a:schemeClr val="tx1"/>
+            </a:fontRef>
+          </p:style>
+        </p:cxnSp>
+        <p:cxnSp>
+          <p:nvCxnSpPr>
+            <p:cNvPr id="17" name="Connector 16"/>
+            <p:cNvCxnSpPr/>
+            <p:nvPr/>
+          </p:nvCxnSpPr>
+          <p:spPr>
+            <a:xfrm>
+              <a:off x="15304" y="6437"/>
+              <a:ext cx="1080" cy="821"/>
+            </a:xfrm>
+            <a:prstGeom prst="line">
+              <a:avLst/>
+            </a:prstGeom>
+            <a:ln w="38100">
+              <a:solidFill>
+                <a:srgbClr val="DC2626"/>
+              </a:solidFill>
+            </a:ln>
+          </p:spPr>
+          <p:style>
+            <a:lnRef idx="2">
+              <a:schemeClr val="accent1"/>
+            </a:lnRef>
+            <a:fillRef idx="0">
+              <a:schemeClr val="accent1"/>
+            </a:fillRef>
+            <a:effectRef idx="1">
+              <a:schemeClr val="accent1"/>
+            </a:effectRef>
+            <a:fontRef idx="minor">
+              <a:schemeClr val="tx1"/>
+            </a:fontRef>
+          </p:style>
+        </p:cxnSp>
+        <p:sp>
+          <p:nvSpPr>
+            <p:cNvPr id="18" name="TextBox 17"/>
+            <p:cNvSpPr txBox="1"/>
+            <p:nvPr/>
+          </p:nvSpPr>
+          <p:spPr>
+            <a:xfrm>
+              <a:off x="11776" y="7546"/>
+              <a:ext cx="4896" cy="432"/>
+            </a:xfrm>
+            <a:prstGeom prst="rect">
+              <a:avLst/>
+            </a:prstGeom>
+            <a:noFill/>
+          </p:spPr>
+          <p:txBody>
+            <a:bodyPr wrap="none" anchor="ctr">
+              <a:spAutoFit/>
+            </a:bodyPr>
+            <a:lstStyle/>
+            <a:p>
+              <a:pPr algn="ctr">
+                <a:defRPr sz="1800" b="1">
+                  <a:solidFill>
+                    <a:srgbClr val="16A34A"/>
+                  </a:solidFill>
+                </a:defRPr>
+              </a:pPr>
+              <a:r>
+                <a:t>More careful</a:t>
+              </a:r>
+            </a:p>
+          </p:txBody>
+        </p:sp>
+      </p:grpSp>
+      <p:sp>
+        <p:nvSpPr>
+          <p:cNvPr id="19" name="Text Box 18"/>
           <p:cNvSpPr txBox="1"/>
           <p:nvPr/>
         </p:nvSpPr>
         <p:spPr>
           <a:xfrm>
-            <a:off x="1625600" y="4791710"/>
-            <a:ext cx="3108960" cy="274320"/>
+            <a:off x="479425" y="5700395"/>
+            <a:ext cx="8580120" cy="645160"/>
           </a:xfrm>
           <a:prstGeom prst="rect">
             <a:avLst/>
@@ -14076,368 +13996,47 @@
           <a:noFill/>
         </p:spPr>
         <p:txBody>
-          <a:bodyPr wrap="none" anchor="ctr">
+          <a:bodyPr wrap="square" rtlCol="0" anchor="t">
             <a:spAutoFit/>
           </a:bodyPr>
-          <a:lstStyle/>
-          <a:p>
-            <a:pPr algn="ctr">
-              <a:defRPr sz="1800" b="1">
-                <a:solidFill>
-                  <a:srgbClr val="DC2626"/>
-                </a:solidFill>
-              </a:defRPr>
-            </a:pPr>
-            <a:r>
-              <a:t>Too confident</a:t>
-            </a:r>
-          </a:p>
-        </p:txBody>
-      </p:sp>
-      <p:sp>
-        <p:nvSpPr>
-          <p:cNvPr id="11" name="Rounded Rectangle 10"/>
-          <p:cNvSpPr/>
-          <p:nvPr/>
-        </p:nvSpPr>
-        <p:spPr>
-          <a:xfrm>
-            <a:off x="6654800" y="2962910"/>
-            <a:ext cx="4297680" cy="502920"/>
-          </a:xfrm>
-          <a:prstGeom prst="roundRect">
-            <a:avLst/>
-          </a:prstGeom>
-          <a:solidFill>
-            <a:srgbClr val="DCFCE7"/>
-          </a:solidFill>
-          <a:ln>
-            <a:solidFill>
-              <a:srgbClr val="16A34A"/>
-            </a:solidFill>
-          </a:ln>
-        </p:spPr>
-        <p:style>
-          <a:lnRef idx="1">
-            <a:schemeClr val="accent1"/>
-          </a:lnRef>
-          <a:fillRef idx="3">
-            <a:schemeClr val="accent1"/>
-          </a:fillRef>
-          <a:effectRef idx="2">
-            <a:schemeClr val="accent1"/>
-          </a:effectRef>
-          <a:fontRef idx="minor">
-            <a:schemeClr val="lt1"/>
-          </a:fontRef>
-        </p:style>
-        <p:txBody>
-          <a:bodyPr lIns="109728" rIns="109728" rtlCol="0" anchor="ctr"/>
-          <a:lstStyle/>
-          <a:p>
-            <a:pPr algn="ctr">
-              <a:defRPr sz="1700" b="1">
-                <a:solidFill>
-                  <a:srgbClr val="172554"/>
-                </a:solidFill>
-              </a:defRPr>
-            </a:pPr>
-            <a:r>
-              <a:t>Several possible futures</a:t>
-            </a:r>
-          </a:p>
-        </p:txBody>
-      </p:sp>
-      <p:sp>
-        <p:nvSpPr>
-          <p:cNvPr id="12" name="Rectangle 11"/>
-          <p:cNvSpPr/>
-          <p:nvPr/>
-        </p:nvSpPr>
-        <p:spPr>
-          <a:xfrm>
-            <a:off x="7340600" y="3785870"/>
-            <a:ext cx="2834640" cy="658368"/>
-          </a:xfrm>
-          <a:prstGeom prst="rect">
-            <a:avLst/>
-          </a:prstGeom>
-          <a:solidFill>
-            <a:srgbClr val="374151"/>
-          </a:solidFill>
-          <a:ln>
-            <a:solidFill>
-              <a:srgbClr val="374151"/>
-            </a:solidFill>
-          </a:ln>
-        </p:spPr>
-        <p:style>
-          <a:lnRef idx="1">
-            <a:schemeClr val="accent1"/>
-          </a:lnRef>
-          <a:fillRef idx="3">
-            <a:schemeClr val="accent1"/>
-          </a:fillRef>
-          <a:effectRef idx="2">
-            <a:schemeClr val="accent1"/>
-          </a:effectRef>
-          <a:fontRef idx="minor">
-            <a:schemeClr val="lt1"/>
-          </a:fontRef>
-        </p:style>
-        <p:txBody>
-          <a:bodyPr rtlCol="0" anchor="ctr"/>
-          <a:lstStyle/>
-          <a:p>
-            <a:pPr algn="ctr"/>
-          </a:p>
-        </p:txBody>
-      </p:sp>
-      <p:sp>
-        <p:nvSpPr>
-          <p:cNvPr id="13" name="Rounded Rectangle 12"/>
-          <p:cNvSpPr/>
-          <p:nvPr/>
-        </p:nvSpPr>
-        <p:spPr>
-          <a:xfrm>
-            <a:off x="7614920" y="3904742"/>
-            <a:ext cx="822960" cy="411480"/>
-          </a:xfrm>
-          <a:prstGeom prst="roundRect">
-            <a:avLst/>
-          </a:prstGeom>
-          <a:solidFill>
-            <a:srgbClr val="2563EB"/>
-          </a:solidFill>
-          <a:ln>
-            <a:solidFill>
-              <a:srgbClr val="2563EB"/>
-            </a:solidFill>
-          </a:ln>
-        </p:spPr>
-        <p:style>
-          <a:lnRef idx="1">
-            <a:schemeClr val="accent1"/>
-          </a:lnRef>
-          <a:fillRef idx="3">
-            <a:schemeClr val="accent1"/>
-          </a:fillRef>
-          <a:effectRef idx="2">
-            <a:schemeClr val="accent1"/>
-          </a:effectRef>
-          <a:fontRef idx="minor">
-            <a:schemeClr val="lt1"/>
-          </a:fontRef>
-        </p:style>
-        <p:txBody>
-          <a:bodyPr rtlCol="0" anchor="ctr"/>
-          <a:lstStyle/>
-          <a:p>
-            <a:pPr algn="ctr">
-              <a:defRPr sz="1100" b="1">
-                <a:solidFill>
-                  <a:srgbClr val="FFFFFF"/>
-                </a:solidFill>
-              </a:defRPr>
-            </a:pPr>
-            <a:r>
-              <a:t>EGO</a:t>
-            </a:r>
-          </a:p>
-        </p:txBody>
-      </p:sp>
-      <p:sp>
-        <p:nvSpPr>
-          <p:cNvPr id="14" name="Rounded Rectangle 13"/>
-          <p:cNvSpPr/>
-          <p:nvPr/>
-        </p:nvSpPr>
-        <p:spPr>
-          <a:xfrm>
-            <a:off x="9123680" y="3904742"/>
-            <a:ext cx="594360" cy="384048"/>
-          </a:xfrm>
-          <a:prstGeom prst="roundRect">
-            <a:avLst/>
-          </a:prstGeom>
-          <a:solidFill>
-            <a:srgbClr val="F97316"/>
-          </a:solidFill>
-          <a:ln>
-            <a:solidFill>
-              <a:srgbClr val="F97316"/>
-            </a:solidFill>
-          </a:ln>
-        </p:spPr>
-        <p:style>
-          <a:lnRef idx="1">
-            <a:schemeClr val="accent1"/>
-          </a:lnRef>
-          <a:fillRef idx="3">
-            <a:schemeClr val="accent1"/>
-          </a:fillRef>
-          <a:effectRef idx="2">
-            <a:schemeClr val="accent1"/>
-          </a:effectRef>
-          <a:fontRef idx="minor">
-            <a:schemeClr val="lt1"/>
-          </a:fontRef>
-        </p:style>
-        <p:txBody>
-          <a:bodyPr rtlCol="0" anchor="ctr"/>
-          <a:lstStyle/>
-          <a:p>
-            <a:pPr algn="ctr">
-              <a:defRPr sz="1100" b="1">
-                <a:solidFill>
-                  <a:srgbClr val="FFFFFF"/>
-                </a:solidFill>
-              </a:defRPr>
-            </a:pPr>
-            <a:r>
-              <a:t>TV</a:t>
-            </a:r>
-          </a:p>
-        </p:txBody>
-      </p:sp>
-      <p:cxnSp>
-        <p:nvCxnSpPr>
-          <p:cNvPr id="15" name="Connector 14"/>
-          <p:cNvCxnSpPr/>
-          <p:nvPr/>
-        </p:nvCxnSpPr>
-        <p:spPr>
-          <a:xfrm flipV="1">
-            <a:off x="9718040" y="3557270"/>
-            <a:ext cx="685800" cy="530352"/>
-          </a:xfrm>
-          <a:prstGeom prst="line">
-            <a:avLst/>
-          </a:prstGeom>
-          <a:ln w="38100">
-            <a:solidFill>
-              <a:srgbClr val="16A34A"/>
-            </a:solidFill>
-          </a:ln>
-        </p:spPr>
-        <p:style>
-          <a:lnRef idx="2">
-            <a:schemeClr val="accent1"/>
-          </a:lnRef>
-          <a:fillRef idx="0">
-            <a:schemeClr val="accent1"/>
-          </a:fillRef>
-          <a:effectRef idx="1">
-            <a:schemeClr val="accent1"/>
-          </a:effectRef>
-          <a:fontRef idx="minor">
-            <a:schemeClr val="tx1"/>
-          </a:fontRef>
-        </p:style>
-      </p:cxnSp>
-      <p:cxnSp>
-        <p:nvCxnSpPr>
-          <p:cNvPr id="16" name="Connector 15"/>
-          <p:cNvCxnSpPr/>
-          <p:nvPr/>
-        </p:nvCxnSpPr>
-        <p:spPr>
-          <a:xfrm>
-            <a:off x="9718040" y="4087622"/>
-            <a:ext cx="777240" cy="0"/>
-          </a:xfrm>
-          <a:prstGeom prst="line">
-            <a:avLst/>
-          </a:prstGeom>
-          <a:ln w="38100">
-            <a:solidFill>
-              <a:srgbClr val="F97316"/>
-            </a:solidFill>
-          </a:ln>
-        </p:spPr>
-        <p:style>
-          <a:lnRef idx="2">
-            <a:schemeClr val="accent1"/>
-          </a:lnRef>
-          <a:fillRef idx="0">
-            <a:schemeClr val="accent1"/>
-          </a:fillRef>
-          <a:effectRef idx="1">
-            <a:schemeClr val="accent1"/>
-          </a:effectRef>
-          <a:fontRef idx="minor">
-            <a:schemeClr val="tx1"/>
-          </a:fontRef>
-        </p:style>
-      </p:cxnSp>
-      <p:cxnSp>
-        <p:nvCxnSpPr>
-          <p:cNvPr id="17" name="Connector 16"/>
-          <p:cNvCxnSpPr/>
-          <p:nvPr/>
-        </p:nvCxnSpPr>
-        <p:spPr>
-          <a:xfrm>
-            <a:off x="9718040" y="4087622"/>
-            <a:ext cx="685800" cy="521208"/>
-          </a:xfrm>
-          <a:prstGeom prst="line">
-            <a:avLst/>
-          </a:prstGeom>
-          <a:ln w="38100">
-            <a:solidFill>
-              <a:srgbClr val="DC2626"/>
-            </a:solidFill>
-          </a:ln>
-        </p:spPr>
-        <p:style>
-          <a:lnRef idx="2">
-            <a:schemeClr val="accent1"/>
-          </a:lnRef>
-          <a:fillRef idx="0">
-            <a:schemeClr val="accent1"/>
-          </a:fillRef>
-          <a:effectRef idx="1">
-            <a:schemeClr val="accent1"/>
-          </a:effectRef>
-          <a:fontRef idx="minor">
-            <a:schemeClr val="tx1"/>
-          </a:fontRef>
-        </p:style>
-      </p:cxnSp>
-      <p:sp>
-        <p:nvSpPr>
-          <p:cNvPr id="18" name="TextBox 17"/>
-          <p:cNvSpPr txBox="1"/>
-          <p:nvPr/>
-        </p:nvSpPr>
-        <p:spPr>
-          <a:xfrm>
-            <a:off x="7477760" y="4791710"/>
-            <a:ext cx="3108960" cy="274320"/>
-          </a:xfrm>
-          <a:prstGeom prst="rect">
-            <a:avLst/>
-          </a:prstGeom>
-          <a:noFill/>
-        </p:spPr>
-        <p:txBody>
-          <a:bodyPr wrap="none" anchor="ctr">
-            <a:spAutoFit/>
-          </a:bodyPr>
-          <a:lstStyle/>
-          <a:p>
-            <a:pPr algn="ctr">
-              <a:defRPr sz="1800" b="1">
-                <a:solidFill>
-                  <a:srgbClr val="16A34A"/>
-                </a:solidFill>
-              </a:defRPr>
-            </a:pPr>
-            <a:r>
-              <a:t>More careful</a:t>
-            </a:r>
+          <a:p>
+            <a:r>
+              <a:rPr lang="en-US" altLang="en-US" sz="1800" b="1" dirty="0">
+                <a:solidFill>
+                  <a:schemeClr val="tx1"/>
+                </a:solidFill>
+                <a:latin typeface="UCL Sans" pitchFamily="2" charset="77"/>
+                <a:sym typeface="+mn-ea"/>
+              </a:rPr>
+              <a:t>The research problem is:</a:t>
+            </a:r>
+            <a:endParaRPr lang="en-US" altLang="en-US" sz="1800" b="1" dirty="0">
+              <a:solidFill>
+                <a:schemeClr val="tx1"/>
+              </a:solidFill>
+              <a:latin typeface="UCL Sans" pitchFamily="2" charset="77"/>
+              <a:sym typeface="+mn-ea"/>
+            </a:endParaRPr>
+          </a:p>
+          <a:p>
+            <a:pPr indent="457200"/>
+            <a:r>
+              <a:rPr lang="en-US" altLang="en-US" sz="1800" b="1" dirty="0">
+                <a:solidFill>
+                  <a:schemeClr val="tx1"/>
+                </a:solidFill>
+                <a:latin typeface="UCL Sans" pitchFamily="2" charset="77"/>
+                <a:sym typeface="+mn-ea"/>
+              </a:rPr>
+              <a:t>how can the car use multiple possible futures to choose a safe action?</a:t>
+            </a:r>
+            <a:endParaRPr lang="en-US" altLang="en-US" sz="1800" b="1" dirty="0">
+              <a:solidFill>
+                <a:schemeClr val="tx1"/>
+              </a:solidFill>
+              <a:latin typeface="UCL Sans" pitchFamily="2" charset="77"/>
+              <a:sym typeface="+mn-ea"/>
+            </a:endParaRPr>
           </a:p>
         </p:txBody>
       </p:sp>
@@ -14476,7 +14075,12 @@
             <p:ph type="ctrTitle"/>
           </p:nvPr>
         </p:nvSpPr>
-        <p:spPr/>
+        <p:spPr>
+          <a:xfrm>
+            <a:off x="431800" y="266065"/>
+            <a:ext cx="11533505" cy="1009650"/>
+          </a:xfrm>
+        </p:spPr>
         <p:txBody>
           <a:bodyPr/>
           <a:lstStyle/>
@@ -14487,7 +14091,21 @@
               </a:rPr>
               <a:t>Significance</a:t>
             </a:r>
-            <a:endParaRPr lang="en-US"/>
+            <a:r>
+              <a:rPr lang="en-US" altLang="en-GB">
+                <a:latin typeface="UCL Sans SemiBold"/>
+              </a:rPr>
+              <a:t>: </a:t>
+            </a:r>
+            <a:r>
+              <a:rPr lang="en-US" altLang="en-US">
+                <a:latin typeface="UCL Sans SemiBold"/>
+              </a:rPr>
+              <a:t>Safety Requires More Than Stopping</a:t>
+            </a:r>
+            <a:endParaRPr lang="en-US" altLang="en-US">
+              <a:latin typeface="UCL Sans SemiBold"/>
+            </a:endParaRPr>
           </a:p>
         </p:txBody>
       </p:sp>
@@ -14503,7 +14121,7 @@
         </p:nvSpPr>
         <p:spPr>
           <a:xfrm>
-            <a:off x="440690" y="1155065"/>
+            <a:off x="440690" y="1298575"/>
             <a:ext cx="11257915" cy="3528060"/>
           </a:xfrm>
         </p:spPr>
@@ -14544,9 +14162,9 @@
             </a:pPr>
             <a:r>
               <a:rPr lang="en-US" altLang="en-US" sz="1800">
-                <a:sym typeface="+mn-ea"/>
+                <a:latin typeface="UCL Sans" pitchFamily="2" charset="77"/>
               </a:rPr>
-              <a:t>A good autonomous driving planner should satisfy three goals:</a:t>
+              <a:t>A useful planner must balance three goals:</a:t>
             </a:r>
             <a:endParaRPr lang="en-US" altLang="en-US" sz="1800">
               <a:latin typeface="UCL Sans" pitchFamily="2" charset="77"/>
@@ -14572,8 +14190,8 @@
         </p:nvSpPr>
         <p:spPr>
           <a:xfrm>
-            <a:off x="1097280" y="2574290"/>
-            <a:ext cx="2560320" cy="1097280"/>
+            <a:off x="738505" y="3004820"/>
+            <a:ext cx="2900045" cy="1097280"/>
           </a:xfrm>
           <a:prstGeom prst="roundRect">
             <a:avLst/>
@@ -14621,6 +14239,36 @@
             </a:r>
             <a:endParaRPr lang="en-US"/>
           </a:p>
+          <a:p>
+            <a:pPr algn="ctr">
+              <a:defRPr sz="2800" b="1">
+                <a:solidFill>
+                  <a:srgbClr val="172554"/>
+                </a:solidFill>
+              </a:defRPr>
+            </a:pPr>
+            <a:r>
+              <a:rPr lang="en-US" altLang="en-US" sz="1600" b="0">
+                <a:solidFill>
+                  <a:schemeClr val="accent5">
+                    <a:lumMod val="50000"/>
+                  </a:schemeClr>
+                </a:solidFill>
+                <a:latin typeface="UCL Sans" pitchFamily="2" charset="77"/>
+                <a:sym typeface="+mn-ea"/>
+              </a:rPr>
+              <a:t>avoid collision</a:t>
+            </a:r>
+            <a:endParaRPr lang="en-US" altLang="en-US" sz="1600" b="0">
+              <a:solidFill>
+                <a:schemeClr val="accent5">
+                  <a:lumMod val="50000"/>
+                </a:schemeClr>
+              </a:solidFill>
+              <a:latin typeface="UCL Sans" pitchFamily="2" charset="77"/>
+              <a:sym typeface="+mn-ea"/>
+            </a:endParaRPr>
+          </a:p>
         </p:txBody>
       </p:sp>
       <p:sp>
@@ -14631,8 +14279,8 @@
         </p:nvSpPr>
         <p:spPr>
           <a:xfrm>
-            <a:off x="4754880" y="2574290"/>
-            <a:ext cx="2560320" cy="1097280"/>
+            <a:off x="4436110" y="3004820"/>
+            <a:ext cx="2950845" cy="1097280"/>
           </a:xfrm>
           <a:prstGeom prst="roundRect">
             <a:avLst/>
@@ -14677,6 +14325,36 @@
             </a:r>
             <a:endParaRPr lang="en-US" altLang="en-US"/>
           </a:p>
+          <a:p>
+            <a:pPr algn="ctr">
+              <a:defRPr sz="2800" b="1">
+                <a:solidFill>
+                  <a:srgbClr val="172554"/>
+                </a:solidFill>
+              </a:defRPr>
+            </a:pPr>
+            <a:r>
+              <a:rPr lang="en-US" altLang="en-US" sz="1600" b="0">
+                <a:solidFill>
+                  <a:schemeClr val="accent5">
+                    <a:lumMod val="50000"/>
+                  </a:schemeClr>
+                </a:solidFill>
+                <a:latin typeface="UCL Sans" pitchFamily="2" charset="77"/>
+                <a:sym typeface="+mn-ea"/>
+              </a:rPr>
+              <a:t>avoid unnecessary stopping or hesitation</a:t>
+            </a:r>
+            <a:endParaRPr lang="en-US" altLang="en-US" sz="1600" b="0">
+              <a:solidFill>
+                <a:schemeClr val="accent5">
+                  <a:lumMod val="50000"/>
+                </a:schemeClr>
+              </a:solidFill>
+              <a:latin typeface="UCL Sans" pitchFamily="2" charset="77"/>
+              <a:sym typeface="+mn-ea"/>
+            </a:endParaRPr>
+          </a:p>
         </p:txBody>
       </p:sp>
       <p:sp>
@@ -14687,8 +14365,8 @@
         </p:nvSpPr>
         <p:spPr>
           <a:xfrm>
-            <a:off x="8412480" y="2574290"/>
-            <a:ext cx="2560320" cy="1097280"/>
+            <a:off x="8235950" y="3004820"/>
+            <a:ext cx="2880360" cy="1097280"/>
           </a:xfrm>
           <a:prstGeom prst="roundRect">
             <a:avLst/>
@@ -14733,6 +14411,36 @@
             </a:r>
             <a:endParaRPr lang="en-US"/>
           </a:p>
+          <a:p>
+            <a:pPr algn="ctr">
+              <a:defRPr sz="2800" b="1">
+                <a:solidFill>
+                  <a:srgbClr val="172554"/>
+                </a:solidFill>
+              </a:defRPr>
+            </a:pPr>
+            <a:r>
+              <a:rPr lang="en-US" altLang="en-US" sz="1600" b="0">
+                <a:solidFill>
+                  <a:schemeClr val="accent5">
+                    <a:lumMod val="50000"/>
+                  </a:schemeClr>
+                </a:solidFill>
+                <a:latin typeface="UCL Sans" pitchFamily="2" charset="77"/>
+                <a:sym typeface="+mn-ea"/>
+              </a:rPr>
+              <a:t>avoid sudden braking or steering</a:t>
+            </a:r>
+            <a:endParaRPr lang="en-US" altLang="en-US" sz="1600" b="0">
+              <a:solidFill>
+                <a:schemeClr val="accent5">
+                  <a:lumMod val="50000"/>
+                </a:schemeClr>
+              </a:solidFill>
+              <a:latin typeface="UCL Sans" pitchFamily="2" charset="77"/>
+              <a:sym typeface="+mn-ea"/>
+            </a:endParaRPr>
+          </a:p>
         </p:txBody>
       </p:sp>
       <p:sp>
@@ -14743,8 +14451,8 @@
         </p:nvSpPr>
         <p:spPr>
           <a:xfrm>
-            <a:off x="422910" y="3937000"/>
-            <a:ext cx="11219180" cy="2214880"/>
+            <a:off x="422910" y="4798060"/>
+            <a:ext cx="11219180" cy="1153160"/>
           </a:xfrm>
           <a:prstGeom prst="rect">
             <a:avLst/>
@@ -14757,110 +14465,6 @@
           </a:bodyPr>
           <a:lstStyle/>
           <a:p>
-            <a:pPr marL="285750" indent="-285750">
-              <a:spcAft>
-                <a:spcPts val="900"/>
-              </a:spcAft>
-              <a:buFont typeface="Arial" panose="020B0604020202090204" pitchFamily="34" charset="0"/>
-              <a:buChar char="•"/>
-              <a:defRPr sz="2200">
-                <a:solidFill>
-                  <a:srgbClr val="111827"/>
-                </a:solidFill>
-              </a:defRPr>
-            </a:pPr>
-            <a:r>
-              <a:rPr lang="en-US" altLang="en-US" sz="1800" b="1">
-                <a:latin typeface="UCL Sans" pitchFamily="2" charset="77"/>
-              </a:rPr>
-              <a:t>Safety</a:t>
-            </a:r>
-            <a:r>
-              <a:rPr lang="en-US" altLang="en-US" sz="1800">
-                <a:latin typeface="UCL Sans" pitchFamily="2" charset="77"/>
-              </a:rPr>
-              <a:t>: avoid collision.</a:t>
-            </a:r>
-            <a:endParaRPr lang="en-US" altLang="en-US" sz="1800">
-              <a:latin typeface="UCL Sans" pitchFamily="2" charset="77"/>
-            </a:endParaRPr>
-          </a:p>
-          <a:p>
-            <a:pPr marL="285750" indent="-285750">
-              <a:spcAft>
-                <a:spcPts val="900"/>
-              </a:spcAft>
-              <a:buFont typeface="Arial" panose="020B0604020202090204" pitchFamily="34" charset="0"/>
-              <a:buChar char="•"/>
-              <a:defRPr sz="2200">
-                <a:solidFill>
-                  <a:srgbClr val="111827"/>
-                </a:solidFill>
-              </a:defRPr>
-            </a:pPr>
-            <a:r>
-              <a:rPr lang="en-US" altLang="en-US" sz="1800" b="1">
-                <a:latin typeface="UCL Sans" pitchFamily="2" charset="77"/>
-              </a:rPr>
-              <a:t>Progress</a:t>
-            </a:r>
-            <a:r>
-              <a:rPr lang="en-US" altLang="en-US" sz="1800">
-                <a:latin typeface="UCL Sans" pitchFamily="2" charset="77"/>
-              </a:rPr>
-              <a:t>: avoid unnecessary stopping or hesitation.</a:t>
-            </a:r>
-            <a:endParaRPr lang="en-US" altLang="en-US" sz="1800">
-              <a:latin typeface="UCL Sans" pitchFamily="2" charset="77"/>
-            </a:endParaRPr>
-          </a:p>
-          <a:p>
-            <a:pPr marL="285750" indent="-285750">
-              <a:spcAft>
-                <a:spcPts val="900"/>
-              </a:spcAft>
-              <a:buFont typeface="Arial" panose="020B0604020202090204" pitchFamily="34" charset="0"/>
-              <a:buChar char="•"/>
-              <a:defRPr sz="2200">
-                <a:solidFill>
-                  <a:srgbClr val="111827"/>
-                </a:solidFill>
-              </a:defRPr>
-            </a:pPr>
-            <a:r>
-              <a:rPr lang="en-US" altLang="en-US" sz="1800" b="1">
-                <a:latin typeface="UCL Sans" pitchFamily="2" charset="77"/>
-              </a:rPr>
-              <a:t>Comfort</a:t>
-            </a:r>
-            <a:r>
-              <a:rPr lang="en-US" altLang="en-US" sz="1800">
-                <a:latin typeface="UCL Sans" pitchFamily="2" charset="77"/>
-              </a:rPr>
-              <a:t>: avoid sudden acceleration, braking, or steering.</a:t>
-            </a:r>
-            <a:endParaRPr lang="en-US" altLang="en-US" sz="1800">
-              <a:latin typeface="UCL Sans" pitchFamily="2" charset="77"/>
-            </a:endParaRPr>
-          </a:p>
-          <a:p>
-            <a:pPr marL="0" indent="0">
-              <a:spcAft>
-                <a:spcPts val="900"/>
-              </a:spcAft>
-              <a:buFont typeface="Arial" panose="020B0604020202090204" pitchFamily="34" charset="0"/>
-              <a:buNone/>
-              <a:defRPr sz="2200">
-                <a:solidFill>
-                  <a:srgbClr val="111827"/>
-                </a:solidFill>
-              </a:defRPr>
-            </a:pPr>
-            <a:endParaRPr lang="en-US" altLang="en-US" sz="1800">
-              <a:latin typeface="UCL Sans" pitchFamily="2" charset="77"/>
-            </a:endParaRPr>
-          </a:p>
-          <a:p>
             <a:pPr marL="0">
               <a:spcAft>
                 <a:spcPts val="900"/>
@@ -14874,15 +14478,73 @@
             <a:r>
               <a:rPr lang="en-US" altLang="en-US" sz="1800">
                 <a:solidFill>
-                  <a:srgbClr val="FF0000"/>
+                  <a:schemeClr val="tx1"/>
                 </a:solidFill>
                 <a:latin typeface="UCL Sans" pitchFamily="2" charset="77"/>
               </a:rPr>
-              <a:t>If this problem is solved, autonomous vehicles can handle more complex urban driving situations with better safety and reliability.</a:t>
+              <a:t>If solved, autonomous vehicles could:</a:t>
             </a:r>
             <a:endParaRPr lang="en-US" altLang="en-US" sz="1800">
               <a:solidFill>
-                <a:srgbClr val="FF0000"/>
+                <a:schemeClr val="tx1"/>
+              </a:solidFill>
+              <a:latin typeface="UCL Sans" pitchFamily="2" charset="77"/>
+            </a:endParaRPr>
+          </a:p>
+          <a:p>
+            <a:pPr marL="342900" indent="-342900">
+              <a:spcAft>
+                <a:spcPts val="900"/>
+              </a:spcAft>
+              <a:buFont typeface="Arial" panose="020B0604020202090204" pitchFamily="34" charset="0"/>
+              <a:buAutoNum type="arabicPeriod"/>
+              <a:defRPr sz="2200">
+                <a:solidFill>
+                  <a:srgbClr val="111827"/>
+                </a:solidFill>
+              </a:defRPr>
+            </a:pPr>
+            <a:r>
+              <a:rPr lang="en-US" altLang="en-US" sz="1800">
+                <a:solidFill>
+                  <a:schemeClr val="tx1"/>
+                </a:solidFill>
+                <a:latin typeface="UCL Sans" pitchFamily="2" charset="77"/>
+              </a:rPr>
+              <a:t>cross complex intersections more reliably and avoid unsafe over-confident decisions;</a:t>
+            </a:r>
+            <a:endParaRPr lang="en-US" altLang="en-US" sz="1800">
+              <a:solidFill>
+                <a:schemeClr val="tx1"/>
+              </a:solidFill>
+              <a:latin typeface="UCL Sans" pitchFamily="2" charset="77"/>
+            </a:endParaRPr>
+          </a:p>
+          <a:p>
+            <a:pPr marL="342900" indent="-342900">
+              <a:spcAft>
+                <a:spcPts val="900"/>
+              </a:spcAft>
+              <a:buFont typeface="Arial" panose="020B0604020202090204" pitchFamily="34" charset="0"/>
+              <a:buAutoNum type="arabicPeriod"/>
+              <a:defRPr sz="2200">
+                <a:solidFill>
+                  <a:srgbClr val="111827"/>
+                </a:solidFill>
+              </a:defRPr>
+            </a:pPr>
+            <a:r>
+              <a:rPr lang="en-US" altLang="en-US" sz="1800">
+                <a:solidFill>
+                  <a:schemeClr val="tx1"/>
+                </a:solidFill>
+                <a:latin typeface="UCL Sans" pitchFamily="2" charset="77"/>
+              </a:rPr>
+              <a:t>reduce unnecessary stopping and provide smoother passenger experience.</a:t>
+            </a:r>
+            <a:endParaRPr lang="en-US" altLang="en-US" sz="1800">
+              <a:solidFill>
+                <a:schemeClr val="tx1"/>
               </a:solidFill>
               <a:latin typeface="UCL Sans" pitchFamily="2" charset="77"/>
             </a:endParaRPr>
@@ -14924,7 +14586,12 @@
             <p:ph type="ctrTitle"/>
           </p:nvPr>
         </p:nvSpPr>
-        <p:spPr/>
+        <p:spPr>
+          <a:xfrm>
+            <a:off x="431800" y="409575"/>
+            <a:ext cx="11155680" cy="1009650"/>
+          </a:xfrm>
+        </p:spPr>
         <p:txBody>
           <a:bodyPr/>
           <a:lstStyle/>
@@ -14935,86 +14602,20 @@
               </a:rPr>
               <a:t>State of the Art</a:t>
             </a:r>
-            <a:endParaRPr lang="en-US" dirty="0"/>
-          </a:p>
-        </p:txBody>
-      </p:sp>
-      <p:sp>
-        <p:nvSpPr>
-          <p:cNvPr id="3" name="Text Box 2"/>
-          <p:cNvSpPr txBox="1"/>
-          <p:nvPr/>
-        </p:nvSpPr>
-        <p:spPr>
-          <a:xfrm>
-            <a:off x="-456565" y="6572250"/>
-            <a:ext cx="10810240" cy="306705"/>
-          </a:xfrm>
-          <a:prstGeom prst="rect">
-            <a:avLst/>
-          </a:prstGeom>
-          <a:noFill/>
-        </p:spPr>
-        <p:txBody>
-          <a:bodyPr wrap="square" rtlCol="0" anchor="t">
-            <a:spAutoFit/>
-          </a:bodyPr>
-          <a:p>
-            <a:pPr lvl="1" indent="0" algn="l">
-              <a:buFont typeface="Arial" panose="020B0604020202090204" pitchFamily="34" charset="0"/>
-              <a:buNone/>
-              <a:defRPr sz="2300" b="1">
-                <a:solidFill>
-                  <a:srgbClr val="172554"/>
-                </a:solidFill>
-              </a:defRPr>
-            </a:pPr>
-            <a:r>
-              <a:rPr lang="en-US" altLang="en-US" sz="1400">
-                <a:solidFill>
-                  <a:srgbClr val="111827"/>
-                </a:solidFill>
-                <a:latin typeface="UCL Sans" pitchFamily="2" charset="77"/>
-                <a:sym typeface="+mn-ea"/>
+            <a:r>
+              <a:rPr lang="en-US" altLang="en-GB" dirty="0">
+                <a:latin typeface="UCL Sans SemiBold"/>
               </a:rPr>
-              <a:t>SMPC (</a:t>
-            </a:r>
-            <a:r>
-              <a:rPr lang="en-US" altLang="en-US" sz="1400">
-                <a:solidFill>
-                  <a:srgbClr val="111827"/>
-                </a:solidFill>
-                <a:latin typeface="UCL Sans" pitchFamily="2" charset="77"/>
-                <a:sym typeface="+mn-ea"/>
+              <a:t>: </a:t>
+            </a:r>
+            <a:r>
+              <a:rPr lang="en-US" altLang="en-US" dirty="0">
+                <a:latin typeface="UCL Sans SemiBold"/>
               </a:rPr>
-              <a:t>Stochastic Model Predictive Control</a:t>
-            </a:r>
-            <a:r>
-              <a:rPr lang="en-US" altLang="en-US" sz="1400">
-                <a:solidFill>
-                  <a:srgbClr val="111827"/>
-                </a:solidFill>
-                <a:latin typeface="UCL Sans" pitchFamily="2" charset="77"/>
-                <a:sym typeface="+mn-ea"/>
-              </a:rPr>
-              <a:t>): </a:t>
-            </a:r>
-            <a:r>
-              <a:rPr lang="en-US" altLang="en-US" sz="1400">
-                <a:solidFill>
-                  <a:schemeClr val="tx1"/>
-                </a:solidFill>
-                <a:latin typeface="UCL Sans" pitchFamily="2" charset="77"/>
-                <a:sym typeface="+mn-ea"/>
-              </a:rPr>
-              <a:t>plans what the car should do while considering uncertain future paths.</a:t>
-            </a:r>
-            <a:endParaRPr lang="en-US" altLang="en-US" sz="1400">
-              <a:solidFill>
-                <a:schemeClr val="tx1"/>
-              </a:solidFill>
-              <a:latin typeface="UCL Sans" pitchFamily="2" charset="77"/>
-              <a:sym typeface="+mn-ea"/>
+              <a:t>From Prediction to Safe Planning</a:t>
+            </a:r>
+            <a:endParaRPr lang="en-US" altLang="en-US" dirty="0">
+              <a:latin typeface="UCL Sans SemiBold"/>
             </a:endParaRPr>
           </a:p>
         </p:txBody>
@@ -15057,7 +14658,7 @@
               <a:rPr lang="en-US" altLang="en-US" sz="1800" b="1">
                 <a:latin typeface="UCL Sans" pitchFamily="2" charset="77"/>
               </a:rPr>
-              <a:t>Current research: </a:t>
+              <a:t>MultiPath: </a:t>
             </a:r>
             <a:endParaRPr lang="en-US" altLang="en-US" sz="1800">
               <a:latin typeface="UCL Sans" pitchFamily="2" charset="77"/>
@@ -15078,18 +14679,9 @@
             </a:pPr>
             <a:r>
               <a:rPr lang="en-US" altLang="en-US" sz="1800">
-                <a:solidFill>
-                  <a:srgbClr val="FF0000"/>
-                </a:solidFill>
                 <a:latin typeface="UCL Sans" pitchFamily="2" charset="77"/>
               </a:rPr>
-              <a:t>MultiPath </a:t>
-            </a:r>
-            <a:r>
-              <a:rPr lang="en-US" altLang="en-US" sz="1800">
-                <a:latin typeface="UCL Sans" pitchFamily="2" charset="77"/>
-              </a:rPr>
-              <a:t>predicts several likely paths and the uncertainty of each path.</a:t>
+              <a:t>predicts several possible future paths with probabilities and uncertainty.</a:t>
             </a:r>
             <a:endParaRPr lang="en-US" altLang="en-US" sz="1800">
               <a:latin typeface="UCL Sans" pitchFamily="2" charset="77"/>
@@ -15112,19 +14704,19 @@
               <a:rPr lang="en-US" altLang="en-US" sz="1800">
                 <a:latin typeface="UCL Sans" pitchFamily="2" charset="77"/>
               </a:rPr>
-              <a:t>Good for representing uncertainty, but it does not choose the ego vehicle's action.</a:t>
+              <a:t>Limitation: prediction alone does not choose the ego vehicle's action.</a:t>
             </a:r>
             <a:endParaRPr lang="en-US" altLang="en-US" sz="1800">
               <a:latin typeface="UCL Sans" pitchFamily="2" charset="77"/>
             </a:endParaRPr>
           </a:p>
           <a:p>
-            <a:pPr marL="285750" indent="-285750">
+            <a:pPr lvl="1" indent="0">
               <a:spcAft>
                 <a:spcPts val="600"/>
               </a:spcAft>
               <a:buFont typeface="Arial" panose="020B0604020202090204" pitchFamily="34" charset="0"/>
-              <a:buChar char="•"/>
+              <a:buNone/>
               <a:defRPr sz="1700">
                 <a:solidFill>
                   <a:srgbClr val="111827"/>
@@ -15136,7 +14728,7 @@
             </a:endParaRPr>
           </a:p>
           <a:p>
-            <a:pPr marL="0" indent="0">
+            <a:pPr marL="0" lvl="0" indent="0">
               <a:spcAft>
                 <a:spcPts val="600"/>
               </a:spcAft>
@@ -15152,19 +14744,20 @@
               <a:rPr lang="en-US" altLang="en-US" sz="1800">
                 <a:latin typeface="UCL Sans" pitchFamily="2" charset="77"/>
               </a:rPr>
-              <a:t>However, </a:t>
-            </a:r>
-            <a:r>
-              <a:rPr lang="en-US" altLang="en-US" sz="1800" b="1">
+              <a:t>SMPC </a:t>
+            </a:r>
+            <a:r>
+              <a:rPr lang="en-US" altLang="en-US" sz="1800">
                 <a:latin typeface="UCL Sans" pitchFamily="2" charset="77"/>
+                <a:sym typeface="+mn-ea"/>
               </a:rPr>
-              <a:t>prediction alone does not decide what the ego car should do</a:t>
+              <a:t>(Stochastic Model Predictive Control)</a:t>
             </a:r>
             <a:r>
               <a:rPr lang="en-US" altLang="en-US" sz="1800">
                 <a:latin typeface="UCL Sans" pitchFamily="2" charset="77"/>
               </a:rPr>
-              <a:t>.</a:t>
+              <a:t>:</a:t>
             </a:r>
             <a:endParaRPr lang="en-US" altLang="en-US" sz="1800">
               <a:latin typeface="UCL Sans" pitchFamily="2" charset="77"/>
@@ -15187,7 +14780,7 @@
               <a:rPr lang="en-US" altLang="en-US" sz="1800">
                 <a:latin typeface="UCL Sans" pitchFamily="2" charset="77"/>
               </a:rPr>
-              <a:t>The planner must turn uncertain futures into safe actions.</a:t>
+              <a:t>plans safe actions under uncertainty using risk constraints.</a:t>
             </a:r>
             <a:endParaRPr lang="en-US" altLang="en-US" sz="1800">
               <a:latin typeface="UCL Sans" pitchFamily="2" charset="77"/>
@@ -15210,7 +14803,7 @@
               <a:rPr lang="en-US" altLang="en-US" sz="1800">
                 <a:latin typeface="UCL Sans" pitchFamily="2" charset="77"/>
               </a:rPr>
-              <a:t>SMPC uses probabilistic safety constraints to plan under uncertainty.</a:t>
+              <a:t>Limitation: it may become conservative or infeasible when uncertainty is large.</a:t>
             </a:r>
             <a:endParaRPr lang="en-US" altLang="en-US" sz="1800">
               <a:latin typeface="UCL Sans" pitchFamily="2" charset="77"/>
@@ -15273,7 +14866,7 @@
               <a:rPr lang="en-US" altLang="en-US" sz="1800">
                 <a:latin typeface="UCL Sans" pitchFamily="2" charset="77"/>
               </a:rPr>
-              <a:t>How to use multimodal predictions in a safe, efficient, closed-loop controller.</a:t>
+              <a:t>How can multimodal predictions be used safely and efficiently in closed-loop control?</a:t>
             </a:r>
             <a:endParaRPr lang="en-US" altLang="en-US" sz="1800">
               <a:latin typeface="UCL Sans" pitchFamily="2" charset="77"/>
@@ -15408,10 +15001,10 @@
         </p:nvGrpSpPr>
         <p:grpSpPr>
           <a:xfrm>
-            <a:off x="568960" y="1214755"/>
-            <a:ext cx="10175240" cy="4772660"/>
-            <a:chOff x="896" y="1687"/>
-            <a:chExt cx="16024" cy="7516"/>
+            <a:off x="322509" y="1358265"/>
+            <a:ext cx="11715821" cy="4676140"/>
+            <a:chOff x="1209" y="1913"/>
+            <a:chExt cx="17775" cy="7364"/>
           </a:xfrm>
         </p:grpSpPr>
         <p:sp>
@@ -15422,8 +15015,8 @@
           </p:nvSpPr>
           <p:spPr>
             <a:xfrm>
-              <a:off x="896" y="1687"/>
-              <a:ext cx="8981" cy="864"/>
+              <a:off x="1223" y="1913"/>
+              <a:ext cx="17477" cy="1152"/>
             </a:xfrm>
             <a:prstGeom prst="roundRect">
               <a:avLst/>
@@ -15455,16 +15048,52 @@
             <a:bodyPr wrap="square" rtlCol="0" anchor="ctr"/>
             <a:lstStyle/>
             <a:p>
-              <a:pPr algn="ctr">
-                <a:defRPr sz="1800" b="1">
+              <a:pPr lvl="1" indent="0" algn="l">
+                <a:buFont typeface="Arial" panose="020B0604020202090204" pitchFamily="34" charset="0"/>
+                <a:buNone/>
+                <a:defRPr sz="2300" b="1">
                   <a:solidFill>
                     <a:srgbClr val="172554"/>
                   </a:solidFill>
                 </a:defRPr>
               </a:pPr>
               <a:r>
-                <a:rPr lang="en-US" altLang="en-US"/>
-                <a:t>Planning With Several Futures Should Be Safer</a:t>
+                <a:rPr lang="en-US" altLang="en-US" sz="1800" b="0">
+                  <a:solidFill>
+                    <a:srgbClr val="111827"/>
+                  </a:solidFill>
+                  <a:latin typeface="UCL Sans" pitchFamily="2" charset="77"/>
+                  <a:sym typeface="+mn-ea"/>
+                </a:rPr>
+                <a:t>Research question: </a:t>
+              </a:r>
+              <a:endParaRPr lang="en-US" altLang="en-US" sz="1800" b="0">
+                <a:solidFill>
+                  <a:srgbClr val="111827"/>
+                </a:solidFill>
+                <a:latin typeface="UCL Sans" pitchFamily="2" charset="77"/>
+                <a:sym typeface="+mn-ea"/>
+              </a:endParaRPr>
+            </a:p>
+            <a:p>
+              <a:pPr lvl="1" indent="0" algn="l">
+                <a:buFont typeface="Arial" panose="020B0604020202090204" pitchFamily="34" charset="0"/>
+                <a:buNone/>
+                <a:defRPr sz="2300" b="1">
+                  <a:solidFill>
+                    <a:srgbClr val="172554"/>
+                  </a:solidFill>
+                </a:defRPr>
+              </a:pPr>
+              <a:r>
+                <a:rPr lang="en-US" altLang="en-US" sz="1800" b="0">
+                  <a:solidFill>
+                    <a:srgbClr val="111827"/>
+                  </a:solidFill>
+                  <a:latin typeface="UCL Sans" pitchFamily="2" charset="77"/>
+                  <a:sym typeface="+mn-ea"/>
+                </a:rPr>
+                <a:t>Can a self-driving car cross an intersection more safely by considering several possible futures?</a:t>
               </a:r>
               <a:endParaRPr lang="en-US" altLang="en-US"/>
             </a:p>
@@ -15478,8 +15107,8 @@
           </p:nvSpPr>
           <p:spPr>
             <a:xfrm>
-              <a:off x="896" y="2952"/>
-              <a:ext cx="16024" cy="6251"/>
+              <a:off x="1209" y="2650"/>
+              <a:ext cx="17775" cy="6627"/>
             </a:xfrm>
             <a:prstGeom prst="rect">
               <a:avLst/>
@@ -15488,7 +15117,7 @@
           </p:spPr>
           <p:txBody>
             <a:bodyPr wrap="square" lIns="73152" rIns="73152">
-              <a:spAutoFit/>
+              <a:noAutofit/>
             </a:bodyPr>
             <a:lstStyle/>
             <a:p>
@@ -15500,15 +15129,6 @@
                   </a:solidFill>
                 </a:defRPr>
               </a:pPr>
-              <a:r>
-                <a:rPr lang="en-US" altLang="en-US" sz="1800" b="0">
-                  <a:solidFill>
-                    <a:srgbClr val="111827"/>
-                  </a:solidFill>
-                  <a:latin typeface="UCL Sans" pitchFamily="2" charset="77"/>
-                </a:rPr>
-                <a:t>Research question:</a:t>
-              </a:r>
               <a:endParaRPr lang="en-US" altLang="en-US" sz="1800" b="0">
                 <a:solidFill>
                   <a:srgbClr val="111827"/>
@@ -15517,51 +15137,8 @@
               </a:endParaRPr>
             </a:p>
             <a:p>
-              <a:pPr marL="742950" lvl="1" indent="-285750" algn="l">
+              <a:pPr lvl="1" indent="0" algn="l">
                 <a:buFont typeface="Arial" panose="020B0604020202090204" pitchFamily="34" charset="0"/>
-                <a:buChar char="•"/>
-                <a:defRPr sz="2300" b="1">
-                  <a:solidFill>
-                    <a:srgbClr val="172554"/>
-                  </a:solidFill>
-                </a:defRPr>
-              </a:pPr>
-              <a:r>
-                <a:rPr lang="en-US" altLang="en-US" sz="1800" b="0">
-                  <a:solidFill>
-                    <a:srgbClr val="111827"/>
-                  </a:solidFill>
-                  <a:latin typeface="UCL Sans" pitchFamily="2" charset="77"/>
-                </a:rPr>
-                <a:t>Can a self-driving car cross an intersection more safely by </a:t>
-              </a:r>
-              <a:r>
-                <a:rPr lang="en-US" altLang="en-US" sz="1800">
-                  <a:solidFill>
-                    <a:srgbClr val="111827"/>
-                  </a:solidFill>
-                  <a:latin typeface="UCL Sans" pitchFamily="2" charset="77"/>
-                </a:rPr>
-                <a:t>planning with several possible futures</a:t>
-              </a:r>
-              <a:r>
-                <a:rPr lang="en-US" altLang="en-US" sz="1800" b="0">
-                  <a:solidFill>
-                    <a:srgbClr val="111827"/>
-                  </a:solidFill>
-                  <a:latin typeface="UCL Sans" pitchFamily="2" charset="77"/>
-                </a:rPr>
-                <a:t> of the target vehicle?</a:t>
-              </a:r>
-              <a:endParaRPr lang="en-US" altLang="en-US" sz="1800" b="0">
-                <a:solidFill>
-                  <a:srgbClr val="111827"/>
-                </a:solidFill>
-                <a:latin typeface="UCL Sans" pitchFamily="2" charset="77"/>
-              </a:endParaRPr>
-            </a:p>
-            <a:p>
-              <a:pPr marL="0" lvl="0" indent="0" algn="l">
                 <a:buNone/>
                 <a:defRPr sz="2300" b="1">
                   <a:solidFill>
@@ -15618,25 +15195,7 @@
                   </a:solidFill>
                   <a:latin typeface="UCL Sans" pitchFamily="2" charset="77"/>
                 </a:rPr>
-                <a:t>If the ego vehicle considers </a:t>
-              </a:r>
-              <a:r>
-                <a:rPr lang="en-US" altLang="en-US" sz="1800">
-                  <a:solidFill>
-                    <a:srgbClr val="111827"/>
-                  </a:solidFill>
-                  <a:latin typeface="UCL Sans" pitchFamily="2" charset="77"/>
-                </a:rPr>
-                <a:t>multimodal predictions</a:t>
-              </a:r>
-              <a:r>
-                <a:rPr lang="en-US" altLang="en-US" sz="1800" b="0">
-                  <a:solidFill>
-                    <a:srgbClr val="111827"/>
-                  </a:solidFill>
-                  <a:latin typeface="UCL Sans" pitchFamily="2" charset="77"/>
-                </a:rPr>
-                <a:t> and allocates risk inside the controller (SMPC), then it should be safer and less over-confident than weaker baselines.</a:t>
+                <a:t>Using multimodal predictions in SMPC should keep the ego vehicle safer without making it unnecessarily hesitant.</a:t>
               </a:r>
               <a:endParaRPr lang="en-US" altLang="en-US" sz="1800" b="0">
                 <a:solidFill>
@@ -15646,7 +15205,9 @@
               </a:endParaRPr>
             </a:p>
             <a:p>
-              <a:pPr algn="l">
+              <a:pPr lvl="1" indent="0" algn="l">
+                <a:buFont typeface="Arial" panose="020B0604020202090204" pitchFamily="34" charset="0"/>
+                <a:buNone/>
                 <a:defRPr sz="2300" b="1">
                   <a:solidFill>
                     <a:srgbClr val="172554"/>
@@ -15780,6 +15341,75 @@
                   <a:latin typeface="UCL Sans" pitchFamily="2" charset="77"/>
                 </a:rPr>
                 <a:t>Smooth and stable control actions.</a:t>
+              </a:r>
+              <a:endParaRPr lang="en-US" altLang="en-US" sz="1800" b="0">
+                <a:solidFill>
+                  <a:srgbClr val="111827"/>
+                </a:solidFill>
+                <a:latin typeface="UCL Sans" pitchFamily="2" charset="77"/>
+              </a:endParaRPr>
+            </a:p>
+            <a:p>
+              <a:pPr marL="0" lvl="0" indent="0" algn="l">
+                <a:buFont typeface="Arial" panose="020B0604020202090204" pitchFamily="34" charset="0"/>
+                <a:buNone/>
+                <a:defRPr sz="2300" b="1">
+                  <a:solidFill>
+                    <a:srgbClr val="172554"/>
+                  </a:solidFill>
+                </a:defRPr>
+              </a:pPr>
+              <a:endParaRPr lang="en-US" altLang="en-US" sz="1800" b="0">
+                <a:solidFill>
+                  <a:srgbClr val="111827"/>
+                </a:solidFill>
+                <a:latin typeface="UCL Sans" pitchFamily="2" charset="77"/>
+              </a:endParaRPr>
+            </a:p>
+            <a:p>
+              <a:pPr marL="0" lvl="0" indent="0" algn="l">
+                <a:buFont typeface="Arial" panose="020B0604020202090204" pitchFamily="34" charset="0"/>
+                <a:buNone/>
+                <a:defRPr sz="2300" b="1">
+                  <a:solidFill>
+                    <a:srgbClr val="172554"/>
+                  </a:solidFill>
+                </a:defRPr>
+              </a:pPr>
+              <a:r>
+                <a:rPr lang="en-US" altLang="en-US" sz="1800" b="0">
+                  <a:solidFill>
+                    <a:srgbClr val="111827"/>
+                  </a:solidFill>
+                  <a:latin typeface="UCL Sans" pitchFamily="2" charset="77"/>
+                </a:rPr>
+                <a:t>Failure condition:</a:t>
+              </a:r>
+              <a:endParaRPr lang="en-US" altLang="en-US" sz="1800" b="0">
+                <a:solidFill>
+                  <a:srgbClr val="111827"/>
+                </a:solidFill>
+                <a:latin typeface="UCL Sans" pitchFamily="2" charset="77"/>
+              </a:endParaRPr>
+            </a:p>
+            <a:p>
+              <a:pPr marL="742950" lvl="1" indent="-285750" algn="l">
+                <a:buFont typeface="Arial" panose="020B0604020202090204" pitchFamily="34" charset="0"/>
+                <a:buChar char="•"/>
+                <a:defRPr sz="2300" b="1">
+                  <a:solidFill>
+                    <a:srgbClr val="172554"/>
+                  </a:solidFill>
+                </a:defRPr>
+              </a:pPr>
+              <a:r>
+                <a:rPr lang="en-US" altLang="en-US" sz="1800" b="0">
+                  <a:solidFill>
+                    <a:srgbClr val="111827"/>
+                  </a:solidFill>
+                  <a:latin typeface="UCL Sans" pitchFamily="2" charset="77"/>
+                </a:rPr>
+                <a:t>If the method is unsafe, infeasible, or only stays safe by stopping too much</a:t>
               </a:r>
               <a:endParaRPr lang="en-US" altLang="en-US" sz="1800" b="0">
                 <a:solidFill>
@@ -16355,27 +15985,7 @@
                 <a:latin typeface="UCL Sans" pitchFamily="2" charset="77"/>
                 <a:sym typeface="+mn-ea"/>
               </a:rPr>
-              <a:t>GMM (</a:t>
-            </a:r>
-            <a:r>
-              <a:rPr lang="en-US" altLang="en-US" sz="1400">
-                <a:solidFill>
-                  <a:srgbClr val="111827"/>
-                </a:solidFill>
-                <a:latin typeface="UCL Sans" pitchFamily="2" charset="77"/>
-                <a:sym typeface="+mn-ea"/>
-              </a:rPr>
-              <a:t>Gaussian Mixture Model</a:t>
-            </a:r>
-            <a:r>
-              <a:rPr lang="en-US" altLang="en-US" sz="1400">
-                <a:solidFill>
-                  <a:srgbClr val="111827"/>
-                </a:solidFill>
-                <a:latin typeface="UCL Sans" pitchFamily="2" charset="77"/>
-                <a:sym typeface="+mn-ea"/>
-              </a:rPr>
-              <a:t>) : represents possible target-vehicle futures using probabilities and uncertainty.</a:t>
+              <a:t>GMM: represents possible target-vehicle futures using probabilities and uncertainty.</a:t>
             </a:r>
             <a:endParaRPr lang="en-US" altLang="en-US" sz="1400">
               <a:solidFill>

--- a/docs/presentation/25027138 - Presentation.pptx
+++ b/docs/presentation/25027138 - Presentation.pptx
@@ -17,7 +17,7 @@
     <p:sldId id="327" r:id="rId7"/>
     <p:sldId id="320" r:id="rId8"/>
     <p:sldId id="321" r:id="rId9"/>
-    <p:sldId id="323" r:id="rId10"/>
+    <p:sldId id="328" r:id="rId10"/>
     <p:sldId id="324" r:id="rId11"/>
     <p:sldId id="325" r:id="rId12"/>
     <p:sldId id="326" r:id="rId13"/>
@@ -179,7 +179,7 @@
             <p14:sldId id="327"/>
             <p14:sldId id="320"/>
             <p14:sldId id="321"/>
-            <p14:sldId id="323"/>
+            <p14:sldId id="328"/>
             <p14:sldId id="324"/>
             <p14:sldId id="325"/>
             <p14:sldId id="326"/>
@@ -11539,10 +11539,10 @@
                         </a:defRPr>
                       </a:pPr>
                       <a:r>
-                        <a:rPr sz="1600"/>
-                        <a:t>Why it matters</a:t>
+                        <a:rPr lang="en-US" altLang="en-US" sz="1600"/>
+                        <a:t>Impact</a:t>
                       </a:r>
-                      <a:endParaRPr sz="1600"/>
+                      <a:endParaRPr lang="en-US" altLang="en-US" sz="1600"/>
                     </a:p>
                   </a:txBody>
                   <a:tcPr marL="36576" marR="36576" anchor="ctr">
@@ -11564,10 +11564,10 @@
                         </a:defRPr>
                       </a:pPr>
                       <a:r>
-                        <a:rPr sz="1600"/>
-                        <a:t>My response</a:t>
+                        <a:rPr lang="en-US" altLang="en-US" sz="1600"/>
+                        <a:t>Mitigation</a:t>
                       </a:r>
-                      <a:endParaRPr sz="1600"/>
+                      <a:endParaRPr lang="en-US" altLang="en-US" sz="1600"/>
                     </a:p>
                   </a:txBody>
                   <a:tcPr marL="36576" marR="36576" anchor="ctr">
@@ -11965,14 +11965,14 @@
               <a:rPr lang="en-US" altLang="en-US" sz="1800">
                 <a:latin typeface="UCL Sans" pitchFamily="2" charset="77"/>
               </a:rPr>
-              <a:t>The main research risk is not only whether the car can complete one scenario, </a:t>
+              <a:t>The main risk is interpretability: </a:t>
             </a:r>
             <a:endParaRPr lang="en-US" altLang="en-US" sz="1800">
               <a:latin typeface="UCL Sans" pitchFamily="2" charset="77"/>
             </a:endParaRPr>
           </a:p>
           <a:p>
-            <a:pPr algn="l">
+            <a:pPr indent="457200" algn="l">
               <a:defRPr sz="1500">
                 <a:solidFill>
                   <a:srgbClr val="111827"/>
@@ -11983,7 +11983,7 @@
               <a:rPr lang="en-US" altLang="en-US" sz="1800">
                 <a:latin typeface="UCL Sans" pitchFamily="2" charset="77"/>
               </a:rPr>
-              <a:t>but whether the method is reliable across different initial conditions.</a:t>
+              <a:t>I need to know not only whether the car succeeds, but why it succeeds or fails.</a:t>
             </a:r>
             <a:endParaRPr lang="en-US" altLang="en-US" sz="1800">
               <a:latin typeface="UCL Sans" pitchFamily="2" charset="77"/>
@@ -12059,6 +12059,43 @@
           </a:prstGeom>
         </p:spPr>
       </p:pic>
+      <p:sp>
+        <p:nvSpPr>
+          <p:cNvPr id="2" name="Text Box 1"/>
+          <p:cNvSpPr txBox="1"/>
+          <p:nvPr/>
+        </p:nvSpPr>
+        <p:spPr>
+          <a:xfrm>
+            <a:off x="5396865" y="4460875"/>
+            <a:ext cx="5413375" cy="1198880"/>
+          </a:xfrm>
+          <a:prstGeom prst="rect">
+            <a:avLst/>
+          </a:prstGeom>
+          <a:noFill/>
+        </p:spPr>
+        <p:txBody>
+          <a:bodyPr wrap="square" rtlCol="0" anchor="t">
+            <a:spAutoFit/>
+          </a:bodyPr>
+          <a:p>
+            <a:r>
+              <a:rPr lang="en-US" altLang="en-US" sz="7200" b="1">
+                <a:solidFill>
+                  <a:schemeClr val="accent2"/>
+                </a:solidFill>
+              </a:rPr>
+              <a:t>Thank you</a:t>
+            </a:r>
+            <a:endParaRPr lang="en-US" altLang="en-US" sz="7200" b="1">
+              <a:solidFill>
+                <a:schemeClr val="accent2"/>
+              </a:solidFill>
+            </a:endParaRPr>
+          </a:p>
+        </p:txBody>
+      </p:sp>
     </p:spTree>
   </p:cSld>
   <p:clrMapOvr>
@@ -12096,8 +12133,8 @@
         </p:nvSpPr>
         <p:spPr>
           <a:xfrm>
-            <a:off x="431800" y="409575"/>
-            <a:ext cx="11580495" cy="1009650"/>
+            <a:off x="50800" y="266065"/>
+            <a:ext cx="12091670" cy="1009650"/>
           </a:xfrm>
         </p:spPr>
         <p:txBody>
@@ -12114,9 +12151,15 @@
               <a:rPr lang="en-US" altLang="en-GB">
                 <a:latin typeface="UCL Sans SemiBold"/>
               </a:rPr>
-              <a:t>: Autonomous Driving</a:t>
-            </a:r>
-            <a:endParaRPr lang="en-US" altLang="en-GB">
+              <a:t>: </a:t>
+            </a:r>
+            <a:r>
+              <a:rPr lang="en-US" altLang="en-US">
+                <a:latin typeface="UCL Sans SemiBold"/>
+              </a:rPr>
+              <a:t>Motion Planning under Uncertainty</a:t>
+            </a:r>
+            <a:endParaRPr lang="en-US" altLang="en-US">
               <a:latin typeface="UCL Sans SemiBold"/>
             </a:endParaRPr>
           </a:p>
@@ -12197,7 +12240,23 @@
                   <a:srgbClr val="111827"/>
                 </a:solidFill>
               </a:rPr>
-              <a:t>This project focuses on motion planning:</a:t>
+              <a:t>This project focuses on motion planning under </a:t>
+            </a:r>
+            <a:r>
+              <a:rPr lang="en-US" altLang="en-US" sz="1800" b="1">
+                <a:solidFill>
+                  <a:srgbClr val="111827"/>
+                </a:solidFill>
+              </a:rPr>
+              <a:t>uncertainty</a:t>
+            </a:r>
+            <a:r>
+              <a:rPr lang="en-US" altLang="en-US" sz="1800">
+                <a:solidFill>
+                  <a:srgbClr val="111827"/>
+                </a:solidFill>
+              </a:rPr>
+              <a:t>:</a:t>
             </a:r>
             <a:endParaRPr lang="en-US" altLang="en-US" sz="1800">
               <a:solidFill>
@@ -12223,7 +12282,23 @@
                   <a:srgbClr val="111827"/>
                 </a:solidFill>
               </a:rPr>
-              <a:t>how the ego car decides a safe action when another vehicle may slow down, continue, or move differently.</a:t>
+              <a:t>how the ego car decides a safe action </a:t>
+            </a:r>
+            <a:r>
+              <a:rPr lang="en-US" altLang="en-US" sz="1800" b="1">
+                <a:solidFill>
+                  <a:srgbClr val="111827"/>
+                </a:solidFill>
+              </a:rPr>
+              <a:t>when another vehicle may slow down, continue, or move differently</a:t>
+            </a:r>
+            <a:r>
+              <a:rPr lang="en-US" altLang="en-US" sz="1800">
+                <a:solidFill>
+                  <a:srgbClr val="111827"/>
+                </a:solidFill>
+              </a:rPr>
+              <a:t>.</a:t>
             </a:r>
             <a:endParaRPr lang="en-US" altLang="en-US" sz="1800">
               <a:solidFill>
@@ -12791,16 +12866,16 @@
             <a:r>
               <a:rPr lang="en-US" altLang="en-US" sz="1800">
                 <a:solidFill>
-                  <a:srgbClr val="111827"/>
+                  <a:srgbClr val="FF0000"/>
                 </a:solidFill>
                 <a:latin typeface="UCL Sans" pitchFamily="2" charset="77"/>
                 <a:sym typeface="+mn-ea"/>
               </a:rPr>
-              <a:t>This is not general autonomous driving perception. </a:t>
+              <a:t>This is not about detecting objects.</a:t>
             </a:r>
             <a:endParaRPr lang="en-US" altLang="en-US" sz="1800">
               <a:solidFill>
-                <a:srgbClr val="111827"/>
+                <a:srgbClr val="FF0000"/>
               </a:solidFill>
               <a:latin typeface="UCL Sans" pitchFamily="2" charset="77"/>
               <a:sym typeface="+mn-ea"/>
@@ -12821,12 +12896,12 @@
             <a:r>
               <a:rPr lang="en-US" altLang="en-US" sz="1800">
                 <a:solidFill>
-                  <a:srgbClr val="111827"/>
+                  <a:srgbClr val="FF0000"/>
                 </a:solidFill>
                 <a:latin typeface="UCL Sans" pitchFamily="2" charset="77"/>
                 <a:sym typeface="+mn-ea"/>
               </a:rPr>
-              <a:t>It is about decision-making and control under uncertain future behaviour.</a:t>
+              <a:t>It is about turning uncertain predictions into safe driving decisions.</a:t>
             </a:r>
             <a:endParaRPr lang="en-US" altLang="en-US" sz="1800">
               <a:solidFill>
@@ -12847,7 +12922,7 @@
 </file>
 
 <file path=ppt/slides/slide3.xml><?xml version="1.0" encoding="utf-8"?>
-<p:sld xmlns:a="http://schemas.openxmlformats.org/drawingml/2006/main" xmlns:p="http://schemas.openxmlformats.org/presentationml/2006/main" xmlns:r="http://schemas.openxmlformats.org/officeDocument/2006/relationships">
+<p:sld xmlns:a="http://schemas.openxmlformats.org/drawingml/2006/main" xmlns:r="http://schemas.openxmlformats.org/officeDocument/2006/relationships" xmlns:p="http://schemas.openxmlformats.org/presentationml/2006/main">
   <p:cSld>
     <p:spTree>
       <p:nvGrpSpPr>
@@ -13020,22 +13095,8 @@
                   <a:srgbClr val="111827"/>
                 </a:solidFill>
               </a:rPr>
-              <a:t>The ego vehicle must make repeated decisions: observe the traffic, predict possible futures, plan an action, and update the plan.</a:t>
-            </a:r>
-            <a:endParaRPr lang="en-US" altLang="en-US" sz="1800">
-              <a:solidFill>
-                <a:srgbClr val="111827"/>
-              </a:solidFill>
-            </a:endParaRPr>
-          </a:p>
-          <a:p>
-            <a:pPr>
-              <a:defRPr sz="1500">
-                <a:solidFill>
-                  <a:srgbClr val="4B5563"/>
-                </a:solidFill>
-              </a:defRPr>
-            </a:pPr>
+              <a:t>The decision must be updated repeatedly as new observations arrive.</a:t>
+            </a:r>
             <a:endParaRPr lang="en-US" altLang="en-US" sz="1800">
               <a:solidFill>
                 <a:srgbClr val="111827"/>
@@ -13183,7 +13244,7 @@
           <p:nvPr/>
         </p:nvPicPr>
         <p:blipFill>
-          <a:blip r:embed="rId3"/>
+          <a:blip r:embed="rId1"/>
           <a:stretch>
             <a:fillRect/>
           </a:stretch>
@@ -13198,6 +13259,51 @@
           </a:prstGeom>
         </p:spPr>
       </p:pic>
+      <p:sp>
+        <p:nvSpPr>
+          <p:cNvPr id="4" name="Rectangle 3"/>
+          <p:cNvSpPr/>
+          <p:nvPr/>
+        </p:nvSpPr>
+        <p:spPr>
+          <a:xfrm>
+            <a:off x="8472170" y="2924810"/>
+            <a:ext cx="360045" cy="216535"/>
+          </a:xfrm>
+          <a:prstGeom prst="rect">
+            <a:avLst/>
+          </a:prstGeom>
+          <a:solidFill>
+            <a:schemeClr val="bg1"/>
+          </a:solidFill>
+          <a:ln>
+            <a:noFill/>
+          </a:ln>
+        </p:spPr>
+        <p:style>
+          <a:lnRef idx="2">
+            <a:schemeClr val="accent1">
+              <a:lumMod val="75000"/>
+            </a:schemeClr>
+          </a:lnRef>
+          <a:fillRef idx="1">
+            <a:schemeClr val="accent1"/>
+          </a:fillRef>
+          <a:effectRef idx="0">
+            <a:srgbClr val="FFFFFF"/>
+          </a:effectRef>
+          <a:fontRef idx="minor">
+            <a:schemeClr val="lt1"/>
+          </a:fontRef>
+        </p:style>
+        <p:txBody>
+          <a:bodyPr rtlCol="0" anchor="ctr"/>
+          <a:p>
+            <a:pPr algn="ctr"/>
+            <a:endParaRPr lang="en-US"/>
+          </a:p>
+        </p:txBody>
+      </p:sp>
     </p:spTree>
   </p:cSld>
   <p:clrMapOvr>
@@ -13271,13 +13377,16 @@
           <a:bodyPr/>
           <a:lstStyle/>
           <a:p>
+            <a:pPr indent="0">
+              <a:buFont typeface="Arial" panose="020B0604020202090204" pitchFamily="34" charset="0"/>
+            </a:pPr>
             <a:r>
               <a:rPr lang="en-US" altLang="en-US" dirty="0"/>
-              <a:t>At intersections, the target vehicle has several possible futures, and the ego vehicle does not know which one will happen. </a:t>
+              <a:t>If the planner trusts only one guessed target-vehicle trajector</a:t>
             </a:r>
             <a:r>
               <a:rPr lang="en-US" altLang="en-US" dirty="0"/>
-              <a:t>It may:</a:t>
+              <a:t>y, it may:</a:t>
             </a:r>
             <a:endParaRPr lang="en-US" altLang="en-US" dirty="0"/>
           </a:p>
@@ -13348,10 +13457,10 @@
         </p:nvGrpSpPr>
         <p:grpSpPr>
           <a:xfrm>
-            <a:off x="1148715" y="3321685"/>
-            <a:ext cx="9875520" cy="2103120"/>
+            <a:off x="1148715" y="3034665"/>
+            <a:ext cx="9875520" cy="2150110"/>
             <a:chOff x="1696" y="4666"/>
-            <a:chExt cx="15552" cy="3312"/>
+            <a:chExt cx="15552" cy="3386"/>
           </a:xfrm>
         </p:grpSpPr>
         <p:sp>
@@ -13951,8 +14060,8 @@
           </p:nvSpPr>
           <p:spPr>
             <a:xfrm>
-              <a:off x="11776" y="7546"/>
-              <a:ext cx="4896" cy="432"/>
+              <a:off x="13103" y="7472"/>
+              <a:ext cx="2242" cy="580"/>
             </a:xfrm>
             <a:prstGeom prst="rect">
               <a:avLst/>
@@ -13973,8 +14082,10 @@
                 </a:defRPr>
               </a:pPr>
               <a:r>
-                <a:t>More careful</a:t>
+                <a:rPr lang="en-US" altLang="en-US"/>
+                <a:t>Risk-aware</a:t>
               </a:r>
+              <a:endParaRPr lang="en-US" altLang="en-US"/>
             </a:p>
           </p:txBody>
         </p:sp>
@@ -13987,8 +14098,8 @@
         </p:nvSpPr>
         <p:spPr>
           <a:xfrm>
-            <a:off x="479425" y="5700395"/>
-            <a:ext cx="8580120" cy="645160"/>
+            <a:off x="352425" y="5446395"/>
+            <a:ext cx="11088370" cy="645160"/>
           </a:xfrm>
           <a:prstGeom prst="rect">
             <a:avLst/>
@@ -14028,7 +14139,7 @@
                 <a:latin typeface="UCL Sans" pitchFamily="2" charset="77"/>
                 <a:sym typeface="+mn-ea"/>
               </a:rPr>
-              <a:t>how can the car use multiple possible futures to choose a safe action?</a:t>
+              <a:t>how can the car use multiple predicted target-vehicle trajectories to choose a safe action?</a:t>
             </a:r>
             <a:endParaRPr lang="en-US" altLang="en-US" sz="1800" b="1" dirty="0">
               <a:solidFill>
@@ -14452,7 +14563,7 @@
         <p:spPr>
           <a:xfrm>
             <a:off x="422910" y="4798060"/>
-            <a:ext cx="11219180" cy="1153160"/>
+            <a:ext cx="11219180" cy="1314450"/>
           </a:xfrm>
           <a:prstGeom prst="rect">
             <a:avLst/>
@@ -14465,10 +14576,12 @@
           </a:bodyPr>
           <a:lstStyle/>
           <a:p>
-            <a:pPr marL="0">
+            <a:pPr marL="285750" indent="-285750">
               <a:spcAft>
                 <a:spcPts val="900"/>
               </a:spcAft>
+              <a:buFont typeface="Arial" panose="020B0604020202090204" pitchFamily="34" charset="0"/>
+              <a:buChar char="•"/>
               <a:defRPr sz="2200">
                 <a:solidFill>
                   <a:srgbClr val="111827"/>
@@ -14482,7 +14595,7 @@
                 </a:solidFill>
                 <a:latin typeface="UCL Sans" pitchFamily="2" charset="77"/>
               </a:rPr>
-              <a:t>If solved, autonomous vehicles could:</a:t>
+              <a:t>This is worth prioritising because prediction errors become real safety risks only when they affect the vehicle's action.</a:t>
             </a:r>
             <a:endParaRPr lang="en-US" altLang="en-US" sz="1800">
               <a:solidFill>
@@ -14492,12 +14605,12 @@
             </a:endParaRPr>
           </a:p>
           <a:p>
-            <a:pPr marL="342900" indent="-342900">
+            <a:pPr marL="285750" indent="-285750">
               <a:spcAft>
                 <a:spcPts val="900"/>
               </a:spcAft>
               <a:buFont typeface="Arial" panose="020B0604020202090204" pitchFamily="34" charset="0"/>
-              <a:buAutoNum type="arabicPeriod"/>
+              <a:buChar char="•"/>
               <a:defRPr sz="2200">
                 <a:solidFill>
                   <a:srgbClr val="111827"/>
@@ -14511,36 +14624,7 @@
                 </a:solidFill>
                 <a:latin typeface="UCL Sans" pitchFamily="2" charset="77"/>
               </a:rPr>
-              <a:t>cross complex intersections more reliably and avoid unsafe over-confident decisions;</a:t>
-            </a:r>
-            <a:endParaRPr lang="en-US" altLang="en-US" sz="1800">
-              <a:solidFill>
-                <a:schemeClr val="tx1"/>
-              </a:solidFill>
-              <a:latin typeface="UCL Sans" pitchFamily="2" charset="77"/>
-            </a:endParaRPr>
-          </a:p>
-          <a:p>
-            <a:pPr marL="342900" indent="-342900">
-              <a:spcAft>
-                <a:spcPts val="900"/>
-              </a:spcAft>
-              <a:buFont typeface="Arial" panose="020B0604020202090204" pitchFamily="34" charset="0"/>
-              <a:buAutoNum type="arabicPeriod"/>
-              <a:defRPr sz="2200">
-                <a:solidFill>
-                  <a:srgbClr val="111827"/>
-                </a:solidFill>
-              </a:defRPr>
-            </a:pPr>
-            <a:r>
-              <a:rPr lang="en-US" altLang="en-US" sz="1800">
-                <a:solidFill>
-                  <a:schemeClr val="tx1"/>
-                </a:solidFill>
-                <a:latin typeface="UCL Sans" pitchFamily="2" charset="77"/>
-              </a:rPr>
-              <a:t>reduce unnecessary stopping and provide smoother passenger experience.</a:t>
+              <a:t>If solved, the vehicle can cross complex intersections more reliably without simply becoming over-cautious.</a:t>
             </a:r>
             <a:endParaRPr lang="en-US" altLang="en-US" sz="1800">
               <a:solidFill>
@@ -14628,8 +14712,8 @@
         </p:nvSpPr>
         <p:spPr>
           <a:xfrm>
-            <a:off x="568960" y="1327785"/>
-            <a:ext cx="11155045" cy="4765040"/>
+            <a:off x="568960" y="5143500"/>
+            <a:ext cx="11155045" cy="1133475"/>
           </a:xfrm>
           <a:prstGeom prst="rect">
             <a:avLst/>
@@ -14655,290 +14739,844 @@
               </a:defRPr>
             </a:pPr>
             <a:r>
-              <a:rPr lang="en-US" altLang="en-US" sz="1800" b="1">
+              <a:rPr lang="en-US" altLang="en-US" sz="1800">
+                <a:solidFill>
+                  <a:schemeClr val="tx1"/>
+                </a:solidFill>
                 <a:latin typeface="UCL Sans" pitchFamily="2" charset="77"/>
               </a:rPr>
-              <a:t>MultiPath: </a:t>
-            </a:r>
-            <a:endParaRPr lang="en-US" altLang="en-US" sz="1800">
-              <a:latin typeface="UCL Sans" pitchFamily="2" charset="77"/>
-            </a:endParaRPr>
-          </a:p>
-          <a:p>
-            <a:pPr marL="742950" lvl="1" indent="-285750">
-              <a:spcAft>
-                <a:spcPts val="600"/>
-              </a:spcAft>
-              <a:buFont typeface="Arial" panose="020B0604020202090204" pitchFamily="34" charset="0"/>
-              <a:buChar char="•"/>
-              <a:defRPr sz="1700">
-                <a:solidFill>
-                  <a:srgbClr val="111827"/>
-                </a:solidFill>
-              </a:defRPr>
-            </a:pPr>
-            <a:r>
-              <a:rPr lang="en-US" altLang="en-US" sz="1800">
-                <a:latin typeface="UCL Sans" pitchFamily="2" charset="77"/>
-              </a:rPr>
-              <a:t>predicts several possible future paths with probabilities and uncertainty.</a:t>
-            </a:r>
-            <a:endParaRPr lang="en-US" altLang="en-US" sz="1800">
-              <a:latin typeface="UCL Sans" pitchFamily="2" charset="77"/>
-            </a:endParaRPr>
-          </a:p>
-          <a:p>
-            <a:pPr marL="742950" lvl="1" indent="-285750">
-              <a:spcAft>
-                <a:spcPts val="600"/>
-              </a:spcAft>
-              <a:buFont typeface="Arial" panose="020B0604020202090204" pitchFamily="34" charset="0"/>
-              <a:buChar char="•"/>
-              <a:defRPr sz="1700">
-                <a:solidFill>
-                  <a:srgbClr val="111827"/>
-                </a:solidFill>
-              </a:defRPr>
-            </a:pPr>
-            <a:r>
-              <a:rPr lang="en-US" altLang="en-US" sz="1800">
-                <a:latin typeface="UCL Sans" pitchFamily="2" charset="77"/>
-              </a:rPr>
-              <a:t>Limitation: prediction alone does not choose the ego vehicle's action.</a:t>
-            </a:r>
-            <a:endParaRPr lang="en-US" altLang="en-US" sz="1800">
-              <a:latin typeface="UCL Sans" pitchFamily="2" charset="77"/>
-            </a:endParaRPr>
-          </a:p>
-          <a:p>
-            <a:pPr lvl="1" indent="0">
-              <a:spcAft>
-                <a:spcPts val="600"/>
-              </a:spcAft>
-              <a:buFont typeface="Arial" panose="020B0604020202090204" pitchFamily="34" charset="0"/>
-              <a:buNone/>
-              <a:defRPr sz="1700">
-                <a:solidFill>
-                  <a:srgbClr val="111827"/>
-                </a:solidFill>
-              </a:defRPr>
-            </a:pPr>
-            <a:endParaRPr lang="en-US" altLang="en-US" sz="1800">
-              <a:latin typeface="UCL Sans" pitchFamily="2" charset="77"/>
-            </a:endParaRPr>
-          </a:p>
-          <a:p>
-            <a:pPr marL="0" lvl="0" indent="0">
-              <a:spcAft>
-                <a:spcPts val="600"/>
-              </a:spcAft>
-              <a:buFont typeface="Arial" panose="020B0604020202090204" pitchFamily="34" charset="0"/>
-              <a:buNone/>
-              <a:defRPr sz="1700">
-                <a:solidFill>
-                  <a:srgbClr val="111827"/>
-                </a:solidFill>
-              </a:defRPr>
-            </a:pPr>
-            <a:r>
-              <a:rPr lang="en-US" altLang="en-US" sz="1800">
-                <a:latin typeface="UCL Sans" pitchFamily="2" charset="77"/>
-              </a:rPr>
-              <a:t>SMPC </a:t>
-            </a:r>
-            <a:r>
-              <a:rPr lang="en-US" altLang="en-US" sz="1800">
-                <a:latin typeface="UCL Sans" pitchFamily="2" charset="77"/>
-                <a:sym typeface="+mn-ea"/>
-              </a:rPr>
-              <a:t>(Stochastic Model Predictive Control)</a:t>
-            </a:r>
-            <a:r>
-              <a:rPr lang="en-US" altLang="en-US" sz="1800">
-                <a:latin typeface="UCL Sans" pitchFamily="2" charset="77"/>
-              </a:rPr>
-              <a:t>:</a:t>
-            </a:r>
-            <a:endParaRPr lang="en-US" altLang="en-US" sz="1800">
-              <a:latin typeface="UCL Sans" pitchFamily="2" charset="77"/>
-            </a:endParaRPr>
-          </a:p>
-          <a:p>
-            <a:pPr marL="742950" lvl="1" indent="-285750">
-              <a:spcAft>
-                <a:spcPts val="600"/>
-              </a:spcAft>
-              <a:buFont typeface="Arial" panose="020B0604020202090204" pitchFamily="34" charset="0"/>
-              <a:buChar char="•"/>
-              <a:defRPr sz="1700">
-                <a:solidFill>
-                  <a:srgbClr val="111827"/>
-                </a:solidFill>
-              </a:defRPr>
-            </a:pPr>
-            <a:r>
-              <a:rPr lang="en-US" altLang="en-US" sz="1800">
-                <a:latin typeface="UCL Sans" pitchFamily="2" charset="77"/>
-              </a:rPr>
-              <a:t>plans safe actions under uncertainty using risk constraints.</a:t>
-            </a:r>
-            <a:endParaRPr lang="en-US" altLang="en-US" sz="1800">
-              <a:latin typeface="UCL Sans" pitchFamily="2" charset="77"/>
-            </a:endParaRPr>
-          </a:p>
-          <a:p>
-            <a:pPr marL="742950" lvl="1" indent="-285750">
-              <a:spcAft>
-                <a:spcPts val="600"/>
-              </a:spcAft>
-              <a:buFont typeface="Arial" panose="020B0604020202090204" pitchFamily="34" charset="0"/>
-              <a:buChar char="•"/>
-              <a:defRPr sz="1700">
-                <a:solidFill>
-                  <a:srgbClr val="111827"/>
-                </a:solidFill>
-              </a:defRPr>
-            </a:pPr>
-            <a:r>
-              <a:rPr lang="en-US" altLang="en-US" sz="1800">
-                <a:latin typeface="UCL Sans" pitchFamily="2" charset="77"/>
-              </a:rPr>
-              <a:t>Limitation: it may become conservative or infeasible when uncertainty is large.</a:t>
-            </a:r>
-            <a:endParaRPr lang="en-US" altLang="en-US" sz="1800">
-              <a:latin typeface="UCL Sans" pitchFamily="2" charset="77"/>
-            </a:endParaRPr>
-          </a:p>
-          <a:p>
-            <a:pPr marL="0" indent="0">
-              <a:spcAft>
-                <a:spcPts val="600"/>
-              </a:spcAft>
-              <a:buFont typeface="Arial" panose="020B0604020202090204" pitchFamily="34" charset="0"/>
-              <a:buNone/>
-              <a:defRPr sz="1700">
-                <a:solidFill>
-                  <a:srgbClr val="111827"/>
-                </a:solidFill>
-              </a:defRPr>
-            </a:pPr>
-            <a:endParaRPr lang="en-US" altLang="en-US" sz="1800">
-              <a:latin typeface="UCL Sans" pitchFamily="2" charset="77"/>
-            </a:endParaRPr>
-          </a:p>
-          <a:p>
-            <a:pPr marL="0" indent="0">
-              <a:spcAft>
-                <a:spcPts val="600"/>
-              </a:spcAft>
-              <a:buFont typeface="Arial" panose="020B0604020202090204" pitchFamily="34" charset="0"/>
-              <a:buNone/>
-              <a:defRPr sz="1700">
-                <a:solidFill>
-                  <a:srgbClr val="111827"/>
-                </a:solidFill>
-              </a:defRPr>
-            </a:pPr>
-            <a:r>
-              <a:rPr lang="en-US" altLang="en-US" sz="1800" b="1">
-                <a:latin typeface="UCL Sans" pitchFamily="2" charset="77"/>
-              </a:rPr>
-              <a:t>The remaining gap:</a:t>
-            </a:r>
-            <a:endParaRPr lang="en-US" altLang="en-US" sz="1800">
-              <a:latin typeface="UCL Sans" pitchFamily="2" charset="77"/>
-            </a:endParaRPr>
-          </a:p>
-          <a:p>
-            <a:pPr marL="742950" lvl="1" indent="-285750">
-              <a:spcAft>
-                <a:spcPts val="600"/>
-              </a:spcAft>
-              <a:buFont typeface="Arial" panose="020B0604020202090204" pitchFamily="34" charset="0"/>
-              <a:buChar char="•"/>
-              <a:defRPr sz="1700">
-                <a:solidFill>
-                  <a:srgbClr val="111827"/>
-                </a:solidFill>
-              </a:defRPr>
-            </a:pPr>
-            <a:r>
-              <a:rPr lang="en-US" altLang="en-US" sz="1800">
-                <a:latin typeface="UCL Sans" pitchFamily="2" charset="77"/>
-              </a:rPr>
-              <a:t>How can multimodal predictions be used safely and efficiently in closed-loop control?</a:t>
-            </a:r>
-            <a:endParaRPr lang="en-US" altLang="en-US" sz="1800">
-              <a:latin typeface="UCL Sans" pitchFamily="2" charset="77"/>
-            </a:endParaRPr>
-          </a:p>
-          <a:p>
-            <a:pPr lvl="1" indent="0">
-              <a:spcAft>
-                <a:spcPts val="600"/>
-              </a:spcAft>
-              <a:buFont typeface="Arial" panose="020B0604020202090204" pitchFamily="34" charset="0"/>
-              <a:buNone/>
-              <a:defRPr sz="1700">
-                <a:solidFill>
-                  <a:srgbClr val="111827"/>
-                </a:solidFill>
-              </a:defRPr>
-            </a:pPr>
-            <a:endParaRPr lang="en-US" altLang="en-US" sz="1800">
-              <a:latin typeface="UCL Sans" pitchFamily="2" charset="77"/>
-            </a:endParaRPr>
-          </a:p>
-          <a:p>
-            <a:pPr marL="0" indent="0">
-              <a:spcAft>
-                <a:spcPts val="600"/>
-              </a:spcAft>
-              <a:buFont typeface="Arial" panose="020B0604020202090204" pitchFamily="34" charset="0"/>
-              <a:buNone/>
-              <a:defRPr sz="1700">
-                <a:solidFill>
-                  <a:srgbClr val="111827"/>
-                </a:solidFill>
-              </a:defRPr>
-            </a:pPr>
-            <a:r>
-              <a:rPr lang="en-US" altLang="en-US" sz="1800">
-                <a:latin typeface="UCL Sans" pitchFamily="2" charset="77"/>
-              </a:rPr>
-              <a:t>My project: </a:t>
-            </a:r>
-            <a:endParaRPr lang="en-US" altLang="en-US" sz="1800">
-              <a:latin typeface="UCL Sans" pitchFamily="2" charset="77"/>
-            </a:endParaRPr>
-          </a:p>
-          <a:p>
-            <a:pPr marL="742950" lvl="1" indent="-285750">
-              <a:spcAft>
-                <a:spcPts val="600"/>
-              </a:spcAft>
-              <a:buFont typeface="Arial" panose="020B0604020202090204" pitchFamily="34" charset="0"/>
-              <a:buChar char="•"/>
-              <a:defRPr sz="1700">
-                <a:solidFill>
-                  <a:srgbClr val="111827"/>
-                </a:solidFill>
-              </a:defRPr>
-            </a:pPr>
-            <a:r>
-              <a:rPr lang="en-US" altLang="en-US" sz="1800">
-                <a:solidFill>
-                  <a:srgbClr val="FF0000"/>
-                </a:solidFill>
-                <a:latin typeface="UCL Sans" pitchFamily="2" charset="77"/>
-              </a:rPr>
-              <a:t>Produce and evaluate risk-aware SMPC in an intersection scenario with CARLA simulator.</a:t>
+              <a:t>Remaining Gap: </a:t>
             </a:r>
             <a:endParaRPr lang="en-US" altLang="en-US" sz="1800">
               <a:solidFill>
                 <a:srgbClr val="FF0000"/>
               </a:solidFill>
               <a:latin typeface="UCL Sans" pitchFamily="2" charset="77"/>
+            </a:endParaRPr>
+          </a:p>
+          <a:p>
+            <a:pPr marL="0" indent="457200">
+              <a:spcAft>
+                <a:spcPts val="600"/>
+              </a:spcAft>
+              <a:buFont typeface="Arial" panose="020B0604020202090204" pitchFamily="34" charset="0"/>
+              <a:buNone/>
+              <a:defRPr sz="1700">
+                <a:solidFill>
+                  <a:srgbClr val="111827"/>
+                </a:solidFill>
+              </a:defRPr>
+            </a:pPr>
+            <a:r>
+              <a:rPr lang="en-US" altLang="en-US" sz="1800" b="1">
+                <a:solidFill>
+                  <a:schemeClr val="accent2"/>
+                </a:solidFill>
+                <a:latin typeface="UCL Sans" pitchFamily="2" charset="77"/>
+              </a:rPr>
+              <a:t>we need a closed-loop planner that uses multimodal predictions while balancing safety, progress, feasibility, and comfort.</a:t>
+            </a:r>
+            <a:endParaRPr lang="en-US" altLang="en-US" sz="1800" b="1">
+              <a:solidFill>
+                <a:schemeClr val="accent2"/>
+              </a:solidFill>
+              <a:latin typeface="UCL Sans" pitchFamily="2" charset="77"/>
+            </a:endParaRPr>
+          </a:p>
+        </p:txBody>
+      </p:sp>
+      <p:graphicFrame>
+        <p:nvGraphicFramePr>
+          <p:cNvPr id="3" name="Table 2"/>
+          <p:cNvGraphicFramePr>
+            <a:graphicFrameLocks noGrp="1"/>
+          </p:cNvGraphicFramePr>
+          <p:nvPr/>
+        </p:nvGraphicFramePr>
+        <p:xfrm>
+          <a:off x="87630" y="1480185"/>
+          <a:ext cx="11943080" cy="3235960"/>
+        </p:xfrm>
+        <a:graphic>
+          <a:graphicData uri="http://schemas.openxmlformats.org/drawingml/2006/table">
+            <a:tbl>
+              <a:tblPr firstRow="1" bandRow="1">
+                <a:tableStyleId>{5C22544A-7EE6-4342-B048-85BDC9FD1C3A}</a:tableStyleId>
+              </a:tblPr>
+              <a:tblGrid>
+                <a:gridCol w="3550920"/>
+                <a:gridCol w="3592830"/>
+                <a:gridCol w="4799330"/>
+              </a:tblGrid>
+              <a:tr h="685165">
+                <a:tc>
+                  <a:txBody>
+                    <a:bodyPr/>
+                    <a:p>
+                      <a:pPr algn="ctr">
+                        <a:defRPr sz="1200" b="1">
+                          <a:solidFill>
+                            <a:srgbClr val="FFFFFF"/>
+                          </a:solidFill>
+                        </a:defRPr>
+                      </a:pPr>
+                      <a:r>
+                        <a:rPr lang="en-US" altLang="en-US" sz="1600"/>
+                        <a:t>Approach</a:t>
+                      </a:r>
+                      <a:endParaRPr lang="en-US" altLang="en-US" sz="1600"/>
+                    </a:p>
+                  </a:txBody>
+                  <a:tcPr marL="36576" marR="36576" anchor="ctr">
+                    <a:lnL>
+                      <a:noFill/>
+                    </a:lnL>
+                    <a:lnR w="12700">
+                      <a:solidFill>
+                        <a:schemeClr val="tx1"/>
+                      </a:solidFill>
+                      <a:prstDash val="solid"/>
+                    </a:lnR>
+                    <a:lnT>
+                      <a:noFill/>
+                    </a:lnT>
+                    <a:lnB w="12700">
+                      <a:solidFill>
+                        <a:schemeClr val="tx1"/>
+                      </a:solidFill>
+                      <a:prstDash val="solid"/>
+                    </a:lnB>
+                    <a:lnTlToBr>
+                      <a:noFill/>
+                    </a:lnTlToBr>
+                    <a:lnBlToTr>
+                      <a:noFill/>
+                    </a:lnBlToTr>
+                    <a:solidFill>
+                      <a:srgbClr val="002060"/>
+                    </a:solidFill>
+                  </a:tcPr>
+                </a:tc>
+                <a:tc>
+                  <a:txBody>
+                    <a:bodyPr/>
+                    <a:p>
+                      <a:pPr algn="ctr">
+                        <a:defRPr sz="1200" b="1">
+                          <a:solidFill>
+                            <a:srgbClr val="FFFFFF"/>
+                          </a:solidFill>
+                        </a:defRPr>
+                      </a:pPr>
+                      <a:r>
+                        <a:rPr lang="en-US" altLang="en-US" sz="1600"/>
+                        <a:t>Contribution</a:t>
+                      </a:r>
+                      <a:endParaRPr lang="en-US" altLang="en-US" sz="1600"/>
+                    </a:p>
+                  </a:txBody>
+                  <a:tcPr marL="36576" marR="36576" anchor="ctr">
+                    <a:lnL w="12700">
+                      <a:solidFill>
+                        <a:schemeClr val="tx1"/>
+                      </a:solidFill>
+                      <a:prstDash val="solid"/>
+                    </a:lnL>
+                    <a:lnR w="12700">
+                      <a:solidFill>
+                        <a:schemeClr val="tx1"/>
+                      </a:solidFill>
+                      <a:prstDash val="solid"/>
+                    </a:lnR>
+                    <a:lnB w="12700">
+                      <a:solidFill>
+                        <a:schemeClr val="tx1"/>
+                      </a:solidFill>
+                      <a:prstDash val="solid"/>
+                    </a:lnB>
+                    <a:solidFill>
+                      <a:srgbClr val="002060"/>
+                    </a:solidFill>
+                  </a:tcPr>
+                </a:tc>
+                <a:tc>
+                  <a:txBody>
+                    <a:bodyPr/>
+                    <a:p>
+                      <a:pPr algn="ctr">
+                        <a:defRPr sz="1200" b="1">
+                          <a:solidFill>
+                            <a:srgbClr val="FFFFFF"/>
+                          </a:solidFill>
+                        </a:defRPr>
+                      </a:pPr>
+                      <a:r>
+                        <a:rPr lang="en-US" altLang="en-US" sz="1600"/>
+                        <a:t>Remaining limitation</a:t>
+                      </a:r>
+                      <a:endParaRPr lang="en-US" altLang="en-US" sz="1600"/>
+                    </a:p>
+                  </a:txBody>
+                  <a:tcPr marL="36576" marR="36576" anchor="ctr">
+                    <a:lnL w="12700">
+                      <a:solidFill>
+                        <a:schemeClr val="tx1"/>
+                      </a:solidFill>
+                      <a:prstDash val="solid"/>
+                    </a:lnL>
+                    <a:lnB w="12700">
+                      <a:solidFill>
+                        <a:schemeClr val="tx1"/>
+                      </a:solidFill>
+                      <a:prstDash val="solid"/>
+                    </a:lnB>
+                    <a:solidFill>
+                      <a:srgbClr val="002060"/>
+                    </a:solidFill>
+                  </a:tcPr>
+                </a:tc>
+              </a:tr>
+              <a:tr h="685165">
+                <a:tc>
+                  <a:txBody>
+                    <a:bodyPr/>
+                    <a:lstStyle/>
+                    <a:p>
+                      <a:pPr algn="ctr">
+                        <a:defRPr sz="1200">
+                          <a:solidFill>
+                            <a:srgbClr val="111827"/>
+                          </a:solidFill>
+                        </a:defRPr>
+                      </a:pPr>
+                      <a:r>
+                        <a:rPr lang="en-US" altLang="en-US" sz="1600" b="1"/>
+                        <a:t>Multimodal prediction, </a:t>
+                      </a:r>
+                      <a:endParaRPr lang="en-US" altLang="en-US" sz="1600" b="1"/>
+                    </a:p>
+                    <a:p>
+                      <a:pPr algn="ctr">
+                        <a:defRPr sz="1200">
+                          <a:solidFill>
+                            <a:srgbClr val="111827"/>
+                          </a:solidFill>
+                        </a:defRPr>
+                      </a:pPr>
+                      <a:r>
+                        <a:rPr lang="en-US" altLang="en-US" sz="1600" b="1"/>
+                        <a:t>e.g. MultiPath</a:t>
+                      </a:r>
+                      <a:endParaRPr lang="en-US" altLang="en-US" sz="1600" b="1"/>
+                    </a:p>
+                  </a:txBody>
+                  <a:tcPr marL="36576" marR="36576" anchor="ctr">
+                    <a:lnL>
+                      <a:noFill/>
+                    </a:lnL>
+                    <a:lnR w="12700">
+                      <a:solidFill>
+                        <a:schemeClr val="tx1"/>
+                      </a:solidFill>
+                      <a:prstDash val="solid"/>
+                    </a:lnR>
+                    <a:lnT w="12700">
+                      <a:solidFill>
+                        <a:schemeClr val="tx1"/>
+                      </a:solidFill>
+                      <a:prstDash val="solid"/>
+                    </a:lnT>
+                    <a:lnB w="12700">
+                      <a:solidFill>
+                        <a:schemeClr val="tx1"/>
+                      </a:solidFill>
+                      <a:prstDash val="solid"/>
+                    </a:lnB>
+                    <a:lnTlToBr>
+                      <a:noFill/>
+                    </a:lnTlToBr>
+                    <a:lnBlToTr>
+                      <a:noFill/>
+                    </a:lnBlToTr>
+                    <a:solidFill>
+                      <a:srgbClr val="FFFFFF"/>
+                    </a:solidFill>
+                  </a:tcPr>
+                </a:tc>
+                <a:tc>
+                  <a:txBody>
+                    <a:bodyPr/>
+                    <a:lstStyle/>
+                    <a:p>
+                      <a:pPr algn="ctr">
+                        <a:defRPr sz="1200">
+                          <a:solidFill>
+                            <a:srgbClr val="111827"/>
+                          </a:solidFill>
+                        </a:defRPr>
+                      </a:pPr>
+                      <a:r>
+                        <a:rPr lang="en-US" altLang="en-US" sz="1600" b="0"/>
+                        <a:t>predicts several possible trajectories</a:t>
+                      </a:r>
+                      <a:endParaRPr lang="en-US" altLang="en-US" sz="1600" b="0"/>
+                    </a:p>
+                  </a:txBody>
+                  <a:tcPr marL="36576" marR="36576" anchor="ctr">
+                    <a:lnL w="12700">
+                      <a:solidFill>
+                        <a:schemeClr val="tx1"/>
+                      </a:solidFill>
+                      <a:prstDash val="solid"/>
+                    </a:lnL>
+                    <a:lnR w="12700">
+                      <a:solidFill>
+                        <a:schemeClr val="tx1"/>
+                      </a:solidFill>
+                      <a:prstDash val="solid"/>
+                    </a:lnR>
+                    <a:lnT w="12700">
+                      <a:solidFill>
+                        <a:schemeClr val="tx1"/>
+                      </a:solidFill>
+                      <a:prstDash val="solid"/>
+                    </a:lnT>
+                    <a:lnB w="12700">
+                      <a:solidFill>
+                        <a:schemeClr val="tx1"/>
+                      </a:solidFill>
+                      <a:prstDash val="solid"/>
+                    </a:lnB>
+                    <a:solidFill>
+                      <a:srgbClr val="FFFFFF"/>
+                    </a:solidFill>
+                  </a:tcPr>
+                </a:tc>
+                <a:tc>
+                  <a:txBody>
+                    <a:bodyPr/>
+                    <a:lstStyle/>
+                    <a:p>
+                      <a:pPr algn="ctr">
+                        <a:defRPr sz="1200">
+                          <a:solidFill>
+                            <a:srgbClr val="111827"/>
+                          </a:solidFill>
+                        </a:defRPr>
+                      </a:pPr>
+                      <a:r>
+                        <a:rPr lang="en-US" altLang="en-US" sz="1600" b="0"/>
+                        <a:t>does not choose the ego action</a:t>
+                      </a:r>
+                      <a:endParaRPr lang="en-US" altLang="en-US" sz="1600" b="0"/>
+                    </a:p>
+                  </a:txBody>
+                  <a:tcPr marL="36576" marR="36576" anchor="ctr">
+                    <a:lnL w="12700">
+                      <a:solidFill>
+                        <a:schemeClr val="tx1"/>
+                      </a:solidFill>
+                      <a:prstDash val="solid"/>
+                    </a:lnL>
+                    <a:lnT w="12700">
+                      <a:solidFill>
+                        <a:schemeClr val="tx1"/>
+                      </a:solidFill>
+                      <a:prstDash val="solid"/>
+                    </a:lnT>
+                    <a:lnB w="12700">
+                      <a:solidFill>
+                        <a:schemeClr val="tx1"/>
+                      </a:solidFill>
+                      <a:prstDash val="solid"/>
+                    </a:lnB>
+                    <a:solidFill>
+                      <a:srgbClr val="FFFFFF"/>
+                    </a:solidFill>
+                  </a:tcPr>
+                </a:tc>
+              </a:tr>
+              <a:tr h="603885">
+                <a:tc>
+                  <a:txBody>
+                    <a:bodyPr/>
+                    <a:lstStyle/>
+                    <a:p>
+                      <a:pPr algn="ctr">
+                        <a:defRPr sz="1200">
+                          <a:solidFill>
+                            <a:srgbClr val="111827"/>
+                          </a:solidFill>
+                        </a:defRPr>
+                      </a:pPr>
+                      <a:r>
+                        <a:rPr lang="en-US" altLang="en-US" sz="1600" b="1">
+                          <a:sym typeface="+mn-ea"/>
+                        </a:rPr>
+                        <a:t>Learning-based planners</a:t>
+                      </a:r>
+                      <a:endParaRPr lang="en-US" altLang="en-US" sz="1600" b="1"/>
+                    </a:p>
+                  </a:txBody>
+                  <a:tcPr marL="36576" marR="36576" anchor="ctr">
+                    <a:lnR w="12700">
+                      <a:solidFill>
+                        <a:schemeClr val="tx1"/>
+                      </a:solidFill>
+                      <a:prstDash val="solid"/>
+                    </a:lnR>
+                    <a:lnT w="12700">
+                      <a:solidFill>
+                        <a:schemeClr val="tx1"/>
+                      </a:solidFill>
+                      <a:prstDash val="solid"/>
+                    </a:lnT>
+                    <a:lnB w="12700">
+                      <a:solidFill>
+                        <a:schemeClr val="tx1"/>
+                      </a:solidFill>
+                      <a:prstDash val="solid"/>
+                    </a:lnB>
+                    <a:solidFill>
+                      <a:srgbClr val="F3F4F6"/>
+                    </a:solidFill>
+                  </a:tcPr>
+                </a:tc>
+                <a:tc>
+                  <a:txBody>
+                    <a:bodyPr/>
+                    <a:lstStyle/>
+                    <a:p>
+                      <a:pPr algn="ctr">
+                        <a:defRPr sz="1200">
+                          <a:solidFill>
+                            <a:srgbClr val="111827"/>
+                          </a:solidFill>
+                        </a:defRPr>
+                      </a:pPr>
+                      <a:r>
+                        <a:rPr lang="en-US" altLang="en-US" sz="1600">
+                          <a:sym typeface="+mn-ea"/>
+                        </a:rPr>
+                        <a:t>can learn complex behaviour</a:t>
+                      </a:r>
+                      <a:endParaRPr lang="en-US" altLang="en-US" sz="1600"/>
+                    </a:p>
+                  </a:txBody>
+                  <a:tcPr marL="36576" marR="36576" anchor="ctr">
+                    <a:lnL w="12700">
+                      <a:solidFill>
+                        <a:schemeClr val="tx1"/>
+                      </a:solidFill>
+                      <a:prstDash val="solid"/>
+                    </a:lnL>
+                    <a:lnR w="12700">
+                      <a:solidFill>
+                        <a:schemeClr val="tx1"/>
+                      </a:solidFill>
+                      <a:prstDash val="solid"/>
+                    </a:lnR>
+                    <a:lnT w="12700">
+                      <a:solidFill>
+                        <a:schemeClr val="tx1"/>
+                      </a:solidFill>
+                      <a:prstDash val="solid"/>
+                    </a:lnT>
+                    <a:lnB w="12700">
+                      <a:solidFill>
+                        <a:schemeClr val="tx1"/>
+                      </a:solidFill>
+                      <a:prstDash val="solid"/>
+                    </a:lnB>
+                    <a:solidFill>
+                      <a:srgbClr val="F3F4F6"/>
+                    </a:solidFill>
+                  </a:tcPr>
+                </a:tc>
+                <a:tc>
+                  <a:txBody>
+                    <a:bodyPr/>
+                    <a:lstStyle/>
+                    <a:p>
+                      <a:pPr algn="ctr">
+                        <a:defRPr sz="1200">
+                          <a:solidFill>
+                            <a:srgbClr val="111827"/>
+                          </a:solidFill>
+                        </a:defRPr>
+                      </a:pPr>
+                      <a:r>
+                        <a:rPr lang="en-US" altLang="en-US" sz="1600">
+                          <a:sym typeface="+mn-ea"/>
+                        </a:rPr>
+                        <a:t>hard to guarantee safety and interpret failure</a:t>
+                      </a:r>
+                      <a:r>
+                        <a:rPr lang="en-US" altLang="en-US" sz="1600"/>
+                        <a:t>s</a:t>
+                      </a:r>
+                      <a:endParaRPr lang="en-US" altLang="en-US" sz="1600"/>
+                    </a:p>
+                  </a:txBody>
+                  <a:tcPr marL="36576" marR="36576" anchor="ctr">
+                    <a:lnL w="12700">
+                      <a:solidFill>
+                        <a:schemeClr val="tx1"/>
+                      </a:solidFill>
+                      <a:prstDash val="solid"/>
+                    </a:lnL>
+                    <a:lnT w="12700">
+                      <a:solidFill>
+                        <a:schemeClr val="tx1"/>
+                      </a:solidFill>
+                      <a:prstDash val="solid"/>
+                    </a:lnT>
+                    <a:lnB w="12700">
+                      <a:solidFill>
+                        <a:schemeClr val="tx1"/>
+                      </a:solidFill>
+                      <a:prstDash val="solid"/>
+                    </a:lnB>
+                    <a:solidFill>
+                      <a:srgbClr val="F3F4F6"/>
+                    </a:solidFill>
+                  </a:tcPr>
+                </a:tc>
+              </a:tr>
+              <a:tr h="605790">
+                <a:tc>
+                  <a:txBody>
+                    <a:bodyPr/>
+                    <a:lstStyle/>
+                    <a:p>
+                      <a:pPr algn="ctr">
+                        <a:defRPr sz="1200">
+                          <a:solidFill>
+                            <a:srgbClr val="111827"/>
+                          </a:solidFill>
+                        </a:defRPr>
+                      </a:pPr>
+                      <a:r>
+                        <a:rPr lang="en-US" altLang="en-US" sz="1600" b="1"/>
+                        <a:t>Rule-based safety methods</a:t>
+                      </a:r>
+                      <a:endParaRPr lang="en-US" altLang="en-US" sz="1600" b="1"/>
+                    </a:p>
+                  </a:txBody>
+                  <a:tcPr marL="36576" marR="36576" anchor="ctr">
+                    <a:lnR w="12700">
+                      <a:solidFill>
+                        <a:schemeClr val="tx1"/>
+                      </a:solidFill>
+                      <a:prstDash val="solid"/>
+                    </a:lnR>
+                    <a:lnT w="12700">
+                      <a:solidFill>
+                        <a:schemeClr val="tx1"/>
+                      </a:solidFill>
+                      <a:prstDash val="solid"/>
+                    </a:lnT>
+                    <a:lnB w="12700">
+                      <a:solidFill>
+                        <a:schemeClr val="tx1"/>
+                      </a:solidFill>
+                      <a:prstDash val="solid"/>
+                    </a:lnB>
+                    <a:solidFill>
+                      <a:srgbClr val="FFFFFF"/>
+                    </a:solidFill>
+                  </a:tcPr>
+                </a:tc>
+                <a:tc>
+                  <a:txBody>
+                    <a:bodyPr/>
+                    <a:lstStyle/>
+                    <a:p>
+                      <a:pPr algn="ctr">
+                        <a:defRPr sz="1200">
+                          <a:solidFill>
+                            <a:srgbClr val="111827"/>
+                          </a:solidFill>
+                        </a:defRPr>
+                      </a:pPr>
+                      <a:r>
+                        <a:rPr lang="en-US" altLang="en-US" sz="1600"/>
+                        <a:t>provide simple safety guarantees</a:t>
+                      </a:r>
+                      <a:endParaRPr lang="en-US" altLang="en-US" sz="1600"/>
+                    </a:p>
+                  </a:txBody>
+                  <a:tcPr marL="36576" marR="36576" anchor="ctr">
+                    <a:lnL w="12700">
+                      <a:solidFill>
+                        <a:schemeClr val="tx1"/>
+                      </a:solidFill>
+                      <a:prstDash val="solid"/>
+                    </a:lnL>
+                    <a:lnR w="12700">
+                      <a:solidFill>
+                        <a:schemeClr val="tx1"/>
+                      </a:solidFill>
+                      <a:prstDash val="solid"/>
+                    </a:lnR>
+                    <a:lnT w="12700">
+                      <a:solidFill>
+                        <a:schemeClr val="tx1"/>
+                      </a:solidFill>
+                      <a:prstDash val="solid"/>
+                    </a:lnT>
+                    <a:lnB w="12700">
+                      <a:solidFill>
+                        <a:schemeClr val="tx1"/>
+                      </a:solidFill>
+                      <a:prstDash val="solid"/>
+                    </a:lnB>
+                    <a:solidFill>
+                      <a:srgbClr val="FFFFFF"/>
+                    </a:solidFill>
+                  </a:tcPr>
+                </a:tc>
+                <a:tc>
+                  <a:txBody>
+                    <a:bodyPr/>
+                    <a:lstStyle/>
+                    <a:p>
+                      <a:pPr algn="ctr">
+                        <a:defRPr sz="1200">
+                          <a:solidFill>
+                            <a:srgbClr val="111827"/>
+                          </a:solidFill>
+                        </a:defRPr>
+                      </a:pPr>
+                      <a:r>
+                        <a:rPr lang="en-US" altLang="en-US" sz="1600"/>
+                        <a:t>may be too rigid in interactive scenarios</a:t>
+                      </a:r>
+                      <a:endParaRPr lang="en-US" altLang="en-US" sz="1600"/>
+                    </a:p>
+                  </a:txBody>
+                  <a:tcPr marL="36576" marR="36576" anchor="ctr">
+                    <a:lnL w="12700">
+                      <a:solidFill>
+                        <a:schemeClr val="tx1"/>
+                      </a:solidFill>
+                      <a:prstDash val="solid"/>
+                    </a:lnL>
+                    <a:lnT w="12700">
+                      <a:solidFill>
+                        <a:schemeClr val="tx1"/>
+                      </a:solidFill>
+                      <a:prstDash val="solid"/>
+                    </a:lnT>
+                    <a:lnB w="12700">
+                      <a:solidFill>
+                        <a:schemeClr val="tx1"/>
+                      </a:solidFill>
+                      <a:prstDash val="solid"/>
+                    </a:lnB>
+                    <a:solidFill>
+                      <a:srgbClr val="FFFFFF"/>
+                    </a:solidFill>
+                  </a:tcPr>
+                </a:tc>
+              </a:tr>
+              <a:tr h="655955">
+                <a:tc>
+                  <a:txBody>
+                    <a:bodyPr/>
+                    <a:lstStyle/>
+                    <a:p>
+                      <a:pPr algn="ctr">
+                        <a:defRPr sz="1200">
+                          <a:solidFill>
+                            <a:srgbClr val="111827"/>
+                          </a:solidFill>
+                        </a:defRPr>
+                      </a:pPr>
+                      <a:r>
+                        <a:rPr lang="en-US" altLang="en-US" sz="1600" b="1">
+                          <a:solidFill>
+                            <a:srgbClr val="FF0000"/>
+                          </a:solidFill>
+                          <a:sym typeface="+mn-ea"/>
+                        </a:rPr>
+                        <a:t>Risk-aware SMPC</a:t>
+                      </a:r>
+                      <a:endParaRPr lang="en-US" altLang="en-US" sz="1600" b="1">
+                        <a:solidFill>
+                          <a:srgbClr val="FF0000"/>
+                        </a:solidFill>
+                        <a:sym typeface="+mn-ea"/>
+                      </a:endParaRPr>
+                    </a:p>
+                  </a:txBody>
+                  <a:tcPr marL="36576" marR="36576" anchor="ctr">
+                    <a:lnR w="12700">
+                      <a:solidFill>
+                        <a:schemeClr val="tx1"/>
+                      </a:solidFill>
+                      <a:prstDash val="solid"/>
+                    </a:lnR>
+                    <a:lnT w="12700">
+                      <a:solidFill>
+                        <a:schemeClr val="tx1"/>
+                      </a:solidFill>
+                      <a:prstDash val="solid"/>
+                    </a:lnT>
+                    <a:solidFill>
+                      <a:srgbClr val="F3F4F6"/>
+                    </a:solidFill>
+                  </a:tcPr>
+                </a:tc>
+                <a:tc>
+                  <a:txBody>
+                    <a:bodyPr/>
+                    <a:lstStyle/>
+                    <a:p>
+                      <a:pPr algn="ctr">
+                        <a:defRPr sz="1200">
+                          <a:solidFill>
+                            <a:srgbClr val="111827"/>
+                          </a:solidFill>
+                        </a:defRPr>
+                      </a:pPr>
+                      <a:r>
+                        <a:rPr lang="en-US" altLang="en-US" sz="1600" b="1">
+                          <a:solidFill>
+                            <a:srgbClr val="FF0000"/>
+                          </a:solidFill>
+                          <a:sym typeface="+mn-ea"/>
+                        </a:rPr>
+                        <a:t>plans under uncertainty</a:t>
+                      </a:r>
+                      <a:endParaRPr lang="en-US" altLang="en-US" sz="1600" b="1">
+                        <a:solidFill>
+                          <a:srgbClr val="FF0000"/>
+                        </a:solidFill>
+                        <a:sym typeface="+mn-ea"/>
+                      </a:endParaRPr>
+                    </a:p>
+                  </a:txBody>
+                  <a:tcPr marL="36576" marR="36576" anchor="ctr">
+                    <a:lnL w="12700">
+                      <a:solidFill>
+                        <a:schemeClr val="tx1"/>
+                      </a:solidFill>
+                      <a:prstDash val="solid"/>
+                    </a:lnL>
+                    <a:lnR w="12700">
+                      <a:solidFill>
+                        <a:schemeClr val="tx1"/>
+                      </a:solidFill>
+                      <a:prstDash val="solid"/>
+                    </a:lnR>
+                    <a:lnT w="12700">
+                      <a:solidFill>
+                        <a:schemeClr val="tx1"/>
+                      </a:solidFill>
+                      <a:prstDash val="solid"/>
+                    </a:lnT>
+                    <a:solidFill>
+                      <a:srgbClr val="F3F4F6"/>
+                    </a:solidFill>
+                  </a:tcPr>
+                </a:tc>
+                <a:tc>
+                  <a:txBody>
+                    <a:bodyPr/>
+                    <a:lstStyle/>
+                    <a:p>
+                      <a:pPr algn="ctr">
+                        <a:defRPr sz="1200">
+                          <a:solidFill>
+                            <a:srgbClr val="111827"/>
+                          </a:solidFill>
+                        </a:defRPr>
+                      </a:pPr>
+                      <a:r>
+                        <a:rPr lang="en-US" altLang="en-US" sz="1600" b="1">
+                          <a:solidFill>
+                            <a:srgbClr val="FF0000"/>
+                          </a:solidFill>
+                          <a:sym typeface="+mn-ea"/>
+                        </a:rPr>
+                        <a:t>can become conservative or infeasible</a:t>
+                      </a:r>
+                      <a:r>
+                        <a:rPr lang="en-US" altLang="en-US" sz="1600" b="1">
+                          <a:solidFill>
+                            <a:srgbClr val="FF0000"/>
+                          </a:solidFill>
+                        </a:rPr>
+                        <a:t> </a:t>
+                      </a:r>
+                      <a:endParaRPr lang="en-US" altLang="en-US" sz="1600" b="1">
+                        <a:solidFill>
+                          <a:srgbClr val="FF0000"/>
+                        </a:solidFill>
+                      </a:endParaRPr>
+                    </a:p>
+                  </a:txBody>
+                  <a:tcPr marL="36576" marR="36576" anchor="ctr">
+                    <a:lnL w="12700">
+                      <a:solidFill>
+                        <a:schemeClr val="tx1"/>
+                      </a:solidFill>
+                      <a:prstDash val="solid"/>
+                    </a:lnL>
+                    <a:lnT w="12700">
+                      <a:solidFill>
+                        <a:schemeClr val="tx1"/>
+                      </a:solidFill>
+                      <a:prstDash val="solid"/>
+                    </a:lnT>
+                    <a:solidFill>
+                      <a:srgbClr val="F3F4F6"/>
+                    </a:solidFill>
+                  </a:tcPr>
+                </a:tc>
+              </a:tr>
+            </a:tbl>
+          </a:graphicData>
+        </a:graphic>
+      </p:graphicFrame>
+      <p:sp>
+        <p:nvSpPr>
+          <p:cNvPr id="5" name="Text Box 4"/>
+          <p:cNvSpPr txBox="1"/>
+          <p:nvPr/>
+        </p:nvSpPr>
+        <p:spPr>
+          <a:xfrm>
+            <a:off x="0" y="6525260"/>
+            <a:ext cx="10992485" cy="306705"/>
+          </a:xfrm>
+          <a:prstGeom prst="rect">
+            <a:avLst/>
+          </a:prstGeom>
+          <a:noFill/>
+        </p:spPr>
+        <p:txBody>
+          <a:bodyPr wrap="square" rtlCol="0" anchor="t">
+            <a:spAutoFit/>
+          </a:bodyPr>
+          <a:p>
+            <a:r>
+              <a:rPr lang="en-US" altLang="en-US" sz="1400" b="1">
+                <a:solidFill>
+                  <a:srgbClr val="111827"/>
+                </a:solidFill>
+                <a:latin typeface="UCL Sans" pitchFamily="2" charset="77"/>
+                <a:sym typeface="+mn-ea"/>
+              </a:rPr>
+              <a:t>SMPC = Stochastic Model Predictive Control: a planning method that chooses safe actions while accounting for uncertainty.</a:t>
+            </a:r>
+            <a:endParaRPr lang="en-US" altLang="en-US" sz="1400" b="1">
+              <a:solidFill>
+                <a:srgbClr val="111827"/>
+              </a:solidFill>
+              <a:latin typeface="UCL Sans" pitchFamily="2" charset="77"/>
+              <a:sym typeface="+mn-ea"/>
             </a:endParaRPr>
           </a:p>
         </p:txBody>
@@ -15383,7 +16021,7 @@
                   </a:solidFill>
                   <a:latin typeface="UCL Sans" pitchFamily="2" charset="77"/>
                 </a:rPr>
-                <a:t>Failure condition:</a:t>
+                <a:t>Failure condition &amp; Alternative explanation:</a:t>
               </a:r>
               <a:endParaRPr lang="en-US" altLang="en-US" sz="1800" b="0">
                 <a:solidFill>
@@ -15456,7 +16094,12 @@
             <p:ph type="ctrTitle"/>
           </p:nvPr>
         </p:nvSpPr>
-        <p:spPr/>
+        <p:spPr>
+          <a:xfrm>
+            <a:off x="431800" y="409575"/>
+            <a:ext cx="10022205" cy="1009650"/>
+          </a:xfrm>
+        </p:spPr>
         <p:txBody>
           <a:bodyPr/>
           <a:lstStyle/>
@@ -15467,7 +16110,9 @@
               </a:rPr>
               <a:t>Execution plan</a:t>
             </a:r>
-            <a:endParaRPr lang="en-US"/>
+            <a:endParaRPr lang="en-US" altLang="en-US">
+              <a:latin typeface="UCL Sans SemiBold"/>
+            </a:endParaRPr>
           </a:p>
         </p:txBody>
       </p:sp>
@@ -15479,10 +16124,10 @@
         </p:nvGrpSpPr>
         <p:grpSpPr>
           <a:xfrm>
-            <a:off x="1331595" y="3593465"/>
-            <a:ext cx="10694950" cy="2301875"/>
-            <a:chOff x="687" y="5337"/>
-            <a:chExt cx="17119" cy="3625"/>
+            <a:off x="1053758" y="3306445"/>
+            <a:ext cx="11331562" cy="2558415"/>
+            <a:chOff x="-332" y="5337"/>
+            <a:chExt cx="18138" cy="4029"/>
           </a:xfrm>
         </p:grpSpPr>
         <p:grpSp>
@@ -15493,10 +16138,10 @@
           </p:nvGrpSpPr>
           <p:grpSpPr>
             <a:xfrm>
-              <a:off x="687" y="5337"/>
-              <a:ext cx="6834" cy="3322"/>
-              <a:chOff x="687" y="3824"/>
-              <a:chExt cx="6834" cy="3322"/>
+              <a:off x="-332" y="5337"/>
+              <a:ext cx="7622" cy="3322"/>
+              <a:chOff x="-332" y="3824"/>
+              <a:chExt cx="7622" cy="3322"/>
             </a:xfrm>
           </p:grpSpPr>
           <p:sp>
@@ -15507,8 +16152,8 @@
             </p:nvSpPr>
             <p:spPr>
               <a:xfrm>
-                <a:off x="687" y="4776"/>
-                <a:ext cx="6834" cy="2370"/>
+                <a:off x="-332" y="4776"/>
+                <a:ext cx="7622" cy="2370"/>
               </a:xfrm>
               <a:prstGeom prst="rect">
                 <a:avLst/>
@@ -15520,7 +16165,10 @@
                 <a:noAutofit/>
               </a:bodyPr>
               <a:p>
-                <a:pPr marL="285750" indent="-285750">
+                <a:pPr marL="285750" indent="-285750" latinLnBrk="0">
+                  <a:spcAft>
+                    <a:spcPts val="400"/>
+                  </a:spcAft>
                   <a:buFont typeface="Arial" panose="020B0604020202090204" pitchFamily="34" charset="0"/>
                   <a:buChar char="•"/>
                 </a:pPr>
@@ -15531,16 +16179,7 @@
                     </a:solidFill>
                     <a:latin typeface="UCL Sans" pitchFamily="2" charset="77"/>
                   </a:rPr>
-                  <a:t>No-TV baseline</a:t>
-                </a:r>
-                <a:r>
-                  <a:rPr lang="en-US" altLang="en-US" sz="1800">
-                    <a:solidFill>
-                      <a:srgbClr val="111827"/>
-                    </a:solidFill>
-                    <a:latin typeface="UCL Sans" pitchFamily="2" charset="77"/>
-                  </a:rPr>
-                  <a:t>s.</a:t>
+                  <a:t>No target-vehicle baselines.</a:t>
                 </a:r>
                 <a:endParaRPr lang="en-US" altLang="en-US" sz="1800">
                   <a:solidFill>
@@ -15550,7 +16189,10 @@
                 </a:endParaRPr>
               </a:p>
               <a:p>
-                <a:pPr marL="742950" lvl="1" indent="-285750">
+                <a:pPr marL="742950" lvl="1" indent="-285750" latinLnBrk="0">
+                  <a:spcAft>
+                    <a:spcPts val="400"/>
+                  </a:spcAft>
                   <a:buFont typeface="Arial" panose="020B0604020202090204" pitchFamily="34" charset="0"/>
                   <a:buChar char="•"/>
                 </a:pPr>
@@ -15571,7 +16213,10 @@
                 </a:endParaRPr>
               </a:p>
               <a:p>
-                <a:pPr marL="285750" indent="-285750">
+                <a:pPr marL="285750" indent="-285750" latinLnBrk="0">
+                  <a:spcAft>
+                    <a:spcPts val="400"/>
+                  </a:spcAft>
                   <a:buFont typeface="Arial" panose="020B0604020202090204" pitchFamily="34" charset="0"/>
                   <a:buChar char="•"/>
                 </a:pPr>
@@ -15593,7 +16238,10 @@
                 </a:endParaRPr>
               </a:p>
               <a:p>
-                <a:pPr marL="742950" lvl="1" indent="-285750">
+                <a:pPr marL="742950" lvl="1" indent="-285750" latinLnBrk="0">
+                  <a:spcAft>
+                    <a:spcPts val="400"/>
+                  </a:spcAft>
                   <a:buFont typeface="Arial" panose="020B0604020202090204" pitchFamily="34" charset="0"/>
                   <a:buChar char="•"/>
                 </a:pPr>
@@ -15615,7 +16263,10 @@
                 </a:endParaRPr>
               </a:p>
               <a:p>
-                <a:pPr marL="285750" indent="-285750">
+                <a:pPr marL="285750" indent="-285750" latinLnBrk="0">
+                  <a:spcAft>
+                    <a:spcPts val="400"/>
+                  </a:spcAft>
                   <a:buFont typeface="Arial" panose="020B0604020202090204" pitchFamily="34" charset="0"/>
                   <a:buChar char="•"/>
                 </a:pPr>
@@ -15636,7 +16287,10 @@
                 </a:endParaRPr>
               </a:p>
               <a:p>
-                <a:pPr marL="742950" lvl="1" indent="-285750">
+                <a:pPr marL="742950" lvl="1" indent="-285750" latinLnBrk="0">
+                  <a:spcAft>
+                    <a:spcPts val="400"/>
+                  </a:spcAft>
                   <a:buFont typeface="Arial" panose="020B0604020202090204" pitchFamily="34" charset="0"/>
                   <a:buChar char="•"/>
                 </a:pPr>
@@ -15647,7 +16301,7 @@
                     </a:solidFill>
                     <a:latin typeface="UCL Sans" pitchFamily="2" charset="77"/>
                   </a:rPr>
-                  <a:t>adaptive risk allocation</a:t>
+                  <a:t>adaptive risk-budget allocation</a:t>
                 </a:r>
                 <a:endParaRPr lang="en-US" altLang="en-US" sz="1800">
                   <a:solidFill>
@@ -15666,7 +16320,7 @@
             </p:nvSpPr>
             <p:spPr>
               <a:xfrm>
-                <a:off x="896" y="3824"/>
+                <a:off x="-123" y="3824"/>
                 <a:ext cx="5589" cy="792"/>
               </a:xfrm>
               <a:prstGeom prst="roundRect">
@@ -15783,7 +16437,7 @@
           <p:spPr>
             <a:xfrm>
               <a:off x="8206" y="6201"/>
-              <a:ext cx="9600" cy="2761"/>
+              <a:ext cx="9600" cy="3165"/>
             </a:xfrm>
             <a:prstGeom prst="rect">
               <a:avLst/>
@@ -15795,7 +16449,10 @@
               <a:spAutoFit/>
             </a:bodyPr>
             <a:p>
-              <a:pPr marL="285750" indent="-285750">
+              <a:pPr marL="285750" indent="-285750" latinLnBrk="0">
+                <a:spcAft>
+                  <a:spcPts val="400"/>
+                </a:spcAft>
                 <a:buFont typeface="Arial" panose="020B0604020202090204" pitchFamily="34" charset="0"/>
                 <a:buChar char="•"/>
               </a:pPr>
@@ -15816,7 +16473,10 @@
               </a:endParaRPr>
             </a:p>
             <a:p>
-              <a:pPr marL="285750" indent="-285750">
+              <a:pPr marL="285750" indent="-285750" latinLnBrk="0">
+                <a:spcAft>
+                  <a:spcPts val="400"/>
+                </a:spcAft>
                 <a:buFont typeface="Arial" panose="020B0604020202090204" pitchFamily="34" charset="0"/>
                 <a:buChar char="•"/>
               </a:pPr>
@@ -15837,7 +16497,10 @@
               </a:endParaRPr>
             </a:p>
             <a:p>
-              <a:pPr marL="285750" indent="-285750">
+              <a:pPr marL="285750" indent="-285750" latinLnBrk="0">
+                <a:spcAft>
+                  <a:spcPts val="400"/>
+                </a:spcAft>
                 <a:buFont typeface="Arial" panose="020B0604020202090204" pitchFamily="34" charset="0"/>
                 <a:buChar char="•"/>
               </a:pPr>
@@ -15858,7 +16521,10 @@
               </a:endParaRPr>
             </a:p>
             <a:p>
-              <a:pPr marL="285750" indent="-285750">
+              <a:pPr marL="285750" indent="-285750" latinLnBrk="0">
+                <a:spcAft>
+                  <a:spcPts val="400"/>
+                </a:spcAft>
                 <a:buFont typeface="Arial" panose="020B0604020202090204" pitchFamily="34" charset="0"/>
                 <a:buChar char="•"/>
               </a:pPr>
@@ -15879,7 +16545,10 @@
               </a:endParaRPr>
             </a:p>
             <a:p>
-              <a:pPr marL="285750" indent="-285750">
+              <a:pPr marL="285750" indent="-285750" latinLnBrk="0">
+                <a:spcAft>
+                  <a:spcPts val="400"/>
+                </a:spcAft>
                 <a:buFont typeface="Arial" panose="020B0604020202090204" pitchFamily="34" charset="0"/>
                 <a:buChar char="•"/>
               </a:pPr>
@@ -15900,7 +16569,10 @@
               </a:endParaRPr>
             </a:p>
             <a:p>
-              <a:pPr marL="285750" indent="-285750">
+              <a:pPr marL="285750" indent="-285750" latinLnBrk="0">
+                <a:spcAft>
+                  <a:spcPts val="400"/>
+                </a:spcAft>
                 <a:buFont typeface="Arial" panose="020B0604020202090204" pitchFamily="34" charset="0"/>
                 <a:buChar char="•"/>
               </a:pPr>
@@ -15911,7 +16583,7 @@
                   </a:solidFill>
                   <a:latin typeface="UCL Sans" pitchFamily="2" charset="77"/>
                 </a:rPr>
-                <a:t>Solve time.</a:t>
+                <a:t>Computation time.</a:t>
               </a:r>
               <a:endParaRPr lang="en-US" altLang="en-US" sz="1800">
                 <a:solidFill>
@@ -15939,7 +16611,7 @@
         </p:blipFill>
         <p:spPr>
           <a:xfrm>
-            <a:off x="341630" y="1430655"/>
+            <a:off x="341630" y="1287145"/>
             <a:ext cx="11469370" cy="1636395"/>
           </a:xfrm>
           <a:prstGeom prst="rect">
@@ -15985,7 +16657,7 @@
                 <a:latin typeface="UCL Sans" pitchFamily="2" charset="77"/>
                 <a:sym typeface="+mn-ea"/>
               </a:rPr>
-              <a:t>GMM: represents possible target-vehicle futures using probabilities and uncertainty.</a:t>
+              <a:t>GMM = Gaussian Mixture Model. It represents several possible target-vehicle trajectories and their probabilities.</a:t>
             </a:r>
             <a:endParaRPr lang="en-US" altLang="en-US" sz="1400">
               <a:solidFill>
@@ -16013,7 +16685,7 @@
                 <a:latin typeface="UCL Sans" pitchFamily="2" charset="77"/>
                 <a:sym typeface="+mn-ea"/>
               </a:rPr>
-              <a:t>SMPC: a planning method that chooses safe actions while accounting for uncertain future paths.</a:t>
+              <a:t>SMPC = Stochastic Model Predictive Control. It chooses actions using probabilistic safety constraints.</a:t>
             </a:r>
             <a:endParaRPr lang="en-US" altLang="en-US" sz="1400">
               <a:solidFill>
@@ -16056,7 +16728,7 @@
         <p:spPr>
           <a:xfrm>
             <a:off x="431800" y="409575"/>
-            <a:ext cx="7550785" cy="838835"/>
+            <a:ext cx="10343515" cy="838835"/>
           </a:xfrm>
         </p:spPr>
         <p:txBody>
@@ -16069,13 +16741,30 @@
               </a:rPr>
               <a:t>Execution plan</a:t>
             </a:r>
-            <a:endParaRPr lang="en-US"/>
+            <a:r>
+              <a:rPr lang="en-US" altLang="en-GB">
+                <a:latin typeface="UCL Sans SemiBold"/>
+                <a:sym typeface="+mn-ea"/>
+              </a:rPr>
+              <a:t>: </a:t>
+            </a:r>
+            <a:r>
+              <a:rPr lang="en-US" altLang="en-US">
+                <a:latin typeface="UCL Sans SemiBold"/>
+                <a:sym typeface="+mn-ea"/>
+              </a:rPr>
+              <a:t>Timeline and Dependencies</a:t>
+            </a:r>
+            <a:endParaRPr lang="en-US" altLang="en-US">
+              <a:latin typeface="UCL Sans SemiBold"/>
+              <a:sym typeface="+mn-ea"/>
+            </a:endParaRPr>
           </a:p>
         </p:txBody>
       </p:sp>
       <p:pic>
         <p:nvPicPr>
-          <p:cNvPr id="22" name="Picture 21"/>
+          <p:cNvPr id="4" name="Picture 3"/>
           <p:cNvPicPr>
             <a:picLocks noChangeAspect="1"/>
           </p:cNvPicPr>
@@ -16089,8 +16778,8 @@
         </p:blipFill>
         <p:spPr>
           <a:xfrm>
-            <a:off x="198120" y="1449070"/>
-            <a:ext cx="11729085" cy="4269105"/>
+            <a:off x="911225" y="1187450"/>
+            <a:ext cx="10049510" cy="4826635"/>
           </a:xfrm>
           <a:prstGeom prst="rect">
             <a:avLst/>
@@ -17226,8 +17915,8 @@
 </file>
 
 <file path=customXml/item1.xml><?xml version="1.0" encoding="utf-8"?>
-<ct:contentTypeSchema xmlns:ma="http://schemas.microsoft.com/office/2006/metadata/properties/metaAttributes" xmlns:ct="http://schemas.microsoft.com/office/2006/metadata/contentType" ma:contentTypeName="Document" ct:_="" ma:_="" ma:versionID="601ee87aba0edee35dd0bd1031319f69" ma:contentTypeID="0x010100A12A0662030DBC4F99C1FA9D93D14A4C" ma:contentTypeVersion="" ma:contentTypeDescription="Create a new document." ma:contentTypeScope="">
-  <xsd:schema xmlns:xsd="http://www.w3.org/2001/XMLSchema" xmlns:xs="http://www.w3.org/2001/XMLSchema" xmlns:ns2="1d368349-1023-48e7-96c9-f9d028f6f0fb" xmlns:ns3="1aa119c2-5735-4356-91ec-0ca074bf9097" xmlns:p="http://schemas.microsoft.com/office/2006/metadata/properties" xmlns:ns4="32f397aa-99c0-43f4-9b94-7b5d785faf95" ns3:_="" ma:root="true" ma:fieldsID="ceaa2ff74debb88eeec5ab219e85c5f9" ns2:_="" ns4:_="" targetNamespace="http://schemas.microsoft.com/office/2006/metadata/properties">
+<ct:contentTypeSchema xmlns:ct="http://schemas.microsoft.com/office/2006/metadata/contentType" xmlns:ma="http://schemas.microsoft.com/office/2006/metadata/properties/metaAttributes" ma:contentTypeVersion="" ma:contentTypeDescription="Create a new document." ct:_="" ma:_="" ma:contentTypeID="0x010100A12A0662030DBC4F99C1FA9D93D14A4C" ma:contentTypeScope="" ma:contentTypeName="Document" ma:versionID="601ee87aba0edee35dd0bd1031319f69">
+  <xsd:schema xmlns:p="http://schemas.microsoft.com/office/2006/metadata/properties" xmlns:xs="http://www.w3.org/2001/XMLSchema" xmlns:ns2="1d368349-1023-48e7-96c9-f9d028f6f0fb" xmlns:ns3="1aa119c2-5735-4356-91ec-0ca074bf9097" xmlns:ns4="32f397aa-99c0-43f4-9b94-7b5d785faf95" xmlns:xsd="http://www.w3.org/2001/XMLSchema" ns2:_="" ns4:_="" targetNamespace="http://schemas.microsoft.com/office/2006/metadata/properties" ma:root="true" ns3:_="" ma:fieldsID="ceaa2ff74debb88eeec5ab219e85c5f9">
     <xsd:import namespace="1d368349-1023-48e7-96c9-f9d028f6f0fb"/>
     <xsd:import namespace="1aa119c2-5735-4356-91ec-0ca074bf9097"/>
     <xsd:import namespace="32f397aa-99c0-43f4-9b94-7b5d785faf95"/>
@@ -17261,95 +17950,95 @@
       </xsd:complexType>
     </xsd:element>
   </xsd:schema>
-  <xsd:schema xmlns:xsd="http://www.w3.org/2001/XMLSchema" xmlns:xs="http://www.w3.org/2001/XMLSchema" xmlns:dms="http://schemas.microsoft.com/office/2006/documentManagement/types" xmlns:pc="http://schemas.microsoft.com/office/infopath/2007/PartnerControls" elementFormDefault="qualified" targetNamespace="1d368349-1023-48e7-96c9-f9d028f6f0fb">
+  <xsd:schema xmlns:dms="http://schemas.microsoft.com/office/2006/documentManagement/types" xmlns:xs="http://www.w3.org/2001/XMLSchema" xmlns:xsd="http://www.w3.org/2001/XMLSchema" xmlns:pc="http://schemas.microsoft.com/office/infopath/2007/PartnerControls" targetNamespace="1d368349-1023-48e7-96c9-f9d028f6f0fb" elementFormDefault="qualified">
     <xsd:import namespace="http://schemas.microsoft.com/office/2006/documentManagement/types"/>
     <xsd:import namespace="http://schemas.microsoft.com/office/infopath/2007/PartnerControls"/>
-    <xsd:element name="MediaServiceMetadata" ma:internalName="MediaServiceMetadata" ma:readOnly="true" nillable="true" ma:index="8" ma:hidden="true" ma:displayName="MediaServiceMetadata">
+    <xsd:element name="MediaServiceMetadata" ma:hidden="true" ma:displayName="MediaServiceMetadata" nillable="true" ma:internalName="MediaServiceMetadata" ma:readOnly="true" ma:index="8">
       <xsd:simpleType>
         <xsd:restriction base="dms:Note"/>
       </xsd:simpleType>
     </xsd:element>
-    <xsd:element name="MediaServiceFastMetadata" ma:internalName="MediaServiceFastMetadata" ma:readOnly="true" nillable="true" ma:index="9" ma:hidden="true" ma:displayName="MediaServiceFastMetadata">
+    <xsd:element name="MediaServiceFastMetadata" ma:hidden="true" ma:displayName="MediaServiceFastMetadata" nillable="true" ma:internalName="MediaServiceFastMetadata" ma:readOnly="true" ma:index="9">
       <xsd:simpleType>
         <xsd:restriction base="dms:Note"/>
       </xsd:simpleType>
     </xsd:element>
-    <xsd:element name="MediaServiceAutoKeyPoints" ma:internalName="MediaServiceAutoKeyPoints" ma:readOnly="true" nillable="true" ma:index="10" ma:hidden="true" ma:displayName="MediaServiceAutoKeyPoints">
+    <xsd:element name="MediaServiceAutoKeyPoints" ma:hidden="true" ma:displayName="MediaServiceAutoKeyPoints" nillable="true" ma:internalName="MediaServiceAutoKeyPoints" ma:readOnly="true" ma:index="10">
       <xsd:simpleType>
         <xsd:restriction base="dms:Note"/>
       </xsd:simpleType>
     </xsd:element>
-    <xsd:element name="MediaServiceKeyPoints" ma:internalName="MediaServiceKeyPoints" ma:readOnly="true" nillable="true" ma:index="11" ma:displayName="KeyPoints">
+    <xsd:element name="MediaServiceKeyPoints" ma:displayName="KeyPoints" nillable="true" ma:internalName="MediaServiceKeyPoints" ma:readOnly="true" ma:index="11">
       <xsd:simpleType>
         <xsd:restriction base="dms:Note">
           <xsd:maxLength value="255"/>
         </xsd:restriction>
       </xsd:simpleType>
     </xsd:element>
-    <xsd:element name="MediaServiceAutoTags" ma:internalName="MediaServiceAutoTags" ma:readOnly="true" nillable="true" ma:index="12" ma:displayName="Tags">
+    <xsd:element name="MediaServiceAutoTags" ma:displayName="Tags" nillable="true" ma:internalName="MediaServiceAutoTags" ma:readOnly="true" ma:index="12">
       <xsd:simpleType>
         <xsd:restriction base="dms:Text"/>
       </xsd:simpleType>
     </xsd:element>
-    <xsd:element name="MediaServiceOCR" ma:internalName="MediaServiceOCR" ma:readOnly="true" nillable="true" ma:index="13" ma:displayName="Extracted Text">
+    <xsd:element name="MediaServiceOCR" ma:displayName="Extracted Text" nillable="true" ma:internalName="MediaServiceOCR" ma:readOnly="true" ma:index="13">
       <xsd:simpleType>
         <xsd:restriction base="dms:Note">
           <xsd:maxLength value="255"/>
         </xsd:restriction>
       </xsd:simpleType>
     </xsd:element>
-    <xsd:element name="MediaServiceGenerationTime" ma:internalName="MediaServiceGenerationTime" ma:readOnly="true" nillable="true" ma:index="14" ma:hidden="true" ma:displayName="MediaServiceGenerationTime">
+    <xsd:element name="MediaServiceGenerationTime" ma:hidden="true" ma:displayName="MediaServiceGenerationTime" nillable="true" ma:internalName="MediaServiceGenerationTime" ma:readOnly="true" ma:index="14">
       <xsd:simpleType>
         <xsd:restriction base="dms:Text"/>
       </xsd:simpleType>
     </xsd:element>
-    <xsd:element name="MediaServiceEventHashCode" ma:internalName="MediaServiceEventHashCode" ma:readOnly="true" nillable="true" ma:index="15" ma:hidden="true" ma:displayName="MediaServiceEventHashCode">
+    <xsd:element name="MediaServiceEventHashCode" ma:hidden="true" ma:displayName="MediaServiceEventHashCode" nillable="true" ma:internalName="MediaServiceEventHashCode" ma:readOnly="true" ma:index="15">
       <xsd:simpleType>
         <xsd:restriction base="dms:Text"/>
       </xsd:simpleType>
     </xsd:element>
-    <xsd:element name="MediaServiceDateTaken" ma:internalName="MediaServiceDateTaken" ma:readOnly="true" nillable="true" ma:index="16" ma:hidden="true" ma:displayName="MediaServiceDateTaken">
+    <xsd:element name="MediaServiceDateTaken" ma:hidden="true" ma:displayName="MediaServiceDateTaken" nillable="true" ma:internalName="MediaServiceDateTaken" ma:readOnly="true" ma:index="16">
       <xsd:simpleType>
         <xsd:restriction base="dms:Text"/>
       </xsd:simpleType>
     </xsd:element>
-    <xsd:element name="MediaServiceLocation" ma:internalName="MediaServiceLocation" ma:readOnly="true" nillable="true" ma:index="19" ma:displayName="Location">
+    <xsd:element name="MediaServiceLocation" ma:displayName="Location" nillable="true" ma:internalName="MediaServiceLocation" ma:readOnly="true" ma:index="19">
       <xsd:simpleType>
         <xsd:restriction base="dms:Text"/>
       </xsd:simpleType>
     </xsd:element>
-    <xsd:element name="MediaLengthInSeconds" ma:internalName="MediaLengthInSeconds" ma:readOnly="true" nillable="true" ma:index="20" ma:hidden="true" ma:displayName="MediaLengthInSeconds">
+    <xsd:element name="MediaLengthInSeconds" ma:hidden="true" ma:displayName="MediaLengthInSeconds" nillable="true" ma:internalName="MediaLengthInSeconds" ma:readOnly="true" ma:index="20">
       <xsd:simpleType>
         <xsd:restriction base="dms:Unknown"/>
       </xsd:simpleType>
     </xsd:element>
-    <xsd:element ma:termSetId="09814cd3-568e-fe90-9814-8d621ff8fb84" ma:taxonomyMulti="true" name="lcf76f155ced4ddcb4097134ff3c332f" ma:anchorId="fba54fb3-c3e1-fe81-a776-ca4b69148c4d" ma:internalName="lcf76f155ced4ddcb4097134ff3c332f" ma:fieldId="{5cf76f15-5ced-4ddc-b409-7134ff3c332f}" ma:readOnly="false" nillable="true" ma:sspId="579a89b1-2c2c-4f7f-9bd7-7914fb13a02b" ma:taxonomy="true" ma:index="22" ma:isKeyword="false" ma:open="true" ma:taxonomyFieldName="MediaServiceImageTags" ma:displayName="Image Tags">
+    <xsd:element ma:open="true" name="lcf76f155ced4ddcb4097134ff3c332f" ma:taxonomy="true" ma:isKeyword="false" ma:termSetId="09814cd3-568e-fe90-9814-8d621ff8fb84" ma:fieldId="{5cf76f15-5ced-4ddc-b409-7134ff3c332f}" ma:displayName="Image Tags" nillable="true" ma:sspId="579a89b1-2c2c-4f7f-9bd7-7914fb13a02b" ma:taxonomyFieldName="MediaServiceImageTags" ma:taxonomyMulti="true" ma:anchorId="fba54fb3-c3e1-fe81-a776-ca4b69148c4d" ma:internalName="lcf76f155ced4ddcb4097134ff3c332f" ma:readOnly="false" ma:index="22">
       <xsd:complexType>
         <xsd:sequence>
-          <xsd:element maxOccurs="1" minOccurs="0" ref="pc:Terms"/>
+          <xsd:element minOccurs="0" ref="pc:Terms" maxOccurs="1"/>
         </xsd:sequence>
       </xsd:complexType>
     </xsd:element>
-    <xsd:element name="MediaServiceObjectDetectorVersions" ma:internalName="MediaServiceObjectDetectorVersions" ma:readOnly="true" ma:indexed="true" nillable="true" ma:index="24" ma:hidden="true" ma:displayName="MediaServiceObjectDetectorVersions">
+    <xsd:element name="MediaServiceObjectDetectorVersions" ma:indexed="true" ma:hidden="true" ma:displayName="MediaServiceObjectDetectorVersions" nillable="true" ma:internalName="MediaServiceObjectDetectorVersions" ma:readOnly="true" ma:index="24">
       <xsd:simpleType>
         <xsd:restriction base="dms:Text"/>
       </xsd:simpleType>
     </xsd:element>
-    <xsd:element name="MediaServiceSearchProperties" ma:internalName="MediaServiceSearchProperties" ma:readOnly="true" nillable="true" ma:index="25" ma:hidden="true" ma:displayName="MediaServiceSearchProperties">
+    <xsd:element name="MediaServiceSearchProperties" ma:hidden="true" ma:displayName="MediaServiceSearchProperties" nillable="true" ma:internalName="MediaServiceSearchProperties" ma:readOnly="true" ma:index="25">
       <xsd:simpleType>
         <xsd:restriction base="dms:Note"/>
       </xsd:simpleType>
     </xsd:element>
   </xsd:schema>
-  <xsd:schema xmlns:xsd="http://www.w3.org/2001/XMLSchema" xmlns:xs="http://www.w3.org/2001/XMLSchema" xmlns:dms="http://schemas.microsoft.com/office/2006/documentManagement/types" xmlns:pc="http://schemas.microsoft.com/office/infopath/2007/PartnerControls" elementFormDefault="qualified" targetNamespace="1aa119c2-5735-4356-91ec-0ca074bf9097">
+  <xsd:schema xmlns:dms="http://schemas.microsoft.com/office/2006/documentManagement/types" xmlns:xs="http://www.w3.org/2001/XMLSchema" xmlns:xsd="http://www.w3.org/2001/XMLSchema" xmlns:pc="http://schemas.microsoft.com/office/infopath/2007/PartnerControls" targetNamespace="1aa119c2-5735-4356-91ec-0ca074bf9097" elementFormDefault="qualified">
     <xsd:import namespace="http://schemas.microsoft.com/office/2006/documentManagement/types"/>
     <xsd:import namespace="http://schemas.microsoft.com/office/infopath/2007/PartnerControls"/>
-    <xsd:element name="SharedWithUsers" ma:internalName="SharedWithUsers" ma:readOnly="true" nillable="true" ma:index="17" ma:displayName="Shared With">
+    <xsd:element name="SharedWithUsers" ma:displayName="Shared With" nillable="true" ma:internalName="SharedWithUsers" ma:readOnly="true" ma:index="17">
       <xsd:complexType>
         <xsd:complexContent>
           <xsd:extension base="dms:UserMulti">
             <xsd:sequence>
-              <xsd:element maxOccurs="unbounded" minOccurs="0" name="UserInfo">
+              <xsd:element minOccurs="0" name="UserInfo" maxOccurs="unbounded">
                 <xsd:complexType>
                   <xsd:sequence>
                     <xsd:element minOccurs="0" name="DisplayName" type="xsd:string"/>
@@ -17363,7 +18052,7 @@
         </xsd:complexContent>
       </xsd:complexType>
     </xsd:element>
-    <xsd:element name="SharedWithDetails" ma:internalName="SharedWithDetails" ma:readOnly="true" nillable="true" ma:index="18" ma:displayName="Shared With Details">
+    <xsd:element name="SharedWithDetails" ma:displayName="Shared With Details" nillable="true" ma:internalName="SharedWithDetails" ma:readOnly="true" ma:index="18">
       <xsd:simpleType>
         <xsd:restriction base="dms:Note">
           <xsd:maxLength value="255"/>
@@ -17371,52 +18060,52 @@
       </xsd:simpleType>
     </xsd:element>
   </xsd:schema>
-  <xsd:schema xmlns:xsd="http://www.w3.org/2001/XMLSchema" xmlns:xs="http://www.w3.org/2001/XMLSchema" xmlns:dms="http://schemas.microsoft.com/office/2006/documentManagement/types" xmlns:pc="http://schemas.microsoft.com/office/infopath/2007/PartnerControls" elementFormDefault="qualified" targetNamespace="32f397aa-99c0-43f4-9b94-7b5d785faf95">
+  <xsd:schema xmlns:dms="http://schemas.microsoft.com/office/2006/documentManagement/types" xmlns:xs="http://www.w3.org/2001/XMLSchema" xmlns:xsd="http://www.w3.org/2001/XMLSchema" xmlns:pc="http://schemas.microsoft.com/office/infopath/2007/PartnerControls" targetNamespace="32f397aa-99c0-43f4-9b94-7b5d785faf95" elementFormDefault="qualified">
     <xsd:import namespace="http://schemas.microsoft.com/office/2006/documentManagement/types"/>
     <xsd:import namespace="http://schemas.microsoft.com/office/infopath/2007/PartnerControls"/>
-    <xsd:element name="TaxCatchAll" ma:internalName="TaxCatchAll" nillable="true" ma:index="23" ma:web="32f397aa-99c0-43f4-9b94-7b5d785faf95" ma:showField="CatchAllData" ma:list="{d117ceb8-fbd8-4cd5-a93e-9fc1393353fc}" ma:hidden="true" ma:displayName="Taxonomy Catch All Column">
+    <xsd:element ma:showField="CatchAllData" name="TaxCatchAll" ma:hidden="true" ma:displayName="Taxonomy Catch All Column" nillable="true" ma:web="32f397aa-99c0-43f4-9b94-7b5d785faf95" ma:internalName="TaxCatchAll" ma:index="23" ma:list="{d117ceb8-fbd8-4cd5-a93e-9fc1393353fc}">
       <xsd:complexType>
         <xsd:complexContent>
           <xsd:extension base="dms:MultiChoiceLookup">
             <xsd:sequence>
-              <xsd:element maxOccurs="unbounded" minOccurs="0" name="Value" nillable="true" type="dms:Lookup"/>
+              <xsd:element minOccurs="0" name="Value" nillable="true" type="dms:Lookup" maxOccurs="unbounded"/>
             </xsd:sequence>
           </xsd:extension>
         </xsd:complexContent>
       </xsd:complexType>
     </xsd:element>
   </xsd:schema>
-  <xsd:schema xmlns:xsd="http://www.w3.org/2001/XMLSchema" xmlns:xsi="http://www.w3.org/2001/XMLSchema-instance" xmlns="http://schemas.openxmlformats.org/package/2006/metadata/core-properties" xmlns:dcterms="http://purl.org/dc/terms/" xmlns:odoc="http://schemas.microsoft.com/internal/obd" xmlns:dc="http://purl.org/dc/elements/1.1/" elementFormDefault="qualified" attributeFormDefault="unqualified" targetNamespace="http://schemas.openxmlformats.org/package/2006/metadata/core-properties" blockDefault="#all">
-    <xsd:import namespace="http://purl.org/dc/elements/1.1/" schemaLocation="http://dublincore.org/schemas/xmls/qdc/2003/04/02/dc.xsd"/>
-    <xsd:import namespace="http://purl.org/dc/terms/" schemaLocation="http://dublincore.org/schemas/xmls/qdc/2003/04/02/dcterms.xsd"/>
+  <xsd:schema xmlns="http://schemas.openxmlformats.org/package/2006/metadata/core-properties" xmlns:dc="http://purl.org/dc/elements/1.1/" xmlns:xsi="http://www.w3.org/2001/XMLSchema-instance" xmlns:dcterms="http://purl.org/dc/terms/" xmlns:odoc="http://schemas.microsoft.com/internal/obd" xmlns:xsd="http://www.w3.org/2001/XMLSchema" blockDefault="#all" targetNamespace="http://schemas.openxmlformats.org/package/2006/metadata/core-properties" attributeFormDefault="unqualified" elementFormDefault="qualified">
+    <xsd:import schemaLocation="http://dublincore.org/schemas/xmls/qdc/2003/04/02/dc.xsd" namespace="http://purl.org/dc/elements/1.1/"/>
+    <xsd:import schemaLocation="http://dublincore.org/schemas/xmls/qdc/2003/04/02/dcterms.xsd" namespace="http://purl.org/dc/terms/"/>
     <xsd:element name="coreProperties" type="CT_coreProperties"/>
     <xsd:complexType name="CT_coreProperties">
       <xsd:all>
-        <xsd:element maxOccurs="1" minOccurs="0" ref="dc:creator"/>
-        <xsd:element maxOccurs="1" minOccurs="0" ref="dcterms:created"/>
-        <xsd:element maxOccurs="1" minOccurs="0" ref="dc:identifier"/>
-        <xsd:element maxOccurs="1" minOccurs="0" name="contentType" ma:index="0" type="xsd:string" ma:displayName="Content Type"/>
-        <xsd:element maxOccurs="1" minOccurs="0" ma:index="4" ref="dc:title" ma:displayName="Title"/>
-        <xsd:element maxOccurs="1" minOccurs="0" ref="dc:subject"/>
-        <xsd:element maxOccurs="1" minOccurs="0" ref="dc:description"/>
-        <xsd:element maxOccurs="1" minOccurs="0" name="keywords" type="xsd:string"/>
-        <xsd:element maxOccurs="1" minOccurs="0" ref="dc:language"/>
-        <xsd:element maxOccurs="1" minOccurs="0" name="category" type="xsd:string"/>
-        <xsd:element maxOccurs="1" minOccurs="0" name="version" type="xsd:string"/>
-        <xsd:element maxOccurs="1" minOccurs="0" name="revision" type="xsd:string">
+        <xsd:element minOccurs="0" ref="dc:creator" maxOccurs="1"/>
+        <xsd:element minOccurs="0" ref="dcterms:created" maxOccurs="1"/>
+        <xsd:element minOccurs="0" ref="dc:identifier" maxOccurs="1"/>
+        <xsd:element minOccurs="0" name="contentType" ma:displayName="Content Type" type="xsd:string" maxOccurs="1" ma:index="0"/>
+        <xsd:element minOccurs="0" ref="dc:title" ma:displayName="Title" maxOccurs="1" ma:index="4"/>
+        <xsd:element minOccurs="0" ref="dc:subject" maxOccurs="1"/>
+        <xsd:element minOccurs="0" ref="dc:description" maxOccurs="1"/>
+        <xsd:element minOccurs="0" name="keywords" type="xsd:string" maxOccurs="1"/>
+        <xsd:element minOccurs="0" ref="dc:language" maxOccurs="1"/>
+        <xsd:element minOccurs="0" name="category" type="xsd:string" maxOccurs="1"/>
+        <xsd:element minOccurs="0" name="version" type="xsd:string" maxOccurs="1"/>
+        <xsd:element minOccurs="0" name="revision" type="xsd:string" maxOccurs="1">
           <xsd:annotation>
             <xsd:documentation>
                         This value indicates the number of saves or revisions. The application is responsible for updating this value after each revision.
                     </xsd:documentation>
           </xsd:annotation>
         </xsd:element>
-        <xsd:element maxOccurs="1" minOccurs="0" name="lastModifiedBy" type="xsd:string"/>
-        <xsd:element maxOccurs="1" minOccurs="0" ref="dcterms:modified"/>
-        <xsd:element maxOccurs="1" minOccurs="0" name="contentStatus" type="xsd:string"/>
+        <xsd:element minOccurs="0" name="lastModifiedBy" type="xsd:string" maxOccurs="1"/>
+        <xsd:element minOccurs="0" ref="dcterms:modified" maxOccurs="1"/>
+        <xsd:element minOccurs="0" name="contentStatus" type="xsd:string" maxOccurs="1"/>
       </xsd:all>
     </xsd:complexType>
   </xsd:schema>
-  <xs:schema xmlns:xs="http://www.w3.org/2001/XMLSchema" xmlns:pc="http://schemas.microsoft.com/office/infopath/2007/PartnerControls" elementFormDefault="qualified" attributeFormDefault="unqualified" targetNamespace="http://schemas.microsoft.com/office/infopath/2007/PartnerControls">
+  <xs:schema xmlns:xs="http://www.w3.org/2001/XMLSchema" xmlns:pc="http://schemas.microsoft.com/office/infopath/2007/PartnerControls" targetNamespace="http://schemas.microsoft.com/office/infopath/2007/PartnerControls" attributeFormDefault="unqualified" elementFormDefault="qualified">
     <xs:element name="Person">
       <xs:complexType>
         <xs:sequence>
@@ -17432,7 +18121,7 @@
     <xs:element name="BDCAssociatedEntity">
       <xs:complexType>
         <xs:sequence>
-          <xs:element maxOccurs="unbounded" minOccurs="0" ref="pc:BDCEntity"/>
+          <xs:element minOccurs="0" ref="pc:BDCEntity" maxOccurs="unbounded"/>
         </xs:sequence>
         <xs:attribute ref="pc:EntityNamespace"/>
         <xs:attribute ref="pc:EntityName"/>
@@ -17467,7 +18156,7 @@
     <xs:element name="Terms">
       <xs:complexType>
         <xs:sequence>
-          <xs:element maxOccurs="unbounded" minOccurs="0" ref="pc:TermInfo"/>
+          <xs:element minOccurs="0" ref="pc:TermInfo" maxOccurs="unbounded"/>
         </xs:sequence>
       </xs:complexType>
     </xs:element>
@@ -17486,7 +18175,7 @@
 </file>
 
 <file path=customXml/item2.xml><?xml version="1.0" encoding="utf-8"?>
-<p:properties xmlns:xsi="http://www.w3.org/2001/XMLSchema-instance" xmlns:pc="http://schemas.microsoft.com/office/infopath/2007/PartnerControls" xmlns:p="http://schemas.microsoft.com/office/2006/metadata/properties">
+<p:properties xmlns:xsi="http://www.w3.org/2001/XMLSchema-instance" xmlns:p="http://schemas.microsoft.com/office/2006/metadata/properties" xmlns:pc="http://schemas.microsoft.com/office/infopath/2007/PartnerControls">
   <documentManagement>
     <lcf76f155ced4ddcb4097134ff3c332f xmlns="1d368349-1023-48e7-96c9-f9d028f6f0fb">
       <Terms xmlns="http://schemas.microsoft.com/office/infopath/2007/PartnerControls"/>
